--- a/lecons/LSA/Geomorphology/02_LSA_GEOMO_L02_Internal_Structure_of_the_Earth.pptx
+++ b/lecons/LSA/Geomorphology/02_LSA_GEOMO_L02_Internal_Structure_of_the_Earth.pptx
@@ -65,9 +65,13 @@
     <p:sldId id="313" r:id="rId59"/>
     <p:sldId id="314" r:id="rId60"/>
     <p:sldId id="315" r:id="rId61"/>
+    <p:sldId id="316" r:id="rId62"/>
+    <p:sldId id="317" r:id="rId63"/>
+    <p:sldId id="318" r:id="rId64"/>
+    <p:sldId id="319" r:id="rId65"/>
   </p:sldIdLst>
   <p:notesMasterIdLst>
-    <p:notesMasterId r:id="rId62"/>
+    <p:notesMasterId r:id="rId66"/>
   </p:notesMasterIdLst>
   <p:sldSz cx="12192000" cy="6858000"/>
   <p:notesSz cx="6858000" cy="12192000"/>
@@ -649,7 +653,7 @@
           <a:p>
             <a:r>
               <a:rPr lang="en-US" dirty="0"/>
-              <a:t>Listen carefully to this situation from real life. After an earthquake is felt in the South-West Region, a student asks why the ground can shake and why Mount Cameroon erupts. Another student says that the inside of the Earth is empty. Think about it, because I am going to ask you some questions.</a:t>
+              <a:t>Take your time to copy this part; we will continue together.</a:t>
             </a:r>
             <a:endParaRPr lang="en-US" dirty="0"/>
           </a:p>
@@ -737,7 +741,7 @@
           <a:p>
             <a:r>
               <a:rPr lang="en-US" dirty="0"/>
-              <a:t>Question 1: What is the problem in the situation? Think for a moment, then raise your hand to answer.</a:t>
+              <a:t>Listen carefully to this situation from real life. Hassan helps his father build a new room in their compound at Yelwa, Garoua. They use sand and gravel from the Benue riverbed for the concrete, but for the foundation his father insists on hard rocks bought from a quarry near the mountains. Hassan notices how different the soft river sand is from the hard quarry stone. He asks: "Why are rocks so different, and what lies under all this sand and rock?" Think about it, because I am going to ask you some questions.</a:t>
             </a:r>
             <a:endParaRPr lang="en-US" dirty="0"/>
           </a:p>
@@ -825,7 +829,7 @@
           <a:p>
             <a:r>
               <a:rPr lang="en-US" dirty="0"/>
-              <a:t>Good. Students do not know what the inside of the Earth is like.</a:t>
+              <a:t>Question 1: What is the problem in the situation? Think for a moment, then raise your hand to answer.</a:t>
             </a:r>
             <a:endParaRPr lang="en-US" dirty="0"/>
           </a:p>
@@ -913,7 +917,7 @@
           <a:p>
             <a:r>
               <a:rPr lang="en-US" dirty="0"/>
-              <a:t>Question 2: Is the inside of the Earth empty? Think for a moment, then raise your hand to answer.</a:t>
+              <a:t>Good. Hassan does not know the internal structure of the Earth and how rocks form.</a:t>
             </a:r>
             <a:endParaRPr lang="en-US" dirty="0"/>
           </a:p>
@@ -1001,7 +1005,7 @@
           <a:p>
             <a:r>
               <a:rPr lang="en-US" dirty="0"/>
-              <a:t>Good. No. It is made of solid and liquid layers.</a:t>
+              <a:t>Question 2: What are the main layers of the Earth? Think for a moment, then raise your hand to answer.</a:t>
             </a:r>
             <a:endParaRPr lang="en-US" dirty="0"/>
           </a:p>
@@ -1089,7 +1093,7 @@
           <a:p>
             <a:r>
               <a:rPr lang="en-US" dirty="0"/>
-              <a:t>Question 3: How do scientists know this? Think for a moment, then raise your hand to answer.</a:t>
+              <a:t>Good. The crust, the mantle and the core.</a:t>
             </a:r>
             <a:endParaRPr lang="en-US" dirty="0"/>
           </a:p>
@@ -1177,7 +1181,7 @@
           <a:p>
             <a:r>
               <a:rPr lang="en-US" dirty="0"/>
-              <a:t>Good. They study earthquake waves that pass through the Earth.</a:t>
+              <a:t>Question 3: How do rocks form and change? Think for a moment, then raise your hand to answer.</a:t>
             </a:r>
             <a:endParaRPr lang="en-US" dirty="0"/>
           </a:p>
@@ -1265,7 +1269,7 @@
           <a:p>
             <a:r>
               <a:rPr lang="en-US" dirty="0"/>
-              <a:t>From this situation, the action we are working towards in this lesson is the following: understand the forces that shape our landscape and the rocks we use.</a:t>
+              <a:t>Good. Through the rock cycle, powered by internal heat and surface energy.</a:t>
             </a:r>
             <a:endParaRPr lang="en-US" dirty="0"/>
           </a:p>
@@ -1353,7 +1357,7 @@
           <a:p>
             <a:r>
               <a:rPr lang="en-US" dirty="0"/>
-              <a:t>Why is this lesson important for you? This lesson helps us to understand the structure of the Earth and the forces that build and wear down the landscape.</a:t>
+              <a:t>From this situation, the action we are working towards in this lesson is the following: recognise the types of rocks around you and use them sustainably for building.</a:t>
             </a:r>
             <a:endParaRPr lang="en-US" dirty="0"/>
           </a:p>
@@ -1441,7 +1445,7 @@
           <a:p>
             <a:r>
               <a:rPr lang="en-US" dirty="0"/>
-              <a:t>Activity 1. Look carefully at this diagram: the layers of the Earth. Observe every detail before I ask the question.</a:t>
+              <a:t>Why is this lesson important for you? This lesson helps us to understand the materials and forces that shape the relief, and to choose building materials wisely.</a:t>
             </a:r>
             <a:endParaRPr lang="en-US" dirty="0"/>
           </a:p>
@@ -1617,7 +1621,7 @@
           <a:p>
             <a:r>
               <a:rPr lang="en-US" dirty="0"/>
-              <a:t>Here is the question for Activity 1: Name the layers from the surface to the centre. Take one minute to think and write your answer in your rough notebook.</a:t>
+              <a:t>Activity 1. Look carefully at this diagram: the layers of the Earth. Observe every detail before I ask the question.</a:t>
             </a:r>
             <a:endParaRPr lang="en-US" dirty="0"/>
           </a:p>
@@ -1705,7 +1709,7 @@
           <a:p>
             <a:r>
               <a:rPr lang="en-US" dirty="0"/>
-              <a:t>Let us check the answer together. Crust, mantle, outer core and inner core.</a:t>
+              <a:t>Here is the question for Activity 1: Which layer is the thickest? Take one minute to think and write your answer in your rough notebook.</a:t>
             </a:r>
             <a:endParaRPr lang="en-US" dirty="0"/>
           </a:p>
@@ -1793,7 +1797,7 @@
           <a:p>
             <a:r>
               <a:rPr lang="en-US" dirty="0"/>
-              <a:t>Activity 2. Look carefully at this diagram: discontinuities: the boundaries between the layers. Observe every detail before I ask the question.</a:t>
+              <a:t>Let us check the answer together. The mantle (about 84 % of the volume of the Earth).</a:t>
             </a:r>
             <a:endParaRPr lang="en-US" dirty="0"/>
           </a:p>
@@ -1881,7 +1885,7 @@
           <a:p>
             <a:r>
               <a:rPr lang="en-US" dirty="0"/>
-              <a:t>Here is the question for Activity 2: What is the name of the boundary between the crust and the mantle? Take one minute to think and write your answer in your rough notebook.</a:t>
+              <a:t>Activity 2. Look carefully at this diagram: boundaries inside the Earth. Observe every detail before I ask the question.</a:t>
             </a:r>
             <a:endParaRPr lang="en-US" dirty="0"/>
           </a:p>
@@ -1969,7 +1973,7 @@
           <a:p>
             <a:r>
               <a:rPr lang="en-US" dirty="0"/>
-              <a:t>Let us check the answer together. The Mohorovičić discontinuity (Moho).</a:t>
+              <a:t>Here is the question for Activity 2: What separates the crust from the mantle? Take one minute to think and write your answer in your rough notebook.</a:t>
             </a:r>
             <a:endParaRPr lang="en-US" dirty="0"/>
           </a:p>
@@ -2057,7 +2061,7 @@
           <a:p>
             <a:r>
               <a:rPr lang="en-US" dirty="0"/>
-              <a:t>Activity 3. Look carefully at this diagram: the rock cycle. Observe every detail before I ask the question.</a:t>
+              <a:t>Let us check the answer together. The Moho discontinuity.</a:t>
             </a:r>
             <a:endParaRPr lang="en-US" dirty="0"/>
           </a:p>
@@ -2145,7 +2149,7 @@
           <a:p>
             <a:r>
               <a:rPr lang="en-US" dirty="0"/>
-              <a:t>Here is the question for Activity 3: How can an igneous rock become a sedimentary rock? Take one minute to think and write your answer in your rough notebook.</a:t>
+              <a:t>Activity 3. Look carefully at this diagram: the rock cycle. Observe every detail before I ask the question.</a:t>
             </a:r>
             <a:endParaRPr lang="en-US" dirty="0"/>
           </a:p>
@@ -2233,7 +2237,7 @@
           <a:p>
             <a:r>
               <a:rPr lang="en-US" dirty="0"/>
-              <a:t>Let us check the answer together. It is weathered and eroded; the pieces form layers that harden.</a:t>
+              <a:t>Here is the question for Activity 3: How does igneous rock form? Take one minute to think and write your answer in your rough notebook.</a:t>
             </a:r>
             <a:endParaRPr lang="en-US" dirty="0"/>
           </a:p>
@@ -2321,7 +2325,7 @@
           <a:p>
             <a:r>
               <a:rPr lang="en-US" dirty="0"/>
-              <a:t>Activity 4. Look carefully at this picture: a volcanic eruption. Observe every detail before I ask the question.</a:t>
+              <a:t>Let us check the answer together. When magma or lava cools and solidifies.</a:t>
             </a:r>
             <a:endParaRPr lang="en-US" dirty="0"/>
           </a:p>
@@ -2409,7 +2413,7 @@
           <a:p>
             <a:r>
               <a:rPr lang="en-US" dirty="0"/>
-              <a:t>Here is the question for Activity 4: This force comes from inside the Earth. Is it an internal or an external force? Take one minute to think and write your answer in your rough notebook.</a:t>
+              <a:t>Activity 4. Look carefully at this picture: a gully cut by running water. Observe every detail before I ask the question.</a:t>
             </a:r>
             <a:endParaRPr lang="en-US" dirty="0"/>
           </a:p>
@@ -2497,7 +2501,7 @@
           <a:p>
             <a:r>
               <a:rPr lang="en-US" dirty="0"/>
-              <a:t>Our topic is The Development of the Earth's Structure, and the sub-topic is The Origin and Earth's Structure. The key notions we shall use today are: endogenesis, exogenesis, discontinuity, lithosphere, rock cycle. At the end, you should be able to do this: learners are able to describe the layers of the Earth and explain how internal and external forces shape the landscape.</a:t>
+              <a:t>Our topic is The Development of the Earth's Structure, and the sub-topic is The Origin and Earth's Structure. The key notions we shall use today are: crust, lithosphere, mantle, asthenosphere, core, rock cycle, igneous, sedimentary and metamorphic rocks, internal and external forces, landform orders. At the end, you should be able to do this: learners are able to describe the internal structure of the Earth, the rock cycle and the forces that shape landforms around Garoua.</a:t>
             </a:r>
             <a:endParaRPr lang="en-US" dirty="0"/>
           </a:p>
@@ -2585,7 +2589,7 @@
           <a:p>
             <a:r>
               <a:rPr lang="en-US" dirty="0"/>
-              <a:t>Let us check the answer together. An internal (endogenic) force. It builds up the relief.</a:t>
+              <a:t>Here is the question for Activity 4: Is gully erosion an internal or an external force? Take one minute to think and write your answer in your rough notebook.</a:t>
             </a:r>
             <a:endParaRPr lang="en-US" dirty="0"/>
           </a:p>
@@ -2673,7 +2677,7 @@
           <a:p>
             <a:r>
               <a:rPr lang="en-US" dirty="0"/>
-              <a:t>Activity 5. Look carefully at this picture: a gully cut by rain water. Observe every detail before I ask the question.</a:t>
+              <a:t>Let us check the answer together. An external (exogenic) force.</a:t>
             </a:r>
             <a:endParaRPr lang="en-US" dirty="0"/>
           </a:p>
@@ -2761,7 +2765,7 @@
           <a:p>
             <a:r>
               <a:rPr lang="en-US" dirty="0"/>
-              <a:t>Here is the question for Activity 5: Rain water wears the land down. Is this an internal or an external force? Take one minute to think and write your answer in your rough notebook.</a:t>
+              <a:t>Activity 5. Look carefully at this picture: categories of landforms. Observe every detail before I ask the question.</a:t>
             </a:r>
             <a:endParaRPr lang="en-US" dirty="0"/>
           </a:p>
@@ -2849,7 +2853,7 @@
           <a:p>
             <a:r>
               <a:rPr lang="en-US" dirty="0"/>
-              <a:t>Let us check the answer together. An external (exogenic) force. It wears down the relief.</a:t>
+              <a:t>Here is the question for Activity 5: Give one landform of the second order in Cameroon. Take one minute to think and write your answer in your rough notebook.</a:t>
             </a:r>
             <a:endParaRPr lang="en-US" dirty="0"/>
           </a:p>
@@ -2937,7 +2941,7 @@
           <a:p>
             <a:r>
               <a:rPr lang="en-US" dirty="0"/>
-              <a:t>Now we are going to copy the board summary. Write the title and the headings neatly in your notebooks. I will give you enough time for each slide, so do not rush.</a:t>
+              <a:t>Let us check the answer together. The Adamawa Plateau, the Mandara Mountains or the Benue plain.</a:t>
             </a:r>
             <a:endParaRPr lang="en-US" dirty="0"/>
           </a:p>
@@ -3025,7 +3029,7 @@
           <a:p>
             <a:r>
               <a:rPr lang="en-US" dirty="0"/>
-              <a:t>Let us copy the definitions. The key terms of this lesson are defined as follows. On this slide we have Lithosphere and Rock cycle. Write each point on a new line, with the key term first, and explain it in your own words when we revise. When you finish, we go to the next slide.</a:t>
+              <a:t>Now we are going to copy the board summary. Write the title and the headings neatly in your notebooks. I will give you enough time for each slide, so do not rush.</a:t>
             </a:r>
             <a:endParaRPr lang="en-US" dirty="0"/>
           </a:p>
@@ -3113,7 +3117,7 @@
           <a:p>
             <a:r>
               <a:rPr lang="en-US" dirty="0"/>
-              <a:t>We continue with the definitions. On this slide we have Landform. Write each point on a new line, with the key term first, and explain it in your own words when we revise.</a:t>
+              <a:t>Let us copy the definitions. The key terms of this lesson are defined as follows. On this slide we have Crust and Lithosphere. Write each point on a new line, with the key term first, and explain it in your own words when we revise. When you finish, we go to the next slide.</a:t>
             </a:r>
             <a:endParaRPr lang="en-US" dirty="0"/>
           </a:p>
@@ -3201,7 +3205,7 @@
           <a:p>
             <a:r>
               <a:rPr lang="en-US" dirty="0"/>
-              <a:t>Let us copy Layers of the Earth and their Properties. The Earth is made up of the following layers. On this slide we have Crust. Write each point on a new line, with the key term first, and explain it in your own words when we revise. When you finish, we go to the next slide.</a:t>
+              <a:t>We continue with the definitions. On this slide we have Mantle and Rock cycle. Write each point on a new line, with the key term first, and explain it in your own words when we revise. When you finish, we go to the next slide.</a:t>
             </a:r>
             <a:endParaRPr lang="en-US" dirty="0"/>
           </a:p>
@@ -3289,7 +3293,7 @@
           <a:p>
             <a:r>
               <a:rPr lang="en-US" dirty="0"/>
-              <a:t>We continue with Layers of the Earth and their Properties. On this slide we have Mantle. Write each point on a new line, with the key term first, and explain it in your own words when we revise. When you finish, we go to the next slide.</a:t>
+              <a:t>We continue with the definitions. On this slide we have Landform. Write each point on a new line, with the key term first, and explain it in your own words when we revise.</a:t>
             </a:r>
             <a:endParaRPr lang="en-US" dirty="0"/>
           </a:p>
@@ -3377,7 +3381,7 @@
           <a:p>
             <a:r>
               <a:rPr lang="en-US" dirty="0"/>
-              <a:t>We continue with Layers of the Earth and their Properties. On this slide we have Core. Write each point on a new line, with the key term first, and explain it in your own words when we revise.</a:t>
+              <a:t>Let us copy The Layers of the Earth. The Earth is made of the following layers. Copy the point on The crust on the left, then draw the diagram on the right: the layers of the Earth. Give it a title and label it clearly.</a:t>
             </a:r>
             <a:endParaRPr lang="en-US" dirty="0"/>
           </a:p>
@@ -3465,7 +3469,7 @@
           <a:p>
             <a:r>
               <a:rPr lang="en-US" dirty="0"/>
-              <a:t>Before we start the new lesson, let us correct the homework I gave you at the end of Lesson 1: Origin of the Earth. The question was: Draw the geologic time scale in your exercise book and write one event for each era. Take out your exercise books.</a:t>
+              <a:t>Before we start the new lesson, let us correct the homework I gave you at the end of Lesson 1: Origin of the Earth. The question was: Name the three main layers of the Earth. Take out your exercise books.</a:t>
             </a:r>
             <a:endParaRPr lang="en-US" dirty="0"/>
           </a:p>
@@ -3553,7 +3557,7 @@
           <a:p>
             <a:r>
               <a:rPr lang="en-US" dirty="0"/>
-              <a:t>Now draw this illustration in your notebook: the layers of the Earth. Give it a title and label it clearly.</a:t>
+              <a:t>We continue with The Layers of the Earth. On this slide we have Types of crust. Write each point on a new line, with the key term first, and explain it in your own words when we revise. When you finish, we go to the next slide.</a:t>
             </a:r>
             <a:endParaRPr lang="en-US" dirty="0"/>
           </a:p>
@@ -3641,7 +3645,7 @@
           <a:p>
             <a:r>
               <a:rPr lang="en-US" dirty="0"/>
-              <a:t>Let us copy The Rock Material Cycle. Rocks change from one type to another as follows. On this slide we have Igneous rocks. Write each point on a new line, with the key term first, and explain it in your own words when we revise. When you finish, we go to the next slide.</a:t>
+              <a:t>We continue with The Layers of the Earth. On this slide we have The mantle and Role of the mantle. Write each point on a new line, with the key term first, and explain it in your own words when we revise.</a:t>
             </a:r>
             <a:endParaRPr lang="en-US" dirty="0"/>
           </a:p>
@@ -3729,7 +3733,7 @@
           <a:p>
             <a:r>
               <a:rPr lang="en-US" dirty="0"/>
-              <a:t>We continue with The Rock Material Cycle. On this slide we have Sedimentary rocks. Write each point on a new line, with the key term first, and explain it in your own words when we revise. When you finish, we go to the next slide.</a:t>
+              <a:t>Copy the point on The core on the left, then draw the diagram on the right: boundaries inside the Earth. Give it a title and label it clearly.</a:t>
             </a:r>
             <a:endParaRPr lang="en-US" dirty="0"/>
           </a:p>
@@ -3817,7 +3821,7 @@
           <a:p>
             <a:r>
               <a:rPr lang="en-US" dirty="0"/>
-              <a:t>We continue with The Rock Material Cycle. On this slide we have Metamorphic rocks. Write each point on a new line, with the key term first, and explain it in your own words when we revise.</a:t>
+              <a:t>Let us copy The Rock Cycle. The rock cycle and the three types of rocks are presented as follows. Copy the point on The rock cycle on the left, then draw the diagram on the right: the rock cycle. Give it a title and label it clearly.</a:t>
             </a:r>
             <a:endParaRPr lang="en-US" dirty="0"/>
           </a:p>
@@ -3905,7 +3909,7 @@
           <a:p>
             <a:r>
               <a:rPr lang="en-US" dirty="0"/>
-              <a:t>Now draw this illustration in your notebook: the rock cycle. Give it a title and label it clearly.</a:t>
+              <a:t>Copy the point on Igneous rocks on the left, then draw the diagram on the right: granite. Give it a title and label it clearly.</a:t>
             </a:r>
             <a:endParaRPr lang="en-US" dirty="0"/>
           </a:p>
@@ -3993,7 +3997,7 @@
           <a:p>
             <a:r>
               <a:rPr lang="en-US" dirty="0"/>
-              <a:t>Let us copy Forces and Categories of Landforms. The landscape is shaped by two groups of forces. On this slide we have Internal (endogenic) forces. Write each point on a new line, with the key term first, and explain it in your own words when we revise. When you finish, we go to the next slide.</a:t>
+              <a:t>Copy the point on Sedimentary rocks on the left, then draw the diagram on the right: sandstone. Give it a title and label it clearly.</a:t>
             </a:r>
             <a:endParaRPr lang="en-US" dirty="0"/>
           </a:p>
@@ -4081,7 +4085,7 @@
           <a:p>
             <a:r>
               <a:rPr lang="en-US" dirty="0"/>
-              <a:t>We continue with Forces and Categories of Landforms. On this slide we have External (exogenic) forces. Write each point on a new line, with the key term first, and explain it in your own words when we revise. When you finish, we go to the next slide.</a:t>
+              <a:t>Copy the point on Metamorphic rocks on the left, then draw the diagram on the right: marble. Give it a title and label it clearly.</a:t>
             </a:r>
             <a:endParaRPr lang="en-US" dirty="0"/>
           </a:p>
@@ -4169,7 +4173,7 @@
           <a:p>
             <a:r>
               <a:rPr lang="en-US" dirty="0"/>
-              <a:t>We continue with Forces and Categories of Landforms. On this slide we have Categories of landforms. Write each point on a new line, with the key term first, and explain it in your own words when we revise.</a:t>
+              <a:t>Let us copy Forces that Shape the Landscape. The forces that shape the landscape are the following. Copy the point on Internal (endogenic) forces on the left, then draw the diagram on the right: a volcanic eruption. Give it a title and label it clearly.</a:t>
             </a:r>
             <a:endParaRPr lang="en-US" dirty="0"/>
           </a:p>
@@ -4257,7 +4261,7 @@
           <a:p>
             <a:r>
               <a:rPr lang="en-US" dirty="0"/>
-              <a:t>Now let us check what you have understood. Question 1: Define a discontinuity and name one. Answer in your exercise book.</a:t>
+              <a:t>Copy the point on External (exogenic) forces on the left, then draw the diagram on the right: a gully. Give it a title and label it clearly.</a:t>
             </a:r>
             <a:endParaRPr lang="en-US" dirty="0"/>
           </a:p>
@@ -4345,7 +4349,7 @@
           <a:p>
             <a:r>
               <a:rPr lang="en-US" dirty="0"/>
-              <a:t>The expected answer is: a boundary between two layers of the Earth, for example the Moho. If you got it right, well done.</a:t>
+              <a:t>We continue with Forces that Shape the Landscape. On this slide we have Local example. Write each point on a new line, with the key term first, and explain it in your own words when we revise.</a:t>
             </a:r>
             <a:endParaRPr lang="en-US" dirty="0"/>
           </a:p>
@@ -4433,7 +4437,7 @@
           <a:p>
             <a:r>
               <a:rPr lang="en-US" dirty="0"/>
-              <a:t>Here is a good answer. Precambrian: first bacteria and oldest rocks. Palaeozoic: trilobites and first forests. Mesozoic: dinosaurs and break-up of Pangaea. Cenozoic: mammals, man and the Himalayas. Compare it with your own answer and correct your work in red.</a:t>
+              <a:t>Here is a good answer. The crust, the mantle and the core. Compare it with your own answer and correct your work in red.</a:t>
             </a:r>
             <a:endParaRPr lang="en-US" dirty="0"/>
           </a:p>
@@ -4521,7 +4525,7 @@
           <a:p>
             <a:r>
               <a:rPr lang="en-US" dirty="0"/>
-              <a:t>Now let us check what you have understood. Question 2: Give one internal and one external force. Answer in your exercise book.</a:t>
+              <a:t>Let us copy Categories of Landforms. Landforms are classified as follows. Copy the point on First-order (major) landforms on the left, then draw the diagram on the right: categories of landforms. Give it a title and label it clearly.</a:t>
             </a:r>
             <a:endParaRPr lang="en-US" dirty="0"/>
           </a:p>
@@ -4609,7 +4613,7 @@
           <a:p>
             <a:r>
               <a:rPr lang="en-US" dirty="0"/>
-              <a:t>The expected answer is: volcanism (internal); erosion by rivers (external). If you got it right, well done.</a:t>
+              <a:t>We continue with Categories of Landforms. On this slide we have Second-order landforms and Third-order (minor) landforms. Write each point on a new line, with the key term first, and explain it in your own words when we revise.</a:t>
             </a:r>
             <a:endParaRPr lang="en-US" dirty="0"/>
           </a:p>
@@ -4697,7 +4701,7 @@
           <a:p>
             <a:r>
               <a:rPr lang="en-US" dirty="0"/>
-              <a:t>Take your time to copy this part; we will continue together.</a:t>
+              <a:t>Now let us check what you have understood. Question 1: Distinguish continental crust from oceanic crust. Answer in your exercise book.</a:t>
             </a:r>
             <a:endParaRPr lang="en-US" dirty="0"/>
           </a:p>
@@ -4785,7 +4789,7 @@
           <a:p>
             <a:r>
               <a:rPr lang="en-US" dirty="0"/>
-              <a:t>For those who need more practice, fill in the blanks in your exercise book. The answers are: number 1, Moho; number 2, endogenic (internal); number 3, pressure.</a:t>
+              <a:t>The expected answer is: continental crust is thick, light and granitic; oceanic crust is thin, dense and basaltic. If you got it right, well done.</a:t>
             </a:r>
             <a:endParaRPr lang="en-US" dirty="0"/>
           </a:p>
@@ -4873,7 +4877,7 @@
           <a:p>
             <a:r>
               <a:rPr lang="en-US" dirty="0"/>
-              <a:t>For your homework: Look at a map of the world. Why do the coasts of Africa and South America look like pieces of a puzzle? Write two sentences. We shall correct it at the beginning of our next lesson.</a:t>
+              <a:t>Now let us check what you have understood. Question 2: How is a sedimentary rock formed? Answer in your exercise book.</a:t>
             </a:r>
             <a:endParaRPr lang="en-US" dirty="0"/>
           </a:p>
@@ -4961,7 +4965,7 @@
           <a:p>
             <a:r>
               <a:rPr lang="en-US" dirty="0"/>
-              <a:t>Our next lesson will be on Further Study 1: Early Theories of Crustal Movements. Thank you for your attention, and see you next time.</a:t>
+              <a:t>The expected answer is: by the compression of layers of sediments such as sand and mud. If you got it right, well done.</a:t>
             </a:r>
             <a:endParaRPr lang="en-US" dirty="0"/>
           </a:p>
@@ -5049,7 +5053,7 @@
           <a:p>
             <a:r>
               <a:rPr lang="en-US" dirty="0"/>
-              <a:t>Let us play the bilingual game. I say a word in English, and you give me the French word. Then we do the reverse.</a:t>
+              <a:t>For those who need more practice, fill in the blanks in your exercise book. The answers are: number 1, mantle; number 2, igneous; number 3, first.</a:t>
             </a:r>
             <a:endParaRPr lang="en-US" dirty="0"/>
           </a:p>
@@ -5137,7 +5141,7 @@
           <a:p>
             <a:r>
               <a:rPr lang="en-US" dirty="0"/>
-              <a:t>I record this information in the official logbook of the class after the lesson.</a:t>
+              <a:t>For your homework: Name the supercontinent proposed by Wegener. We shall correct it at the beginning of our next lesson.</a:t>
             </a:r>
             <a:endParaRPr lang="en-US" dirty="0"/>
           </a:p>
@@ -5225,7 +5229,7 @@
           <a:p>
             <a:r>
               <a:rPr lang="en-US" dirty="0"/>
-              <a:t>I complete the second page of the logbook: the matter taught, the evaluation, the homework and the attendance.</a:t>
+              <a:t>Our next lesson will be on Further Study 1: Early Theories of Crustal Movements. Thank you for your attention, and see you next time.</a:t>
             </a:r>
             <a:endParaRPr lang="en-US" dirty="0"/>
           </a:p>
@@ -5313,7 +5317,7 @@
           <a:p>
             <a:r>
               <a:rPr lang="en-US" dirty="0"/>
-              <a:t>This slide is for me, the teacher: it gives the timing of the lesson and what to do if the projector is not available.</a:t>
+              <a:t>Let us play the bilingual game. I say a word in English, and you give me the French word. Then we do the reverse.</a:t>
             </a:r>
             <a:endParaRPr lang="en-US" dirty="0"/>
           </a:p>
@@ -5489,7 +5493,7 @@
           <a:p>
             <a:r>
               <a:rPr lang="en-US" dirty="0"/>
-              <a:t>These are the references and picture credits used to prepare this lesson.</a:t>
+              <a:t>I record this information in the official logbook of the class after the lesson.</a:t>
             </a:r>
             <a:endParaRPr lang="en-US" dirty="0"/>
           </a:p>
@@ -5513,6 +5517,358 @@
             <a:fld id="{F7021451-1387-4CA6-816F-3879F97B5CBC}" type="slidenum">
               <a:rPr lang="en-US"/>
               <a:t>60</a:t>
+            </a:fld>
+            <a:endParaRPr lang="en-US"/>
+          </a:p>
+        </p:txBody>
+      </p:sp>
+    </p:spTree>
+    <p:extLst>
+      <p:ext uri="{BB962C8B-B14F-4D97-AF65-F5344CB8AC3E}">
+        <p14:creationId xmlns:p14="http://schemas.microsoft.com/office/powerpoint/2010/main" val="1024086991"/>
+      </p:ext>
+    </p:extLst>
+  </p:cSld>
+  <p:clrMapOvr>
+    <a:masterClrMapping/>
+  </p:clrMapOvr>
+</p:notes>
+</file>
+
+<file path=ppt/notesSlides/notesSlide61.xml><?xml version="1.0" encoding="utf-8"?>
+<p:notes xmlns:a="http://schemas.openxmlformats.org/drawingml/2006/main" xmlns:r="http://schemas.openxmlformats.org/officeDocument/2006/relationships" xmlns:p="http://schemas.openxmlformats.org/presentationml/2006/main">
+  <p:cSld>
+    <p:spTree>
+      <p:nvGrpSpPr>
+        <p:cNvPr id="1" name=""/>
+        <p:cNvGrpSpPr/>
+        <p:nvPr/>
+      </p:nvGrpSpPr>
+      <p:grpSpPr>
+        <a:xfrm>
+          <a:off x="0" y="0"/>
+          <a:ext cx="0" cy="0"/>
+          <a:chOff x="0" y="0"/>
+          <a:chExt cx="0" cy="0"/>
+        </a:xfrm>
+      </p:grpSpPr>
+      <p:sp>
+        <p:nvSpPr>
+          <p:cNvPr id="2" name="Slide Image Placeholder 1"/>
+          <p:cNvSpPr>
+            <a:spLocks noGrp="1" noRot="1" noChangeAspect="1"/>
+          </p:cNvSpPr>
+          <p:nvPr>
+            <p:ph type="sldImg"/>
+          </p:nvPr>
+        </p:nvSpPr>
+        <p:spPr/>
+      </p:sp>
+      <p:sp>
+        <p:nvSpPr>
+          <p:cNvPr id="3" name="Notes Placeholder 2"/>
+          <p:cNvSpPr>
+            <a:spLocks noGrp="1"/>
+          </p:cNvSpPr>
+          <p:nvPr>
+            <p:ph type="body" idx="1"/>
+          </p:nvPr>
+        </p:nvSpPr>
+        <p:spPr/>
+        <p:txBody>
+          <a:bodyPr/>
+          <a:lstStyle/>
+          <a:p>
+            <a:r>
+              <a:rPr lang="en-US" dirty="0"/>
+              <a:t>I complete the second page of the logbook: the matter taught, the evaluation, the homework and the attendance.</a:t>
+            </a:r>
+            <a:endParaRPr lang="en-US" dirty="0"/>
+          </a:p>
+        </p:txBody>
+      </p:sp>
+      <p:sp>
+        <p:nvSpPr>
+          <p:cNvPr id="4" name="Slide Number Placeholder 3"/>
+          <p:cNvSpPr>
+            <a:spLocks noGrp="1"/>
+          </p:cNvSpPr>
+          <p:nvPr>
+            <p:ph type="sldNum" sz="quarter" idx="10"/>
+          </p:nvPr>
+        </p:nvSpPr>
+        <p:spPr/>
+        <p:txBody>
+          <a:bodyPr/>
+          <a:lstStyle/>
+          <a:p>
+            <a:fld id="{F7021451-1387-4CA6-816F-3879F97B5CBC}" type="slidenum">
+              <a:rPr lang="en-US"/>
+              <a:t>61</a:t>
+            </a:fld>
+            <a:endParaRPr lang="en-US"/>
+          </a:p>
+        </p:txBody>
+      </p:sp>
+    </p:spTree>
+    <p:extLst>
+      <p:ext uri="{BB962C8B-B14F-4D97-AF65-F5344CB8AC3E}">
+        <p14:creationId xmlns:p14="http://schemas.microsoft.com/office/powerpoint/2010/main" val="1024086991"/>
+      </p:ext>
+    </p:extLst>
+  </p:cSld>
+  <p:clrMapOvr>
+    <a:masterClrMapping/>
+  </p:clrMapOvr>
+</p:notes>
+</file>
+
+<file path=ppt/notesSlides/notesSlide62.xml><?xml version="1.0" encoding="utf-8"?>
+<p:notes xmlns:a="http://schemas.openxmlformats.org/drawingml/2006/main" xmlns:r="http://schemas.openxmlformats.org/officeDocument/2006/relationships" xmlns:p="http://schemas.openxmlformats.org/presentationml/2006/main">
+  <p:cSld>
+    <p:spTree>
+      <p:nvGrpSpPr>
+        <p:cNvPr id="1" name=""/>
+        <p:cNvGrpSpPr/>
+        <p:nvPr/>
+      </p:nvGrpSpPr>
+      <p:grpSpPr>
+        <a:xfrm>
+          <a:off x="0" y="0"/>
+          <a:ext cx="0" cy="0"/>
+          <a:chOff x="0" y="0"/>
+          <a:chExt cx="0" cy="0"/>
+        </a:xfrm>
+      </p:grpSpPr>
+      <p:sp>
+        <p:nvSpPr>
+          <p:cNvPr id="2" name="Slide Image Placeholder 1"/>
+          <p:cNvSpPr>
+            <a:spLocks noGrp="1" noRot="1" noChangeAspect="1"/>
+          </p:cNvSpPr>
+          <p:nvPr>
+            <p:ph type="sldImg"/>
+          </p:nvPr>
+        </p:nvSpPr>
+        <p:spPr/>
+      </p:sp>
+      <p:sp>
+        <p:nvSpPr>
+          <p:cNvPr id="3" name="Notes Placeholder 2"/>
+          <p:cNvSpPr>
+            <a:spLocks noGrp="1"/>
+          </p:cNvSpPr>
+          <p:nvPr>
+            <p:ph type="body" idx="1"/>
+          </p:nvPr>
+        </p:nvSpPr>
+        <p:spPr/>
+        <p:txBody>
+          <a:bodyPr/>
+          <a:lstStyle/>
+          <a:p>
+            <a:r>
+              <a:rPr lang="en-US" dirty="0"/>
+              <a:t>This slide is for me, the teacher: it gives the timing of the lesson and what to do if the projector is not available.</a:t>
+            </a:r>
+            <a:endParaRPr lang="en-US" dirty="0"/>
+          </a:p>
+        </p:txBody>
+      </p:sp>
+      <p:sp>
+        <p:nvSpPr>
+          <p:cNvPr id="4" name="Slide Number Placeholder 3"/>
+          <p:cNvSpPr>
+            <a:spLocks noGrp="1"/>
+          </p:cNvSpPr>
+          <p:nvPr>
+            <p:ph type="sldNum" sz="quarter" idx="10"/>
+          </p:nvPr>
+        </p:nvSpPr>
+        <p:spPr/>
+        <p:txBody>
+          <a:bodyPr/>
+          <a:lstStyle/>
+          <a:p>
+            <a:fld id="{F7021451-1387-4CA6-816F-3879F97B5CBC}" type="slidenum">
+              <a:rPr lang="en-US"/>
+              <a:t>62</a:t>
+            </a:fld>
+            <a:endParaRPr lang="en-US"/>
+          </a:p>
+        </p:txBody>
+      </p:sp>
+    </p:spTree>
+    <p:extLst>
+      <p:ext uri="{BB962C8B-B14F-4D97-AF65-F5344CB8AC3E}">
+        <p14:creationId xmlns:p14="http://schemas.microsoft.com/office/powerpoint/2010/main" val="1024086991"/>
+      </p:ext>
+    </p:extLst>
+  </p:cSld>
+  <p:clrMapOvr>
+    <a:masterClrMapping/>
+  </p:clrMapOvr>
+</p:notes>
+</file>
+
+<file path=ppt/notesSlides/notesSlide63.xml><?xml version="1.0" encoding="utf-8"?>
+<p:notes xmlns:a="http://schemas.openxmlformats.org/drawingml/2006/main" xmlns:r="http://schemas.openxmlformats.org/officeDocument/2006/relationships" xmlns:p="http://schemas.openxmlformats.org/presentationml/2006/main">
+  <p:cSld>
+    <p:spTree>
+      <p:nvGrpSpPr>
+        <p:cNvPr id="1" name=""/>
+        <p:cNvGrpSpPr/>
+        <p:nvPr/>
+      </p:nvGrpSpPr>
+      <p:grpSpPr>
+        <a:xfrm>
+          <a:off x="0" y="0"/>
+          <a:ext cx="0" cy="0"/>
+          <a:chOff x="0" y="0"/>
+          <a:chExt cx="0" cy="0"/>
+        </a:xfrm>
+      </p:grpSpPr>
+      <p:sp>
+        <p:nvSpPr>
+          <p:cNvPr id="2" name="Slide Image Placeholder 1"/>
+          <p:cNvSpPr>
+            <a:spLocks noGrp="1" noRot="1" noChangeAspect="1"/>
+          </p:cNvSpPr>
+          <p:nvPr>
+            <p:ph type="sldImg"/>
+          </p:nvPr>
+        </p:nvSpPr>
+        <p:spPr/>
+      </p:sp>
+      <p:sp>
+        <p:nvSpPr>
+          <p:cNvPr id="3" name="Notes Placeholder 2"/>
+          <p:cNvSpPr>
+            <a:spLocks noGrp="1"/>
+          </p:cNvSpPr>
+          <p:nvPr>
+            <p:ph type="body" idx="1"/>
+          </p:nvPr>
+        </p:nvSpPr>
+        <p:spPr/>
+        <p:txBody>
+          <a:bodyPr/>
+          <a:lstStyle/>
+          <a:p>
+            <a:r>
+              <a:rPr lang="en-US" dirty="0"/>
+              <a:t>Take your time to copy this part; we will continue together.</a:t>
+            </a:r>
+            <a:endParaRPr lang="en-US" dirty="0"/>
+          </a:p>
+        </p:txBody>
+      </p:sp>
+      <p:sp>
+        <p:nvSpPr>
+          <p:cNvPr id="4" name="Slide Number Placeholder 3"/>
+          <p:cNvSpPr>
+            <a:spLocks noGrp="1"/>
+          </p:cNvSpPr>
+          <p:nvPr>
+            <p:ph type="sldNum" sz="quarter" idx="10"/>
+          </p:nvPr>
+        </p:nvSpPr>
+        <p:spPr/>
+        <p:txBody>
+          <a:bodyPr/>
+          <a:lstStyle/>
+          <a:p>
+            <a:fld id="{F7021451-1387-4CA6-816F-3879F97B5CBC}" type="slidenum">
+              <a:rPr lang="en-US"/>
+              <a:t>63</a:t>
+            </a:fld>
+            <a:endParaRPr lang="en-US"/>
+          </a:p>
+        </p:txBody>
+      </p:sp>
+    </p:spTree>
+    <p:extLst>
+      <p:ext uri="{BB962C8B-B14F-4D97-AF65-F5344CB8AC3E}">
+        <p14:creationId xmlns:p14="http://schemas.microsoft.com/office/powerpoint/2010/main" val="1024086991"/>
+      </p:ext>
+    </p:extLst>
+  </p:cSld>
+  <p:clrMapOvr>
+    <a:masterClrMapping/>
+  </p:clrMapOvr>
+</p:notes>
+</file>
+
+<file path=ppt/notesSlides/notesSlide64.xml><?xml version="1.0" encoding="utf-8"?>
+<p:notes xmlns:a="http://schemas.openxmlformats.org/drawingml/2006/main" xmlns:r="http://schemas.openxmlformats.org/officeDocument/2006/relationships" xmlns:p="http://schemas.openxmlformats.org/presentationml/2006/main">
+  <p:cSld>
+    <p:spTree>
+      <p:nvGrpSpPr>
+        <p:cNvPr id="1" name=""/>
+        <p:cNvGrpSpPr/>
+        <p:nvPr/>
+      </p:nvGrpSpPr>
+      <p:grpSpPr>
+        <a:xfrm>
+          <a:off x="0" y="0"/>
+          <a:ext cx="0" cy="0"/>
+          <a:chOff x="0" y="0"/>
+          <a:chExt cx="0" cy="0"/>
+        </a:xfrm>
+      </p:grpSpPr>
+      <p:sp>
+        <p:nvSpPr>
+          <p:cNvPr id="2" name="Slide Image Placeholder 1"/>
+          <p:cNvSpPr>
+            <a:spLocks noGrp="1" noRot="1" noChangeAspect="1"/>
+          </p:cNvSpPr>
+          <p:nvPr>
+            <p:ph type="sldImg"/>
+          </p:nvPr>
+        </p:nvSpPr>
+        <p:spPr/>
+      </p:sp>
+      <p:sp>
+        <p:nvSpPr>
+          <p:cNvPr id="3" name="Notes Placeholder 2"/>
+          <p:cNvSpPr>
+            <a:spLocks noGrp="1"/>
+          </p:cNvSpPr>
+          <p:nvPr>
+            <p:ph type="body" idx="1"/>
+          </p:nvPr>
+        </p:nvSpPr>
+        <p:spPr/>
+        <p:txBody>
+          <a:bodyPr/>
+          <a:lstStyle/>
+          <a:p>
+            <a:r>
+              <a:rPr lang="en-US" dirty="0"/>
+              <a:t>These are the references and picture credits used to prepare this lesson.</a:t>
+            </a:r>
+            <a:endParaRPr lang="en-US" dirty="0"/>
+          </a:p>
+        </p:txBody>
+      </p:sp>
+      <p:sp>
+        <p:nvSpPr>
+          <p:cNvPr id="4" name="Slide Number Placeholder 3"/>
+          <p:cNvSpPr>
+            <a:spLocks noGrp="1"/>
+          </p:cNvSpPr>
+          <p:nvPr>
+            <p:ph type="sldNum" sz="quarter" idx="10"/>
+          </p:nvPr>
+        </p:nvSpPr>
+        <p:spPr/>
+        <p:txBody>
+          <a:bodyPr/>
+          <a:lstStyle/>
+          <a:p>
+            <a:fld id="{F7021451-1387-4CA6-816F-3879F97B5CBC}" type="slidenum">
+              <a:rPr lang="en-US"/>
+              <a:t>64</a:t>
             </a:fld>
             <a:endParaRPr lang="en-US"/>
           </a:p>
@@ -5665,7 +6021,7 @@
           <a:p>
             <a:r>
               <a:rPr lang="en-US" dirty="0"/>
-              <a:t>By the end of this lesson, you should be able to do three things. Number 1: describe the layers of the Earth and the main discontinuities. Number 2: explain the rock cycle. Number 3: distinguish internal (endogenic) and external (exogenic) forces.</a:t>
+              <a:t>By the end of this lesson, you should be able to do four things. Number 1: describe the crust, the mantle and the core. Number 2: explain the rock cycle and the three types of rocks. Number 3: distinguish internal and external forces. Number 4: classify landforms into orders with examples.</a:t>
             </a:r>
             <a:endParaRPr lang="en-US" dirty="0"/>
           </a:p>
@@ -5753,7 +6109,7 @@
           <a:p>
             <a:r>
               <a:rPr lang="en-US" dirty="0"/>
-              <a:t>Let us first remember what you already know. The Earth formed about 4.6 billion years ago. Rocks are igneous, sedimentary or metamorphic. Keep this in mind, because we shall build on it today.</a:t>
+              <a:t>Let us first remember what you already know. The Earth formed about 4.6 billion years ago. Endogenic processes build up the land. Exogenic processes wear down the land. Keep this in mind, because we shall build on it today.</a:t>
             </a:r>
             <a:endParaRPr lang="en-US" dirty="0"/>
           </a:p>
@@ -7133,7 +7489,7 @@
         <p:spPr>
           <a:xfrm>
             <a:off x="0" y="658368"/>
-            <a:ext cx="5120640" cy="5833872"/>
+            <a:ext cx="2468880" cy="5833872"/>
           </a:xfrm>
           <a:prstGeom prst="rect">
             <a:avLst/>
@@ -7148,8 +7504,8 @@
         </p:nvSpPr>
         <p:spPr>
           <a:xfrm>
-            <a:off x="5349240" y="1005840"/>
-            <a:ext cx="6522415" cy="731520"/>
+            <a:off x="2697480" y="1005840"/>
+            <a:ext cx="9174175" cy="731520"/>
           </a:xfrm>
           <a:prstGeom prst="rect">
             <a:avLst/>
@@ -7189,8 +7545,8 @@
         </p:nvSpPr>
         <p:spPr>
           <a:xfrm>
-            <a:off x="5349240" y="1783080"/>
-            <a:ext cx="6522415" cy="4663440"/>
+            <a:off x="2697480" y="1783080"/>
+            <a:ext cx="9174175" cy="4663440"/>
           </a:xfrm>
           <a:prstGeom prst="rect">
             <a:avLst/>
@@ -7217,7 +7573,27 @@
                 <a:ea typeface="Times New Roman" pitchFamily="34" charset="-122"/>
                 <a:cs typeface="Times New Roman" pitchFamily="34" charset="-120"/>
               </a:rPr>
-              <a:t>After an earthquake is felt in the South-West Region, a student asks why the ground can shake and why Mount Cameroon erupts. Another student says that the inside of the Earth is empty.</a:t>
+              <a:t>Hassan helps his father build a new room in their compound at Yelwa, Garoua.</a:t>
+            </a:r>
+            <a:endParaRPr lang="en-US" sz="4000" dirty="0"/>
+          </a:p>
+          <a:p>
+            <a:pPr algn="l" indent="0" marL="0">
+              <a:spcAft>
+                <a:spcPts val="800"/>
+              </a:spcAft>
+              <a:buNone/>
+            </a:pPr>
+            <a:r>
+              <a:rPr lang="en-US" sz="4000" dirty="0">
+                <a:solidFill>
+                  <a:srgbClr val="111111"/>
+                </a:solidFill>
+                <a:latin typeface="Times New Roman" pitchFamily="34" charset="0"/>
+                <a:ea typeface="Times New Roman" pitchFamily="34" charset="-122"/>
+                <a:cs typeface="Times New Roman" pitchFamily="34" charset="-120"/>
+              </a:rPr>
+              <a:t>They use sand and gravel from the Benue riverbed for the concrete, but for the foundation his father insists on hard rocks bought from a quarry near the mountains.</a:t>
             </a:r>
             <a:endParaRPr lang="en-US" sz="4000" dirty="0"/>
           </a:p>
@@ -7394,7 +7770,7 @@
                 <a:ea typeface="Times New Roman" pitchFamily="34" charset="-122"/>
                 <a:cs typeface="Times New Roman" pitchFamily="34" charset="-120"/>
               </a:rPr>
-              <a:t>Situation: Question 1</a:t>
+              <a:t>Situation in Real Life (continued)</a:t>
             </a:r>
             <a:endParaRPr lang="en-US" sz="3600" dirty="0"/>
           </a:p>
@@ -7436,7 +7812,27 @@
                 <a:ea typeface="Times New Roman" pitchFamily="34" charset="-122"/>
                 <a:cs typeface="Times New Roman" pitchFamily="34" charset="-120"/>
               </a:rPr>
-              <a:t>What is the problem in the situation?</a:t>
+              <a:t>Hassan notices how different the soft river sand is from the hard quarry stone.</a:t>
+            </a:r>
+            <a:endParaRPr lang="en-US" sz="4000" dirty="0"/>
+          </a:p>
+          <a:p>
+            <a:pPr algn="l" indent="0" marL="0">
+              <a:spcAft>
+                <a:spcPts val="800"/>
+              </a:spcAft>
+              <a:buNone/>
+            </a:pPr>
+            <a:r>
+              <a:rPr lang="en-US" sz="4000" dirty="0">
+                <a:solidFill>
+                  <a:srgbClr val="111111"/>
+                </a:solidFill>
+                <a:latin typeface="Times New Roman" pitchFamily="34" charset="0"/>
+                <a:ea typeface="Times New Roman" pitchFamily="34" charset="-122"/>
+                <a:cs typeface="Times New Roman" pitchFamily="34" charset="-120"/>
+              </a:rPr>
+              <a:t>He asks: "Why are rocks so different, and what lies under all this sand and rock?"</a:t>
             </a:r>
             <a:endParaRPr lang="en-US" sz="4000" dirty="0"/>
           </a:p>
@@ -7613,7 +8009,7 @@
                 <a:ea typeface="Times New Roman" pitchFamily="34" charset="-122"/>
                 <a:cs typeface="Times New Roman" pitchFamily="34" charset="-120"/>
               </a:rPr>
-              <a:t>Answer</a:t>
+              <a:t>Situation: Question 1</a:t>
             </a:r>
             <a:endParaRPr lang="en-US" sz="3600" dirty="0"/>
           </a:p>
@@ -7655,7 +8051,7 @@
                 <a:ea typeface="Times New Roman" pitchFamily="34" charset="-122"/>
                 <a:cs typeface="Times New Roman" pitchFamily="34" charset="-120"/>
               </a:rPr>
-              <a:t>Students do not know what the inside of the Earth is like.</a:t>
+              <a:t>What is the problem in the situation?</a:t>
             </a:r>
             <a:endParaRPr lang="en-US" sz="4000" dirty="0"/>
           </a:p>
@@ -7832,7 +8228,7 @@
                 <a:ea typeface="Times New Roman" pitchFamily="34" charset="-122"/>
                 <a:cs typeface="Times New Roman" pitchFamily="34" charset="-120"/>
               </a:rPr>
-              <a:t>Situation: Question 2</a:t>
+              <a:t>Answer</a:t>
             </a:r>
             <a:endParaRPr lang="en-US" sz="3600" dirty="0"/>
           </a:p>
@@ -7874,7 +8270,7 @@
                 <a:ea typeface="Times New Roman" pitchFamily="34" charset="-122"/>
                 <a:cs typeface="Times New Roman" pitchFamily="34" charset="-120"/>
               </a:rPr>
-              <a:t>Is the inside of the Earth empty?</a:t>
+              <a:t>Hassan does not know the internal structure of the Earth and how rocks form.</a:t>
             </a:r>
             <a:endParaRPr lang="en-US" sz="4000" dirty="0"/>
           </a:p>
@@ -8051,7 +8447,7 @@
                 <a:ea typeface="Times New Roman" pitchFamily="34" charset="-122"/>
                 <a:cs typeface="Times New Roman" pitchFamily="34" charset="-120"/>
               </a:rPr>
-              <a:t>Answer</a:t>
+              <a:t>Situation: Question 2</a:t>
             </a:r>
             <a:endParaRPr lang="en-US" sz="3600" dirty="0"/>
           </a:p>
@@ -8093,7 +8489,7 @@
                 <a:ea typeface="Times New Roman" pitchFamily="34" charset="-122"/>
                 <a:cs typeface="Times New Roman" pitchFamily="34" charset="-120"/>
               </a:rPr>
-              <a:t>No. It is made of solid and liquid layers.</a:t>
+              <a:t>What are the main layers of the Earth?</a:t>
             </a:r>
             <a:endParaRPr lang="en-US" sz="4000" dirty="0"/>
           </a:p>
@@ -8270,7 +8666,7 @@
                 <a:ea typeface="Times New Roman" pitchFamily="34" charset="-122"/>
                 <a:cs typeface="Times New Roman" pitchFamily="34" charset="-120"/>
               </a:rPr>
-              <a:t>Situation: Question 3</a:t>
+              <a:t>Answer</a:t>
             </a:r>
             <a:endParaRPr lang="en-US" sz="3600" dirty="0"/>
           </a:p>
@@ -8312,7 +8708,7 @@
                 <a:ea typeface="Times New Roman" pitchFamily="34" charset="-122"/>
                 <a:cs typeface="Times New Roman" pitchFamily="34" charset="-120"/>
               </a:rPr>
-              <a:t>How do scientists know this?</a:t>
+              <a:t>The crust, the mantle and the core.</a:t>
             </a:r>
             <a:endParaRPr lang="en-US" sz="4000" dirty="0"/>
           </a:p>
@@ -8489,7 +8885,7 @@
                 <a:ea typeface="Times New Roman" pitchFamily="34" charset="-122"/>
                 <a:cs typeface="Times New Roman" pitchFamily="34" charset="-120"/>
               </a:rPr>
-              <a:t>Possible Answer</a:t>
+              <a:t>Situation: Question 3</a:t>
             </a:r>
             <a:endParaRPr lang="en-US" sz="3600" dirty="0"/>
           </a:p>
@@ -8531,7 +8927,7 @@
                 <a:ea typeface="Times New Roman" pitchFamily="34" charset="-122"/>
                 <a:cs typeface="Times New Roman" pitchFamily="34" charset="-120"/>
               </a:rPr>
-              <a:t>They study earthquake waves that pass through the Earth.</a:t>
+              <a:t>How do rocks form and change?</a:t>
             </a:r>
             <a:endParaRPr lang="en-US" sz="4000" dirty="0"/>
           </a:p>
@@ -8643,7 +9039,7 @@
                 <a:ea typeface="Calibri" pitchFamily="34" charset="-122"/>
                 <a:cs typeface="Calibri" pitchFamily="34" charset="-120"/>
               </a:rPr>
-              <a:t>ACTION TO TAKE</a:t>
+              <a:t>REAL-LIFE SITUATION</a:t>
             </a:r>
             <a:endParaRPr lang="en-US" sz="1400" dirty="0"/>
           </a:p>
@@ -8708,7 +9104,7 @@
                 <a:ea typeface="Times New Roman" pitchFamily="34" charset="-122"/>
                 <a:cs typeface="Times New Roman" pitchFamily="34" charset="-120"/>
               </a:rPr>
-              <a:t>Action to Take</a:t>
+              <a:t>Possible Answer</a:t>
             </a:r>
             <a:endParaRPr lang="en-US" sz="3600" dirty="0"/>
           </a:p>
@@ -8750,7 +9146,7 @@
                 <a:ea typeface="Times New Roman" pitchFamily="34" charset="-122"/>
                 <a:cs typeface="Times New Roman" pitchFamily="34" charset="-120"/>
               </a:rPr>
-              <a:t>Understand the forces that shape our landscape and the rocks we use.</a:t>
+              <a:t>Through the rock cycle, powered by internal heat and surface energy.</a:t>
             </a:r>
             <a:endParaRPr lang="en-US" sz="4000" dirty="0"/>
           </a:p>
@@ -8862,7 +9258,7 @@
                 <a:ea typeface="Calibri" pitchFamily="34" charset="-122"/>
                 <a:cs typeface="Calibri" pitchFamily="34" charset="-120"/>
               </a:rPr>
-              <a:t>JUSTIFICATION</a:t>
+              <a:t>ACTION TO TAKE</a:t>
             </a:r>
             <a:endParaRPr lang="en-US" sz="1400" dirty="0"/>
           </a:p>
@@ -8927,7 +9323,7 @@
                 <a:ea typeface="Times New Roman" pitchFamily="34" charset="-122"/>
                 <a:cs typeface="Times New Roman" pitchFamily="34" charset="-120"/>
               </a:rPr>
-              <a:t>Justification of the Lesson</a:t>
+              <a:t>Action to Take</a:t>
             </a:r>
             <a:endParaRPr lang="en-US" sz="3600" dirty="0"/>
           </a:p>
@@ -8969,7 +9365,7 @@
                 <a:ea typeface="Times New Roman" pitchFamily="34" charset="-122"/>
                 <a:cs typeface="Times New Roman" pitchFamily="34" charset="-120"/>
               </a:rPr>
-              <a:t>This lesson helps us to understand the structure of the Earth and the forces that build and wear down the landscape.</a:t>
+              <a:t>Recognise the types of rocks around you and use them sustainably for building.</a:t>
             </a:r>
             <a:endParaRPr lang="en-US" sz="4000" dirty="0"/>
           </a:p>
@@ -9081,54 +9477,15 @@
                 <a:ea typeface="Calibri" pitchFamily="34" charset="-122"/>
                 <a:cs typeface="Calibri" pitchFamily="34" charset="-120"/>
               </a:rPr>
-              <a:t>1. LAYERS OF THE EARTH</a:t>
+              <a:t>JUSTIFICATION</a:t>
             </a:r>
             <a:endParaRPr lang="en-US" sz="1400" dirty="0"/>
-          </a:p>
-        </p:txBody>
-      </p:sp>
-      <p:sp>
-        <p:nvSpPr>
-          <p:cNvPr id="3" name="Text 1"/>
-          <p:cNvSpPr/>
-          <p:nvPr/>
-        </p:nvSpPr>
-        <p:spPr>
-          <a:xfrm>
-            <a:off x="457200" y="1005840"/>
-            <a:ext cx="11277295" cy="731520"/>
-          </a:xfrm>
-          <a:prstGeom prst="rect">
-            <a:avLst/>
-          </a:prstGeom>
-          <a:noFill/>
-          <a:ln/>
-        </p:spPr>
-        <p:txBody>
-          <a:bodyPr wrap="square" lIns="0" tIns="0" rIns="0" bIns="0" rtlCol="0" anchor="ctr"/>
-          <a:lstStyle/>
-          <a:p>
-            <a:pPr algn="ctr" indent="0" marL="0">
-              <a:buNone/>
-            </a:pPr>
-            <a:r>
-              <a:rPr lang="en-US" sz="3600" b="1" dirty="0">
-                <a:solidFill>
-                  <a:srgbClr val="990011"/>
-                </a:solidFill>
-                <a:latin typeface="Times New Roman" pitchFamily="34" charset="0"/>
-                <a:ea typeface="Times New Roman" pitchFamily="34" charset="-122"/>
-                <a:cs typeface="Times New Roman" pitchFamily="34" charset="-120"/>
-              </a:rPr>
-              <a:t>Activity 1</a:t>
-            </a:r>
-            <a:endParaRPr lang="en-US" sz="3600" dirty="0"/>
           </a:p>
         </p:txBody>
       </p:sp>
       <p:pic>
         <p:nvPicPr>
-          <p:cNvPr id="4" name="Image 0" descr="/home/claude/f4/img/v2/earth_layers_big.png">    </p:cNvPr>
+          <p:cNvPr id="3" name="Image 0" descr="/home/claude/f4/img/minesec_sheet.png">    </p:cNvPr>
           <p:cNvPicPr>
             <a:picLocks noChangeAspect="1"/>
           </p:cNvPicPr>
@@ -9142,8 +9499,8 @@
         </p:blipFill>
         <p:spPr>
           <a:xfrm>
-            <a:off x="629930" y="1783080"/>
-            <a:ext cx="10931835" cy="4270248"/>
+            <a:off x="0" y="658368"/>
+            <a:ext cx="5120640" cy="5833872"/>
           </a:xfrm>
           <a:prstGeom prst="rect">
             <a:avLst/>
@@ -9152,14 +9509,14 @@
       </p:pic>
       <p:sp>
         <p:nvSpPr>
-          <p:cNvPr id="5" name="Text 2"/>
+          <p:cNvPr id="4" name="Text 1"/>
           <p:cNvSpPr/>
           <p:nvPr/>
         </p:nvSpPr>
         <p:spPr>
           <a:xfrm>
-            <a:off x="457200" y="6089904"/>
-            <a:ext cx="11277295" cy="347472"/>
+            <a:off x="5349240" y="1005840"/>
+            <a:ext cx="6522415" cy="731520"/>
           </a:xfrm>
           <a:prstGeom prst="rect">
             <a:avLst/>
@@ -9168,24 +9525,68 @@
           <a:ln/>
         </p:spPr>
         <p:txBody>
-          <a:bodyPr wrap="square" lIns="0" tIns="0" rIns="0" bIns="0" rtlCol="0" anchor="ctr"/>
+          <a:bodyPr wrap="square" lIns="0" tIns="0" rIns="0" bIns="0" rtlCol="0" anchor="ctr">
+            <a:normAutofit/>
+          </a:bodyPr>
           <a:lstStyle/>
           <a:p>
             <a:pPr algn="ctr" indent="0" marL="0">
               <a:buNone/>
             </a:pPr>
             <a:r>
-              <a:rPr lang="en-US" sz="1800" i="1" dirty="0">
-                <a:solidFill>
-                  <a:srgbClr val="555555"/>
+              <a:rPr lang="en-US" sz="3600" b="1" dirty="0">
+                <a:solidFill>
+                  <a:srgbClr val="990011"/>
                 </a:solidFill>
                 <a:latin typeface="Times New Roman" pitchFamily="34" charset="0"/>
                 <a:ea typeface="Times New Roman" pitchFamily="34" charset="-122"/>
                 <a:cs typeface="Times New Roman" pitchFamily="34" charset="-120"/>
               </a:rPr>
-              <a:t>The layers of the Earth.</a:t>
-            </a:r>
-            <a:endParaRPr lang="en-US" sz="1800" dirty="0"/>
+              <a:t>Justification of the Lesson</a:t>
+            </a:r>
+            <a:endParaRPr lang="en-US" sz="3600" dirty="0"/>
+          </a:p>
+        </p:txBody>
+      </p:sp>
+      <p:sp>
+        <p:nvSpPr>
+          <p:cNvPr id="5" name="Text 2"/>
+          <p:cNvSpPr/>
+          <p:nvPr/>
+        </p:nvSpPr>
+        <p:spPr>
+          <a:xfrm>
+            <a:off x="5349240" y="1783080"/>
+            <a:ext cx="6522415" cy="4663440"/>
+          </a:xfrm>
+          <a:prstGeom prst="rect">
+            <a:avLst/>
+          </a:prstGeom>
+          <a:noFill/>
+          <a:ln/>
+        </p:spPr>
+        <p:txBody>
+          <a:bodyPr wrap="square" lIns="0" tIns="0" rIns="0" bIns="0" rtlCol="0" anchor="t"/>
+          <a:lstStyle/>
+          <a:p>
+            <a:pPr algn="l" indent="0" marL="0">
+              <a:spcAft>
+                <a:spcPts val="800"/>
+              </a:spcAft>
+              <a:buNone/>
+            </a:pPr>
+            <a:r>
+              <a:rPr lang="en-US" sz="4000" dirty="0">
+                <a:solidFill>
+                  <a:srgbClr val="111111"/>
+                </a:solidFill>
+                <a:latin typeface="Times New Roman" pitchFamily="34" charset="0"/>
+                <a:ea typeface="Times New Roman" pitchFamily="34" charset="-122"/>
+                <a:cs typeface="Times New Roman" pitchFamily="34" charset="-120"/>
+              </a:rPr>
+              <a:t>This lesson helps us to understand the materials and forces that shape the relief, and to choose building materials wisely.</a:t>
+            </a:r>
+            <a:endParaRPr lang="en-US" sz="4000" dirty="0"/>
           </a:p>
         </p:txBody>
       </p:sp>
@@ -9890,15 +10291,54 @@
                 <a:ea typeface="Calibri" pitchFamily="34" charset="-122"/>
                 <a:cs typeface="Calibri" pitchFamily="34" charset="-120"/>
               </a:rPr>
-              <a:t>1. LAYERS OF THE EARTH</a:t>
+              <a:t>1. LAYERS</a:t>
             </a:r>
             <a:endParaRPr lang="en-US" sz="1400" dirty="0"/>
+          </a:p>
+        </p:txBody>
+      </p:sp>
+      <p:sp>
+        <p:nvSpPr>
+          <p:cNvPr id="3" name="Text 1"/>
+          <p:cNvSpPr/>
+          <p:nvPr/>
+        </p:nvSpPr>
+        <p:spPr>
+          <a:xfrm>
+            <a:off x="457200" y="1005840"/>
+            <a:ext cx="11277295" cy="731520"/>
+          </a:xfrm>
+          <a:prstGeom prst="rect">
+            <a:avLst/>
+          </a:prstGeom>
+          <a:noFill/>
+          <a:ln/>
+        </p:spPr>
+        <p:txBody>
+          <a:bodyPr wrap="square" lIns="0" tIns="0" rIns="0" bIns="0" rtlCol="0" anchor="ctr"/>
+          <a:lstStyle/>
+          <a:p>
+            <a:pPr algn="ctr" indent="0" marL="0">
+              <a:buNone/>
+            </a:pPr>
+            <a:r>
+              <a:rPr lang="en-US" sz="3600" b="1" dirty="0">
+                <a:solidFill>
+                  <a:srgbClr val="990011"/>
+                </a:solidFill>
+                <a:latin typeface="Times New Roman" pitchFamily="34" charset="0"/>
+                <a:ea typeface="Times New Roman" pitchFamily="34" charset="-122"/>
+                <a:cs typeface="Times New Roman" pitchFamily="34" charset="-120"/>
+              </a:rPr>
+              <a:t>Activity 1</a:t>
+            </a:r>
+            <a:endParaRPr lang="en-US" sz="3600" dirty="0"/>
           </a:p>
         </p:txBody>
       </p:sp>
       <p:pic>
         <p:nvPicPr>
-          <p:cNvPr id="3" name="Image 0" descr="/home/claude/f4/img/minesec_sheet.png">    </p:cNvPr>
+          <p:cNvPr id="4" name="Image 0" descr="/home/claude/f4/img/v2/earth_layers_big.png">    </p:cNvPr>
           <p:cNvPicPr>
             <a:picLocks noChangeAspect="1"/>
           </p:cNvPicPr>
@@ -9912,8 +10352,8 @@
         </p:blipFill>
         <p:spPr>
           <a:xfrm>
-            <a:off x="0" y="658368"/>
-            <a:ext cx="5120640" cy="5833872"/>
+            <a:off x="629930" y="1783080"/>
+            <a:ext cx="10931835" cy="4270248"/>
           </a:xfrm>
           <a:prstGeom prst="rect">
             <a:avLst/>
@@ -9922,14 +10362,14 @@
       </p:pic>
       <p:sp>
         <p:nvSpPr>
-          <p:cNvPr id="4" name="Text 1"/>
+          <p:cNvPr id="5" name="Text 2"/>
           <p:cNvSpPr/>
           <p:nvPr/>
         </p:nvSpPr>
         <p:spPr>
           <a:xfrm>
-            <a:off x="5349240" y="1005840"/>
-            <a:ext cx="6522415" cy="731520"/>
+            <a:off x="457200" y="6089904"/>
+            <a:ext cx="11277295" cy="347472"/>
           </a:xfrm>
           <a:prstGeom prst="rect">
             <a:avLst/>
@@ -9938,68 +10378,24 @@
           <a:ln/>
         </p:spPr>
         <p:txBody>
-          <a:bodyPr wrap="square" lIns="0" tIns="0" rIns="0" bIns="0" rtlCol="0" anchor="ctr">
-            <a:normAutofit/>
-          </a:bodyPr>
+          <a:bodyPr wrap="square" lIns="0" tIns="0" rIns="0" bIns="0" rtlCol="0" anchor="ctr"/>
           <a:lstStyle/>
           <a:p>
             <a:pPr algn="ctr" indent="0" marL="0">
               <a:buNone/>
             </a:pPr>
             <a:r>
-              <a:rPr lang="en-US" sz="3600" b="1" dirty="0">
-                <a:solidFill>
-                  <a:srgbClr val="990011"/>
+              <a:rPr lang="en-US" sz="1800" i="1" dirty="0">
+                <a:solidFill>
+                  <a:srgbClr val="555555"/>
                 </a:solidFill>
                 <a:latin typeface="Times New Roman" pitchFamily="34" charset="0"/>
                 <a:ea typeface="Times New Roman" pitchFamily="34" charset="-122"/>
                 <a:cs typeface="Times New Roman" pitchFamily="34" charset="-120"/>
               </a:rPr>
-              <a:t>Activity 1: Question</a:t>
-            </a:r>
-            <a:endParaRPr lang="en-US" sz="3600" dirty="0"/>
-          </a:p>
-        </p:txBody>
-      </p:sp>
-      <p:sp>
-        <p:nvSpPr>
-          <p:cNvPr id="5" name="Text 2"/>
-          <p:cNvSpPr/>
-          <p:nvPr/>
-        </p:nvSpPr>
-        <p:spPr>
-          <a:xfrm>
-            <a:off x="5349240" y="1783080"/>
-            <a:ext cx="6522415" cy="4663440"/>
-          </a:xfrm>
-          <a:prstGeom prst="rect">
-            <a:avLst/>
-          </a:prstGeom>
-          <a:noFill/>
-          <a:ln/>
-        </p:spPr>
-        <p:txBody>
-          <a:bodyPr wrap="square" lIns="0" tIns="0" rIns="0" bIns="0" rtlCol="0" anchor="t"/>
-          <a:lstStyle/>
-          <a:p>
-            <a:pPr algn="l" indent="0" marL="0">
-              <a:spcAft>
-                <a:spcPts val="800"/>
-              </a:spcAft>
-              <a:buNone/>
-            </a:pPr>
-            <a:r>
-              <a:rPr lang="en-US" sz="4000" dirty="0">
-                <a:solidFill>
-                  <a:srgbClr val="111111"/>
-                </a:solidFill>
-                <a:latin typeface="Times New Roman" pitchFamily="34" charset="0"/>
-                <a:ea typeface="Times New Roman" pitchFamily="34" charset="-122"/>
-                <a:cs typeface="Times New Roman" pitchFamily="34" charset="-120"/>
-              </a:rPr>
-              <a:t>Name the layers from the surface to the centre.</a:t>
-            </a:r>
-            <a:endParaRPr lang="en-US" sz="4000" dirty="0"/>
+              <a:t>The layers of the Earth.</a:t>
+            </a:r>
+            <a:endParaRPr lang="en-US" sz="1800" dirty="0"/>
           </a:p>
         </p:txBody>
       </p:sp>
@@ -10109,7 +10505,7 @@
                 <a:ea typeface="Calibri" pitchFamily="34" charset="-122"/>
                 <a:cs typeface="Calibri" pitchFamily="34" charset="-120"/>
               </a:rPr>
-              <a:t>1. LAYERS OF THE EARTH</a:t>
+              <a:t>1. LAYERS</a:t>
             </a:r>
             <a:endParaRPr lang="en-US" sz="1400" dirty="0"/>
           </a:p>
@@ -10174,7 +10570,7 @@
                 <a:ea typeface="Times New Roman" pitchFamily="34" charset="-122"/>
                 <a:cs typeface="Times New Roman" pitchFamily="34" charset="-120"/>
               </a:rPr>
-              <a:t>Activity 1: Answer</a:t>
+              <a:t>Activity 1: Question</a:t>
             </a:r>
             <a:endParaRPr lang="en-US" sz="3600" dirty="0"/>
           </a:p>
@@ -10216,7 +10612,7 @@
                 <a:ea typeface="Times New Roman" pitchFamily="34" charset="-122"/>
                 <a:cs typeface="Times New Roman" pitchFamily="34" charset="-120"/>
               </a:rPr>
-              <a:t>Crust, mantle, outer core and inner core.</a:t>
+              <a:t>Which layer is the thickest?</a:t>
             </a:r>
             <a:endParaRPr lang="en-US" sz="4000" dirty="0"/>
           </a:p>
@@ -10328,54 +10724,15 @@
                 <a:ea typeface="Calibri" pitchFamily="34" charset="-122"/>
                 <a:cs typeface="Calibri" pitchFamily="34" charset="-120"/>
               </a:rPr>
-              <a:t>1. LAYERS OF THE EARTH</a:t>
+              <a:t>1. LAYERS</a:t>
             </a:r>
             <a:endParaRPr lang="en-US" sz="1400" dirty="0"/>
-          </a:p>
-        </p:txBody>
-      </p:sp>
-      <p:sp>
-        <p:nvSpPr>
-          <p:cNvPr id="3" name="Text 1"/>
-          <p:cNvSpPr/>
-          <p:nvPr/>
-        </p:nvSpPr>
-        <p:spPr>
-          <a:xfrm>
-            <a:off x="457200" y="1005840"/>
-            <a:ext cx="11277295" cy="731520"/>
-          </a:xfrm>
-          <a:prstGeom prst="rect">
-            <a:avLst/>
-          </a:prstGeom>
-          <a:noFill/>
-          <a:ln/>
-        </p:spPr>
-        <p:txBody>
-          <a:bodyPr wrap="square" lIns="0" tIns="0" rIns="0" bIns="0" rtlCol="0" anchor="ctr"/>
-          <a:lstStyle/>
-          <a:p>
-            <a:pPr algn="ctr" indent="0" marL="0">
-              <a:buNone/>
-            </a:pPr>
-            <a:r>
-              <a:rPr lang="en-US" sz="3600" b="1" dirty="0">
-                <a:solidFill>
-                  <a:srgbClr val="990011"/>
-                </a:solidFill>
-                <a:latin typeface="Times New Roman" pitchFamily="34" charset="0"/>
-                <a:ea typeface="Times New Roman" pitchFamily="34" charset="-122"/>
-                <a:cs typeface="Times New Roman" pitchFamily="34" charset="-120"/>
-              </a:rPr>
-              <a:t>Activity 2</a:t>
-            </a:r>
-            <a:endParaRPr lang="en-US" sz="3600" dirty="0"/>
           </a:p>
         </p:txBody>
       </p:sp>
       <p:pic>
         <p:nvPicPr>
-          <p:cNvPr id="4" name="Image 0" descr="/home/claude/f4/img/v2/earth_disc_big.png">    </p:cNvPr>
+          <p:cNvPr id="3" name="Image 0" descr="/home/claude/f4/img/minesec_sheet.png">    </p:cNvPr>
           <p:cNvPicPr>
             <a:picLocks noChangeAspect="1"/>
           </p:cNvPicPr>
@@ -10389,8 +10746,8 @@
         </p:blipFill>
         <p:spPr>
           <a:xfrm>
-            <a:off x="629930" y="1783080"/>
-            <a:ext cx="10931835" cy="4270248"/>
+            <a:off x="0" y="658368"/>
+            <a:ext cx="5120640" cy="5833872"/>
           </a:xfrm>
           <a:prstGeom prst="rect">
             <a:avLst/>
@@ -10399,14 +10756,14 @@
       </p:pic>
       <p:sp>
         <p:nvSpPr>
-          <p:cNvPr id="5" name="Text 2"/>
+          <p:cNvPr id="4" name="Text 1"/>
           <p:cNvSpPr/>
           <p:nvPr/>
         </p:nvSpPr>
         <p:spPr>
           <a:xfrm>
-            <a:off x="457200" y="6089904"/>
-            <a:ext cx="11277295" cy="347472"/>
+            <a:off x="5349240" y="1005840"/>
+            <a:ext cx="6522415" cy="731520"/>
           </a:xfrm>
           <a:prstGeom prst="rect">
             <a:avLst/>
@@ -10415,24 +10772,68 @@
           <a:ln/>
         </p:spPr>
         <p:txBody>
-          <a:bodyPr wrap="square" lIns="0" tIns="0" rIns="0" bIns="0" rtlCol="0" anchor="ctr"/>
+          <a:bodyPr wrap="square" lIns="0" tIns="0" rIns="0" bIns="0" rtlCol="0" anchor="ctr">
+            <a:normAutofit/>
+          </a:bodyPr>
           <a:lstStyle/>
           <a:p>
             <a:pPr algn="ctr" indent="0" marL="0">
               <a:buNone/>
             </a:pPr>
             <a:r>
-              <a:rPr lang="en-US" sz="1800" i="1" dirty="0">
-                <a:solidFill>
-                  <a:srgbClr val="555555"/>
+              <a:rPr lang="en-US" sz="3600" b="1" dirty="0">
+                <a:solidFill>
+                  <a:srgbClr val="990011"/>
                 </a:solidFill>
                 <a:latin typeface="Times New Roman" pitchFamily="34" charset="0"/>
                 <a:ea typeface="Times New Roman" pitchFamily="34" charset="-122"/>
                 <a:cs typeface="Times New Roman" pitchFamily="34" charset="-120"/>
               </a:rPr>
-              <a:t>Discontinuities: the boundaries between the layers.</a:t>
-            </a:r>
-            <a:endParaRPr lang="en-US" sz="1800" dirty="0"/>
+              <a:t>Activity 1: Answer</a:t>
+            </a:r>
+            <a:endParaRPr lang="en-US" sz="3600" dirty="0"/>
+          </a:p>
+        </p:txBody>
+      </p:sp>
+      <p:sp>
+        <p:nvSpPr>
+          <p:cNvPr id="5" name="Text 2"/>
+          <p:cNvSpPr/>
+          <p:nvPr/>
+        </p:nvSpPr>
+        <p:spPr>
+          <a:xfrm>
+            <a:off x="5349240" y="1783080"/>
+            <a:ext cx="6522415" cy="4663440"/>
+          </a:xfrm>
+          <a:prstGeom prst="rect">
+            <a:avLst/>
+          </a:prstGeom>
+          <a:noFill/>
+          <a:ln/>
+        </p:spPr>
+        <p:txBody>
+          <a:bodyPr wrap="square" lIns="0" tIns="0" rIns="0" bIns="0" rtlCol="0" anchor="t"/>
+          <a:lstStyle/>
+          <a:p>
+            <a:pPr algn="l" indent="0" marL="0">
+              <a:spcAft>
+                <a:spcPts val="800"/>
+              </a:spcAft>
+              <a:buNone/>
+            </a:pPr>
+            <a:r>
+              <a:rPr lang="en-US" sz="4000" dirty="0">
+                <a:solidFill>
+                  <a:srgbClr val="111111"/>
+                </a:solidFill>
+                <a:latin typeface="Times New Roman" pitchFamily="34" charset="0"/>
+                <a:ea typeface="Times New Roman" pitchFamily="34" charset="-122"/>
+                <a:cs typeface="Times New Roman" pitchFamily="34" charset="-120"/>
+              </a:rPr>
+              <a:t>The mantle (about 84 % of the volume of the Earth).</a:t>
+            </a:r>
+            <a:endParaRPr lang="en-US" sz="4000" dirty="0"/>
           </a:p>
         </p:txBody>
       </p:sp>
@@ -10542,15 +10943,54 @@
                 <a:ea typeface="Calibri" pitchFamily="34" charset="-122"/>
                 <a:cs typeface="Calibri" pitchFamily="34" charset="-120"/>
               </a:rPr>
-              <a:t>1. LAYERS OF THE EARTH</a:t>
+              <a:t>1. LAYERS</a:t>
             </a:r>
             <a:endParaRPr lang="en-US" sz="1400" dirty="0"/>
+          </a:p>
+        </p:txBody>
+      </p:sp>
+      <p:sp>
+        <p:nvSpPr>
+          <p:cNvPr id="3" name="Text 1"/>
+          <p:cNvSpPr/>
+          <p:nvPr/>
+        </p:nvSpPr>
+        <p:spPr>
+          <a:xfrm>
+            <a:off x="457200" y="1005840"/>
+            <a:ext cx="11277295" cy="731520"/>
+          </a:xfrm>
+          <a:prstGeom prst="rect">
+            <a:avLst/>
+          </a:prstGeom>
+          <a:noFill/>
+          <a:ln/>
+        </p:spPr>
+        <p:txBody>
+          <a:bodyPr wrap="square" lIns="0" tIns="0" rIns="0" bIns="0" rtlCol="0" anchor="ctr"/>
+          <a:lstStyle/>
+          <a:p>
+            <a:pPr algn="ctr" indent="0" marL="0">
+              <a:buNone/>
+            </a:pPr>
+            <a:r>
+              <a:rPr lang="en-US" sz="3600" b="1" dirty="0">
+                <a:solidFill>
+                  <a:srgbClr val="990011"/>
+                </a:solidFill>
+                <a:latin typeface="Times New Roman" pitchFamily="34" charset="0"/>
+                <a:ea typeface="Times New Roman" pitchFamily="34" charset="-122"/>
+                <a:cs typeface="Times New Roman" pitchFamily="34" charset="-120"/>
+              </a:rPr>
+              <a:t>Activity 2</a:t>
+            </a:r>
+            <a:endParaRPr lang="en-US" sz="3600" dirty="0"/>
           </a:p>
         </p:txBody>
       </p:sp>
       <p:pic>
         <p:nvPicPr>
-          <p:cNvPr id="3" name="Image 0" descr="/home/claude/f4/img/minesec_sheet.png">    </p:cNvPr>
+          <p:cNvPr id="4" name="Image 0" descr="/home/claude/f4/img/v2/earth_disc_big.png">    </p:cNvPr>
           <p:cNvPicPr>
             <a:picLocks noChangeAspect="1"/>
           </p:cNvPicPr>
@@ -10564,8 +11004,8 @@
         </p:blipFill>
         <p:spPr>
           <a:xfrm>
-            <a:off x="0" y="658368"/>
-            <a:ext cx="5120640" cy="5833872"/>
+            <a:off x="629930" y="1783080"/>
+            <a:ext cx="10931835" cy="4270248"/>
           </a:xfrm>
           <a:prstGeom prst="rect">
             <a:avLst/>
@@ -10574,14 +11014,14 @@
       </p:pic>
       <p:sp>
         <p:nvSpPr>
-          <p:cNvPr id="4" name="Text 1"/>
+          <p:cNvPr id="5" name="Text 2"/>
           <p:cNvSpPr/>
           <p:nvPr/>
         </p:nvSpPr>
         <p:spPr>
           <a:xfrm>
-            <a:off x="5349240" y="1005840"/>
-            <a:ext cx="6522415" cy="731520"/>
+            <a:off x="457200" y="6089904"/>
+            <a:ext cx="11277295" cy="347472"/>
           </a:xfrm>
           <a:prstGeom prst="rect">
             <a:avLst/>
@@ -10590,68 +11030,24 @@
           <a:ln/>
         </p:spPr>
         <p:txBody>
-          <a:bodyPr wrap="square" lIns="0" tIns="0" rIns="0" bIns="0" rtlCol="0" anchor="ctr">
-            <a:normAutofit/>
-          </a:bodyPr>
+          <a:bodyPr wrap="square" lIns="0" tIns="0" rIns="0" bIns="0" rtlCol="0" anchor="ctr"/>
           <a:lstStyle/>
           <a:p>
             <a:pPr algn="ctr" indent="0" marL="0">
               <a:buNone/>
             </a:pPr>
             <a:r>
-              <a:rPr lang="en-US" sz="3600" b="1" dirty="0">
-                <a:solidFill>
-                  <a:srgbClr val="990011"/>
+              <a:rPr lang="en-US" sz="1800" i="1" dirty="0">
+                <a:solidFill>
+                  <a:srgbClr val="555555"/>
                 </a:solidFill>
                 <a:latin typeface="Times New Roman" pitchFamily="34" charset="0"/>
                 <a:ea typeface="Times New Roman" pitchFamily="34" charset="-122"/>
                 <a:cs typeface="Times New Roman" pitchFamily="34" charset="-120"/>
               </a:rPr>
-              <a:t>Activity 2: Question</a:t>
-            </a:r>
-            <a:endParaRPr lang="en-US" sz="3600" dirty="0"/>
-          </a:p>
-        </p:txBody>
-      </p:sp>
-      <p:sp>
-        <p:nvSpPr>
-          <p:cNvPr id="5" name="Text 2"/>
-          <p:cNvSpPr/>
-          <p:nvPr/>
-        </p:nvSpPr>
-        <p:spPr>
-          <a:xfrm>
-            <a:off x="5349240" y="1783080"/>
-            <a:ext cx="6522415" cy="4663440"/>
-          </a:xfrm>
-          <a:prstGeom prst="rect">
-            <a:avLst/>
-          </a:prstGeom>
-          <a:noFill/>
-          <a:ln/>
-        </p:spPr>
-        <p:txBody>
-          <a:bodyPr wrap="square" lIns="0" tIns="0" rIns="0" bIns="0" rtlCol="0" anchor="t"/>
-          <a:lstStyle/>
-          <a:p>
-            <a:pPr algn="l" indent="0" marL="0">
-              <a:spcAft>
-                <a:spcPts val="800"/>
-              </a:spcAft>
-              <a:buNone/>
-            </a:pPr>
-            <a:r>
-              <a:rPr lang="en-US" sz="4000" dirty="0">
-                <a:solidFill>
-                  <a:srgbClr val="111111"/>
-                </a:solidFill>
-                <a:latin typeface="Times New Roman" pitchFamily="34" charset="0"/>
-                <a:ea typeface="Times New Roman" pitchFamily="34" charset="-122"/>
-                <a:cs typeface="Times New Roman" pitchFamily="34" charset="-120"/>
-              </a:rPr>
-              <a:t>What is the name of the boundary between the crust and the mantle?</a:t>
-            </a:r>
-            <a:endParaRPr lang="en-US" sz="4000" dirty="0"/>
+              <a:t>Boundaries inside the Earth.</a:t>
+            </a:r>
+            <a:endParaRPr lang="en-US" sz="1800" dirty="0"/>
           </a:p>
         </p:txBody>
       </p:sp>
@@ -10761,7 +11157,7 @@
                 <a:ea typeface="Calibri" pitchFamily="34" charset="-122"/>
                 <a:cs typeface="Calibri" pitchFamily="34" charset="-120"/>
               </a:rPr>
-              <a:t>1. LAYERS OF THE EARTH</a:t>
+              <a:t>1. LAYERS</a:t>
             </a:r>
             <a:endParaRPr lang="en-US" sz="1400" dirty="0"/>
           </a:p>
@@ -10826,7 +11222,7 @@
                 <a:ea typeface="Times New Roman" pitchFamily="34" charset="-122"/>
                 <a:cs typeface="Times New Roman" pitchFamily="34" charset="-120"/>
               </a:rPr>
-              <a:t>Activity 2: Answer</a:t>
+              <a:t>Activity 2: Question</a:t>
             </a:r>
             <a:endParaRPr lang="en-US" sz="3600" dirty="0"/>
           </a:p>
@@ -10868,7 +11264,7 @@
                 <a:ea typeface="Times New Roman" pitchFamily="34" charset="-122"/>
                 <a:cs typeface="Times New Roman" pitchFamily="34" charset="-120"/>
               </a:rPr>
-              <a:t>The Mohorovičić discontinuity (Moho).</a:t>
+              <a:t>What separates the crust from the mantle?</a:t>
             </a:r>
             <a:endParaRPr lang="en-US" sz="4000" dirty="0"/>
           </a:p>
@@ -10980,54 +11376,15 @@
                 <a:ea typeface="Calibri" pitchFamily="34" charset="-122"/>
                 <a:cs typeface="Calibri" pitchFamily="34" charset="-120"/>
               </a:rPr>
-              <a:t>2. THE ROCK CYCLE</a:t>
+              <a:t>1. LAYERS</a:t>
             </a:r>
             <a:endParaRPr lang="en-US" sz="1400" dirty="0"/>
-          </a:p>
-        </p:txBody>
-      </p:sp>
-      <p:sp>
-        <p:nvSpPr>
-          <p:cNvPr id="3" name="Text 1"/>
-          <p:cNvSpPr/>
-          <p:nvPr/>
-        </p:nvSpPr>
-        <p:spPr>
-          <a:xfrm>
-            <a:off x="457200" y="1005840"/>
-            <a:ext cx="11277295" cy="731520"/>
-          </a:xfrm>
-          <a:prstGeom prst="rect">
-            <a:avLst/>
-          </a:prstGeom>
-          <a:noFill/>
-          <a:ln/>
-        </p:spPr>
-        <p:txBody>
-          <a:bodyPr wrap="square" lIns="0" tIns="0" rIns="0" bIns="0" rtlCol="0" anchor="ctr"/>
-          <a:lstStyle/>
-          <a:p>
-            <a:pPr algn="ctr" indent="0" marL="0">
-              <a:buNone/>
-            </a:pPr>
-            <a:r>
-              <a:rPr lang="en-US" sz="3600" b="1" dirty="0">
-                <a:solidFill>
-                  <a:srgbClr val="990011"/>
-                </a:solidFill>
-                <a:latin typeface="Times New Roman" pitchFamily="34" charset="0"/>
-                <a:ea typeface="Times New Roman" pitchFamily="34" charset="-122"/>
-                <a:cs typeface="Times New Roman" pitchFamily="34" charset="-120"/>
-              </a:rPr>
-              <a:t>Activity 3</a:t>
-            </a:r>
-            <a:endParaRPr lang="en-US" sz="3600" dirty="0"/>
           </a:p>
         </p:txBody>
       </p:sp>
       <p:pic>
         <p:nvPicPr>
-          <p:cNvPr id="4" name="Image 0" descr="/home/claude/f4/img/v2/rock_cycle_big.png">    </p:cNvPr>
+          <p:cNvPr id="3" name="Image 0" descr="/home/claude/f4/img/minesec_sheet.png">    </p:cNvPr>
           <p:cNvPicPr>
             <a:picLocks noChangeAspect="1"/>
           </p:cNvPicPr>
@@ -11041,8 +11398,8 @@
         </p:blipFill>
         <p:spPr>
           <a:xfrm>
-            <a:off x="629930" y="1783080"/>
-            <a:ext cx="10931835" cy="4270248"/>
+            <a:off x="0" y="658368"/>
+            <a:ext cx="5120640" cy="5833872"/>
           </a:xfrm>
           <a:prstGeom prst="rect">
             <a:avLst/>
@@ -11051,14 +11408,14 @@
       </p:pic>
       <p:sp>
         <p:nvSpPr>
-          <p:cNvPr id="5" name="Text 2"/>
+          <p:cNvPr id="4" name="Text 1"/>
           <p:cNvSpPr/>
           <p:nvPr/>
         </p:nvSpPr>
         <p:spPr>
           <a:xfrm>
-            <a:off x="457200" y="6089904"/>
-            <a:ext cx="11277295" cy="347472"/>
+            <a:off x="5349240" y="1005840"/>
+            <a:ext cx="6522415" cy="731520"/>
           </a:xfrm>
           <a:prstGeom prst="rect">
             <a:avLst/>
@@ -11067,24 +11424,68 @@
           <a:ln/>
         </p:spPr>
         <p:txBody>
-          <a:bodyPr wrap="square" lIns="0" tIns="0" rIns="0" bIns="0" rtlCol="0" anchor="ctr"/>
+          <a:bodyPr wrap="square" lIns="0" tIns="0" rIns="0" bIns="0" rtlCol="0" anchor="ctr">
+            <a:normAutofit/>
+          </a:bodyPr>
           <a:lstStyle/>
           <a:p>
             <a:pPr algn="ctr" indent="0" marL="0">
               <a:buNone/>
             </a:pPr>
             <a:r>
-              <a:rPr lang="en-US" sz="1800" i="1" dirty="0">
-                <a:solidFill>
-                  <a:srgbClr val="555555"/>
+              <a:rPr lang="en-US" sz="3600" b="1" dirty="0">
+                <a:solidFill>
+                  <a:srgbClr val="990011"/>
                 </a:solidFill>
                 <a:latin typeface="Times New Roman" pitchFamily="34" charset="0"/>
                 <a:ea typeface="Times New Roman" pitchFamily="34" charset="-122"/>
                 <a:cs typeface="Times New Roman" pitchFamily="34" charset="-120"/>
               </a:rPr>
-              <a:t>The rock cycle.</a:t>
-            </a:r>
-            <a:endParaRPr lang="en-US" sz="1800" dirty="0"/>
+              <a:t>Activity 2: Answer</a:t>
+            </a:r>
+            <a:endParaRPr lang="en-US" sz="3600" dirty="0"/>
+          </a:p>
+        </p:txBody>
+      </p:sp>
+      <p:sp>
+        <p:nvSpPr>
+          <p:cNvPr id="5" name="Text 2"/>
+          <p:cNvSpPr/>
+          <p:nvPr/>
+        </p:nvSpPr>
+        <p:spPr>
+          <a:xfrm>
+            <a:off x="5349240" y="1783080"/>
+            <a:ext cx="6522415" cy="4663440"/>
+          </a:xfrm>
+          <a:prstGeom prst="rect">
+            <a:avLst/>
+          </a:prstGeom>
+          <a:noFill/>
+          <a:ln/>
+        </p:spPr>
+        <p:txBody>
+          <a:bodyPr wrap="square" lIns="0" tIns="0" rIns="0" bIns="0" rtlCol="0" anchor="t"/>
+          <a:lstStyle/>
+          <a:p>
+            <a:pPr algn="l" indent="0" marL="0">
+              <a:spcAft>
+                <a:spcPts val="800"/>
+              </a:spcAft>
+              <a:buNone/>
+            </a:pPr>
+            <a:r>
+              <a:rPr lang="en-US" sz="4000" dirty="0">
+                <a:solidFill>
+                  <a:srgbClr val="111111"/>
+                </a:solidFill>
+                <a:latin typeface="Times New Roman" pitchFamily="34" charset="0"/>
+                <a:ea typeface="Times New Roman" pitchFamily="34" charset="-122"/>
+                <a:cs typeface="Times New Roman" pitchFamily="34" charset="-120"/>
+              </a:rPr>
+              <a:t>The Moho discontinuity.</a:t>
+            </a:r>
+            <a:endParaRPr lang="en-US" sz="4000" dirty="0"/>
           </a:p>
         </p:txBody>
       </p:sp>
@@ -11194,15 +11595,54 @@
                 <a:ea typeface="Calibri" pitchFamily="34" charset="-122"/>
                 <a:cs typeface="Calibri" pitchFamily="34" charset="-120"/>
               </a:rPr>
-              <a:t>2. THE ROCK CYCLE</a:t>
+              <a:t>2. ROCK CYCLE</a:t>
             </a:r>
             <a:endParaRPr lang="en-US" sz="1400" dirty="0"/>
+          </a:p>
+        </p:txBody>
+      </p:sp>
+      <p:sp>
+        <p:nvSpPr>
+          <p:cNvPr id="3" name="Text 1"/>
+          <p:cNvSpPr/>
+          <p:nvPr/>
+        </p:nvSpPr>
+        <p:spPr>
+          <a:xfrm>
+            <a:off x="457200" y="1005840"/>
+            <a:ext cx="11277295" cy="731520"/>
+          </a:xfrm>
+          <a:prstGeom prst="rect">
+            <a:avLst/>
+          </a:prstGeom>
+          <a:noFill/>
+          <a:ln/>
+        </p:spPr>
+        <p:txBody>
+          <a:bodyPr wrap="square" lIns="0" tIns="0" rIns="0" bIns="0" rtlCol="0" anchor="ctr"/>
+          <a:lstStyle/>
+          <a:p>
+            <a:pPr algn="ctr" indent="0" marL="0">
+              <a:buNone/>
+            </a:pPr>
+            <a:r>
+              <a:rPr lang="en-US" sz="3600" b="1" dirty="0">
+                <a:solidFill>
+                  <a:srgbClr val="990011"/>
+                </a:solidFill>
+                <a:latin typeface="Times New Roman" pitchFamily="34" charset="0"/>
+                <a:ea typeface="Times New Roman" pitchFamily="34" charset="-122"/>
+                <a:cs typeface="Times New Roman" pitchFamily="34" charset="-120"/>
+              </a:rPr>
+              <a:t>Activity 3</a:t>
+            </a:r>
+            <a:endParaRPr lang="en-US" sz="3600" dirty="0"/>
           </a:p>
         </p:txBody>
       </p:sp>
       <p:pic>
         <p:nvPicPr>
-          <p:cNvPr id="3" name="Image 0" descr="/home/claude/f4/img/minesec_sheet.png">    </p:cNvPr>
+          <p:cNvPr id="4" name="Image 0" descr="/home/claude/f4/img/v2/rock_cycle_big.png">    </p:cNvPr>
           <p:cNvPicPr>
             <a:picLocks noChangeAspect="1"/>
           </p:cNvPicPr>
@@ -11216,8 +11656,8 @@
         </p:blipFill>
         <p:spPr>
           <a:xfrm>
-            <a:off x="0" y="658368"/>
-            <a:ext cx="5120640" cy="5833872"/>
+            <a:off x="629930" y="1783080"/>
+            <a:ext cx="10931835" cy="4270248"/>
           </a:xfrm>
           <a:prstGeom prst="rect">
             <a:avLst/>
@@ -11226,14 +11666,14 @@
       </p:pic>
       <p:sp>
         <p:nvSpPr>
-          <p:cNvPr id="4" name="Text 1"/>
+          <p:cNvPr id="5" name="Text 2"/>
           <p:cNvSpPr/>
           <p:nvPr/>
         </p:nvSpPr>
         <p:spPr>
           <a:xfrm>
-            <a:off x="5349240" y="1005840"/>
-            <a:ext cx="6522415" cy="731520"/>
+            <a:off x="457200" y="6089904"/>
+            <a:ext cx="11277295" cy="347472"/>
           </a:xfrm>
           <a:prstGeom prst="rect">
             <a:avLst/>
@@ -11242,68 +11682,24 @@
           <a:ln/>
         </p:spPr>
         <p:txBody>
-          <a:bodyPr wrap="square" lIns="0" tIns="0" rIns="0" bIns="0" rtlCol="0" anchor="ctr">
-            <a:normAutofit/>
-          </a:bodyPr>
+          <a:bodyPr wrap="square" lIns="0" tIns="0" rIns="0" bIns="0" rtlCol="0" anchor="ctr"/>
           <a:lstStyle/>
           <a:p>
             <a:pPr algn="ctr" indent="0" marL="0">
               <a:buNone/>
             </a:pPr>
             <a:r>
-              <a:rPr lang="en-US" sz="3600" b="1" dirty="0">
-                <a:solidFill>
-                  <a:srgbClr val="990011"/>
+              <a:rPr lang="en-US" sz="1800" i="1" dirty="0">
+                <a:solidFill>
+                  <a:srgbClr val="555555"/>
                 </a:solidFill>
                 <a:latin typeface="Times New Roman" pitchFamily="34" charset="0"/>
                 <a:ea typeface="Times New Roman" pitchFamily="34" charset="-122"/>
                 <a:cs typeface="Times New Roman" pitchFamily="34" charset="-120"/>
               </a:rPr>
-              <a:t>Activity 3: Question</a:t>
-            </a:r>
-            <a:endParaRPr lang="en-US" sz="3600" dirty="0"/>
-          </a:p>
-        </p:txBody>
-      </p:sp>
-      <p:sp>
-        <p:nvSpPr>
-          <p:cNvPr id="5" name="Text 2"/>
-          <p:cNvSpPr/>
-          <p:nvPr/>
-        </p:nvSpPr>
-        <p:spPr>
-          <a:xfrm>
-            <a:off x="5349240" y="1783080"/>
-            <a:ext cx="6522415" cy="4663440"/>
-          </a:xfrm>
-          <a:prstGeom prst="rect">
-            <a:avLst/>
-          </a:prstGeom>
-          <a:noFill/>
-          <a:ln/>
-        </p:spPr>
-        <p:txBody>
-          <a:bodyPr wrap="square" lIns="0" tIns="0" rIns="0" bIns="0" rtlCol="0" anchor="t"/>
-          <a:lstStyle/>
-          <a:p>
-            <a:pPr algn="l" indent="0" marL="0">
-              <a:spcAft>
-                <a:spcPts val="800"/>
-              </a:spcAft>
-              <a:buNone/>
-            </a:pPr>
-            <a:r>
-              <a:rPr lang="en-US" sz="4000" dirty="0">
-                <a:solidFill>
-                  <a:srgbClr val="111111"/>
-                </a:solidFill>
-                <a:latin typeface="Times New Roman" pitchFamily="34" charset="0"/>
-                <a:ea typeface="Times New Roman" pitchFamily="34" charset="-122"/>
-                <a:cs typeface="Times New Roman" pitchFamily="34" charset="-120"/>
-              </a:rPr>
-              <a:t>How can an igneous rock become a sedimentary rock?</a:t>
-            </a:r>
-            <a:endParaRPr lang="en-US" sz="4000" dirty="0"/>
+              <a:t>The rock cycle.</a:t>
+            </a:r>
+            <a:endParaRPr lang="en-US" sz="1800" dirty="0"/>
           </a:p>
         </p:txBody>
       </p:sp>
@@ -11413,7 +11809,7 @@
                 <a:ea typeface="Calibri" pitchFamily="34" charset="-122"/>
                 <a:cs typeface="Calibri" pitchFamily="34" charset="-120"/>
               </a:rPr>
-              <a:t>2. THE ROCK CYCLE</a:t>
+              <a:t>2. ROCK CYCLE</a:t>
             </a:r>
             <a:endParaRPr lang="en-US" sz="1400" dirty="0"/>
           </a:p>
@@ -11478,7 +11874,7 @@
                 <a:ea typeface="Times New Roman" pitchFamily="34" charset="-122"/>
                 <a:cs typeface="Times New Roman" pitchFamily="34" charset="-120"/>
               </a:rPr>
-              <a:t>Activity 3: Answer</a:t>
+              <a:t>Activity 3: Question</a:t>
             </a:r>
             <a:endParaRPr lang="en-US" sz="3600" dirty="0"/>
           </a:p>
@@ -11520,7 +11916,7 @@
                 <a:ea typeface="Times New Roman" pitchFamily="34" charset="-122"/>
                 <a:cs typeface="Times New Roman" pitchFamily="34" charset="-120"/>
               </a:rPr>
-              <a:t>It is weathered and eroded; the pieces form layers that harden.</a:t>
+              <a:t>How does igneous rock form?</a:t>
             </a:r>
             <a:endParaRPr lang="en-US" sz="4000" dirty="0"/>
           </a:p>
@@ -11632,54 +12028,15 @@
                 <a:ea typeface="Calibri" pitchFamily="34" charset="-122"/>
                 <a:cs typeface="Calibri" pitchFamily="34" charset="-120"/>
               </a:rPr>
-              <a:t>3. INTERNAL FORCES</a:t>
+              <a:t>2. ROCK CYCLE</a:t>
             </a:r>
             <a:endParaRPr lang="en-US" sz="1400" dirty="0"/>
-          </a:p>
-        </p:txBody>
-      </p:sp>
-      <p:sp>
-        <p:nvSpPr>
-          <p:cNvPr id="3" name="Text 1"/>
-          <p:cNvSpPr/>
-          <p:nvPr/>
-        </p:nvSpPr>
-        <p:spPr>
-          <a:xfrm>
-            <a:off x="457200" y="1005840"/>
-            <a:ext cx="11277295" cy="731520"/>
-          </a:xfrm>
-          <a:prstGeom prst="rect">
-            <a:avLst/>
-          </a:prstGeom>
-          <a:noFill/>
-          <a:ln/>
-        </p:spPr>
-        <p:txBody>
-          <a:bodyPr wrap="square" lIns="0" tIns="0" rIns="0" bIns="0" rtlCol="0" anchor="ctr"/>
-          <a:lstStyle/>
-          <a:p>
-            <a:pPr algn="ctr" indent="0" marL="0">
-              <a:buNone/>
-            </a:pPr>
-            <a:r>
-              <a:rPr lang="en-US" sz="3600" b="1" dirty="0">
-                <a:solidFill>
-                  <a:srgbClr val="990011"/>
-                </a:solidFill>
-                <a:latin typeface="Times New Roman" pitchFamily="34" charset="0"/>
-                <a:ea typeface="Times New Roman" pitchFamily="34" charset="-122"/>
-                <a:cs typeface="Times New Roman" pitchFamily="34" charset="-120"/>
-              </a:rPr>
-              <a:t>Activity 4</a:t>
-            </a:r>
-            <a:endParaRPr lang="en-US" sz="3600" dirty="0"/>
           </a:p>
         </p:txBody>
       </p:sp>
       <p:pic>
         <p:nvPicPr>
-          <p:cNvPr id="4" name="Image 0" descr="/home/claude/f4/img/v2/f4_eruption.jpg">    </p:cNvPr>
+          <p:cNvPr id="3" name="Image 0" descr="/home/claude/f4/img/minesec_sheet.png">    </p:cNvPr>
           <p:cNvPicPr>
             <a:picLocks noChangeAspect="1"/>
           </p:cNvPicPr>
@@ -11693,8 +12050,8 @@
         </p:blipFill>
         <p:spPr>
           <a:xfrm>
-            <a:off x="2246610" y="1783080"/>
-            <a:ext cx="7698475" cy="4270248"/>
+            <a:off x="0" y="658368"/>
+            <a:ext cx="5120640" cy="5833872"/>
           </a:xfrm>
           <a:prstGeom prst="rect">
             <a:avLst/>
@@ -11703,14 +12060,14 @@
       </p:pic>
       <p:sp>
         <p:nvSpPr>
-          <p:cNvPr id="5" name="Text 2"/>
+          <p:cNvPr id="4" name="Text 1"/>
           <p:cNvSpPr/>
           <p:nvPr/>
         </p:nvSpPr>
         <p:spPr>
           <a:xfrm>
-            <a:off x="457200" y="6089904"/>
-            <a:ext cx="11277295" cy="347472"/>
+            <a:off x="5349240" y="1005840"/>
+            <a:ext cx="6522415" cy="731520"/>
           </a:xfrm>
           <a:prstGeom prst="rect">
             <a:avLst/>
@@ -11719,24 +12076,68 @@
           <a:ln/>
         </p:spPr>
         <p:txBody>
-          <a:bodyPr wrap="square" lIns="0" tIns="0" rIns="0" bIns="0" rtlCol="0" anchor="ctr"/>
+          <a:bodyPr wrap="square" lIns="0" tIns="0" rIns="0" bIns="0" rtlCol="0" anchor="ctr">
+            <a:normAutofit/>
+          </a:bodyPr>
           <a:lstStyle/>
           <a:p>
             <a:pPr algn="ctr" indent="0" marL="0">
               <a:buNone/>
             </a:pPr>
             <a:r>
-              <a:rPr lang="en-US" sz="1800" i="1" dirty="0">
-                <a:solidFill>
-                  <a:srgbClr val="555555"/>
+              <a:rPr lang="en-US" sz="3600" b="1" dirty="0">
+                <a:solidFill>
+                  <a:srgbClr val="990011"/>
                 </a:solidFill>
                 <a:latin typeface="Times New Roman" pitchFamily="34" charset="0"/>
                 <a:ea typeface="Times New Roman" pitchFamily="34" charset="-122"/>
                 <a:cs typeface="Times New Roman" pitchFamily="34" charset="-120"/>
               </a:rPr>
-              <a:t>A volcanic eruption.</a:t>
-            </a:r>
-            <a:endParaRPr lang="en-US" sz="1800" dirty="0"/>
+              <a:t>Activity 3: Answer</a:t>
+            </a:r>
+            <a:endParaRPr lang="en-US" sz="3600" dirty="0"/>
+          </a:p>
+        </p:txBody>
+      </p:sp>
+      <p:sp>
+        <p:nvSpPr>
+          <p:cNvPr id="5" name="Text 2"/>
+          <p:cNvSpPr/>
+          <p:nvPr/>
+        </p:nvSpPr>
+        <p:spPr>
+          <a:xfrm>
+            <a:off x="5349240" y="1783080"/>
+            <a:ext cx="6522415" cy="4663440"/>
+          </a:xfrm>
+          <a:prstGeom prst="rect">
+            <a:avLst/>
+          </a:prstGeom>
+          <a:noFill/>
+          <a:ln/>
+        </p:spPr>
+        <p:txBody>
+          <a:bodyPr wrap="square" lIns="0" tIns="0" rIns="0" bIns="0" rtlCol="0" anchor="t"/>
+          <a:lstStyle/>
+          <a:p>
+            <a:pPr algn="l" indent="0" marL="0">
+              <a:spcAft>
+                <a:spcPts val="800"/>
+              </a:spcAft>
+              <a:buNone/>
+            </a:pPr>
+            <a:r>
+              <a:rPr lang="en-US" sz="4000" dirty="0">
+                <a:solidFill>
+                  <a:srgbClr val="111111"/>
+                </a:solidFill>
+                <a:latin typeface="Times New Roman" pitchFamily="34" charset="0"/>
+                <a:ea typeface="Times New Roman" pitchFamily="34" charset="-122"/>
+                <a:cs typeface="Times New Roman" pitchFamily="34" charset="-120"/>
+              </a:rPr>
+              <a:t>When magma or lava cools and solidifies.</a:t>
+            </a:r>
+            <a:endParaRPr lang="en-US" sz="4000" dirty="0"/>
           </a:p>
         </p:txBody>
       </p:sp>
@@ -11846,15 +12247,54 @@
                 <a:ea typeface="Calibri" pitchFamily="34" charset="-122"/>
                 <a:cs typeface="Calibri" pitchFamily="34" charset="-120"/>
               </a:rPr>
-              <a:t>3. INTERNAL FORCES</a:t>
+              <a:t>3. FORCES</a:t>
             </a:r>
             <a:endParaRPr lang="en-US" sz="1400" dirty="0"/>
+          </a:p>
+        </p:txBody>
+      </p:sp>
+      <p:sp>
+        <p:nvSpPr>
+          <p:cNvPr id="3" name="Text 1"/>
+          <p:cNvSpPr/>
+          <p:nvPr/>
+        </p:nvSpPr>
+        <p:spPr>
+          <a:xfrm>
+            <a:off x="457200" y="1005840"/>
+            <a:ext cx="11277295" cy="731520"/>
+          </a:xfrm>
+          <a:prstGeom prst="rect">
+            <a:avLst/>
+          </a:prstGeom>
+          <a:noFill/>
+          <a:ln/>
+        </p:spPr>
+        <p:txBody>
+          <a:bodyPr wrap="square" lIns="0" tIns="0" rIns="0" bIns="0" rtlCol="0" anchor="ctr"/>
+          <a:lstStyle/>
+          <a:p>
+            <a:pPr algn="ctr" indent="0" marL="0">
+              <a:buNone/>
+            </a:pPr>
+            <a:r>
+              <a:rPr lang="en-US" sz="3600" b="1" dirty="0">
+                <a:solidFill>
+                  <a:srgbClr val="990011"/>
+                </a:solidFill>
+                <a:latin typeface="Times New Roman" pitchFamily="34" charset="0"/>
+                <a:ea typeface="Times New Roman" pitchFamily="34" charset="-122"/>
+                <a:cs typeface="Times New Roman" pitchFamily="34" charset="-120"/>
+              </a:rPr>
+              <a:t>Activity 4</a:t>
+            </a:r>
+            <a:endParaRPr lang="en-US" sz="3600" dirty="0"/>
           </a:p>
         </p:txBody>
       </p:sp>
       <p:pic>
         <p:nvPicPr>
-          <p:cNvPr id="3" name="Image 0" descr="/home/claude/f4/img/minesec_sheet.png">    </p:cNvPr>
+          <p:cNvPr id="4" name="Image 0" descr="/home/claude/f4/img/v2/f4_gully.jpg">    </p:cNvPr>
           <p:cNvPicPr>
             <a:picLocks noChangeAspect="1"/>
           </p:cNvPicPr>
@@ -11868,8 +12308,8 @@
         </p:blipFill>
         <p:spPr>
           <a:xfrm>
-            <a:off x="0" y="658368"/>
-            <a:ext cx="5120640" cy="5833872"/>
+            <a:off x="2246610" y="1783080"/>
+            <a:ext cx="7698475" cy="4270248"/>
           </a:xfrm>
           <a:prstGeom prst="rect">
             <a:avLst/>
@@ -11878,14 +12318,14 @@
       </p:pic>
       <p:sp>
         <p:nvSpPr>
-          <p:cNvPr id="4" name="Text 1"/>
+          <p:cNvPr id="5" name="Text 2"/>
           <p:cNvSpPr/>
           <p:nvPr/>
         </p:nvSpPr>
         <p:spPr>
           <a:xfrm>
-            <a:off x="5349240" y="1005840"/>
-            <a:ext cx="6522415" cy="731520"/>
+            <a:off x="457200" y="6089904"/>
+            <a:ext cx="11277295" cy="347472"/>
           </a:xfrm>
           <a:prstGeom prst="rect">
             <a:avLst/>
@@ -11894,68 +12334,24 @@
           <a:ln/>
         </p:spPr>
         <p:txBody>
-          <a:bodyPr wrap="square" lIns="0" tIns="0" rIns="0" bIns="0" rtlCol="0" anchor="ctr">
-            <a:normAutofit/>
-          </a:bodyPr>
+          <a:bodyPr wrap="square" lIns="0" tIns="0" rIns="0" bIns="0" rtlCol="0" anchor="ctr"/>
           <a:lstStyle/>
           <a:p>
             <a:pPr algn="ctr" indent="0" marL="0">
               <a:buNone/>
             </a:pPr>
             <a:r>
-              <a:rPr lang="en-US" sz="3600" b="1" dirty="0">
-                <a:solidFill>
-                  <a:srgbClr val="990011"/>
+              <a:rPr lang="en-US" sz="1800" i="1" dirty="0">
+                <a:solidFill>
+                  <a:srgbClr val="555555"/>
                 </a:solidFill>
                 <a:latin typeface="Times New Roman" pitchFamily="34" charset="0"/>
                 <a:ea typeface="Times New Roman" pitchFamily="34" charset="-122"/>
                 <a:cs typeface="Times New Roman" pitchFamily="34" charset="-120"/>
               </a:rPr>
-              <a:t>Activity 4: Question</a:t>
-            </a:r>
-            <a:endParaRPr lang="en-US" sz="3600" dirty="0"/>
-          </a:p>
-        </p:txBody>
-      </p:sp>
-      <p:sp>
-        <p:nvSpPr>
-          <p:cNvPr id="5" name="Text 2"/>
-          <p:cNvSpPr/>
-          <p:nvPr/>
-        </p:nvSpPr>
-        <p:spPr>
-          <a:xfrm>
-            <a:off x="5349240" y="1783080"/>
-            <a:ext cx="6522415" cy="4663440"/>
-          </a:xfrm>
-          <a:prstGeom prst="rect">
-            <a:avLst/>
-          </a:prstGeom>
-          <a:noFill/>
-          <a:ln/>
-        </p:spPr>
-        <p:txBody>
-          <a:bodyPr wrap="square" lIns="0" tIns="0" rIns="0" bIns="0" rtlCol="0" anchor="t"/>
-          <a:lstStyle/>
-          <a:p>
-            <a:pPr algn="l" indent="0" marL="0">
-              <a:spcAft>
-                <a:spcPts val="800"/>
-              </a:spcAft>
-              <a:buNone/>
-            </a:pPr>
-            <a:r>
-              <a:rPr lang="en-US" sz="4000" dirty="0">
-                <a:solidFill>
-                  <a:srgbClr val="111111"/>
-                </a:solidFill>
-                <a:latin typeface="Times New Roman" pitchFamily="34" charset="0"/>
-                <a:ea typeface="Times New Roman" pitchFamily="34" charset="-122"/>
-                <a:cs typeface="Times New Roman" pitchFamily="34" charset="-120"/>
-              </a:rPr>
-              <a:t>This force comes from inside the Earth. Is it an internal or an external force?</a:t>
-            </a:r>
-            <a:endParaRPr lang="en-US" sz="4000" dirty="0"/>
+              <a:t>A gully cut by running water.</a:t>
+            </a:r>
+            <a:endParaRPr lang="en-US" sz="1800" dirty="0"/>
           </a:p>
         </p:txBody>
       </p:sp>
@@ -12636,7 +13032,7 @@
                           <a:ea typeface="Calibri" pitchFamily="34" charset="-122"/>
                           <a:cs typeface="Calibri" pitchFamily="34" charset="-120"/>
                         </a:rPr>
-                        <a:t>Endogenesis, exogenesis, discontinuity, lithosphere, rock cycle.</a:t>
+                        <a:t>Crust, lithosphere, mantle, asthenosphere, core, rock cycle, igneous, sedimentary and metamorphic rocks, internal and external forces, landform orders.</a:t>
                       </a:r>
                       <a:endParaRPr lang="en-US" sz="1700" dirty="0">
                         <a:latin typeface="Calibri" charset="0"/>
@@ -12774,7 +13170,7 @@
                           <a:ea typeface="Calibri" pitchFamily="34" charset="-122"/>
                           <a:cs typeface="Calibri" pitchFamily="34" charset="-120"/>
                         </a:rPr>
-                        <a:t>Layers of the Earth; the rock cycle; internal and external forces; categories of landforms.</a:t>
+                        <a:t>Layers of the Earth; the rock cycle and the three types of rocks; internal and external forces shaping the landscape; categories of landforms.</a:t>
                       </a:r>
                       <a:endParaRPr lang="en-US" sz="1700" dirty="0">
                         <a:latin typeface="Calibri" charset="0"/>
@@ -12912,7 +13308,7 @@
                           <a:ea typeface="Calibri" pitchFamily="34" charset="-122"/>
                           <a:cs typeface="Calibri" pitchFamily="34" charset="-120"/>
                         </a:rPr>
-                        <a:t>Learners are able to describe the layers of the Earth and explain how internal and external forces shape the landscape.</a:t>
+                        <a:t>Learners are able to describe the internal structure of the Earth, the rock cycle and the forces that shape landforms around Garoua.</a:t>
                       </a:r>
                       <a:endParaRPr lang="en-US" sz="1700" dirty="0">
                         <a:latin typeface="Calibri" charset="0"/>
@@ -13074,7 +13470,7 @@
                 <a:ea typeface="Calibri" pitchFamily="34" charset="-122"/>
                 <a:cs typeface="Calibri" pitchFamily="34" charset="-120"/>
               </a:rPr>
-              <a:t>3. INTERNAL FORCES</a:t>
+              <a:t>3. FORCES</a:t>
             </a:r>
             <a:endParaRPr lang="en-US" sz="1400" dirty="0"/>
           </a:p>
@@ -13139,7 +13535,7 @@
                 <a:ea typeface="Times New Roman" pitchFamily="34" charset="-122"/>
                 <a:cs typeface="Times New Roman" pitchFamily="34" charset="-120"/>
               </a:rPr>
-              <a:t>Activity 4: Answer</a:t>
+              <a:t>Activity 4: Question</a:t>
             </a:r>
             <a:endParaRPr lang="en-US" sz="3600" dirty="0"/>
           </a:p>
@@ -13181,7 +13577,7 @@
                 <a:ea typeface="Times New Roman" pitchFamily="34" charset="-122"/>
                 <a:cs typeface="Times New Roman" pitchFamily="34" charset="-120"/>
               </a:rPr>
-              <a:t>An internal (endogenic) force. It builds up the relief.</a:t>
+              <a:t>Is gully erosion an internal or an external force?</a:t>
             </a:r>
             <a:endParaRPr lang="en-US" sz="4000" dirty="0"/>
           </a:p>
@@ -13293,54 +13689,15 @@
                 <a:ea typeface="Calibri" pitchFamily="34" charset="-122"/>
                 <a:cs typeface="Calibri" pitchFamily="34" charset="-120"/>
               </a:rPr>
-              <a:t>3. EXTERNAL FORCES</a:t>
+              <a:t>3. FORCES</a:t>
             </a:r>
             <a:endParaRPr lang="en-US" sz="1400" dirty="0"/>
-          </a:p>
-        </p:txBody>
-      </p:sp>
-      <p:sp>
-        <p:nvSpPr>
-          <p:cNvPr id="3" name="Text 1"/>
-          <p:cNvSpPr/>
-          <p:nvPr/>
-        </p:nvSpPr>
-        <p:spPr>
-          <a:xfrm>
-            <a:off x="457200" y="1005840"/>
-            <a:ext cx="11277295" cy="731520"/>
-          </a:xfrm>
-          <a:prstGeom prst="rect">
-            <a:avLst/>
-          </a:prstGeom>
-          <a:noFill/>
-          <a:ln/>
-        </p:spPr>
-        <p:txBody>
-          <a:bodyPr wrap="square" lIns="0" tIns="0" rIns="0" bIns="0" rtlCol="0" anchor="ctr"/>
-          <a:lstStyle/>
-          <a:p>
-            <a:pPr algn="ctr" indent="0" marL="0">
-              <a:buNone/>
-            </a:pPr>
-            <a:r>
-              <a:rPr lang="en-US" sz="3600" b="1" dirty="0">
-                <a:solidFill>
-                  <a:srgbClr val="990011"/>
-                </a:solidFill>
-                <a:latin typeface="Times New Roman" pitchFamily="34" charset="0"/>
-                <a:ea typeface="Times New Roman" pitchFamily="34" charset="-122"/>
-                <a:cs typeface="Times New Roman" pitchFamily="34" charset="-120"/>
-              </a:rPr>
-              <a:t>Activity 5</a:t>
-            </a:r>
-            <a:endParaRPr lang="en-US" sz="3600" dirty="0"/>
           </a:p>
         </p:txBody>
       </p:sp>
       <p:pic>
         <p:nvPicPr>
-          <p:cNvPr id="4" name="Image 0" descr="/home/claude/f4/img/v2/f4_gully.jpg">    </p:cNvPr>
+          <p:cNvPr id="3" name="Image 0" descr="/home/claude/f4/img/minesec_sheet.png">    </p:cNvPr>
           <p:cNvPicPr>
             <a:picLocks noChangeAspect="1"/>
           </p:cNvPicPr>
@@ -13354,8 +13711,8 @@
         </p:blipFill>
         <p:spPr>
           <a:xfrm>
-            <a:off x="2246610" y="1783080"/>
-            <a:ext cx="7698475" cy="4270248"/>
+            <a:off x="0" y="658368"/>
+            <a:ext cx="5120640" cy="5833872"/>
           </a:xfrm>
           <a:prstGeom prst="rect">
             <a:avLst/>
@@ -13364,14 +13721,14 @@
       </p:pic>
       <p:sp>
         <p:nvSpPr>
-          <p:cNvPr id="5" name="Text 2"/>
+          <p:cNvPr id="4" name="Text 1"/>
           <p:cNvSpPr/>
           <p:nvPr/>
         </p:nvSpPr>
         <p:spPr>
           <a:xfrm>
-            <a:off x="457200" y="6089904"/>
-            <a:ext cx="11277295" cy="347472"/>
+            <a:off x="5349240" y="1005840"/>
+            <a:ext cx="6522415" cy="731520"/>
           </a:xfrm>
           <a:prstGeom prst="rect">
             <a:avLst/>
@@ -13380,24 +13737,68 @@
           <a:ln/>
         </p:spPr>
         <p:txBody>
-          <a:bodyPr wrap="square" lIns="0" tIns="0" rIns="0" bIns="0" rtlCol="0" anchor="ctr"/>
+          <a:bodyPr wrap="square" lIns="0" tIns="0" rIns="0" bIns="0" rtlCol="0" anchor="ctr">
+            <a:normAutofit/>
+          </a:bodyPr>
           <a:lstStyle/>
           <a:p>
             <a:pPr algn="ctr" indent="0" marL="0">
               <a:buNone/>
             </a:pPr>
             <a:r>
-              <a:rPr lang="en-US" sz="1800" i="1" dirty="0">
-                <a:solidFill>
-                  <a:srgbClr val="555555"/>
+              <a:rPr lang="en-US" sz="3600" b="1" dirty="0">
+                <a:solidFill>
+                  <a:srgbClr val="990011"/>
                 </a:solidFill>
                 <a:latin typeface="Times New Roman" pitchFamily="34" charset="0"/>
                 <a:ea typeface="Times New Roman" pitchFamily="34" charset="-122"/>
                 <a:cs typeface="Times New Roman" pitchFamily="34" charset="-120"/>
               </a:rPr>
-              <a:t>A gully cut by rain water.</a:t>
-            </a:r>
-            <a:endParaRPr lang="en-US" sz="1800" dirty="0"/>
+              <a:t>Activity 4: Answer</a:t>
+            </a:r>
+            <a:endParaRPr lang="en-US" sz="3600" dirty="0"/>
+          </a:p>
+        </p:txBody>
+      </p:sp>
+      <p:sp>
+        <p:nvSpPr>
+          <p:cNvPr id="5" name="Text 2"/>
+          <p:cNvSpPr/>
+          <p:nvPr/>
+        </p:nvSpPr>
+        <p:spPr>
+          <a:xfrm>
+            <a:off x="5349240" y="1783080"/>
+            <a:ext cx="6522415" cy="4663440"/>
+          </a:xfrm>
+          <a:prstGeom prst="rect">
+            <a:avLst/>
+          </a:prstGeom>
+          <a:noFill/>
+          <a:ln/>
+        </p:spPr>
+        <p:txBody>
+          <a:bodyPr wrap="square" lIns="0" tIns="0" rIns="0" bIns="0" rtlCol="0" anchor="t"/>
+          <a:lstStyle/>
+          <a:p>
+            <a:pPr algn="l" indent="0" marL="0">
+              <a:spcAft>
+                <a:spcPts val="800"/>
+              </a:spcAft>
+              <a:buNone/>
+            </a:pPr>
+            <a:r>
+              <a:rPr lang="en-US" sz="4000" dirty="0">
+                <a:solidFill>
+                  <a:srgbClr val="111111"/>
+                </a:solidFill>
+                <a:latin typeface="Times New Roman" pitchFamily="34" charset="0"/>
+                <a:ea typeface="Times New Roman" pitchFamily="34" charset="-122"/>
+                <a:cs typeface="Times New Roman" pitchFamily="34" charset="-120"/>
+              </a:rPr>
+              <a:t>An external (exogenic) force.</a:t>
+            </a:r>
+            <a:endParaRPr lang="en-US" sz="4000" dirty="0"/>
           </a:p>
         </p:txBody>
       </p:sp>
@@ -13507,15 +13908,54 @@
                 <a:ea typeface="Calibri" pitchFamily="34" charset="-122"/>
                 <a:cs typeface="Calibri" pitchFamily="34" charset="-120"/>
               </a:rPr>
-              <a:t>3. EXTERNAL FORCES</a:t>
+              <a:t>4. LANDFORMS</a:t>
             </a:r>
             <a:endParaRPr lang="en-US" sz="1400" dirty="0"/>
+          </a:p>
+        </p:txBody>
+      </p:sp>
+      <p:sp>
+        <p:nvSpPr>
+          <p:cNvPr id="3" name="Text 1"/>
+          <p:cNvSpPr/>
+          <p:nvPr/>
+        </p:nvSpPr>
+        <p:spPr>
+          <a:xfrm>
+            <a:off x="457200" y="1005840"/>
+            <a:ext cx="11277295" cy="731520"/>
+          </a:xfrm>
+          <a:prstGeom prst="rect">
+            <a:avLst/>
+          </a:prstGeom>
+          <a:noFill/>
+          <a:ln/>
+        </p:spPr>
+        <p:txBody>
+          <a:bodyPr wrap="square" lIns="0" tIns="0" rIns="0" bIns="0" rtlCol="0" anchor="ctr"/>
+          <a:lstStyle/>
+          <a:p>
+            <a:pPr algn="ctr" indent="0" marL="0">
+              <a:buNone/>
+            </a:pPr>
+            <a:r>
+              <a:rPr lang="en-US" sz="3600" b="1" dirty="0">
+                <a:solidFill>
+                  <a:srgbClr val="990011"/>
+                </a:solidFill>
+                <a:latin typeface="Times New Roman" pitchFamily="34" charset="0"/>
+                <a:ea typeface="Times New Roman" pitchFamily="34" charset="-122"/>
+                <a:cs typeface="Times New Roman" pitchFamily="34" charset="-120"/>
+              </a:rPr>
+              <a:t>Activity 5</a:t>
+            </a:r>
+            <a:endParaRPr lang="en-US" sz="3600" dirty="0"/>
           </a:p>
         </p:txBody>
       </p:sp>
       <p:pic>
         <p:nvPicPr>
-          <p:cNvPr id="3" name="Image 0" descr="/home/claude/f4/img/minesec_sheet.png">    </p:cNvPr>
+          <p:cNvPr id="4" name="Image 0" descr="/home/claude/f4/img/v2/geo2_orders.png">    </p:cNvPr>
           <p:cNvPicPr>
             <a:picLocks noChangeAspect="1"/>
           </p:cNvPicPr>
@@ -13529,8 +13969,8 @@
         </p:blipFill>
         <p:spPr>
           <a:xfrm>
-            <a:off x="0" y="658368"/>
-            <a:ext cx="5120640" cy="5833872"/>
+            <a:off x="629930" y="1783080"/>
+            <a:ext cx="10931835" cy="4270248"/>
           </a:xfrm>
           <a:prstGeom prst="rect">
             <a:avLst/>
@@ -13539,14 +13979,14 @@
       </p:pic>
       <p:sp>
         <p:nvSpPr>
-          <p:cNvPr id="4" name="Text 1"/>
+          <p:cNvPr id="5" name="Text 2"/>
           <p:cNvSpPr/>
           <p:nvPr/>
         </p:nvSpPr>
         <p:spPr>
           <a:xfrm>
-            <a:off x="5349240" y="1005840"/>
-            <a:ext cx="6522415" cy="731520"/>
+            <a:off x="457200" y="6089904"/>
+            <a:ext cx="11277295" cy="347472"/>
           </a:xfrm>
           <a:prstGeom prst="rect">
             <a:avLst/>
@@ -13555,68 +13995,24 @@
           <a:ln/>
         </p:spPr>
         <p:txBody>
-          <a:bodyPr wrap="square" lIns="0" tIns="0" rIns="0" bIns="0" rtlCol="0" anchor="ctr">
-            <a:normAutofit/>
-          </a:bodyPr>
+          <a:bodyPr wrap="square" lIns="0" tIns="0" rIns="0" bIns="0" rtlCol="0" anchor="ctr"/>
           <a:lstStyle/>
           <a:p>
             <a:pPr algn="ctr" indent="0" marL="0">
               <a:buNone/>
             </a:pPr>
             <a:r>
-              <a:rPr lang="en-US" sz="3600" b="1" dirty="0">
-                <a:solidFill>
-                  <a:srgbClr val="990011"/>
+              <a:rPr lang="en-US" sz="1800" i="1" dirty="0">
+                <a:solidFill>
+                  <a:srgbClr val="555555"/>
                 </a:solidFill>
                 <a:latin typeface="Times New Roman" pitchFamily="34" charset="0"/>
                 <a:ea typeface="Times New Roman" pitchFamily="34" charset="-122"/>
                 <a:cs typeface="Times New Roman" pitchFamily="34" charset="-120"/>
               </a:rPr>
-              <a:t>Activity 5: Question</a:t>
-            </a:r>
-            <a:endParaRPr lang="en-US" sz="3600" dirty="0"/>
-          </a:p>
-        </p:txBody>
-      </p:sp>
-      <p:sp>
-        <p:nvSpPr>
-          <p:cNvPr id="5" name="Text 2"/>
-          <p:cNvSpPr/>
-          <p:nvPr/>
-        </p:nvSpPr>
-        <p:spPr>
-          <a:xfrm>
-            <a:off x="5349240" y="1783080"/>
-            <a:ext cx="6522415" cy="4663440"/>
-          </a:xfrm>
-          <a:prstGeom prst="rect">
-            <a:avLst/>
-          </a:prstGeom>
-          <a:noFill/>
-          <a:ln/>
-        </p:spPr>
-        <p:txBody>
-          <a:bodyPr wrap="square" lIns="0" tIns="0" rIns="0" bIns="0" rtlCol="0" anchor="t"/>
-          <a:lstStyle/>
-          <a:p>
-            <a:pPr algn="l" indent="0" marL="0">
-              <a:spcAft>
-                <a:spcPts val="800"/>
-              </a:spcAft>
-              <a:buNone/>
-            </a:pPr>
-            <a:r>
-              <a:rPr lang="en-US" sz="4000" dirty="0">
-                <a:solidFill>
-                  <a:srgbClr val="111111"/>
-                </a:solidFill>
-                <a:latin typeface="Times New Roman" pitchFamily="34" charset="0"/>
-                <a:ea typeface="Times New Roman" pitchFamily="34" charset="-122"/>
-                <a:cs typeface="Times New Roman" pitchFamily="34" charset="-120"/>
-              </a:rPr>
-              <a:t>Rain water wears the land down. Is this an internal or an external force?</a:t>
-            </a:r>
-            <a:endParaRPr lang="en-US" sz="4000" dirty="0"/>
+              <a:t>Categories of landforms.</a:t>
+            </a:r>
+            <a:endParaRPr lang="en-US" sz="1800" dirty="0"/>
           </a:p>
         </p:txBody>
       </p:sp>
@@ -13726,7 +14122,7 @@
                 <a:ea typeface="Calibri" pitchFamily="34" charset="-122"/>
                 <a:cs typeface="Calibri" pitchFamily="34" charset="-120"/>
               </a:rPr>
-              <a:t>3. EXTERNAL FORCES</a:t>
+              <a:t>4. LANDFORMS</a:t>
             </a:r>
             <a:endParaRPr lang="en-US" sz="1400" dirty="0"/>
           </a:p>
@@ -13791,7 +14187,7 @@
                 <a:ea typeface="Times New Roman" pitchFamily="34" charset="-122"/>
                 <a:cs typeface="Times New Roman" pitchFamily="34" charset="-120"/>
               </a:rPr>
-              <a:t>Activity 5: Answer</a:t>
+              <a:t>Activity 5: Question</a:t>
             </a:r>
             <a:endParaRPr lang="en-US" sz="3600" dirty="0"/>
           </a:p>
@@ -13833,7 +14229,7 @@
                 <a:ea typeface="Times New Roman" pitchFamily="34" charset="-122"/>
                 <a:cs typeface="Times New Roman" pitchFamily="34" charset="-120"/>
               </a:rPr>
-              <a:t>An external (exogenic) force. It wears down the relief.</a:t>
+              <a:t>Give one landform of the second order in Cameroon.</a:t>
             </a:r>
             <a:endParaRPr lang="en-US" sz="4000" dirty="0"/>
           </a:p>
@@ -13945,7 +14341,7 @@
                 <a:ea typeface="Calibri" pitchFamily="34" charset="-122"/>
                 <a:cs typeface="Calibri" pitchFamily="34" charset="-120"/>
               </a:rPr>
-              <a:t>BOARD SUMMARY</a:t>
+              <a:t>4. LANDFORMS</a:t>
             </a:r>
             <a:endParaRPr lang="en-US" sz="1400" dirty="0"/>
           </a:p>
@@ -14010,7 +14406,7 @@
                 <a:ea typeface="Times New Roman" pitchFamily="34" charset="-122"/>
                 <a:cs typeface="Times New Roman" pitchFamily="34" charset="-120"/>
               </a:rPr>
-              <a:t>Board Summary</a:t>
+              <a:t>Activity 5: Answer</a:t>
             </a:r>
             <a:endParaRPr lang="en-US" sz="3600" dirty="0"/>
           </a:p>
@@ -14044,7 +14440,7 @@
               <a:buNone/>
             </a:pPr>
             <a:r>
-              <a:rPr lang="en-US" sz="4000" b="1" dirty="0">
+              <a:rPr lang="en-US" sz="4000" dirty="0">
                 <a:solidFill>
                   <a:srgbClr val="111111"/>
                 </a:solidFill>
@@ -14052,47 +14448,7 @@
                 <a:ea typeface="Times New Roman" pitchFamily="34" charset="-122"/>
                 <a:cs typeface="Times New Roman" pitchFamily="34" charset="-120"/>
               </a:rPr>
-              <a:t>Topic: The Development of the Earth's Structure</a:t>
-            </a:r>
-            <a:endParaRPr lang="en-US" sz="4000" dirty="0"/>
-          </a:p>
-          <a:p>
-            <a:pPr algn="l" indent="0" marL="0">
-              <a:spcAft>
-                <a:spcPts val="800"/>
-              </a:spcAft>
-              <a:buNone/>
-            </a:pPr>
-            <a:r>
-              <a:rPr lang="en-US" sz="4000" b="1" dirty="0">
-                <a:solidFill>
-                  <a:srgbClr val="111111"/>
-                </a:solidFill>
-                <a:latin typeface="Times New Roman" pitchFamily="34" charset="0"/>
-                <a:ea typeface="Times New Roman" pitchFamily="34" charset="-122"/>
-                <a:cs typeface="Times New Roman" pitchFamily="34" charset="-120"/>
-              </a:rPr>
-              <a:t>Sub-topic: The Origin and Earth's Structure</a:t>
-            </a:r>
-            <a:endParaRPr lang="en-US" sz="4000" dirty="0"/>
-          </a:p>
-          <a:p>
-            <a:pPr algn="l" indent="0" marL="0">
-              <a:spcAft>
-                <a:spcPts val="800"/>
-              </a:spcAft>
-              <a:buNone/>
-            </a:pPr>
-            <a:r>
-              <a:rPr lang="en-US" sz="4000" b="1" dirty="0">
-                <a:solidFill>
-                  <a:srgbClr val="990011"/>
-                </a:solidFill>
-                <a:latin typeface="Times New Roman" pitchFamily="34" charset="0"/>
-                <a:ea typeface="Times New Roman" pitchFamily="34" charset="-122"/>
-                <a:cs typeface="Times New Roman" pitchFamily="34" charset="-120"/>
-              </a:rPr>
-              <a:t>Lesson 2: Internal Structure of the Earth</a:t>
+              <a:t>The Adamawa Plateau, the Mandara Mountains or the Benue plain.</a:t>
             </a:r>
             <a:endParaRPr lang="en-US" sz="4000" dirty="0"/>
           </a:p>
@@ -14227,7 +14583,7 @@
         <p:spPr>
           <a:xfrm>
             <a:off x="0" y="658368"/>
-            <a:ext cx="2468880" cy="5833872"/>
+            <a:ext cx="5120640" cy="5833872"/>
           </a:xfrm>
           <a:prstGeom prst="rect">
             <a:avLst/>
@@ -14242,8 +14598,8 @@
         </p:nvSpPr>
         <p:spPr>
           <a:xfrm>
-            <a:off x="2697480" y="1005840"/>
-            <a:ext cx="9174175" cy="731520"/>
+            <a:off x="5349240" y="1005840"/>
+            <a:ext cx="6522415" cy="731520"/>
           </a:xfrm>
           <a:prstGeom prst="rect">
             <a:avLst/>
@@ -14269,7 +14625,7 @@
                 <a:ea typeface="Times New Roman" pitchFamily="34" charset="-122"/>
                 <a:cs typeface="Times New Roman" pitchFamily="34" charset="-120"/>
               </a:rPr>
-              <a:t>DEFINITIONS</a:t>
+              <a:t>Board Summary</a:t>
             </a:r>
             <a:endParaRPr lang="en-US" sz="3600" dirty="0"/>
           </a:p>
@@ -14283,8 +14639,8 @@
         </p:nvSpPr>
         <p:spPr>
           <a:xfrm>
-            <a:off x="2697480" y="1783080"/>
-            <a:ext cx="9174175" cy="4663440"/>
+            <a:off x="5349240" y="1783080"/>
+            <a:ext cx="6522415" cy="4663440"/>
           </a:xfrm>
           <a:prstGeom prst="rect">
             <a:avLst/>
@@ -14303,7 +14659,7 @@
               <a:buNone/>
             </a:pPr>
             <a:r>
-              <a:rPr lang="en-US" sz="4000" i="1" dirty="0">
+              <a:rPr lang="en-US" sz="3200" b="1" dirty="0">
                 <a:solidFill>
                   <a:srgbClr val="111111"/>
                 </a:solidFill>
@@ -14311,9 +14667,9 @@
                 <a:ea typeface="Times New Roman" pitchFamily="34" charset="-122"/>
                 <a:cs typeface="Times New Roman" pitchFamily="34" charset="-120"/>
               </a:rPr>
-              <a:t>The key terms of this lesson are defined as follows:</a:t>
-            </a:r>
-            <a:endParaRPr lang="en-US" sz="4000" dirty="0"/>
+              <a:t>Topic: The Development of the Earth's Structure</a:t>
+            </a:r>
+            <a:endParaRPr lang="en-US" sz="3200" dirty="0"/>
           </a:p>
           <a:p>
             <a:pPr algn="l" indent="0" marL="0">
@@ -14323,7 +14679,7 @@
               <a:buNone/>
             </a:pPr>
             <a:r>
-              <a:rPr lang="en-US" sz="4000" b="1" dirty="0">
+              <a:rPr lang="en-US" sz="3200" b="1" dirty="0">
                 <a:solidFill>
                   <a:srgbClr val="111111"/>
                 </a:solidFill>
@@ -14331,8 +14687,11 @@
                 <a:ea typeface="Times New Roman" pitchFamily="34" charset="-122"/>
                 <a:cs typeface="Times New Roman" pitchFamily="34" charset="-120"/>
               </a:rPr>
-              <a:t>Lithosphere: </a:t>
-            </a:r>
+              <a:t>Sub-topic: The Origin and Earth's Structure</a:t>
+            </a:r>
+            <a:endParaRPr lang="en-US" sz="3200" dirty="0"/>
+          </a:p>
+          <a:p>
             <a:pPr algn="l" indent="0" marL="0">
               <a:spcAft>
                 <a:spcPts val="800"/>
@@ -14340,54 +14699,17 @@
               <a:buNone/>
             </a:pPr>
             <a:r>
-              <a:rPr lang="en-US" sz="4000" dirty="0">
-                <a:solidFill>
-                  <a:srgbClr val="111111"/>
+              <a:rPr lang="en-US" sz="3200" b="1" dirty="0">
+                <a:solidFill>
+                  <a:srgbClr val="990011"/>
                 </a:solidFill>
                 <a:latin typeface="Times New Roman" pitchFamily="34" charset="0"/>
                 <a:ea typeface="Times New Roman" pitchFamily="34" charset="-122"/>
                 <a:cs typeface="Times New Roman" pitchFamily="34" charset="-120"/>
               </a:rPr>
-              <a:t>It is the rigid outer shell of the Earth, made of the crust and the upper mantle.</a:t>
-            </a:r>
-            <a:endParaRPr lang="en-US" sz="4000" dirty="0"/>
-          </a:p>
-          <a:p>
-            <a:pPr algn="l" indent="0" marL="0">
-              <a:spcAft>
-                <a:spcPts val="800"/>
-              </a:spcAft>
-              <a:buNone/>
-            </a:pPr>
-            <a:r>
-              <a:rPr lang="en-US" sz="4000" b="1" dirty="0">
-                <a:solidFill>
-                  <a:srgbClr val="111111"/>
-                </a:solidFill>
-                <a:latin typeface="Times New Roman" pitchFamily="34" charset="0"/>
-                <a:ea typeface="Times New Roman" pitchFamily="34" charset="-122"/>
-                <a:cs typeface="Times New Roman" pitchFamily="34" charset="-120"/>
-              </a:rPr>
-              <a:t>Rock cycle: </a:t>
-            </a:r>
-            <a:pPr algn="l" indent="0" marL="0">
-              <a:spcAft>
-                <a:spcPts val="800"/>
-              </a:spcAft>
-              <a:buNone/>
-            </a:pPr>
-            <a:r>
-              <a:rPr lang="en-US" sz="4000" dirty="0">
-                <a:solidFill>
-                  <a:srgbClr val="111111"/>
-                </a:solidFill>
-                <a:latin typeface="Times New Roman" pitchFamily="34" charset="0"/>
-                <a:ea typeface="Times New Roman" pitchFamily="34" charset="-122"/>
-                <a:cs typeface="Times New Roman" pitchFamily="34" charset="-120"/>
-              </a:rPr>
-              <a:t>It is the continuous change of rocks from one type to another.</a:t>
-            </a:r>
-            <a:endParaRPr lang="en-US" sz="4000" dirty="0"/>
+              <a:t>Lesson 2: Internal Structure of the Earth</a:t>
+            </a:r>
+            <a:endParaRPr lang="en-US" sz="3200" dirty="0"/>
           </a:p>
         </p:txBody>
       </p:sp>
@@ -14520,7 +14842,7 @@
         <p:spPr>
           <a:xfrm>
             <a:off x="0" y="658368"/>
-            <a:ext cx="5120640" cy="5833872"/>
+            <a:ext cx="3840480" cy="5833872"/>
           </a:xfrm>
           <a:prstGeom prst="rect">
             <a:avLst/>
@@ -14535,8 +14857,8 @@
         </p:nvSpPr>
         <p:spPr>
           <a:xfrm>
-            <a:off x="5349240" y="1005840"/>
-            <a:ext cx="6522415" cy="731520"/>
+            <a:off x="4069080" y="1005840"/>
+            <a:ext cx="7802575" cy="731520"/>
           </a:xfrm>
           <a:prstGeom prst="rect">
             <a:avLst/>
@@ -14562,7 +14884,7 @@
                 <a:ea typeface="Times New Roman" pitchFamily="34" charset="-122"/>
                 <a:cs typeface="Times New Roman" pitchFamily="34" charset="-120"/>
               </a:rPr>
-              <a:t>DEFINITIONS (continued)</a:t>
+              <a:t>DEFINITIONS</a:t>
             </a:r>
             <a:endParaRPr lang="en-US" sz="3600" dirty="0"/>
           </a:p>
@@ -14576,8 +14898,8 @@
         </p:nvSpPr>
         <p:spPr>
           <a:xfrm>
-            <a:off x="5349240" y="1783080"/>
-            <a:ext cx="6522415" cy="4663440"/>
+            <a:off x="4069080" y="1783080"/>
+            <a:ext cx="7802575" cy="4663440"/>
           </a:xfrm>
           <a:prstGeom prst="rect">
             <a:avLst/>
@@ -14596,7 +14918,7 @@
               <a:buNone/>
             </a:pPr>
             <a:r>
-              <a:rPr lang="en-US" sz="4000" b="1" dirty="0">
+              <a:rPr lang="en-US" sz="4000" i="1" dirty="0">
                 <a:solidFill>
                   <a:srgbClr val="111111"/>
                 </a:solidFill>
@@ -14604,8 +14926,11 @@
                 <a:ea typeface="Times New Roman" pitchFamily="34" charset="-122"/>
                 <a:cs typeface="Times New Roman" pitchFamily="34" charset="-120"/>
               </a:rPr>
-              <a:t>Landform: </a:t>
-            </a:r>
+              <a:t>The key terms of this lesson are defined as follows:</a:t>
+            </a:r>
+            <a:endParaRPr lang="en-US" sz="4000" dirty="0"/>
+          </a:p>
+          <a:p>
             <a:pPr algn="l" indent="0" marL="0">
               <a:spcAft>
                 <a:spcPts val="800"/>
@@ -14613,7 +14938,7 @@
               <a:buNone/>
             </a:pPr>
             <a:r>
-              <a:rPr lang="en-US" sz="4000" dirty="0">
+              <a:rPr lang="en-US" sz="4000" b="1" dirty="0">
                 <a:solidFill>
                   <a:srgbClr val="111111"/>
                 </a:solidFill>
@@ -14621,7 +14946,61 @@
                 <a:ea typeface="Times New Roman" pitchFamily="34" charset="-122"/>
                 <a:cs typeface="Times New Roman" pitchFamily="34" charset="-120"/>
               </a:rPr>
-              <a:t>It is a natural shape of the Earth's surface, such as a mountain or a valley.</a:t>
+              <a:t>Crust: </a:t>
+            </a:r>
+            <a:pPr algn="l" indent="0" marL="0">
+              <a:spcAft>
+                <a:spcPts val="800"/>
+              </a:spcAft>
+              <a:buNone/>
+            </a:pPr>
+            <a:r>
+              <a:rPr lang="en-US" sz="4000" dirty="0">
+                <a:solidFill>
+                  <a:srgbClr val="111111"/>
+                </a:solidFill>
+                <a:latin typeface="Times New Roman" pitchFamily="34" charset="0"/>
+                <a:ea typeface="Times New Roman" pitchFamily="34" charset="-122"/>
+                <a:cs typeface="Times New Roman" pitchFamily="34" charset="-120"/>
+              </a:rPr>
+              <a:t>It is the thin, solid outer layer of the Earth.</a:t>
+            </a:r>
+            <a:endParaRPr lang="en-US" sz="4000" dirty="0"/>
+          </a:p>
+          <a:p>
+            <a:pPr algn="l" indent="0" marL="0">
+              <a:spcAft>
+                <a:spcPts val="800"/>
+              </a:spcAft>
+              <a:buNone/>
+            </a:pPr>
+            <a:r>
+              <a:rPr lang="en-US" sz="4000" b="1" dirty="0">
+                <a:solidFill>
+                  <a:srgbClr val="111111"/>
+                </a:solidFill>
+                <a:latin typeface="Times New Roman" pitchFamily="34" charset="0"/>
+                <a:ea typeface="Times New Roman" pitchFamily="34" charset="-122"/>
+                <a:cs typeface="Times New Roman" pitchFamily="34" charset="-120"/>
+              </a:rPr>
+              <a:t>Lithosphere: </a:t>
+            </a:r>
+            <a:pPr algn="l" indent="0" marL="0">
+              <a:spcAft>
+                <a:spcPts val="800"/>
+              </a:spcAft>
+              <a:buNone/>
+            </a:pPr>
+            <a:r>
+              <a:rPr lang="en-US" sz="4000" dirty="0">
+                <a:solidFill>
+                  <a:srgbClr val="111111"/>
+                </a:solidFill>
+                <a:latin typeface="Times New Roman" pitchFamily="34" charset="0"/>
+                <a:ea typeface="Times New Roman" pitchFamily="34" charset="-122"/>
+                <a:cs typeface="Times New Roman" pitchFamily="34" charset="-120"/>
+              </a:rPr>
+              <a:t>It is the rigid layer made of the crust and the upper part of the mantle.</a:t>
             </a:r>
             <a:endParaRPr lang="en-US" sz="4000" dirty="0"/>
           </a:p>
@@ -14756,7 +15135,7 @@
         <p:spPr>
           <a:xfrm>
             <a:off x="0" y="658368"/>
-            <a:ext cx="2468880" cy="5833872"/>
+            <a:ext cx="3840480" cy="5833872"/>
           </a:xfrm>
           <a:prstGeom prst="rect">
             <a:avLst/>
@@ -14771,8 +15150,8 @@
         </p:nvSpPr>
         <p:spPr>
           <a:xfrm>
-            <a:off x="2697480" y="1005840"/>
-            <a:ext cx="9174175" cy="731520"/>
+            <a:off x="4069080" y="1005840"/>
+            <a:ext cx="7802575" cy="731520"/>
           </a:xfrm>
           <a:prstGeom prst="rect">
             <a:avLst/>
@@ -14798,7 +15177,7 @@
                 <a:ea typeface="Times New Roman" pitchFamily="34" charset="-122"/>
                 <a:cs typeface="Times New Roman" pitchFamily="34" charset="-120"/>
               </a:rPr>
-              <a:t>1. Layers of the Earth and their Properties</a:t>
+              <a:t>DEFINITIONS (continued)</a:t>
             </a:r>
             <a:endParaRPr lang="en-US" sz="3600" dirty="0"/>
           </a:p>
@@ -14812,8 +15191,8 @@
         </p:nvSpPr>
         <p:spPr>
           <a:xfrm>
-            <a:off x="2697480" y="1783080"/>
-            <a:ext cx="9174175" cy="4663440"/>
+            <a:off x="4069080" y="1783080"/>
+            <a:ext cx="7802575" cy="4663440"/>
           </a:xfrm>
           <a:prstGeom prst="rect">
             <a:avLst/>
@@ -14832,7 +15211,7 @@
               <a:buNone/>
             </a:pPr>
             <a:r>
-              <a:rPr lang="en-US" sz="4000" i="1" dirty="0">
+              <a:rPr lang="en-US" sz="4000" b="1" dirty="0">
                 <a:solidFill>
                   <a:srgbClr val="111111"/>
                 </a:solidFill>
@@ -14840,11 +15219,8 @@
                 <a:ea typeface="Times New Roman" pitchFamily="34" charset="-122"/>
                 <a:cs typeface="Times New Roman" pitchFamily="34" charset="-120"/>
               </a:rPr>
-              <a:t>The Earth is made up of the following layers:</a:t>
-            </a:r>
-            <a:endParaRPr lang="en-US" sz="4000" dirty="0"/>
-          </a:p>
-          <a:p>
+              <a:t>Mantle: </a:t>
+            </a:r>
             <a:pPr algn="l" indent="0" marL="0">
               <a:spcAft>
                 <a:spcPts val="800"/>
@@ -14852,7 +15228,7 @@
               <a:buNone/>
             </a:pPr>
             <a:r>
-              <a:rPr lang="en-US" sz="4000" b="1" dirty="0">
+              <a:rPr lang="en-US" sz="4000" dirty="0">
                 <a:solidFill>
                   <a:srgbClr val="111111"/>
                 </a:solidFill>
@@ -14860,8 +15236,11 @@
                 <a:ea typeface="Times New Roman" pitchFamily="34" charset="-122"/>
                 <a:cs typeface="Times New Roman" pitchFamily="34" charset="-120"/>
               </a:rPr>
-              <a:t>Crust: </a:t>
-            </a:r>
+              <a:t>It is the thick layer of hot, dense rock between the crust and the core.</a:t>
+            </a:r>
+            <a:endParaRPr lang="en-US" sz="4000" dirty="0"/>
+          </a:p>
+          <a:p>
             <a:pPr algn="l" indent="0" marL="0">
               <a:spcAft>
                 <a:spcPts val="800"/>
@@ -14869,7 +15248,7 @@
               <a:buNone/>
             </a:pPr>
             <a:r>
-              <a:rPr lang="en-US" sz="4000" dirty="0">
+              <a:rPr lang="en-US" sz="4000" b="1" dirty="0">
                 <a:solidFill>
                   <a:srgbClr val="111111"/>
                 </a:solidFill>
@@ -14877,7 +15256,24 @@
                 <a:ea typeface="Times New Roman" pitchFamily="34" charset="-122"/>
                 <a:cs typeface="Times New Roman" pitchFamily="34" charset="-120"/>
               </a:rPr>
-              <a:t>It is the thin outer layer, 5–10 km thick under the oceans (sima, basalt) and 30–70 km under continents (sial, granite). It is separated from the mantle by the Moho.</a:t>
+              <a:t>Rock cycle: </a:t>
+            </a:r>
+            <a:pPr algn="l" indent="0" marL="0">
+              <a:spcAft>
+                <a:spcPts val="800"/>
+              </a:spcAft>
+              <a:buNone/>
+            </a:pPr>
+            <a:r>
+              <a:rPr lang="en-US" sz="4000" dirty="0">
+                <a:solidFill>
+                  <a:srgbClr val="111111"/>
+                </a:solidFill>
+                <a:latin typeface="Times New Roman" pitchFamily="34" charset="0"/>
+                <a:ea typeface="Times New Roman" pitchFamily="34" charset="-122"/>
+                <a:cs typeface="Times New Roman" pitchFamily="34" charset="-120"/>
+              </a:rPr>
+              <a:t>It is the continuous process by which rocks are formed, broken down and formed again.</a:t>
             </a:r>
             <a:endParaRPr lang="en-US" sz="4000" dirty="0"/>
           </a:p>
@@ -15054,7 +15450,7 @@
                 <a:ea typeface="Times New Roman" pitchFamily="34" charset="-122"/>
                 <a:cs typeface="Times New Roman" pitchFamily="34" charset="-120"/>
               </a:rPr>
-              <a:t>1. Layers of the Earth and their Properties (continued)</a:t>
+              <a:t>DEFINITIONS (continued)</a:t>
             </a:r>
             <a:endParaRPr lang="en-US" sz="3600" dirty="0"/>
           </a:p>
@@ -15096,7 +15492,7 @@
                 <a:ea typeface="Times New Roman" pitchFamily="34" charset="-122"/>
                 <a:cs typeface="Times New Roman" pitchFamily="34" charset="-120"/>
               </a:rPr>
-              <a:t>Mantle: </a:t>
+              <a:t>Landform: </a:t>
             </a:r>
             <a:pPr algn="l" indent="0" marL="0">
               <a:spcAft>
@@ -15113,7 +15509,7 @@
                 <a:ea typeface="Times New Roman" pitchFamily="34" charset="-122"/>
                 <a:cs typeface="Times New Roman" pitchFamily="34" charset="-120"/>
               </a:rPr>
-              <a:t>It is about 2,900 km thick and made of hot, dense rock. Its upper part (asthenosphere) is partly molten and flows slowly, carrying the plates.</a:t>
+              <a:t>It is a natural feature of the surface of the Earth, such as a mountain, a plain or a valley.</a:t>
             </a:r>
             <a:endParaRPr lang="en-US" sz="4000" dirty="0"/>
           </a:p>
@@ -15231,9 +15627,129 @@
           </a:p>
         </p:txBody>
       </p:sp>
+      <p:sp>
+        <p:nvSpPr>
+          <p:cNvPr id="3" name="Text 1"/>
+          <p:cNvSpPr/>
+          <p:nvPr/>
+        </p:nvSpPr>
+        <p:spPr>
+          <a:xfrm>
+            <a:off x="365760" y="1005840"/>
+            <a:ext cx="11460175" cy="731520"/>
+          </a:xfrm>
+          <a:prstGeom prst="rect">
+            <a:avLst/>
+          </a:prstGeom>
+          <a:noFill/>
+          <a:ln/>
+        </p:spPr>
+        <p:txBody>
+          <a:bodyPr wrap="square" lIns="0" tIns="0" rIns="0" bIns="0" rtlCol="0" anchor="ctr">
+            <a:normAutofit/>
+          </a:bodyPr>
+          <a:lstStyle/>
+          <a:p>
+            <a:pPr algn="ctr" indent="0" marL="0">
+              <a:buNone/>
+            </a:pPr>
+            <a:r>
+              <a:rPr lang="en-US" sz="3600" b="1" dirty="0">
+                <a:solidFill>
+                  <a:srgbClr val="990011"/>
+                </a:solidFill>
+                <a:latin typeface="Times New Roman" pitchFamily="34" charset="0"/>
+                <a:ea typeface="Times New Roman" pitchFamily="34" charset="-122"/>
+                <a:cs typeface="Times New Roman" pitchFamily="34" charset="-120"/>
+              </a:rPr>
+              <a:t>1. The Layers of the Earth</a:t>
+            </a:r>
+            <a:endParaRPr lang="en-US" sz="3600" dirty="0"/>
+          </a:p>
+        </p:txBody>
+      </p:sp>
+      <p:sp>
+        <p:nvSpPr>
+          <p:cNvPr id="4" name="Text 2"/>
+          <p:cNvSpPr/>
+          <p:nvPr/>
+        </p:nvSpPr>
+        <p:spPr>
+          <a:xfrm>
+            <a:off x="365760" y="1783080"/>
+            <a:ext cx="4846320" cy="4617720"/>
+          </a:xfrm>
+          <a:prstGeom prst="rect">
+            <a:avLst/>
+          </a:prstGeom>
+          <a:noFill/>
+          <a:ln/>
+        </p:spPr>
+        <p:txBody>
+          <a:bodyPr wrap="square" lIns="0" tIns="0" rIns="0" bIns="0" rtlCol="0" anchor="t"/>
+          <a:lstStyle/>
+          <a:p>
+            <a:pPr algn="l" indent="0" marL="0">
+              <a:spcAft>
+                <a:spcPts val="800"/>
+              </a:spcAft>
+              <a:buNone/>
+            </a:pPr>
+            <a:r>
+              <a:rPr lang="en-US" sz="3600" i="1" dirty="0">
+                <a:solidFill>
+                  <a:srgbClr val="111111"/>
+                </a:solidFill>
+                <a:latin typeface="Times New Roman" pitchFamily="34" charset="0"/>
+                <a:ea typeface="Times New Roman" pitchFamily="34" charset="-122"/>
+                <a:cs typeface="Times New Roman" pitchFamily="34" charset="-120"/>
+              </a:rPr>
+              <a:t>The Earth is made of the following layers:</a:t>
+            </a:r>
+            <a:endParaRPr lang="en-US" sz="3600" dirty="0"/>
+          </a:p>
+          <a:p>
+            <a:pPr algn="l" indent="0" marL="0">
+              <a:spcAft>
+                <a:spcPts val="800"/>
+              </a:spcAft>
+              <a:buNone/>
+            </a:pPr>
+            <a:r>
+              <a:rPr lang="en-US" sz="3600" b="1" dirty="0">
+                <a:solidFill>
+                  <a:srgbClr val="111111"/>
+                </a:solidFill>
+                <a:latin typeface="Times New Roman" pitchFamily="34" charset="0"/>
+                <a:ea typeface="Times New Roman" pitchFamily="34" charset="-122"/>
+                <a:cs typeface="Times New Roman" pitchFamily="34" charset="-120"/>
+              </a:rPr>
+              <a:t>The crust: </a:t>
+            </a:r>
+            <a:pPr algn="l" indent="0" marL="0">
+              <a:spcAft>
+                <a:spcPts val="800"/>
+              </a:spcAft>
+              <a:buNone/>
+            </a:pPr>
+            <a:r>
+              <a:rPr lang="en-US" sz="3600" dirty="0">
+                <a:solidFill>
+                  <a:srgbClr val="111111"/>
+                </a:solidFill>
+                <a:latin typeface="Times New Roman" pitchFamily="34" charset="0"/>
+                <a:ea typeface="Times New Roman" pitchFamily="34" charset="-122"/>
+                <a:cs typeface="Times New Roman" pitchFamily="34" charset="-120"/>
+              </a:rPr>
+              <a:t>It is thin and solid, like the skin of a fruit.</a:t>
+            </a:r>
+            <a:endParaRPr lang="en-US" sz="3600" dirty="0"/>
+          </a:p>
+        </p:txBody>
+      </p:sp>
       <p:pic>
         <p:nvPicPr>
-          <p:cNvPr id="3" name="Image 0" descr="/home/claude/f4/img/minesec_sheet.png">    </p:cNvPr>
+          <p:cNvPr id="5" name="Image 0" descr="/home/claude/f4/img/v2/earth_layers_big.png">    </p:cNvPr>
           <p:cNvPicPr>
             <a:picLocks noChangeAspect="1"/>
           </p:cNvPicPr>
@@ -15247,8 +15763,8 @@
         </p:blipFill>
         <p:spPr>
           <a:xfrm>
-            <a:off x="0" y="658368"/>
-            <a:ext cx="5120640" cy="5833872"/>
+            <a:off x="5349240" y="2617506"/>
+            <a:ext cx="6659575" cy="2601397"/>
           </a:xfrm>
           <a:prstGeom prst="rect">
             <a:avLst/>
@@ -15257,14 +15773,14 @@
       </p:pic>
       <p:sp>
         <p:nvSpPr>
-          <p:cNvPr id="4" name="Text 1"/>
+          <p:cNvPr id="6" name="Text 3"/>
           <p:cNvSpPr/>
           <p:nvPr/>
         </p:nvSpPr>
         <p:spPr>
           <a:xfrm>
-            <a:off x="5349240" y="1005840"/>
-            <a:ext cx="6522415" cy="731520"/>
+            <a:off x="5349240" y="6089904"/>
+            <a:ext cx="6659575" cy="347472"/>
           </a:xfrm>
           <a:prstGeom prst="rect">
             <a:avLst/>
@@ -15273,85 +15789,24 @@
           <a:ln/>
         </p:spPr>
         <p:txBody>
-          <a:bodyPr wrap="square" lIns="0" tIns="0" rIns="0" bIns="0" rtlCol="0" anchor="ctr">
-            <a:normAutofit/>
-          </a:bodyPr>
+          <a:bodyPr wrap="square" lIns="0" tIns="0" rIns="0" bIns="0" rtlCol="0" anchor="ctr"/>
           <a:lstStyle/>
           <a:p>
             <a:pPr algn="ctr" indent="0" marL="0">
               <a:buNone/>
             </a:pPr>
             <a:r>
-              <a:rPr lang="en-US" sz="3600" b="1" dirty="0">
-                <a:solidFill>
-                  <a:srgbClr val="990011"/>
+              <a:rPr lang="en-US" sz="1600" i="1" dirty="0">
+                <a:solidFill>
+                  <a:srgbClr val="555555"/>
                 </a:solidFill>
                 <a:latin typeface="Times New Roman" pitchFamily="34" charset="0"/>
                 <a:ea typeface="Times New Roman" pitchFamily="34" charset="-122"/>
                 <a:cs typeface="Times New Roman" pitchFamily="34" charset="-120"/>
               </a:rPr>
-              <a:t>1. Layers of the Earth and their Properties (continued)</a:t>
-            </a:r>
-            <a:endParaRPr lang="en-US" sz="3600" dirty="0"/>
-          </a:p>
-        </p:txBody>
-      </p:sp>
-      <p:sp>
-        <p:nvSpPr>
-          <p:cNvPr id="5" name="Text 2"/>
-          <p:cNvSpPr/>
-          <p:nvPr/>
-        </p:nvSpPr>
-        <p:spPr>
-          <a:xfrm>
-            <a:off x="5349240" y="1783080"/>
-            <a:ext cx="6522415" cy="4663440"/>
-          </a:xfrm>
-          <a:prstGeom prst="rect">
-            <a:avLst/>
-          </a:prstGeom>
-          <a:noFill/>
-          <a:ln/>
-        </p:spPr>
-        <p:txBody>
-          <a:bodyPr wrap="square" lIns="0" tIns="0" rIns="0" bIns="0" rtlCol="0" anchor="t"/>
-          <a:lstStyle/>
-          <a:p>
-            <a:pPr algn="l" indent="0" marL="0">
-              <a:spcAft>
-                <a:spcPts val="800"/>
-              </a:spcAft>
-              <a:buNone/>
-            </a:pPr>
-            <a:r>
-              <a:rPr lang="en-US" sz="4000" b="1" dirty="0">
-                <a:solidFill>
-                  <a:srgbClr val="111111"/>
-                </a:solidFill>
-                <a:latin typeface="Times New Roman" pitchFamily="34" charset="0"/>
-                <a:ea typeface="Times New Roman" pitchFamily="34" charset="-122"/>
-                <a:cs typeface="Times New Roman" pitchFamily="34" charset="-120"/>
-              </a:rPr>
-              <a:t>Core: </a:t>
-            </a:r>
-            <a:pPr algn="l" indent="0" marL="0">
-              <a:spcAft>
-                <a:spcPts val="800"/>
-              </a:spcAft>
-              <a:buNone/>
-            </a:pPr>
-            <a:r>
-              <a:rPr lang="en-US" sz="4000" dirty="0">
-                <a:solidFill>
-                  <a:srgbClr val="111111"/>
-                </a:solidFill>
-                <a:latin typeface="Times New Roman" pitchFamily="34" charset="0"/>
-                <a:ea typeface="Times New Roman" pitchFamily="34" charset="-122"/>
-                <a:cs typeface="Times New Roman" pitchFamily="34" charset="-120"/>
-              </a:rPr>
-              <a:t>It is made of iron and nickel. The outer core is liquid and creates the Earth's magnetic field, while the inner core is solid.</a:t>
-            </a:r>
-            <a:endParaRPr lang="en-US" sz="4000" dirty="0"/>
+              <a:t>Illustration: the layers of the Earth</a:t>
+            </a:r>
+            <a:endParaRPr lang="en-US" sz="1600" dirty="0"/>
           </a:p>
         </p:txBody>
       </p:sp>
@@ -15588,7 +16043,7 @@
                 <a:ea typeface="Times New Roman" pitchFamily="34" charset="-122"/>
                 <a:cs typeface="Times New Roman" pitchFamily="34" charset="-120"/>
               </a:rPr>
-              <a:t>Draw the geologic time scale in your exercise book and write one event for each era.</a:t>
+              <a:t>Name the three main layers of the Earth.</a:t>
             </a:r>
             <a:endParaRPr lang="en-US" sz="4000" dirty="0"/>
           </a:p>
@@ -15706,48 +16161,9 @@
           </a:p>
         </p:txBody>
       </p:sp>
-      <p:sp>
-        <p:nvSpPr>
-          <p:cNvPr id="3" name="Text 1"/>
-          <p:cNvSpPr/>
-          <p:nvPr/>
-        </p:nvSpPr>
-        <p:spPr>
-          <a:xfrm>
-            <a:off x="457200" y="1005840"/>
-            <a:ext cx="11277295" cy="731520"/>
-          </a:xfrm>
-          <a:prstGeom prst="rect">
-            <a:avLst/>
-          </a:prstGeom>
-          <a:noFill/>
-          <a:ln/>
-        </p:spPr>
-        <p:txBody>
-          <a:bodyPr wrap="square" lIns="0" tIns="0" rIns="0" bIns="0" rtlCol="0" anchor="ctr"/>
-          <a:lstStyle/>
-          <a:p>
-            <a:pPr algn="ctr" indent="0" marL="0">
-              <a:buNone/>
-            </a:pPr>
-            <a:r>
-              <a:rPr lang="en-US" sz="3600" b="1" dirty="0">
-                <a:solidFill>
-                  <a:srgbClr val="990011"/>
-                </a:solidFill>
-                <a:latin typeface="Times New Roman" pitchFamily="34" charset="0"/>
-                <a:ea typeface="Times New Roman" pitchFamily="34" charset="-122"/>
-                <a:cs typeface="Times New Roman" pitchFamily="34" charset="-120"/>
-              </a:rPr>
-              <a:t>1. Layers of the Earth and their Properties</a:t>
-            </a:r>
-            <a:endParaRPr lang="en-US" sz="3600" dirty="0"/>
-          </a:p>
-        </p:txBody>
-      </p:sp>
       <p:pic>
         <p:nvPicPr>
-          <p:cNvPr id="4" name="Image 0" descr="/home/claude/f4/img/v2/earth_layers_big.png">    </p:cNvPr>
+          <p:cNvPr id="3" name="Image 0" descr="/home/claude/f4/img/minesec_sheet.png">    </p:cNvPr>
           <p:cNvPicPr>
             <a:picLocks noChangeAspect="1"/>
           </p:cNvPicPr>
@@ -15761,8 +16177,8 @@
         </p:blipFill>
         <p:spPr>
           <a:xfrm>
-            <a:off x="629930" y="1783080"/>
-            <a:ext cx="10931835" cy="4270248"/>
+            <a:off x="0" y="658368"/>
+            <a:ext cx="5120640" cy="5833872"/>
           </a:xfrm>
           <a:prstGeom prst="rect">
             <a:avLst/>
@@ -15771,14 +16187,14 @@
       </p:pic>
       <p:sp>
         <p:nvSpPr>
-          <p:cNvPr id="5" name="Text 2"/>
+          <p:cNvPr id="4" name="Text 1"/>
           <p:cNvSpPr/>
           <p:nvPr/>
         </p:nvSpPr>
         <p:spPr>
           <a:xfrm>
-            <a:off x="457200" y="6089904"/>
-            <a:ext cx="11277295" cy="347472"/>
+            <a:off x="5349240" y="1005840"/>
+            <a:ext cx="6522415" cy="731520"/>
           </a:xfrm>
           <a:prstGeom prst="rect">
             <a:avLst/>
@@ -15787,24 +16203,110 @@
           <a:ln/>
         </p:spPr>
         <p:txBody>
-          <a:bodyPr wrap="square" lIns="0" tIns="0" rIns="0" bIns="0" rtlCol="0" anchor="ctr"/>
+          <a:bodyPr wrap="square" lIns="0" tIns="0" rIns="0" bIns="0" rtlCol="0" anchor="ctr">
+            <a:normAutofit/>
+          </a:bodyPr>
           <a:lstStyle/>
           <a:p>
             <a:pPr algn="ctr" indent="0" marL="0">
               <a:buNone/>
             </a:pPr>
             <a:r>
-              <a:rPr lang="en-US" sz="1800" i="1" dirty="0">
-                <a:solidFill>
-                  <a:srgbClr val="555555"/>
+              <a:rPr lang="en-US" sz="3600" b="1" dirty="0">
+                <a:solidFill>
+                  <a:srgbClr val="990011"/>
                 </a:solidFill>
                 <a:latin typeface="Times New Roman" pitchFamily="34" charset="0"/>
                 <a:ea typeface="Times New Roman" pitchFamily="34" charset="-122"/>
                 <a:cs typeface="Times New Roman" pitchFamily="34" charset="-120"/>
               </a:rPr>
-              <a:t>Illustration: the layers of the Earth</a:t>
-            </a:r>
-            <a:endParaRPr lang="en-US" sz="1800" dirty="0"/>
+              <a:t>1. The Layers of the Earth</a:t>
+            </a:r>
+            <a:endParaRPr lang="en-US" sz="3600" dirty="0"/>
+          </a:p>
+        </p:txBody>
+      </p:sp>
+      <p:sp>
+        <p:nvSpPr>
+          <p:cNvPr id="5" name="Text 2"/>
+          <p:cNvSpPr/>
+          <p:nvPr/>
+        </p:nvSpPr>
+        <p:spPr>
+          <a:xfrm>
+            <a:off x="5349240" y="1783080"/>
+            <a:ext cx="6522415" cy="4663440"/>
+          </a:xfrm>
+          <a:prstGeom prst="rect">
+            <a:avLst/>
+          </a:prstGeom>
+          <a:noFill/>
+          <a:ln/>
+        </p:spPr>
+        <p:txBody>
+          <a:bodyPr wrap="square" lIns="0" tIns="0" rIns="0" bIns="0" rtlCol="0" anchor="t"/>
+          <a:lstStyle/>
+          <a:p>
+            <a:pPr algn="l" indent="0" marL="0">
+              <a:spcAft>
+                <a:spcPts val="800"/>
+              </a:spcAft>
+              <a:buNone/>
+            </a:pPr>
+            <a:r>
+              <a:rPr lang="en-US" sz="4000" b="1" dirty="0">
+                <a:solidFill>
+                  <a:srgbClr val="111111"/>
+                </a:solidFill>
+                <a:latin typeface="Times New Roman" pitchFamily="34" charset="0"/>
+                <a:ea typeface="Times New Roman" pitchFamily="34" charset="-122"/>
+                <a:cs typeface="Times New Roman" pitchFamily="34" charset="-120"/>
+              </a:rPr>
+              <a:t>Types of crust:</a:t>
+            </a:r>
+            <a:endParaRPr lang="en-US" sz="4000" dirty="0"/>
+          </a:p>
+          <a:p>
+            <a:pPr algn="l" marL="342900" indent="-342900">
+              <a:spcAft>
+                <a:spcPts val="800"/>
+              </a:spcAft>
+              <a:buSzPct val="100000"/>
+              <a:buChar char="•"/>
+            </a:pPr>
+            <a:r>
+              <a:rPr lang="en-US" sz="4000" dirty="0">
+                <a:solidFill>
+                  <a:srgbClr val="111111"/>
+                </a:solidFill>
+                <a:latin typeface="Times New Roman" pitchFamily="34" charset="0"/>
+                <a:ea typeface="Times New Roman" pitchFamily="34" charset="-122"/>
+                <a:cs typeface="Times New Roman" pitchFamily="34" charset="-120"/>
+              </a:rPr>
+              <a:t>Continental crust: thick (up to 70 km under mountains), light, granitic.</a:t>
+            </a:r>
+            <a:endParaRPr lang="en-US" sz="4000" dirty="0"/>
+          </a:p>
+          <a:p>
+            <a:pPr algn="l" marL="342900" indent="-342900">
+              <a:spcAft>
+                <a:spcPts val="800"/>
+              </a:spcAft>
+              <a:buSzPct val="100000"/>
+              <a:buChar char="•"/>
+            </a:pPr>
+            <a:r>
+              <a:rPr lang="en-US" sz="4000" dirty="0">
+                <a:solidFill>
+                  <a:srgbClr val="111111"/>
+                </a:solidFill>
+                <a:latin typeface="Times New Roman" pitchFamily="34" charset="0"/>
+                <a:ea typeface="Times New Roman" pitchFamily="34" charset="-122"/>
+                <a:cs typeface="Times New Roman" pitchFamily="34" charset="-120"/>
+              </a:rPr>
+              <a:t>Oceanic crust: thin (about 7 km), dense, basaltic.</a:t>
+            </a:r>
+            <a:endParaRPr lang="en-US" sz="4000" dirty="0"/>
           </a:p>
         </p:txBody>
       </p:sp>
@@ -15937,7 +16439,7 @@
         <p:spPr>
           <a:xfrm>
             <a:off x="0" y="658368"/>
-            <a:ext cx="5120640" cy="5833872"/>
+            <a:ext cx="2468880" cy="5833872"/>
           </a:xfrm>
           <a:prstGeom prst="rect">
             <a:avLst/>
@@ -15952,8 +16454,8 @@
         </p:nvSpPr>
         <p:spPr>
           <a:xfrm>
-            <a:off x="5349240" y="1005840"/>
-            <a:ext cx="6522415" cy="731520"/>
+            <a:off x="2697480" y="1005840"/>
+            <a:ext cx="9174175" cy="731520"/>
           </a:xfrm>
           <a:prstGeom prst="rect">
             <a:avLst/>
@@ -15979,7 +16481,7 @@
                 <a:ea typeface="Times New Roman" pitchFamily="34" charset="-122"/>
                 <a:cs typeface="Times New Roman" pitchFamily="34" charset="-120"/>
               </a:rPr>
-              <a:t>2. The Rock Material Cycle</a:t>
+              <a:t>1. The Layers of the Earth (continued)</a:t>
             </a:r>
             <a:endParaRPr lang="en-US" sz="3600" dirty="0"/>
           </a:p>
@@ -15993,8 +16495,8 @@
         </p:nvSpPr>
         <p:spPr>
           <a:xfrm>
-            <a:off x="5349240" y="1783080"/>
-            <a:ext cx="6522415" cy="4663440"/>
+            <a:off x="2697480" y="1783080"/>
+            <a:ext cx="9174175" cy="4663440"/>
           </a:xfrm>
           <a:prstGeom prst="rect">
             <a:avLst/>
@@ -16013,7 +16515,7 @@
               <a:buNone/>
             </a:pPr>
             <a:r>
-              <a:rPr lang="en-US" sz="4000" i="1" dirty="0">
+              <a:rPr lang="en-US" sz="4000" b="1" dirty="0">
                 <a:solidFill>
                   <a:srgbClr val="111111"/>
                 </a:solidFill>
@@ -16021,11 +16523,8 @@
                 <a:ea typeface="Times New Roman" pitchFamily="34" charset="-122"/>
                 <a:cs typeface="Times New Roman" pitchFamily="34" charset="-120"/>
               </a:rPr>
-              <a:t>Rocks change from one type to another as follows:</a:t>
-            </a:r>
-            <a:endParaRPr lang="en-US" sz="4000" dirty="0"/>
-          </a:p>
-          <a:p>
+              <a:t>The mantle: </a:t>
+            </a:r>
             <a:pPr algn="l" indent="0" marL="0">
               <a:spcAft>
                 <a:spcPts val="800"/>
@@ -16033,7 +16532,7 @@
               <a:buNone/>
             </a:pPr>
             <a:r>
-              <a:rPr lang="en-US" sz="4000" b="1" dirty="0">
+              <a:rPr lang="en-US" sz="4000" dirty="0">
                 <a:solidFill>
                   <a:srgbClr val="111111"/>
                 </a:solidFill>
@@ -16041,8 +16540,11 @@
                 <a:ea typeface="Times New Roman" pitchFamily="34" charset="-122"/>
                 <a:cs typeface="Times New Roman" pitchFamily="34" charset="-120"/>
               </a:rPr>
-              <a:t>Igneous rocks: </a:t>
-            </a:r>
+              <a:t>It is the thickest layer (about 84 % of the volume of the Earth), made of hot rock that flows very slowly like thick honey.</a:t>
+            </a:r>
+            <a:endParaRPr lang="en-US" sz="4000" dirty="0"/>
+          </a:p>
+          <a:p>
             <a:pPr algn="l" indent="0" marL="0">
               <a:spcAft>
                 <a:spcPts val="800"/>
@@ -16050,7 +16552,7 @@
               <a:buNone/>
             </a:pPr>
             <a:r>
-              <a:rPr lang="en-US" sz="4000" dirty="0">
+              <a:rPr lang="en-US" sz="4000" b="1" dirty="0">
                 <a:solidFill>
                   <a:srgbClr val="111111"/>
                 </a:solidFill>
@@ -16058,7 +16560,24 @@
                 <a:ea typeface="Times New Roman" pitchFamily="34" charset="-122"/>
                 <a:cs typeface="Times New Roman" pitchFamily="34" charset="-120"/>
               </a:rPr>
-              <a:t>They form when magma cools, like granite and basalt. Weathering breaks them into sediments.</a:t>
+              <a:t>Role of the mantle: </a:t>
+            </a:r>
+            <a:pPr algn="l" indent="0" marL="0">
+              <a:spcAft>
+                <a:spcPts val="800"/>
+              </a:spcAft>
+              <a:buNone/>
+            </a:pPr>
+            <a:r>
+              <a:rPr lang="en-US" sz="4000" dirty="0">
+                <a:solidFill>
+                  <a:srgbClr val="111111"/>
+                </a:solidFill>
+                <a:latin typeface="Times New Roman" pitchFamily="34" charset="0"/>
+                <a:ea typeface="Times New Roman" pitchFamily="34" charset="-122"/>
+                <a:cs typeface="Times New Roman" pitchFamily="34" charset="-120"/>
+              </a:rPr>
+              <a:t>Movements of heat in the mantle drive the movement of the continents.</a:t>
             </a:r>
             <a:endParaRPr lang="en-US" sz="4000" dirty="0"/>
           </a:p>
@@ -16176,9 +16695,109 @@
           </a:p>
         </p:txBody>
       </p:sp>
+      <p:sp>
+        <p:nvSpPr>
+          <p:cNvPr id="3" name="Text 1"/>
+          <p:cNvSpPr/>
+          <p:nvPr/>
+        </p:nvSpPr>
+        <p:spPr>
+          <a:xfrm>
+            <a:off x="365760" y="1005840"/>
+            <a:ext cx="11460175" cy="731520"/>
+          </a:xfrm>
+          <a:prstGeom prst="rect">
+            <a:avLst/>
+          </a:prstGeom>
+          <a:noFill/>
+          <a:ln/>
+        </p:spPr>
+        <p:txBody>
+          <a:bodyPr wrap="square" lIns="0" tIns="0" rIns="0" bIns="0" rtlCol="0" anchor="ctr">
+            <a:normAutofit/>
+          </a:bodyPr>
+          <a:lstStyle/>
+          <a:p>
+            <a:pPr algn="ctr" indent="0" marL="0">
+              <a:buNone/>
+            </a:pPr>
+            <a:r>
+              <a:rPr lang="en-US" sz="3600" b="1" dirty="0">
+                <a:solidFill>
+                  <a:srgbClr val="990011"/>
+                </a:solidFill>
+                <a:latin typeface="Times New Roman" pitchFamily="34" charset="0"/>
+                <a:ea typeface="Times New Roman" pitchFamily="34" charset="-122"/>
+                <a:cs typeface="Times New Roman" pitchFamily="34" charset="-120"/>
+              </a:rPr>
+              <a:t>1. The Layers of the Earth</a:t>
+            </a:r>
+            <a:endParaRPr lang="en-US" sz="3600" dirty="0"/>
+          </a:p>
+        </p:txBody>
+      </p:sp>
+      <p:sp>
+        <p:nvSpPr>
+          <p:cNvPr id="4" name="Text 2"/>
+          <p:cNvSpPr/>
+          <p:nvPr/>
+        </p:nvSpPr>
+        <p:spPr>
+          <a:xfrm>
+            <a:off x="365760" y="1783080"/>
+            <a:ext cx="4846320" cy="4617720"/>
+          </a:xfrm>
+          <a:prstGeom prst="rect">
+            <a:avLst/>
+          </a:prstGeom>
+          <a:noFill/>
+          <a:ln/>
+        </p:spPr>
+        <p:txBody>
+          <a:bodyPr wrap="square" lIns="0" tIns="0" rIns="0" bIns="0" rtlCol="0" anchor="t"/>
+          <a:lstStyle/>
+          <a:p>
+            <a:pPr algn="l" indent="0" marL="0">
+              <a:spcAft>
+                <a:spcPts val="800"/>
+              </a:spcAft>
+              <a:buNone/>
+            </a:pPr>
+            <a:r>
+              <a:rPr lang="en-US" sz="3600" b="1" dirty="0">
+                <a:solidFill>
+                  <a:srgbClr val="111111"/>
+                </a:solidFill>
+                <a:latin typeface="Times New Roman" pitchFamily="34" charset="0"/>
+                <a:ea typeface="Times New Roman" pitchFamily="34" charset="-122"/>
+                <a:cs typeface="Times New Roman" pitchFamily="34" charset="-120"/>
+              </a:rPr>
+              <a:t>The core: </a:t>
+            </a:r>
+            <a:pPr algn="l" indent="0" marL="0">
+              <a:spcAft>
+                <a:spcPts val="800"/>
+              </a:spcAft>
+              <a:buNone/>
+            </a:pPr>
+            <a:r>
+              <a:rPr lang="en-US" sz="3600" dirty="0">
+                <a:solidFill>
+                  <a:srgbClr val="111111"/>
+                </a:solidFill>
+                <a:latin typeface="Times New Roman" pitchFamily="34" charset="0"/>
+                <a:ea typeface="Times New Roman" pitchFamily="34" charset="-122"/>
+                <a:cs typeface="Times New Roman" pitchFamily="34" charset="-120"/>
+              </a:rPr>
+              <a:t>It has a liquid outer core and a solid inner core, both made of iron and nickel.</a:t>
+            </a:r>
+            <a:endParaRPr lang="en-US" sz="3600" dirty="0"/>
+          </a:p>
+        </p:txBody>
+      </p:sp>
       <p:pic>
         <p:nvPicPr>
-          <p:cNvPr id="3" name="Image 0" descr="/home/claude/f4/img/minesec_sheet.png">    </p:cNvPr>
+          <p:cNvPr id="5" name="Image 0" descr="/home/claude/f4/img/v2/earth_disc_big.png">    </p:cNvPr>
           <p:cNvPicPr>
             <a:picLocks noChangeAspect="1"/>
           </p:cNvPicPr>
@@ -16192,8 +16811,8 @@
         </p:blipFill>
         <p:spPr>
           <a:xfrm>
-            <a:off x="0" y="658368"/>
-            <a:ext cx="5120640" cy="5833872"/>
+            <a:off x="5349240" y="2617506"/>
+            <a:ext cx="6659575" cy="2601397"/>
           </a:xfrm>
           <a:prstGeom prst="rect">
             <a:avLst/>
@@ -16202,14 +16821,14 @@
       </p:pic>
       <p:sp>
         <p:nvSpPr>
-          <p:cNvPr id="4" name="Text 1"/>
+          <p:cNvPr id="6" name="Text 3"/>
           <p:cNvSpPr/>
           <p:nvPr/>
         </p:nvSpPr>
         <p:spPr>
           <a:xfrm>
-            <a:off x="5349240" y="1005840"/>
-            <a:ext cx="6522415" cy="731520"/>
+            <a:off x="5349240" y="6089904"/>
+            <a:ext cx="6659575" cy="347472"/>
           </a:xfrm>
           <a:prstGeom prst="rect">
             <a:avLst/>
@@ -16218,85 +16837,24 @@
           <a:ln/>
         </p:spPr>
         <p:txBody>
-          <a:bodyPr wrap="square" lIns="0" tIns="0" rIns="0" bIns="0" rtlCol="0" anchor="ctr">
-            <a:normAutofit/>
-          </a:bodyPr>
+          <a:bodyPr wrap="square" lIns="0" tIns="0" rIns="0" bIns="0" rtlCol="0" anchor="ctr"/>
           <a:lstStyle/>
           <a:p>
             <a:pPr algn="ctr" indent="0" marL="0">
               <a:buNone/>
             </a:pPr>
             <a:r>
-              <a:rPr lang="en-US" sz="3600" b="1" dirty="0">
-                <a:solidFill>
-                  <a:srgbClr val="990011"/>
+              <a:rPr lang="en-US" sz="1600" i="1" dirty="0">
+                <a:solidFill>
+                  <a:srgbClr val="555555"/>
                 </a:solidFill>
                 <a:latin typeface="Times New Roman" pitchFamily="34" charset="0"/>
                 <a:ea typeface="Times New Roman" pitchFamily="34" charset="-122"/>
                 <a:cs typeface="Times New Roman" pitchFamily="34" charset="-120"/>
               </a:rPr>
-              <a:t>2. The Rock Material Cycle (continued)</a:t>
-            </a:r>
-            <a:endParaRPr lang="en-US" sz="3600" dirty="0"/>
-          </a:p>
-        </p:txBody>
-      </p:sp>
-      <p:sp>
-        <p:nvSpPr>
-          <p:cNvPr id="5" name="Text 2"/>
-          <p:cNvSpPr/>
-          <p:nvPr/>
-        </p:nvSpPr>
-        <p:spPr>
-          <a:xfrm>
-            <a:off x="5349240" y="1783080"/>
-            <a:ext cx="6522415" cy="4663440"/>
-          </a:xfrm>
-          <a:prstGeom prst="rect">
-            <a:avLst/>
-          </a:prstGeom>
-          <a:noFill/>
-          <a:ln/>
-        </p:spPr>
-        <p:txBody>
-          <a:bodyPr wrap="square" lIns="0" tIns="0" rIns="0" bIns="0" rtlCol="0" anchor="t"/>
-          <a:lstStyle/>
-          <a:p>
-            <a:pPr algn="l" indent="0" marL="0">
-              <a:spcAft>
-                <a:spcPts val="800"/>
-              </a:spcAft>
-              <a:buNone/>
-            </a:pPr>
-            <a:r>
-              <a:rPr lang="en-US" sz="4000" b="1" dirty="0">
-                <a:solidFill>
-                  <a:srgbClr val="111111"/>
-                </a:solidFill>
-                <a:latin typeface="Times New Roman" pitchFamily="34" charset="0"/>
-                <a:ea typeface="Times New Roman" pitchFamily="34" charset="-122"/>
-                <a:cs typeface="Times New Roman" pitchFamily="34" charset="-120"/>
-              </a:rPr>
-              <a:t>Sedimentary rocks: </a:t>
-            </a:r>
-            <a:pPr algn="l" indent="0" marL="0">
-              <a:spcAft>
-                <a:spcPts val="800"/>
-              </a:spcAft>
-              <a:buNone/>
-            </a:pPr>
-            <a:r>
-              <a:rPr lang="en-US" sz="4000" dirty="0">
-                <a:solidFill>
-                  <a:srgbClr val="111111"/>
-                </a:solidFill>
-                <a:latin typeface="Times New Roman" pitchFamily="34" charset="0"/>
-                <a:ea typeface="Times New Roman" pitchFamily="34" charset="-122"/>
-                <a:cs typeface="Times New Roman" pitchFamily="34" charset="-120"/>
-              </a:rPr>
-              <a:t>They form when sediments are deposited, compacted and cemented, like sandstone and limestone. Heat and pressure can change them.</a:t>
-            </a:r>
-            <a:endParaRPr lang="en-US" sz="4000" dirty="0"/>
+              <a:t>Illustration: boundaries inside the Earth</a:t>
+            </a:r>
+            <a:endParaRPr lang="en-US" sz="1600" dirty="0"/>
           </a:p>
         </p:txBody>
       </p:sp>
@@ -16412,9 +16970,129 @@
           </a:p>
         </p:txBody>
       </p:sp>
+      <p:sp>
+        <p:nvSpPr>
+          <p:cNvPr id="3" name="Text 1"/>
+          <p:cNvSpPr/>
+          <p:nvPr/>
+        </p:nvSpPr>
+        <p:spPr>
+          <a:xfrm>
+            <a:off x="365760" y="1005840"/>
+            <a:ext cx="11460175" cy="731520"/>
+          </a:xfrm>
+          <a:prstGeom prst="rect">
+            <a:avLst/>
+          </a:prstGeom>
+          <a:noFill/>
+          <a:ln/>
+        </p:spPr>
+        <p:txBody>
+          <a:bodyPr wrap="square" lIns="0" tIns="0" rIns="0" bIns="0" rtlCol="0" anchor="ctr">
+            <a:normAutofit/>
+          </a:bodyPr>
+          <a:lstStyle/>
+          <a:p>
+            <a:pPr algn="ctr" indent="0" marL="0">
+              <a:buNone/>
+            </a:pPr>
+            <a:r>
+              <a:rPr lang="en-US" sz="3600" b="1" dirty="0">
+                <a:solidFill>
+                  <a:srgbClr val="990011"/>
+                </a:solidFill>
+                <a:latin typeface="Times New Roman" pitchFamily="34" charset="0"/>
+                <a:ea typeface="Times New Roman" pitchFamily="34" charset="-122"/>
+                <a:cs typeface="Times New Roman" pitchFamily="34" charset="-120"/>
+              </a:rPr>
+              <a:t>2. The Rock Cycle</a:t>
+            </a:r>
+            <a:endParaRPr lang="en-US" sz="3600" dirty="0"/>
+          </a:p>
+        </p:txBody>
+      </p:sp>
+      <p:sp>
+        <p:nvSpPr>
+          <p:cNvPr id="4" name="Text 2"/>
+          <p:cNvSpPr/>
+          <p:nvPr/>
+        </p:nvSpPr>
+        <p:spPr>
+          <a:xfrm>
+            <a:off x="365760" y="1783080"/>
+            <a:ext cx="4846320" cy="4617720"/>
+          </a:xfrm>
+          <a:prstGeom prst="rect">
+            <a:avLst/>
+          </a:prstGeom>
+          <a:noFill/>
+          <a:ln/>
+        </p:spPr>
+        <p:txBody>
+          <a:bodyPr wrap="square" lIns="0" tIns="0" rIns="0" bIns="0" rtlCol="0" anchor="t"/>
+          <a:lstStyle/>
+          <a:p>
+            <a:pPr algn="l" indent="0" marL="0">
+              <a:spcAft>
+                <a:spcPts val="800"/>
+              </a:spcAft>
+              <a:buNone/>
+            </a:pPr>
+            <a:r>
+              <a:rPr lang="en-US" sz="3600" i="1" dirty="0">
+                <a:solidFill>
+                  <a:srgbClr val="111111"/>
+                </a:solidFill>
+                <a:latin typeface="Times New Roman" pitchFamily="34" charset="0"/>
+                <a:ea typeface="Times New Roman" pitchFamily="34" charset="-122"/>
+                <a:cs typeface="Times New Roman" pitchFamily="34" charset="-120"/>
+              </a:rPr>
+              <a:t>The rock cycle and the three types of rocks are presented as follows:</a:t>
+            </a:r>
+            <a:endParaRPr lang="en-US" sz="3600" dirty="0"/>
+          </a:p>
+          <a:p>
+            <a:pPr algn="l" indent="0" marL="0">
+              <a:spcAft>
+                <a:spcPts val="800"/>
+              </a:spcAft>
+              <a:buNone/>
+            </a:pPr>
+            <a:r>
+              <a:rPr lang="en-US" sz="3600" b="1" dirty="0">
+                <a:solidFill>
+                  <a:srgbClr val="111111"/>
+                </a:solidFill>
+                <a:latin typeface="Times New Roman" pitchFamily="34" charset="0"/>
+                <a:ea typeface="Times New Roman" pitchFamily="34" charset="-122"/>
+                <a:cs typeface="Times New Roman" pitchFamily="34" charset="-120"/>
+              </a:rPr>
+              <a:t>The rock cycle: </a:t>
+            </a:r>
+            <a:pPr algn="l" indent="0" marL="0">
+              <a:spcAft>
+                <a:spcPts val="800"/>
+              </a:spcAft>
+              <a:buNone/>
+            </a:pPr>
+            <a:r>
+              <a:rPr lang="en-US" sz="3600" dirty="0">
+                <a:solidFill>
+                  <a:srgbClr val="111111"/>
+                </a:solidFill>
+                <a:latin typeface="Times New Roman" pitchFamily="34" charset="0"/>
+                <a:ea typeface="Times New Roman" pitchFamily="34" charset="-122"/>
+                <a:cs typeface="Times New Roman" pitchFamily="34" charset="-120"/>
+              </a:rPr>
+              <a:t>Rocks are always changing: they form, break down and form again.</a:t>
+            </a:r>
+            <a:endParaRPr lang="en-US" sz="3600" dirty="0"/>
+          </a:p>
+        </p:txBody>
+      </p:sp>
       <p:pic>
         <p:nvPicPr>
-          <p:cNvPr id="3" name="Image 0" descr="/home/claude/f4/img/minesec_sheet.png">    </p:cNvPr>
+          <p:cNvPr id="5" name="Image 0" descr="/home/claude/f4/img/v2/rock_cycle_big.png">    </p:cNvPr>
           <p:cNvPicPr>
             <a:picLocks noChangeAspect="1"/>
           </p:cNvPicPr>
@@ -16428,8 +17106,8 @@
         </p:blipFill>
         <p:spPr>
           <a:xfrm>
-            <a:off x="0" y="658368"/>
-            <a:ext cx="5120640" cy="5833872"/>
+            <a:off x="5349240" y="2617506"/>
+            <a:ext cx="6659575" cy="2601397"/>
           </a:xfrm>
           <a:prstGeom prst="rect">
             <a:avLst/>
@@ -16438,14 +17116,14 @@
       </p:pic>
       <p:sp>
         <p:nvSpPr>
-          <p:cNvPr id="4" name="Text 1"/>
+          <p:cNvPr id="6" name="Text 3"/>
           <p:cNvSpPr/>
           <p:nvPr/>
         </p:nvSpPr>
         <p:spPr>
           <a:xfrm>
-            <a:off x="5349240" y="1005840"/>
-            <a:ext cx="6522415" cy="731520"/>
+            <a:off x="5349240" y="6089904"/>
+            <a:ext cx="6659575" cy="347472"/>
           </a:xfrm>
           <a:prstGeom prst="rect">
             <a:avLst/>
@@ -16454,85 +17132,24 @@
           <a:ln/>
         </p:spPr>
         <p:txBody>
-          <a:bodyPr wrap="square" lIns="0" tIns="0" rIns="0" bIns="0" rtlCol="0" anchor="ctr">
-            <a:normAutofit/>
-          </a:bodyPr>
+          <a:bodyPr wrap="square" lIns="0" tIns="0" rIns="0" bIns="0" rtlCol="0" anchor="ctr"/>
           <a:lstStyle/>
           <a:p>
             <a:pPr algn="ctr" indent="0" marL="0">
               <a:buNone/>
             </a:pPr>
             <a:r>
-              <a:rPr lang="en-US" sz="3600" b="1" dirty="0">
-                <a:solidFill>
-                  <a:srgbClr val="990011"/>
+              <a:rPr lang="en-US" sz="1600" i="1" dirty="0">
+                <a:solidFill>
+                  <a:srgbClr val="555555"/>
                 </a:solidFill>
                 <a:latin typeface="Times New Roman" pitchFamily="34" charset="0"/>
                 <a:ea typeface="Times New Roman" pitchFamily="34" charset="-122"/>
                 <a:cs typeface="Times New Roman" pitchFamily="34" charset="-120"/>
               </a:rPr>
-              <a:t>2. The Rock Material Cycle (continued)</a:t>
-            </a:r>
-            <a:endParaRPr lang="en-US" sz="3600" dirty="0"/>
-          </a:p>
-        </p:txBody>
-      </p:sp>
-      <p:sp>
-        <p:nvSpPr>
-          <p:cNvPr id="5" name="Text 2"/>
-          <p:cNvSpPr/>
-          <p:nvPr/>
-        </p:nvSpPr>
-        <p:spPr>
-          <a:xfrm>
-            <a:off x="5349240" y="1783080"/>
-            <a:ext cx="6522415" cy="4663440"/>
-          </a:xfrm>
-          <a:prstGeom prst="rect">
-            <a:avLst/>
-          </a:prstGeom>
-          <a:noFill/>
-          <a:ln/>
-        </p:spPr>
-        <p:txBody>
-          <a:bodyPr wrap="square" lIns="0" tIns="0" rIns="0" bIns="0" rtlCol="0" anchor="t"/>
-          <a:lstStyle/>
-          <a:p>
-            <a:pPr algn="l" indent="0" marL="0">
-              <a:spcAft>
-                <a:spcPts val="800"/>
-              </a:spcAft>
-              <a:buNone/>
-            </a:pPr>
-            <a:r>
-              <a:rPr lang="en-US" sz="4000" b="1" dirty="0">
-                <a:solidFill>
-                  <a:srgbClr val="111111"/>
-                </a:solidFill>
-                <a:latin typeface="Times New Roman" pitchFamily="34" charset="0"/>
-                <a:ea typeface="Times New Roman" pitchFamily="34" charset="-122"/>
-                <a:cs typeface="Times New Roman" pitchFamily="34" charset="-120"/>
-              </a:rPr>
-              <a:t>Metamorphic rocks: </a:t>
-            </a:r>
-            <a:pPr algn="l" indent="0" marL="0">
-              <a:spcAft>
-                <a:spcPts val="800"/>
-              </a:spcAft>
-              <a:buNone/>
-            </a:pPr>
-            <a:r>
-              <a:rPr lang="en-US" sz="4000" dirty="0">
-                <a:solidFill>
-                  <a:srgbClr val="111111"/>
-                </a:solidFill>
-                <a:latin typeface="Times New Roman" pitchFamily="34" charset="0"/>
-                <a:ea typeface="Times New Roman" pitchFamily="34" charset="-122"/>
-                <a:cs typeface="Times New Roman" pitchFamily="34" charset="-120"/>
-              </a:rPr>
-              <a:t>They form when rocks are changed by heat and pressure, like marble and gneiss. If they melt, they become magma again.</a:t>
-            </a:r>
-            <a:endParaRPr lang="en-US" sz="4000" dirty="0"/>
+              <a:t>Illustration: the rock cycle</a:t>
+            </a:r>
+            <a:endParaRPr lang="en-US" sz="1600" dirty="0"/>
           </a:p>
         </p:txBody>
       </p:sp>
@@ -16656,8 +17273,8 @@
         </p:nvSpPr>
         <p:spPr>
           <a:xfrm>
-            <a:off x="457200" y="1005840"/>
-            <a:ext cx="11277295" cy="731520"/>
+            <a:off x="365760" y="1005840"/>
+            <a:ext cx="11460175" cy="731520"/>
           </a:xfrm>
           <a:prstGeom prst="rect">
             <a:avLst/>
@@ -16666,7 +17283,9 @@
           <a:ln/>
         </p:spPr>
         <p:txBody>
-          <a:bodyPr wrap="square" lIns="0" tIns="0" rIns="0" bIns="0" rtlCol="0" anchor="ctr"/>
+          <a:bodyPr wrap="square" lIns="0" tIns="0" rIns="0" bIns="0" rtlCol="0" anchor="ctr">
+            <a:normAutofit/>
+          </a:bodyPr>
           <a:lstStyle/>
           <a:p>
             <a:pPr algn="ctr" indent="0" marL="0">
@@ -16681,7 +17300,66 @@
                 <a:ea typeface="Times New Roman" pitchFamily="34" charset="-122"/>
                 <a:cs typeface="Times New Roman" pitchFamily="34" charset="-120"/>
               </a:rPr>
-              <a:t>2. The Rock Material Cycle</a:t>
+              <a:t>2. The Rock Cycle</a:t>
+            </a:r>
+            <a:endParaRPr lang="en-US" sz="3600" dirty="0"/>
+          </a:p>
+        </p:txBody>
+      </p:sp>
+      <p:sp>
+        <p:nvSpPr>
+          <p:cNvPr id="4" name="Text 2"/>
+          <p:cNvSpPr/>
+          <p:nvPr/>
+        </p:nvSpPr>
+        <p:spPr>
+          <a:xfrm>
+            <a:off x="365760" y="1783080"/>
+            <a:ext cx="4846320" cy="4617720"/>
+          </a:xfrm>
+          <a:prstGeom prst="rect">
+            <a:avLst/>
+          </a:prstGeom>
+          <a:noFill/>
+          <a:ln/>
+        </p:spPr>
+        <p:txBody>
+          <a:bodyPr wrap="square" lIns="0" tIns="0" rIns="0" bIns="0" rtlCol="0" anchor="t"/>
+          <a:lstStyle/>
+          <a:p>
+            <a:pPr algn="l" indent="0" marL="0">
+              <a:spcAft>
+                <a:spcPts val="800"/>
+              </a:spcAft>
+              <a:buNone/>
+            </a:pPr>
+            <a:r>
+              <a:rPr lang="en-US" sz="3600" b="1" dirty="0">
+                <a:solidFill>
+                  <a:srgbClr val="111111"/>
+                </a:solidFill>
+                <a:latin typeface="Times New Roman" pitchFamily="34" charset="0"/>
+                <a:ea typeface="Times New Roman" pitchFamily="34" charset="-122"/>
+                <a:cs typeface="Times New Roman" pitchFamily="34" charset="-120"/>
+              </a:rPr>
+              <a:t>Igneous rocks: </a:t>
+            </a:r>
+            <a:pPr algn="l" indent="0" marL="0">
+              <a:spcAft>
+                <a:spcPts val="800"/>
+              </a:spcAft>
+              <a:buNone/>
+            </a:pPr>
+            <a:r>
+              <a:rPr lang="en-US" sz="3600" dirty="0">
+                <a:solidFill>
+                  <a:srgbClr val="111111"/>
+                </a:solidFill>
+                <a:latin typeface="Times New Roman" pitchFamily="34" charset="0"/>
+                <a:ea typeface="Times New Roman" pitchFamily="34" charset="-122"/>
+                <a:cs typeface="Times New Roman" pitchFamily="34" charset="-120"/>
+              </a:rPr>
+              <a:t>They form when magma or lava cools, such as granite and basalt.</a:t>
             </a:r>
             <a:endParaRPr lang="en-US" sz="3600" dirty="0"/>
           </a:p>
@@ -16689,7 +17367,7 @@
       </p:sp>
       <p:pic>
         <p:nvPicPr>
-          <p:cNvPr id="4" name="Image 0" descr="/home/claude/f4/img/v2/rock_cycle_big.png">    </p:cNvPr>
+          <p:cNvPr id="5" name="Image 0" descr="/home/claude/f4/img/v2/f4_granite.jpg">    </p:cNvPr>
           <p:cNvPicPr>
             <a:picLocks noChangeAspect="1"/>
           </p:cNvPicPr>
@@ -16703,8 +17381,8 @@
         </p:blipFill>
         <p:spPr>
           <a:xfrm>
-            <a:off x="629930" y="1783080"/>
-            <a:ext cx="10931835" cy="4270248"/>
+            <a:off x="5349240" y="2071212"/>
+            <a:ext cx="6659575" cy="3693983"/>
           </a:xfrm>
           <a:prstGeom prst="rect">
             <a:avLst/>
@@ -16713,14 +17391,14 @@
       </p:pic>
       <p:sp>
         <p:nvSpPr>
-          <p:cNvPr id="5" name="Text 2"/>
+          <p:cNvPr id="6" name="Text 3"/>
           <p:cNvSpPr/>
           <p:nvPr/>
         </p:nvSpPr>
         <p:spPr>
           <a:xfrm>
-            <a:off x="457200" y="6089904"/>
-            <a:ext cx="11277295" cy="347472"/>
+            <a:off x="5349240" y="6089904"/>
+            <a:ext cx="6659575" cy="347472"/>
           </a:xfrm>
           <a:prstGeom prst="rect">
             <a:avLst/>
@@ -16736,7 +17414,7 @@
               <a:buNone/>
             </a:pPr>
             <a:r>
-              <a:rPr lang="en-US" sz="1800" i="1" dirty="0">
+              <a:rPr lang="en-US" sz="1600" i="1" dirty="0">
                 <a:solidFill>
                   <a:srgbClr val="555555"/>
                 </a:solidFill>
@@ -16744,9 +17422,9 @@
                 <a:ea typeface="Times New Roman" pitchFamily="34" charset="-122"/>
                 <a:cs typeface="Times New Roman" pitchFamily="34" charset="-120"/>
               </a:rPr>
-              <a:t>Illustration: the rock cycle</a:t>
-            </a:r>
-            <a:endParaRPr lang="en-US" sz="1800" dirty="0"/>
+              <a:t>Illustration: granite</a:t>
+            </a:r>
+            <a:endParaRPr lang="en-US" sz="1600" dirty="0"/>
           </a:p>
         </p:txBody>
       </p:sp>
@@ -16862,9 +17540,109 @@
           </a:p>
         </p:txBody>
       </p:sp>
+      <p:sp>
+        <p:nvSpPr>
+          <p:cNvPr id="3" name="Text 1"/>
+          <p:cNvSpPr/>
+          <p:nvPr/>
+        </p:nvSpPr>
+        <p:spPr>
+          <a:xfrm>
+            <a:off x="365760" y="1005840"/>
+            <a:ext cx="11460175" cy="731520"/>
+          </a:xfrm>
+          <a:prstGeom prst="rect">
+            <a:avLst/>
+          </a:prstGeom>
+          <a:noFill/>
+          <a:ln/>
+        </p:spPr>
+        <p:txBody>
+          <a:bodyPr wrap="square" lIns="0" tIns="0" rIns="0" bIns="0" rtlCol="0" anchor="ctr">
+            <a:normAutofit/>
+          </a:bodyPr>
+          <a:lstStyle/>
+          <a:p>
+            <a:pPr algn="ctr" indent="0" marL="0">
+              <a:buNone/>
+            </a:pPr>
+            <a:r>
+              <a:rPr lang="en-US" sz="3600" b="1" dirty="0">
+                <a:solidFill>
+                  <a:srgbClr val="990011"/>
+                </a:solidFill>
+                <a:latin typeface="Times New Roman" pitchFamily="34" charset="0"/>
+                <a:ea typeface="Times New Roman" pitchFamily="34" charset="-122"/>
+                <a:cs typeface="Times New Roman" pitchFamily="34" charset="-120"/>
+              </a:rPr>
+              <a:t>2. The Rock Cycle</a:t>
+            </a:r>
+            <a:endParaRPr lang="en-US" sz="3600" dirty="0"/>
+          </a:p>
+        </p:txBody>
+      </p:sp>
+      <p:sp>
+        <p:nvSpPr>
+          <p:cNvPr id="4" name="Text 2"/>
+          <p:cNvSpPr/>
+          <p:nvPr/>
+        </p:nvSpPr>
+        <p:spPr>
+          <a:xfrm>
+            <a:off x="365760" y="1783080"/>
+            <a:ext cx="4846320" cy="4617720"/>
+          </a:xfrm>
+          <a:prstGeom prst="rect">
+            <a:avLst/>
+          </a:prstGeom>
+          <a:noFill/>
+          <a:ln/>
+        </p:spPr>
+        <p:txBody>
+          <a:bodyPr wrap="square" lIns="0" tIns="0" rIns="0" bIns="0" rtlCol="0" anchor="t"/>
+          <a:lstStyle/>
+          <a:p>
+            <a:pPr algn="l" indent="0" marL="0">
+              <a:spcAft>
+                <a:spcPts val="800"/>
+              </a:spcAft>
+              <a:buNone/>
+            </a:pPr>
+            <a:r>
+              <a:rPr lang="en-US" sz="3600" b="1" dirty="0">
+                <a:solidFill>
+                  <a:srgbClr val="111111"/>
+                </a:solidFill>
+                <a:latin typeface="Times New Roman" pitchFamily="34" charset="0"/>
+                <a:ea typeface="Times New Roman" pitchFamily="34" charset="-122"/>
+                <a:cs typeface="Times New Roman" pitchFamily="34" charset="-120"/>
+              </a:rPr>
+              <a:t>Sedimentary rocks: </a:t>
+            </a:r>
+            <a:pPr algn="l" indent="0" marL="0">
+              <a:spcAft>
+                <a:spcPts val="800"/>
+              </a:spcAft>
+              <a:buNone/>
+            </a:pPr>
+            <a:r>
+              <a:rPr lang="en-US" sz="3600" dirty="0">
+                <a:solidFill>
+                  <a:srgbClr val="111111"/>
+                </a:solidFill>
+                <a:latin typeface="Times New Roman" pitchFamily="34" charset="0"/>
+                <a:ea typeface="Times New Roman" pitchFamily="34" charset="-122"/>
+                <a:cs typeface="Times New Roman" pitchFamily="34" charset="-120"/>
+              </a:rPr>
+              <a:t>They form from compressed layers of sand, mud and pebbles, such as the sandstones of the Benue valley.</a:t>
+            </a:r>
+            <a:endParaRPr lang="en-US" sz="3600" dirty="0"/>
+          </a:p>
+        </p:txBody>
+      </p:sp>
       <p:pic>
         <p:nvPicPr>
-          <p:cNvPr id="3" name="Image 0" descr="/home/claude/f4/img/minesec_sheet.png">    </p:cNvPr>
+          <p:cNvPr id="5" name="Image 0" descr="/home/claude/f4/img/v2/f4_sandstone.jpg">    </p:cNvPr>
           <p:cNvPicPr>
             <a:picLocks noChangeAspect="1"/>
           </p:cNvPicPr>
@@ -16878,8 +17656,8 @@
         </p:blipFill>
         <p:spPr>
           <a:xfrm>
-            <a:off x="0" y="658368"/>
-            <a:ext cx="3840480" cy="5833872"/>
+            <a:off x="5349240" y="2071212"/>
+            <a:ext cx="6659575" cy="3693983"/>
           </a:xfrm>
           <a:prstGeom prst="rect">
             <a:avLst/>
@@ -16888,14 +17666,14 @@
       </p:pic>
       <p:sp>
         <p:nvSpPr>
-          <p:cNvPr id="4" name="Text 1"/>
+          <p:cNvPr id="6" name="Text 3"/>
           <p:cNvSpPr/>
           <p:nvPr/>
         </p:nvSpPr>
         <p:spPr>
           <a:xfrm>
-            <a:off x="4069080" y="1005840"/>
-            <a:ext cx="7802575" cy="731520"/>
+            <a:off x="5349240" y="6089904"/>
+            <a:ext cx="6659575" cy="347472"/>
           </a:xfrm>
           <a:prstGeom prst="rect">
             <a:avLst/>
@@ -16904,105 +17682,24 @@
           <a:ln/>
         </p:spPr>
         <p:txBody>
-          <a:bodyPr wrap="square" lIns="0" tIns="0" rIns="0" bIns="0" rtlCol="0" anchor="ctr">
-            <a:normAutofit/>
-          </a:bodyPr>
+          <a:bodyPr wrap="square" lIns="0" tIns="0" rIns="0" bIns="0" rtlCol="0" anchor="ctr"/>
           <a:lstStyle/>
           <a:p>
             <a:pPr algn="ctr" indent="0" marL="0">
               <a:buNone/>
             </a:pPr>
             <a:r>
-              <a:rPr lang="en-US" sz="3600" b="1" dirty="0">
-                <a:solidFill>
-                  <a:srgbClr val="990011"/>
+              <a:rPr lang="en-US" sz="1600" i="1" dirty="0">
+                <a:solidFill>
+                  <a:srgbClr val="555555"/>
                 </a:solidFill>
                 <a:latin typeface="Times New Roman" pitchFamily="34" charset="0"/>
                 <a:ea typeface="Times New Roman" pitchFamily="34" charset="-122"/>
                 <a:cs typeface="Times New Roman" pitchFamily="34" charset="-120"/>
               </a:rPr>
-              <a:t>3. Forces and Categories of Landforms</a:t>
-            </a:r>
-            <a:endParaRPr lang="en-US" sz="3600" dirty="0"/>
-          </a:p>
-        </p:txBody>
-      </p:sp>
-      <p:sp>
-        <p:nvSpPr>
-          <p:cNvPr id="5" name="Text 2"/>
-          <p:cNvSpPr/>
-          <p:nvPr/>
-        </p:nvSpPr>
-        <p:spPr>
-          <a:xfrm>
-            <a:off x="4069080" y="1783080"/>
-            <a:ext cx="7802575" cy="4663440"/>
-          </a:xfrm>
-          <a:prstGeom prst="rect">
-            <a:avLst/>
-          </a:prstGeom>
-          <a:noFill/>
-          <a:ln/>
-        </p:spPr>
-        <p:txBody>
-          <a:bodyPr wrap="square" lIns="0" tIns="0" rIns="0" bIns="0" rtlCol="0" anchor="t"/>
-          <a:lstStyle/>
-          <a:p>
-            <a:pPr algn="l" indent="0" marL="0">
-              <a:spcAft>
-                <a:spcPts val="800"/>
-              </a:spcAft>
-              <a:buNone/>
-            </a:pPr>
-            <a:r>
-              <a:rPr lang="en-US" sz="4000" i="1" dirty="0">
-                <a:solidFill>
-                  <a:srgbClr val="111111"/>
-                </a:solidFill>
-                <a:latin typeface="Times New Roman" pitchFamily="34" charset="0"/>
-                <a:ea typeface="Times New Roman" pitchFamily="34" charset="-122"/>
-                <a:cs typeface="Times New Roman" pitchFamily="34" charset="-120"/>
-              </a:rPr>
-              <a:t>The landscape is shaped by two groups of forces:</a:t>
-            </a:r>
-            <a:endParaRPr lang="en-US" sz="4000" dirty="0"/>
-          </a:p>
-          <a:p>
-            <a:pPr algn="l" indent="0" marL="0">
-              <a:spcAft>
-                <a:spcPts val="800"/>
-              </a:spcAft>
-              <a:buNone/>
-            </a:pPr>
-            <a:r>
-              <a:rPr lang="en-US" sz="4000" b="1" dirty="0">
-                <a:solidFill>
-                  <a:srgbClr val="111111"/>
-                </a:solidFill>
-                <a:latin typeface="Times New Roman" pitchFamily="34" charset="0"/>
-                <a:ea typeface="Times New Roman" pitchFamily="34" charset="-122"/>
-                <a:cs typeface="Times New Roman" pitchFamily="34" charset="-120"/>
-              </a:rPr>
-              <a:t>Internal (endogenic) forces: </a:t>
-            </a:r>
-            <a:pPr algn="l" indent="0" marL="0">
-              <a:spcAft>
-                <a:spcPts val="800"/>
-              </a:spcAft>
-              <a:buNone/>
-            </a:pPr>
-            <a:r>
-              <a:rPr lang="en-US" sz="4000" dirty="0">
-                <a:solidFill>
-                  <a:srgbClr val="111111"/>
-                </a:solidFill>
-                <a:latin typeface="Times New Roman" pitchFamily="34" charset="0"/>
-                <a:ea typeface="Times New Roman" pitchFamily="34" charset="-122"/>
-                <a:cs typeface="Times New Roman" pitchFamily="34" charset="-120"/>
-              </a:rPr>
-              <a:t>They come from inside the Earth: plate movements, folding, faulting, volcanism and earthquakes. They build up the relief.</a:t>
-            </a:r>
-            <a:endParaRPr lang="en-US" sz="4000" dirty="0"/>
+              <a:t>Illustration: sandstone</a:t>
+            </a:r>
+            <a:endParaRPr lang="en-US" sz="1600" dirty="0"/>
           </a:p>
         </p:txBody>
       </p:sp>
@@ -17118,9 +17815,109 @@
           </a:p>
         </p:txBody>
       </p:sp>
+      <p:sp>
+        <p:nvSpPr>
+          <p:cNvPr id="3" name="Text 1"/>
+          <p:cNvSpPr/>
+          <p:nvPr/>
+        </p:nvSpPr>
+        <p:spPr>
+          <a:xfrm>
+            <a:off x="365760" y="1005840"/>
+            <a:ext cx="11460175" cy="731520"/>
+          </a:xfrm>
+          <a:prstGeom prst="rect">
+            <a:avLst/>
+          </a:prstGeom>
+          <a:noFill/>
+          <a:ln/>
+        </p:spPr>
+        <p:txBody>
+          <a:bodyPr wrap="square" lIns="0" tIns="0" rIns="0" bIns="0" rtlCol="0" anchor="ctr">
+            <a:normAutofit/>
+          </a:bodyPr>
+          <a:lstStyle/>
+          <a:p>
+            <a:pPr algn="ctr" indent="0" marL="0">
+              <a:buNone/>
+            </a:pPr>
+            <a:r>
+              <a:rPr lang="en-US" sz="3600" b="1" dirty="0">
+                <a:solidFill>
+                  <a:srgbClr val="990011"/>
+                </a:solidFill>
+                <a:latin typeface="Times New Roman" pitchFamily="34" charset="0"/>
+                <a:ea typeface="Times New Roman" pitchFamily="34" charset="-122"/>
+                <a:cs typeface="Times New Roman" pitchFamily="34" charset="-120"/>
+              </a:rPr>
+              <a:t>2. The Rock Cycle</a:t>
+            </a:r>
+            <a:endParaRPr lang="en-US" sz="3600" dirty="0"/>
+          </a:p>
+        </p:txBody>
+      </p:sp>
+      <p:sp>
+        <p:nvSpPr>
+          <p:cNvPr id="4" name="Text 2"/>
+          <p:cNvSpPr/>
+          <p:nvPr/>
+        </p:nvSpPr>
+        <p:spPr>
+          <a:xfrm>
+            <a:off x="365760" y="1783080"/>
+            <a:ext cx="4846320" cy="4617720"/>
+          </a:xfrm>
+          <a:prstGeom prst="rect">
+            <a:avLst/>
+          </a:prstGeom>
+          <a:noFill/>
+          <a:ln/>
+        </p:spPr>
+        <p:txBody>
+          <a:bodyPr wrap="square" lIns="0" tIns="0" rIns="0" bIns="0" rtlCol="0" anchor="t"/>
+          <a:lstStyle/>
+          <a:p>
+            <a:pPr algn="l" indent="0" marL="0">
+              <a:spcAft>
+                <a:spcPts val="800"/>
+              </a:spcAft>
+              <a:buNone/>
+            </a:pPr>
+            <a:r>
+              <a:rPr lang="en-US" sz="3600" b="1" dirty="0">
+                <a:solidFill>
+                  <a:srgbClr val="111111"/>
+                </a:solidFill>
+                <a:latin typeface="Times New Roman" pitchFamily="34" charset="0"/>
+                <a:ea typeface="Times New Roman" pitchFamily="34" charset="-122"/>
+                <a:cs typeface="Times New Roman" pitchFamily="34" charset="-120"/>
+              </a:rPr>
+              <a:t>Metamorphic rocks: </a:t>
+            </a:r>
+            <a:pPr algn="l" indent="0" marL="0">
+              <a:spcAft>
+                <a:spcPts val="800"/>
+              </a:spcAft>
+              <a:buNone/>
+            </a:pPr>
+            <a:r>
+              <a:rPr lang="en-US" sz="3600" dirty="0">
+                <a:solidFill>
+                  <a:srgbClr val="111111"/>
+                </a:solidFill>
+                <a:latin typeface="Times New Roman" pitchFamily="34" charset="0"/>
+                <a:ea typeface="Times New Roman" pitchFamily="34" charset="-122"/>
+                <a:cs typeface="Times New Roman" pitchFamily="34" charset="-120"/>
+              </a:rPr>
+              <a:t>They form when rocks are changed by heat and pressure, such as marble and gneiss.</a:t>
+            </a:r>
+            <a:endParaRPr lang="en-US" sz="3600" dirty="0"/>
+          </a:p>
+        </p:txBody>
+      </p:sp>
       <p:pic>
         <p:nvPicPr>
-          <p:cNvPr id="3" name="Image 0" descr="/home/claude/f4/img/minesec_sheet.png">    </p:cNvPr>
+          <p:cNvPr id="5" name="Image 0" descr="/home/claude/f4/img/v2/f4_marble.jpg">    </p:cNvPr>
           <p:cNvPicPr>
             <a:picLocks noChangeAspect="1"/>
           </p:cNvPicPr>
@@ -17134,8 +17931,8 @@
         </p:blipFill>
         <p:spPr>
           <a:xfrm>
-            <a:off x="0" y="658368"/>
-            <a:ext cx="5120640" cy="5833872"/>
+            <a:off x="5349240" y="2071212"/>
+            <a:ext cx="6659575" cy="3693983"/>
           </a:xfrm>
           <a:prstGeom prst="rect">
             <a:avLst/>
@@ -17144,14 +17941,14 @@
       </p:pic>
       <p:sp>
         <p:nvSpPr>
-          <p:cNvPr id="4" name="Text 1"/>
+          <p:cNvPr id="6" name="Text 3"/>
           <p:cNvSpPr/>
           <p:nvPr/>
         </p:nvSpPr>
         <p:spPr>
           <a:xfrm>
-            <a:off x="5349240" y="1005840"/>
-            <a:ext cx="6522415" cy="731520"/>
+            <a:off x="5349240" y="6089904"/>
+            <a:ext cx="6659575" cy="347472"/>
           </a:xfrm>
           <a:prstGeom prst="rect">
             <a:avLst/>
@@ -17160,85 +17957,24 @@
           <a:ln/>
         </p:spPr>
         <p:txBody>
-          <a:bodyPr wrap="square" lIns="0" tIns="0" rIns="0" bIns="0" rtlCol="0" anchor="ctr">
-            <a:normAutofit/>
-          </a:bodyPr>
+          <a:bodyPr wrap="square" lIns="0" tIns="0" rIns="0" bIns="0" rtlCol="0" anchor="ctr"/>
           <a:lstStyle/>
           <a:p>
             <a:pPr algn="ctr" indent="0" marL="0">
               <a:buNone/>
             </a:pPr>
             <a:r>
-              <a:rPr lang="en-US" sz="3600" b="1" dirty="0">
-                <a:solidFill>
-                  <a:srgbClr val="990011"/>
+              <a:rPr lang="en-US" sz="1600" i="1" dirty="0">
+                <a:solidFill>
+                  <a:srgbClr val="555555"/>
                 </a:solidFill>
                 <a:latin typeface="Times New Roman" pitchFamily="34" charset="0"/>
                 <a:ea typeface="Times New Roman" pitchFamily="34" charset="-122"/>
                 <a:cs typeface="Times New Roman" pitchFamily="34" charset="-120"/>
               </a:rPr>
-              <a:t>3. Forces and Categories of Landforms (continued)</a:t>
-            </a:r>
-            <a:endParaRPr lang="en-US" sz="3600" dirty="0"/>
-          </a:p>
-        </p:txBody>
-      </p:sp>
-      <p:sp>
-        <p:nvSpPr>
-          <p:cNvPr id="5" name="Text 2"/>
-          <p:cNvSpPr/>
-          <p:nvPr/>
-        </p:nvSpPr>
-        <p:spPr>
-          <a:xfrm>
-            <a:off x="5349240" y="1783080"/>
-            <a:ext cx="6522415" cy="4663440"/>
-          </a:xfrm>
-          <a:prstGeom prst="rect">
-            <a:avLst/>
-          </a:prstGeom>
-          <a:noFill/>
-          <a:ln/>
-        </p:spPr>
-        <p:txBody>
-          <a:bodyPr wrap="square" lIns="0" tIns="0" rIns="0" bIns="0" rtlCol="0" anchor="t"/>
-          <a:lstStyle/>
-          <a:p>
-            <a:pPr algn="l" indent="0" marL="0">
-              <a:spcAft>
-                <a:spcPts val="800"/>
-              </a:spcAft>
-              <a:buNone/>
-            </a:pPr>
-            <a:r>
-              <a:rPr lang="en-US" sz="4000" b="1" dirty="0">
-                <a:solidFill>
-                  <a:srgbClr val="111111"/>
-                </a:solidFill>
-                <a:latin typeface="Times New Roman" pitchFamily="34" charset="0"/>
-                <a:ea typeface="Times New Roman" pitchFamily="34" charset="-122"/>
-                <a:cs typeface="Times New Roman" pitchFamily="34" charset="-120"/>
-              </a:rPr>
-              <a:t>External (exogenic) forces: </a:t>
-            </a:r>
-            <a:pPr algn="l" indent="0" marL="0">
-              <a:spcAft>
-                <a:spcPts val="800"/>
-              </a:spcAft>
-              <a:buNone/>
-            </a:pPr>
-            <a:r>
-              <a:rPr lang="en-US" sz="4000" dirty="0">
-                <a:solidFill>
-                  <a:srgbClr val="111111"/>
-                </a:solidFill>
-                <a:latin typeface="Times New Roman" pitchFamily="34" charset="0"/>
-                <a:ea typeface="Times New Roman" pitchFamily="34" charset="-122"/>
-                <a:cs typeface="Times New Roman" pitchFamily="34" charset="-120"/>
-              </a:rPr>
-              <a:t>They come from the sun and gravity: weathering, mass wasting and erosion by rivers, wind, waves and ice. They wear the relief down.</a:t>
-            </a:r>
-            <a:endParaRPr lang="en-US" sz="4000" dirty="0"/>
+              <a:t>Illustration: marble</a:t>
+            </a:r>
+            <a:endParaRPr lang="en-US" sz="1600" dirty="0"/>
           </a:p>
         </p:txBody>
       </p:sp>
@@ -17354,9 +18090,129 @@
           </a:p>
         </p:txBody>
       </p:sp>
+      <p:sp>
+        <p:nvSpPr>
+          <p:cNvPr id="3" name="Text 1"/>
+          <p:cNvSpPr/>
+          <p:nvPr/>
+        </p:nvSpPr>
+        <p:spPr>
+          <a:xfrm>
+            <a:off x="365760" y="1005840"/>
+            <a:ext cx="11460175" cy="731520"/>
+          </a:xfrm>
+          <a:prstGeom prst="rect">
+            <a:avLst/>
+          </a:prstGeom>
+          <a:noFill/>
+          <a:ln/>
+        </p:spPr>
+        <p:txBody>
+          <a:bodyPr wrap="square" lIns="0" tIns="0" rIns="0" bIns="0" rtlCol="0" anchor="ctr">
+            <a:normAutofit/>
+          </a:bodyPr>
+          <a:lstStyle/>
+          <a:p>
+            <a:pPr algn="ctr" indent="0" marL="0">
+              <a:buNone/>
+            </a:pPr>
+            <a:r>
+              <a:rPr lang="en-US" sz="3600" b="1" dirty="0">
+                <a:solidFill>
+                  <a:srgbClr val="990011"/>
+                </a:solidFill>
+                <a:latin typeface="Times New Roman" pitchFamily="34" charset="0"/>
+                <a:ea typeface="Times New Roman" pitchFamily="34" charset="-122"/>
+                <a:cs typeface="Times New Roman" pitchFamily="34" charset="-120"/>
+              </a:rPr>
+              <a:t>3. Forces that Shape the Landscape</a:t>
+            </a:r>
+            <a:endParaRPr lang="en-US" sz="3600" dirty="0"/>
+          </a:p>
+        </p:txBody>
+      </p:sp>
+      <p:sp>
+        <p:nvSpPr>
+          <p:cNvPr id="4" name="Text 2"/>
+          <p:cNvSpPr/>
+          <p:nvPr/>
+        </p:nvSpPr>
+        <p:spPr>
+          <a:xfrm>
+            <a:off x="365760" y="1783080"/>
+            <a:ext cx="4846320" cy="4617720"/>
+          </a:xfrm>
+          <a:prstGeom prst="rect">
+            <a:avLst/>
+          </a:prstGeom>
+          <a:noFill/>
+          <a:ln/>
+        </p:spPr>
+        <p:txBody>
+          <a:bodyPr wrap="square" lIns="0" tIns="0" rIns="0" bIns="0" rtlCol="0" anchor="t"/>
+          <a:lstStyle/>
+          <a:p>
+            <a:pPr algn="l" indent="0" marL="0">
+              <a:spcAft>
+                <a:spcPts val="800"/>
+              </a:spcAft>
+              <a:buNone/>
+            </a:pPr>
+            <a:r>
+              <a:rPr lang="en-US" sz="3000" i="1" dirty="0">
+                <a:solidFill>
+                  <a:srgbClr val="111111"/>
+                </a:solidFill>
+                <a:latin typeface="Times New Roman" pitchFamily="34" charset="0"/>
+                <a:ea typeface="Times New Roman" pitchFamily="34" charset="-122"/>
+                <a:cs typeface="Times New Roman" pitchFamily="34" charset="-120"/>
+              </a:rPr>
+              <a:t>The forces that shape the landscape are the following:</a:t>
+            </a:r>
+            <a:endParaRPr lang="en-US" sz="3000" dirty="0"/>
+          </a:p>
+          <a:p>
+            <a:pPr algn="l" indent="0" marL="0">
+              <a:spcAft>
+                <a:spcPts val="800"/>
+              </a:spcAft>
+              <a:buNone/>
+            </a:pPr>
+            <a:r>
+              <a:rPr lang="en-US" sz="3000" b="1" dirty="0">
+                <a:solidFill>
+                  <a:srgbClr val="111111"/>
+                </a:solidFill>
+                <a:latin typeface="Times New Roman" pitchFamily="34" charset="0"/>
+                <a:ea typeface="Times New Roman" pitchFamily="34" charset="-122"/>
+                <a:cs typeface="Times New Roman" pitchFamily="34" charset="-120"/>
+              </a:rPr>
+              <a:t>Internal (endogenic) forces: </a:t>
+            </a:r>
+            <a:pPr algn="l" indent="0" marL="0">
+              <a:spcAft>
+                <a:spcPts val="800"/>
+              </a:spcAft>
+              <a:buNone/>
+            </a:pPr>
+            <a:r>
+              <a:rPr lang="en-US" sz="3000" dirty="0">
+                <a:solidFill>
+                  <a:srgbClr val="111111"/>
+                </a:solidFill>
+                <a:latin typeface="Times New Roman" pitchFamily="34" charset="0"/>
+                <a:ea typeface="Times New Roman" pitchFamily="34" charset="-122"/>
+                <a:cs typeface="Times New Roman" pitchFamily="34" charset="-120"/>
+              </a:rPr>
+              <a:t>Driven by the heat of the mantle, they build up the land through volcanic eruptions, earthquakes, folding and faulting.</a:t>
+            </a:r>
+            <a:endParaRPr lang="en-US" sz="3000" dirty="0"/>
+          </a:p>
+        </p:txBody>
+      </p:sp>
       <p:pic>
         <p:nvPicPr>
-          <p:cNvPr id="3" name="Image 0" descr="/home/claude/f4/img/minesec_sheet.png">    </p:cNvPr>
+          <p:cNvPr id="5" name="Image 0" descr="/home/claude/f4/img/v2/f4_eruption.jpg">    </p:cNvPr>
           <p:cNvPicPr>
             <a:picLocks noChangeAspect="1"/>
           </p:cNvPicPr>
@@ -17370,8 +18226,8 @@
         </p:blipFill>
         <p:spPr>
           <a:xfrm>
-            <a:off x="0" y="658368"/>
-            <a:ext cx="5120640" cy="5833872"/>
+            <a:off x="5349240" y="2071212"/>
+            <a:ext cx="6659575" cy="3693983"/>
           </a:xfrm>
           <a:prstGeom prst="rect">
             <a:avLst/>
@@ -17380,14 +18236,14 @@
       </p:pic>
       <p:sp>
         <p:nvSpPr>
-          <p:cNvPr id="4" name="Text 1"/>
+          <p:cNvPr id="6" name="Text 3"/>
           <p:cNvSpPr/>
           <p:nvPr/>
         </p:nvSpPr>
         <p:spPr>
           <a:xfrm>
-            <a:off x="5349240" y="1005840"/>
-            <a:ext cx="6522415" cy="731520"/>
+            <a:off x="5349240" y="6089904"/>
+            <a:ext cx="6659575" cy="347472"/>
           </a:xfrm>
           <a:prstGeom prst="rect">
             <a:avLst/>
@@ -17396,85 +18252,24 @@
           <a:ln/>
         </p:spPr>
         <p:txBody>
-          <a:bodyPr wrap="square" lIns="0" tIns="0" rIns="0" bIns="0" rtlCol="0" anchor="ctr">
-            <a:normAutofit/>
-          </a:bodyPr>
+          <a:bodyPr wrap="square" lIns="0" tIns="0" rIns="0" bIns="0" rtlCol="0" anchor="ctr"/>
           <a:lstStyle/>
           <a:p>
             <a:pPr algn="ctr" indent="0" marL="0">
               <a:buNone/>
             </a:pPr>
             <a:r>
-              <a:rPr lang="en-US" sz="3600" b="1" dirty="0">
-                <a:solidFill>
-                  <a:srgbClr val="990011"/>
+              <a:rPr lang="en-US" sz="1600" i="1" dirty="0">
+                <a:solidFill>
+                  <a:srgbClr val="555555"/>
                 </a:solidFill>
                 <a:latin typeface="Times New Roman" pitchFamily="34" charset="0"/>
                 <a:ea typeface="Times New Roman" pitchFamily="34" charset="-122"/>
                 <a:cs typeface="Times New Roman" pitchFamily="34" charset="-120"/>
               </a:rPr>
-              <a:t>3. Forces and Categories of Landforms (continued)</a:t>
-            </a:r>
-            <a:endParaRPr lang="en-US" sz="3600" dirty="0"/>
-          </a:p>
-        </p:txBody>
-      </p:sp>
-      <p:sp>
-        <p:nvSpPr>
-          <p:cNvPr id="5" name="Text 2"/>
-          <p:cNvSpPr/>
-          <p:nvPr/>
-        </p:nvSpPr>
-        <p:spPr>
-          <a:xfrm>
-            <a:off x="5349240" y="1783080"/>
-            <a:ext cx="6522415" cy="4663440"/>
-          </a:xfrm>
-          <a:prstGeom prst="rect">
-            <a:avLst/>
-          </a:prstGeom>
-          <a:noFill/>
-          <a:ln/>
-        </p:spPr>
-        <p:txBody>
-          <a:bodyPr wrap="square" lIns="0" tIns="0" rIns="0" bIns="0" rtlCol="0" anchor="t"/>
-          <a:lstStyle/>
-          <a:p>
-            <a:pPr algn="l" indent="0" marL="0">
-              <a:spcAft>
-                <a:spcPts val="800"/>
-              </a:spcAft>
-              <a:buNone/>
-            </a:pPr>
-            <a:r>
-              <a:rPr lang="en-US" sz="4000" b="1" dirty="0">
-                <a:solidFill>
-                  <a:srgbClr val="111111"/>
-                </a:solidFill>
-                <a:latin typeface="Times New Roman" pitchFamily="34" charset="0"/>
-                <a:ea typeface="Times New Roman" pitchFamily="34" charset="-122"/>
-                <a:cs typeface="Times New Roman" pitchFamily="34" charset="-120"/>
-              </a:rPr>
-              <a:t>Categories of landforms: </a:t>
-            </a:r>
-            <a:pPr algn="l" indent="0" marL="0">
-              <a:spcAft>
-                <a:spcPts val="800"/>
-              </a:spcAft>
-              <a:buNone/>
-            </a:pPr>
-            <a:r>
-              <a:rPr lang="en-US" sz="4000" dirty="0">
-                <a:solidFill>
-                  <a:srgbClr val="111111"/>
-                </a:solidFill>
-                <a:latin typeface="Times New Roman" pitchFamily="34" charset="0"/>
-                <a:ea typeface="Times New Roman" pitchFamily="34" charset="-122"/>
-                <a:cs typeface="Times New Roman" pitchFamily="34" charset="-120"/>
-              </a:rPr>
-              <a:t>Major landforms are continents, ocean basins, mountain ranges and plains. Minor landforms are small features such as valleys, waterfalls and dunes.</a:t>
-            </a:r>
-            <a:endParaRPr lang="en-US" sz="4000" dirty="0"/>
+              <a:t>Illustration: a volcanic eruption</a:t>
+            </a:r>
+            <a:endParaRPr lang="en-US" sz="1600" dirty="0"/>
           </a:p>
         </p:txBody>
       </p:sp>
@@ -17584,15 +18379,115 @@
                 <a:ea typeface="Calibri" pitchFamily="34" charset="-122"/>
                 <a:cs typeface="Calibri" pitchFamily="34" charset="-120"/>
               </a:rPr>
-              <a:t>FORMATIVE EVALUATION</a:t>
+              <a:t>BOARD SUMMARY</a:t>
             </a:r>
             <a:endParaRPr lang="en-US" sz="1400" dirty="0"/>
+          </a:p>
+        </p:txBody>
+      </p:sp>
+      <p:sp>
+        <p:nvSpPr>
+          <p:cNvPr id="3" name="Text 1"/>
+          <p:cNvSpPr/>
+          <p:nvPr/>
+        </p:nvSpPr>
+        <p:spPr>
+          <a:xfrm>
+            <a:off x="365760" y="1005840"/>
+            <a:ext cx="11460175" cy="731520"/>
+          </a:xfrm>
+          <a:prstGeom prst="rect">
+            <a:avLst/>
+          </a:prstGeom>
+          <a:noFill/>
+          <a:ln/>
+        </p:spPr>
+        <p:txBody>
+          <a:bodyPr wrap="square" lIns="0" tIns="0" rIns="0" bIns="0" rtlCol="0" anchor="ctr">
+            <a:normAutofit/>
+          </a:bodyPr>
+          <a:lstStyle/>
+          <a:p>
+            <a:pPr algn="ctr" indent="0" marL="0">
+              <a:buNone/>
+            </a:pPr>
+            <a:r>
+              <a:rPr lang="en-US" sz="3600" b="1" dirty="0">
+                <a:solidFill>
+                  <a:srgbClr val="990011"/>
+                </a:solidFill>
+                <a:latin typeface="Times New Roman" pitchFamily="34" charset="0"/>
+                <a:ea typeface="Times New Roman" pitchFamily="34" charset="-122"/>
+                <a:cs typeface="Times New Roman" pitchFamily="34" charset="-120"/>
+              </a:rPr>
+              <a:t>3. Forces that Shape the Landscape</a:t>
+            </a:r>
+            <a:endParaRPr lang="en-US" sz="3600" dirty="0"/>
+          </a:p>
+        </p:txBody>
+      </p:sp>
+      <p:sp>
+        <p:nvSpPr>
+          <p:cNvPr id="4" name="Text 2"/>
+          <p:cNvSpPr/>
+          <p:nvPr/>
+        </p:nvSpPr>
+        <p:spPr>
+          <a:xfrm>
+            <a:off x="365760" y="1783080"/>
+            <a:ext cx="4846320" cy="4617720"/>
+          </a:xfrm>
+          <a:prstGeom prst="rect">
+            <a:avLst/>
+          </a:prstGeom>
+          <a:noFill/>
+          <a:ln/>
+        </p:spPr>
+        <p:txBody>
+          <a:bodyPr wrap="square" lIns="0" tIns="0" rIns="0" bIns="0" rtlCol="0" anchor="t"/>
+          <a:lstStyle/>
+          <a:p>
+            <a:pPr algn="l" indent="0" marL="0">
+              <a:spcAft>
+                <a:spcPts val="800"/>
+              </a:spcAft>
+              <a:buNone/>
+            </a:pPr>
+            <a:r>
+              <a:rPr lang="en-US" sz="3600" b="1" dirty="0">
+                <a:solidFill>
+                  <a:srgbClr val="111111"/>
+                </a:solidFill>
+                <a:latin typeface="Times New Roman" pitchFamily="34" charset="0"/>
+                <a:ea typeface="Times New Roman" pitchFamily="34" charset="-122"/>
+                <a:cs typeface="Times New Roman" pitchFamily="34" charset="-120"/>
+              </a:rPr>
+              <a:t>External (exogenic) forces: </a:t>
+            </a:r>
+            <a:pPr algn="l" indent="0" marL="0">
+              <a:spcAft>
+                <a:spcPts val="800"/>
+              </a:spcAft>
+              <a:buNone/>
+            </a:pPr>
+            <a:r>
+              <a:rPr lang="en-US" sz="3600" dirty="0">
+                <a:solidFill>
+                  <a:srgbClr val="111111"/>
+                </a:solidFill>
+                <a:latin typeface="Times New Roman" pitchFamily="34" charset="0"/>
+                <a:ea typeface="Times New Roman" pitchFamily="34" charset="-122"/>
+                <a:cs typeface="Times New Roman" pitchFamily="34" charset="-120"/>
+              </a:rPr>
+              <a:t>Powered by the Sun, they wear down the land through weathering and erosion by rivers, wind and ice.</a:t>
+            </a:r>
+            <a:endParaRPr lang="en-US" sz="3600" dirty="0"/>
           </a:p>
         </p:txBody>
       </p:sp>
       <p:pic>
         <p:nvPicPr>
-          <p:cNvPr id="3" name="Image 0" descr="/home/claude/f4/img/minesec_sheet.png">    </p:cNvPr>
+          <p:cNvPr id="5" name="Image 0" descr="/home/claude/f4/img/v2/f4_gully.jpg">    </p:cNvPr>
           <p:cNvPicPr>
             <a:picLocks noChangeAspect="1"/>
           </p:cNvPicPr>
@@ -17606,8 +18501,8 @@
         </p:blipFill>
         <p:spPr>
           <a:xfrm>
-            <a:off x="0" y="658368"/>
-            <a:ext cx="5120640" cy="5833872"/>
+            <a:off x="5349240" y="2071212"/>
+            <a:ext cx="6659575" cy="3693983"/>
           </a:xfrm>
           <a:prstGeom prst="rect">
             <a:avLst/>
@@ -17616,14 +18511,14 @@
       </p:pic>
       <p:sp>
         <p:nvSpPr>
-          <p:cNvPr id="4" name="Text 1"/>
+          <p:cNvPr id="6" name="Text 3"/>
           <p:cNvSpPr/>
           <p:nvPr/>
         </p:nvSpPr>
         <p:spPr>
           <a:xfrm>
-            <a:off x="5349240" y="1005840"/>
-            <a:ext cx="6522415" cy="731520"/>
+            <a:off x="5349240" y="6089904"/>
+            <a:ext cx="6659575" cy="347472"/>
           </a:xfrm>
           <a:prstGeom prst="rect">
             <a:avLst/>
@@ -17632,68 +18527,24 @@
           <a:ln/>
         </p:spPr>
         <p:txBody>
-          <a:bodyPr wrap="square" lIns="0" tIns="0" rIns="0" bIns="0" rtlCol="0" anchor="ctr">
-            <a:normAutofit/>
-          </a:bodyPr>
+          <a:bodyPr wrap="square" lIns="0" tIns="0" rIns="0" bIns="0" rtlCol="0" anchor="ctr"/>
           <a:lstStyle/>
           <a:p>
             <a:pPr algn="ctr" indent="0" marL="0">
               <a:buNone/>
             </a:pPr>
             <a:r>
-              <a:rPr lang="en-US" sz="3600" b="1" dirty="0">
-                <a:solidFill>
-                  <a:srgbClr val="990011"/>
+              <a:rPr lang="en-US" sz="1600" i="1" dirty="0">
+                <a:solidFill>
+                  <a:srgbClr val="555555"/>
                 </a:solidFill>
                 <a:latin typeface="Times New Roman" pitchFamily="34" charset="0"/>
                 <a:ea typeface="Times New Roman" pitchFamily="34" charset="-122"/>
                 <a:cs typeface="Times New Roman" pitchFamily="34" charset="-120"/>
               </a:rPr>
-              <a:t>Evaluation 1</a:t>
-            </a:r>
-            <a:endParaRPr lang="en-US" sz="3600" dirty="0"/>
-          </a:p>
-        </p:txBody>
-      </p:sp>
-      <p:sp>
-        <p:nvSpPr>
-          <p:cNvPr id="5" name="Text 2"/>
-          <p:cNvSpPr/>
-          <p:nvPr/>
-        </p:nvSpPr>
-        <p:spPr>
-          <a:xfrm>
-            <a:off x="5349240" y="1783080"/>
-            <a:ext cx="6522415" cy="4663440"/>
-          </a:xfrm>
-          <a:prstGeom prst="rect">
-            <a:avLst/>
-          </a:prstGeom>
-          <a:noFill/>
-          <a:ln/>
-        </p:spPr>
-        <p:txBody>
-          <a:bodyPr wrap="square" lIns="0" tIns="0" rIns="0" bIns="0" rtlCol="0" anchor="t"/>
-          <a:lstStyle/>
-          <a:p>
-            <a:pPr algn="l" indent="0" marL="0">
-              <a:spcAft>
-                <a:spcPts val="800"/>
-              </a:spcAft>
-              <a:buNone/>
-            </a:pPr>
-            <a:r>
-              <a:rPr lang="en-US" sz="4000" dirty="0">
-                <a:solidFill>
-                  <a:srgbClr val="111111"/>
-                </a:solidFill>
-                <a:latin typeface="Times New Roman" pitchFamily="34" charset="0"/>
-                <a:ea typeface="Times New Roman" pitchFamily="34" charset="-122"/>
-                <a:cs typeface="Times New Roman" pitchFamily="34" charset="-120"/>
-              </a:rPr>
-              <a:t>Define a discontinuity and name one.</a:t>
-            </a:r>
-            <a:endParaRPr lang="en-US" sz="4000" dirty="0"/>
+              <a:t>Illustration: a gully</a:t>
+            </a:r>
+            <a:endParaRPr lang="en-US" sz="1600" dirty="0"/>
           </a:p>
         </p:txBody>
       </p:sp>
@@ -17803,7 +18654,7 @@
                 <a:ea typeface="Calibri" pitchFamily="34" charset="-122"/>
                 <a:cs typeface="Calibri" pitchFamily="34" charset="-120"/>
               </a:rPr>
-              <a:t>FORMATIVE EVALUATION</a:t>
+              <a:t>BOARD SUMMARY</a:t>
             </a:r>
             <a:endParaRPr lang="en-US" sz="1400" dirty="0"/>
           </a:p>
@@ -17868,7 +18719,7 @@
                 <a:ea typeface="Times New Roman" pitchFamily="34" charset="-122"/>
                 <a:cs typeface="Times New Roman" pitchFamily="34" charset="-120"/>
               </a:rPr>
-              <a:t>Expected Answer</a:t>
+              <a:t>3. Forces that Shape the Landscape</a:t>
             </a:r>
             <a:endParaRPr lang="en-US" sz="3600" dirty="0"/>
           </a:p>
@@ -17902,7 +18753,7 @@
               <a:buNone/>
             </a:pPr>
             <a:r>
-              <a:rPr lang="en-US" sz="4000" dirty="0">
+              <a:rPr lang="en-US" sz="4000" b="1" dirty="0">
                 <a:solidFill>
                   <a:srgbClr val="111111"/>
                 </a:solidFill>
@@ -17910,7 +18761,24 @@
                 <a:ea typeface="Times New Roman" pitchFamily="34" charset="-122"/>
                 <a:cs typeface="Times New Roman" pitchFamily="34" charset="-120"/>
               </a:rPr>
-              <a:t>A boundary between two layers of the Earth, for example the Moho.</a:t>
+              <a:t>Local example: </a:t>
+            </a:r>
+            <a:pPr algn="l" indent="0" marL="0">
+              <a:spcAft>
+                <a:spcPts val="800"/>
+              </a:spcAft>
+              <a:buNone/>
+            </a:pPr>
+            <a:r>
+              <a:rPr lang="en-US" sz="4000" dirty="0">
+                <a:solidFill>
+                  <a:srgbClr val="111111"/>
+                </a:solidFill>
+                <a:latin typeface="Times New Roman" pitchFamily="34" charset="0"/>
+                <a:ea typeface="Times New Roman" pitchFamily="34" charset="-122"/>
+                <a:cs typeface="Times New Roman" pitchFamily="34" charset="-120"/>
+              </a:rPr>
+              <a:t>The erosion of the banks of the Benue at Garoua is the work of external forces.</a:t>
             </a:r>
             <a:endParaRPr lang="en-US" sz="4000" dirty="0"/>
           </a:p>
@@ -18129,7 +18997,7 @@
                 <a:ea typeface="Times New Roman" pitchFamily="34" charset="-122"/>
                 <a:cs typeface="Times New Roman" pitchFamily="34" charset="-120"/>
               </a:rPr>
-              <a:t>Precambrian: first bacteria and oldest rocks. Palaeozoic: trilobites and first forests. Mesozoic: dinosaurs and break-up of Pangaea. Cenozoic: mammals, man and the Himalayas.</a:t>
+              <a:t>The crust, the mantle and the core.</a:t>
             </a:r>
             <a:endParaRPr lang="en-US" sz="4000" dirty="0"/>
           </a:p>
@@ -18241,15 +19109,135 @@
                 <a:ea typeface="Calibri" pitchFamily="34" charset="-122"/>
                 <a:cs typeface="Calibri" pitchFamily="34" charset="-120"/>
               </a:rPr>
-              <a:t>FORMATIVE EVALUATION</a:t>
+              <a:t>BOARD SUMMARY</a:t>
             </a:r>
             <a:endParaRPr lang="en-US" sz="1400" dirty="0"/>
+          </a:p>
+        </p:txBody>
+      </p:sp>
+      <p:sp>
+        <p:nvSpPr>
+          <p:cNvPr id="3" name="Text 1"/>
+          <p:cNvSpPr/>
+          <p:nvPr/>
+        </p:nvSpPr>
+        <p:spPr>
+          <a:xfrm>
+            <a:off x="365760" y="1005840"/>
+            <a:ext cx="11460175" cy="731520"/>
+          </a:xfrm>
+          <a:prstGeom prst="rect">
+            <a:avLst/>
+          </a:prstGeom>
+          <a:noFill/>
+          <a:ln/>
+        </p:spPr>
+        <p:txBody>
+          <a:bodyPr wrap="square" lIns="0" tIns="0" rIns="0" bIns="0" rtlCol="0" anchor="ctr">
+            <a:normAutofit/>
+          </a:bodyPr>
+          <a:lstStyle/>
+          <a:p>
+            <a:pPr algn="ctr" indent="0" marL="0">
+              <a:buNone/>
+            </a:pPr>
+            <a:r>
+              <a:rPr lang="en-US" sz="3600" b="1" dirty="0">
+                <a:solidFill>
+                  <a:srgbClr val="990011"/>
+                </a:solidFill>
+                <a:latin typeface="Times New Roman" pitchFamily="34" charset="0"/>
+                <a:ea typeface="Times New Roman" pitchFamily="34" charset="-122"/>
+                <a:cs typeface="Times New Roman" pitchFamily="34" charset="-120"/>
+              </a:rPr>
+              <a:t>4. Categories of Landforms</a:t>
+            </a:r>
+            <a:endParaRPr lang="en-US" sz="3600" dirty="0"/>
+          </a:p>
+        </p:txBody>
+      </p:sp>
+      <p:sp>
+        <p:nvSpPr>
+          <p:cNvPr id="4" name="Text 2"/>
+          <p:cNvSpPr/>
+          <p:nvPr/>
+        </p:nvSpPr>
+        <p:spPr>
+          <a:xfrm>
+            <a:off x="365760" y="1783080"/>
+            <a:ext cx="4846320" cy="4617720"/>
+          </a:xfrm>
+          <a:prstGeom prst="rect">
+            <a:avLst/>
+          </a:prstGeom>
+          <a:noFill/>
+          <a:ln/>
+        </p:spPr>
+        <p:txBody>
+          <a:bodyPr wrap="square" lIns="0" tIns="0" rIns="0" bIns="0" rtlCol="0" anchor="t"/>
+          <a:lstStyle/>
+          <a:p>
+            <a:pPr algn="l" indent="0" marL="0">
+              <a:spcAft>
+                <a:spcPts val="800"/>
+              </a:spcAft>
+              <a:buNone/>
+            </a:pPr>
+            <a:r>
+              <a:rPr lang="en-US" sz="3600" i="1" dirty="0">
+                <a:solidFill>
+                  <a:srgbClr val="111111"/>
+                </a:solidFill>
+                <a:latin typeface="Times New Roman" pitchFamily="34" charset="0"/>
+                <a:ea typeface="Times New Roman" pitchFamily="34" charset="-122"/>
+                <a:cs typeface="Times New Roman" pitchFamily="34" charset="-120"/>
+              </a:rPr>
+              <a:t>Landforms are classified as follows:</a:t>
+            </a:r>
+            <a:endParaRPr lang="en-US" sz="3600" dirty="0"/>
+          </a:p>
+          <a:p>
+            <a:pPr algn="l" indent="0" marL="0">
+              <a:spcAft>
+                <a:spcPts val="800"/>
+              </a:spcAft>
+              <a:buNone/>
+            </a:pPr>
+            <a:r>
+              <a:rPr lang="en-US" sz="3600" b="1" dirty="0">
+                <a:solidFill>
+                  <a:srgbClr val="111111"/>
+                </a:solidFill>
+                <a:latin typeface="Times New Roman" pitchFamily="34" charset="0"/>
+                <a:ea typeface="Times New Roman" pitchFamily="34" charset="-122"/>
+                <a:cs typeface="Times New Roman" pitchFamily="34" charset="-120"/>
+              </a:rPr>
+              <a:t>First-order (major) landforms: </a:t>
+            </a:r>
+            <a:pPr algn="l" indent="0" marL="0">
+              <a:spcAft>
+                <a:spcPts val="800"/>
+              </a:spcAft>
+              <a:buNone/>
+            </a:pPr>
+            <a:r>
+              <a:rPr lang="en-US" sz="3600" dirty="0">
+                <a:solidFill>
+                  <a:srgbClr val="111111"/>
+                </a:solidFill>
+                <a:latin typeface="Times New Roman" pitchFamily="34" charset="0"/>
+                <a:ea typeface="Times New Roman" pitchFamily="34" charset="-122"/>
+                <a:cs typeface="Times New Roman" pitchFamily="34" charset="-120"/>
+              </a:rPr>
+              <a:t>They are the largest features: continents and ocean basins.</a:t>
+            </a:r>
+            <a:endParaRPr lang="en-US" sz="3600" dirty="0"/>
           </a:p>
         </p:txBody>
       </p:sp>
       <p:pic>
         <p:nvPicPr>
-          <p:cNvPr id="3" name="Image 0" descr="/home/claude/f4/img/minesec_sheet.png">    </p:cNvPr>
+          <p:cNvPr id="5" name="Image 0" descr="/home/claude/f4/img/v2/geo2_orders.png">    </p:cNvPr>
           <p:cNvPicPr>
             <a:picLocks noChangeAspect="1"/>
           </p:cNvPicPr>
@@ -18263,8 +19251,8 @@
         </p:blipFill>
         <p:spPr>
           <a:xfrm>
-            <a:off x="0" y="658368"/>
-            <a:ext cx="5120640" cy="5833872"/>
+            <a:off x="5349240" y="2617506"/>
+            <a:ext cx="6659575" cy="2601397"/>
           </a:xfrm>
           <a:prstGeom prst="rect">
             <a:avLst/>
@@ -18273,14 +19261,14 @@
       </p:pic>
       <p:sp>
         <p:nvSpPr>
-          <p:cNvPr id="4" name="Text 1"/>
+          <p:cNvPr id="6" name="Text 3"/>
           <p:cNvSpPr/>
           <p:nvPr/>
         </p:nvSpPr>
         <p:spPr>
           <a:xfrm>
-            <a:off x="5349240" y="1005840"/>
-            <a:ext cx="6522415" cy="731520"/>
+            <a:off x="5349240" y="6089904"/>
+            <a:ext cx="6659575" cy="347472"/>
           </a:xfrm>
           <a:prstGeom prst="rect">
             <a:avLst/>
@@ -18289,68 +19277,24 @@
           <a:ln/>
         </p:spPr>
         <p:txBody>
-          <a:bodyPr wrap="square" lIns="0" tIns="0" rIns="0" bIns="0" rtlCol="0" anchor="ctr">
-            <a:normAutofit/>
-          </a:bodyPr>
+          <a:bodyPr wrap="square" lIns="0" tIns="0" rIns="0" bIns="0" rtlCol="0" anchor="ctr"/>
           <a:lstStyle/>
           <a:p>
             <a:pPr algn="ctr" indent="0" marL="0">
               <a:buNone/>
             </a:pPr>
             <a:r>
-              <a:rPr lang="en-US" sz="3600" b="1" dirty="0">
-                <a:solidFill>
-                  <a:srgbClr val="990011"/>
+              <a:rPr lang="en-US" sz="1600" i="1" dirty="0">
+                <a:solidFill>
+                  <a:srgbClr val="555555"/>
                 </a:solidFill>
                 <a:latin typeface="Times New Roman" pitchFamily="34" charset="0"/>
                 <a:ea typeface="Times New Roman" pitchFamily="34" charset="-122"/>
                 <a:cs typeface="Times New Roman" pitchFamily="34" charset="-120"/>
               </a:rPr>
-              <a:t>Evaluation 2</a:t>
-            </a:r>
-            <a:endParaRPr lang="en-US" sz="3600" dirty="0"/>
-          </a:p>
-        </p:txBody>
-      </p:sp>
-      <p:sp>
-        <p:nvSpPr>
-          <p:cNvPr id="5" name="Text 2"/>
-          <p:cNvSpPr/>
-          <p:nvPr/>
-        </p:nvSpPr>
-        <p:spPr>
-          <a:xfrm>
-            <a:off x="5349240" y="1783080"/>
-            <a:ext cx="6522415" cy="4663440"/>
-          </a:xfrm>
-          <a:prstGeom prst="rect">
-            <a:avLst/>
-          </a:prstGeom>
-          <a:noFill/>
-          <a:ln/>
-        </p:spPr>
-        <p:txBody>
-          <a:bodyPr wrap="square" lIns="0" tIns="0" rIns="0" bIns="0" rtlCol="0" anchor="t"/>
-          <a:lstStyle/>
-          <a:p>
-            <a:pPr algn="l" indent="0" marL="0">
-              <a:spcAft>
-                <a:spcPts val="800"/>
-              </a:spcAft>
-              <a:buNone/>
-            </a:pPr>
-            <a:r>
-              <a:rPr lang="en-US" sz="4000" dirty="0">
-                <a:solidFill>
-                  <a:srgbClr val="111111"/>
-                </a:solidFill>
-                <a:latin typeface="Times New Roman" pitchFamily="34" charset="0"/>
-                <a:ea typeface="Times New Roman" pitchFamily="34" charset="-122"/>
-                <a:cs typeface="Times New Roman" pitchFamily="34" charset="-120"/>
-              </a:rPr>
-              <a:t>Give one internal and one external force.</a:t>
-            </a:r>
-            <a:endParaRPr lang="en-US" sz="4000" dirty="0"/>
+              <a:t>Illustration: categories of landforms</a:t>
+            </a:r>
+            <a:endParaRPr lang="en-US" sz="1600" dirty="0"/>
           </a:p>
         </p:txBody>
       </p:sp>
@@ -18460,7 +19404,7 @@
                 <a:ea typeface="Calibri" pitchFamily="34" charset="-122"/>
                 <a:cs typeface="Calibri" pitchFamily="34" charset="-120"/>
               </a:rPr>
-              <a:t>FORMATIVE EVALUATION</a:t>
+              <a:t>BOARD SUMMARY</a:t>
             </a:r>
             <a:endParaRPr lang="en-US" sz="1400" dirty="0"/>
           </a:p>
@@ -18483,7 +19427,7 @@
         <p:spPr>
           <a:xfrm>
             <a:off x="0" y="658368"/>
-            <a:ext cx="5120640" cy="5833872"/>
+            <a:ext cx="2468880" cy="5833872"/>
           </a:xfrm>
           <a:prstGeom prst="rect">
             <a:avLst/>
@@ -18498,8 +19442,8 @@
         </p:nvSpPr>
         <p:spPr>
           <a:xfrm>
-            <a:off x="5349240" y="1005840"/>
-            <a:ext cx="6522415" cy="731520"/>
+            <a:off x="2697480" y="1005840"/>
+            <a:ext cx="9174175" cy="731520"/>
           </a:xfrm>
           <a:prstGeom prst="rect">
             <a:avLst/>
@@ -18525,7 +19469,7 @@
                 <a:ea typeface="Times New Roman" pitchFamily="34" charset="-122"/>
                 <a:cs typeface="Times New Roman" pitchFamily="34" charset="-120"/>
               </a:rPr>
-              <a:t>Expected Answer</a:t>
+              <a:t>4. Categories of Landforms</a:t>
             </a:r>
             <a:endParaRPr lang="en-US" sz="3600" dirty="0"/>
           </a:p>
@@ -18539,8 +19483,8 @@
         </p:nvSpPr>
         <p:spPr>
           <a:xfrm>
-            <a:off x="5349240" y="1783080"/>
-            <a:ext cx="6522415" cy="4663440"/>
+            <a:off x="2697480" y="1783080"/>
+            <a:ext cx="9174175" cy="4663440"/>
           </a:xfrm>
           <a:prstGeom prst="rect">
             <a:avLst/>
@@ -18559,7 +19503,7 @@
               <a:buNone/>
             </a:pPr>
             <a:r>
-              <a:rPr lang="en-US" sz="4000" dirty="0">
+              <a:rPr lang="en-US" sz="4000" b="1" dirty="0">
                 <a:solidFill>
                   <a:srgbClr val="111111"/>
                 </a:solidFill>
@@ -18567,7 +19511,61 @@
                 <a:ea typeface="Times New Roman" pitchFamily="34" charset="-122"/>
                 <a:cs typeface="Times New Roman" pitchFamily="34" charset="-120"/>
               </a:rPr>
-              <a:t>Volcanism (internal); erosion by rivers (external).</a:t>
+              <a:t>Second-order landforms: </a:t>
+            </a:r>
+            <a:pPr algn="l" indent="0" marL="0">
+              <a:spcAft>
+                <a:spcPts val="800"/>
+              </a:spcAft>
+              <a:buNone/>
+            </a:pPr>
+            <a:r>
+              <a:rPr lang="en-US" sz="4000" dirty="0">
+                <a:solidFill>
+                  <a:srgbClr val="111111"/>
+                </a:solidFill>
+                <a:latin typeface="Times New Roman" pitchFamily="34" charset="0"/>
+                <a:ea typeface="Times New Roman" pitchFamily="34" charset="-122"/>
+                <a:cs typeface="Times New Roman" pitchFamily="34" charset="-120"/>
+              </a:rPr>
+              <a:t>They are found on the major ones: mountains, plateaux and plains, such as the Mandara Mountains and the Adamawa Plateau.</a:t>
+            </a:r>
+            <a:endParaRPr lang="en-US" sz="4000" dirty="0"/>
+          </a:p>
+          <a:p>
+            <a:pPr algn="l" indent="0" marL="0">
+              <a:spcAft>
+                <a:spcPts val="800"/>
+              </a:spcAft>
+              <a:buNone/>
+            </a:pPr>
+            <a:r>
+              <a:rPr lang="en-US" sz="4000" b="1" dirty="0">
+                <a:solidFill>
+                  <a:srgbClr val="111111"/>
+                </a:solidFill>
+                <a:latin typeface="Times New Roman" pitchFamily="34" charset="0"/>
+                <a:ea typeface="Times New Roman" pitchFamily="34" charset="-122"/>
+                <a:cs typeface="Times New Roman" pitchFamily="34" charset="-120"/>
+              </a:rPr>
+              <a:t>Third-order (minor) landforms: </a:t>
+            </a:r>
+            <a:pPr algn="l" indent="0" marL="0">
+              <a:spcAft>
+                <a:spcPts val="800"/>
+              </a:spcAft>
+              <a:buNone/>
+            </a:pPr>
+            <a:r>
+              <a:rPr lang="en-US" sz="4000" dirty="0">
+                <a:solidFill>
+                  <a:srgbClr val="111111"/>
+                </a:solidFill>
+                <a:latin typeface="Times New Roman" pitchFamily="34" charset="0"/>
+                <a:ea typeface="Times New Roman" pitchFamily="34" charset="-122"/>
+                <a:cs typeface="Times New Roman" pitchFamily="34" charset="-120"/>
+              </a:rPr>
+              <a:t>They are smaller features such as valleys, hills and gullies, like the Benue valley.</a:t>
             </a:r>
             <a:endParaRPr lang="en-US" sz="4000" dirty="0"/>
           </a:p>
@@ -18679,7 +19677,7 @@
                 <a:ea typeface="Calibri" pitchFamily="34" charset="-122"/>
                 <a:cs typeface="Calibri" pitchFamily="34" charset="-120"/>
               </a:rPr>
-              <a:t>REMEDIATION</a:t>
+              <a:t>FORMATIVE EVALUATION</a:t>
             </a:r>
             <a:endParaRPr lang="en-US" sz="1400" dirty="0"/>
           </a:p>
@@ -18744,7 +19742,7 @@
                 <a:ea typeface="Times New Roman" pitchFamily="34" charset="-122"/>
                 <a:cs typeface="Times New Roman" pitchFamily="34" charset="-120"/>
               </a:rPr>
-              <a:t>Remediation</a:t>
+              <a:t>Evaluation 1</a:t>
             </a:r>
             <a:endParaRPr lang="en-US" sz="3600" dirty="0"/>
           </a:p>
@@ -18778,7 +19776,7 @@
               <a:buNone/>
             </a:pPr>
             <a:r>
-              <a:rPr lang="en-US" sz="4000" b="1" dirty="0">
+              <a:rPr lang="en-US" sz="4000" dirty="0">
                 <a:solidFill>
                   <a:srgbClr val="111111"/>
                 </a:solidFill>
@@ -18786,51 +19784,7 @@
                 <a:ea typeface="Times New Roman" pitchFamily="34" charset="-122"/>
                 <a:cs typeface="Times New Roman" pitchFamily="34" charset="-120"/>
               </a:rPr>
-              <a:t>Fill in the blanks:</a:t>
-            </a:r>
-            <a:endParaRPr lang="en-US" sz="4000" dirty="0"/>
-          </a:p>
-          <a:p>
-            <a:pPr algn="l" marL="342900" indent="-342900">
-              <a:spcAft>
-                <a:spcPts val="800"/>
-              </a:spcAft>
-              <a:buSzPct val="100000"/>
-              <a:buFont typeface="+mj-lt"/>
-              <a:buAutoNum type="arabicPeriod" startAt="1"/>
-            </a:pPr>
-            <a:r>
-              <a:rPr lang="en-US" sz="4000" dirty="0">
-                <a:solidFill>
-                  <a:srgbClr val="111111"/>
-                </a:solidFill>
-                <a:latin typeface="Times New Roman" pitchFamily="34" charset="0"/>
-                <a:ea typeface="Times New Roman" pitchFamily="34" charset="-122"/>
-                <a:cs typeface="Times New Roman" pitchFamily="34" charset="-120"/>
-              </a:rPr>
-              <a:t>The boundary between crust and mantle is the ______.</a:t>
-            </a:r>
-            <a:endParaRPr lang="en-US" sz="4000" dirty="0"/>
-          </a:p>
-          <a:p>
-            <a:pPr algn="l" marL="342900" indent="-342900">
-              <a:spcAft>
-                <a:spcPts val="800"/>
-              </a:spcAft>
-              <a:buSzPct val="100000"/>
-              <a:buFont typeface="+mj-lt"/>
-              <a:buAutoNum type="arabicPeriod" startAt="1"/>
-            </a:pPr>
-            <a:r>
-              <a:rPr lang="en-US" sz="4000" dirty="0">
-                <a:solidFill>
-                  <a:srgbClr val="111111"/>
-                </a:solidFill>
-                <a:latin typeface="Times New Roman" pitchFamily="34" charset="0"/>
-                <a:ea typeface="Times New Roman" pitchFamily="34" charset="-122"/>
-                <a:cs typeface="Times New Roman" pitchFamily="34" charset="-120"/>
-              </a:rPr>
-              <a:t>Forces from inside the Earth are ______ forces.</a:t>
+              <a:t>Distinguish continental crust from oceanic crust.</a:t>
             </a:r>
             <a:endParaRPr lang="en-US" sz="4000" dirty="0"/>
           </a:p>
@@ -18942,7 +19896,7 @@
                 <a:ea typeface="Calibri" pitchFamily="34" charset="-122"/>
                 <a:cs typeface="Calibri" pitchFamily="34" charset="-120"/>
               </a:rPr>
-              <a:t>REMEDIATION</a:t>
+              <a:t>FORMATIVE EVALUATION</a:t>
             </a:r>
             <a:endParaRPr lang="en-US" sz="1400" dirty="0"/>
           </a:p>
@@ -19007,7 +19961,7 @@
                 <a:ea typeface="Times New Roman" pitchFamily="34" charset="-122"/>
                 <a:cs typeface="Times New Roman" pitchFamily="34" charset="-120"/>
               </a:rPr>
-              <a:t>Remediation (continued)</a:t>
+              <a:t>Expected Answer</a:t>
             </a:r>
             <a:endParaRPr lang="en-US" sz="3600" dirty="0"/>
           </a:p>
@@ -19034,13 +19988,11 @@
           <a:bodyPr wrap="square" lIns="0" tIns="0" rIns="0" bIns="0" rtlCol="0" anchor="t"/>
           <a:lstStyle/>
           <a:p>
-            <a:pPr algn="l" marL="342900" indent="-342900">
+            <a:pPr algn="l" indent="0" marL="0">
               <a:spcAft>
                 <a:spcPts val="800"/>
               </a:spcAft>
-              <a:buSzPct val="100000"/>
-              <a:buFont typeface="+mj-lt"/>
-              <a:buAutoNum type="arabicPeriod" startAt="1"/>
+              <a:buNone/>
             </a:pPr>
             <a:r>
               <a:rPr lang="en-US" sz="4000" dirty="0">
@@ -19051,7 +20003,7 @@
                 <a:ea typeface="Times New Roman" pitchFamily="34" charset="-122"/>
                 <a:cs typeface="Times New Roman" pitchFamily="34" charset="-120"/>
               </a:rPr>
-              <a:t>The inner core is solid because of great ______.</a:t>
+              <a:t>Continental crust is thick, light and granitic; oceanic crust is thin, dense and basaltic.</a:t>
             </a:r>
             <a:endParaRPr lang="en-US" sz="4000" dirty="0"/>
           </a:p>
@@ -19163,7 +20115,7 @@
                 <a:ea typeface="Calibri" pitchFamily="34" charset="-122"/>
                 <a:cs typeface="Calibri" pitchFamily="34" charset="-120"/>
               </a:rPr>
-              <a:t>HOMEWORK</a:t>
+              <a:t>FORMATIVE EVALUATION</a:t>
             </a:r>
             <a:endParaRPr lang="en-US" sz="1400" dirty="0"/>
           </a:p>
@@ -19228,7 +20180,7 @@
                 <a:ea typeface="Times New Roman" pitchFamily="34" charset="-122"/>
                 <a:cs typeface="Times New Roman" pitchFamily="34" charset="-120"/>
               </a:rPr>
-              <a:t>Homework</a:t>
+              <a:t>Evaluation 2</a:t>
             </a:r>
             <a:endParaRPr lang="en-US" sz="3600" dirty="0"/>
           </a:p>
@@ -19270,7 +20222,7 @@
                 <a:ea typeface="Times New Roman" pitchFamily="34" charset="-122"/>
                 <a:cs typeface="Times New Roman" pitchFamily="34" charset="-120"/>
               </a:rPr>
-              <a:t>Look at a map of the world. Why do the coasts of Africa and South America look like pieces of a puzzle? Write two sentences.</a:t>
+              <a:t>How is a sedimentary rock formed?</a:t>
             </a:r>
             <a:endParaRPr lang="en-US" sz="4000" dirty="0"/>
           </a:p>
@@ -19382,7 +20334,7 @@
                 <a:ea typeface="Calibri" pitchFamily="34" charset="-122"/>
                 <a:cs typeface="Calibri" pitchFamily="34" charset="-120"/>
               </a:rPr>
-              <a:t>NEXT LESSON</a:t>
+              <a:t>FORMATIVE EVALUATION</a:t>
             </a:r>
             <a:endParaRPr lang="en-US" sz="1400" dirty="0"/>
           </a:p>
@@ -19447,7 +20399,7 @@
                 <a:ea typeface="Times New Roman" pitchFamily="34" charset="-122"/>
                 <a:cs typeface="Times New Roman" pitchFamily="34" charset="-120"/>
               </a:rPr>
-              <a:t>Next Lesson</a:t>
+              <a:t>Expected Answer</a:t>
             </a:r>
             <a:endParaRPr lang="en-US" sz="3600" dirty="0"/>
           </a:p>
@@ -19471,17 +20423,17 @@
           <a:ln/>
         </p:spPr>
         <p:txBody>
-          <a:bodyPr wrap="square" lIns="0" tIns="0" rIns="0" bIns="0" rtlCol="0" anchor="ctr"/>
-          <a:lstStyle/>
-          <a:p>
-            <a:pPr algn="ctr" indent="0" marL="0">
+          <a:bodyPr wrap="square" lIns="0" tIns="0" rIns="0" bIns="0" rtlCol="0" anchor="t"/>
+          <a:lstStyle/>
+          <a:p>
+            <a:pPr algn="l" indent="0" marL="0">
               <a:spcAft>
                 <a:spcPts val="800"/>
               </a:spcAft>
               <a:buNone/>
             </a:pPr>
             <a:r>
-              <a:rPr lang="en-US" sz="4000" b="1" dirty="0">
+              <a:rPr lang="en-US" sz="4000" dirty="0">
                 <a:solidFill>
                   <a:srgbClr val="111111"/>
                 </a:solidFill>
@@ -19489,27 +20441,7 @@
                 <a:ea typeface="Times New Roman" pitchFamily="34" charset="-122"/>
                 <a:cs typeface="Times New Roman" pitchFamily="34" charset="-120"/>
               </a:rPr>
-              <a:t>Our next lesson will be on:</a:t>
-            </a:r>
-            <a:endParaRPr lang="en-US" sz="4000" dirty="0"/>
-          </a:p>
-          <a:p>
-            <a:pPr algn="ctr" indent="0" marL="0">
-              <a:spcAft>
-                <a:spcPts val="800"/>
-              </a:spcAft>
-              <a:buNone/>
-            </a:pPr>
-            <a:r>
-              <a:rPr lang="en-US" sz="4000" b="1" dirty="0">
-                <a:solidFill>
-                  <a:srgbClr val="990011"/>
-                </a:solidFill>
-                <a:latin typeface="Times New Roman" pitchFamily="34" charset="0"/>
-                <a:ea typeface="Times New Roman" pitchFamily="34" charset="-122"/>
-                <a:cs typeface="Times New Roman" pitchFamily="34" charset="-120"/>
-              </a:rPr>
-              <a:t>Further Study 1: Early Theories of Crustal Movements</a:t>
+              <a:t>By the compression of layers of sediments such as sand and mud.</a:t>
             </a:r>
             <a:endParaRPr lang="en-US" sz="4000" dirty="0"/>
           </a:p>
@@ -19621,22 +20553,46 @@
                 <a:ea typeface="Calibri" pitchFamily="34" charset="-122"/>
                 <a:cs typeface="Calibri" pitchFamily="34" charset="-120"/>
               </a:rPr>
-              <a:t>BILINGUAL GAME</a:t>
+              <a:t>REMEDIATION</a:t>
             </a:r>
             <a:endParaRPr lang="en-US" sz="1400" dirty="0"/>
           </a:p>
         </p:txBody>
       </p:sp>
-      <p:sp>
-        <p:nvSpPr>
-          <p:cNvPr id="3" name="Text 1"/>
+      <p:pic>
+        <p:nvPicPr>
+          <p:cNvPr id="3" name="Image 0" descr="/home/claude/f4/img/minesec_sheet.png">    </p:cNvPr>
+          <p:cNvPicPr>
+            <a:picLocks noChangeAspect="1"/>
+          </p:cNvPicPr>
+          <p:nvPr/>
+        </p:nvPicPr>
+        <p:blipFill>
+          <a:blip r:embed="rId1"/>
+          <a:stretch>
+            <a:fillRect/>
+          </a:stretch>
+        </p:blipFill>
+        <p:spPr>
+          <a:xfrm>
+            <a:off x="0" y="658368"/>
+            <a:ext cx="1463040" cy="5833872"/>
+          </a:xfrm>
+          <a:prstGeom prst="rect">
+            <a:avLst/>
+          </a:prstGeom>
+        </p:spPr>
+      </p:pic>
+      <p:sp>
+        <p:nvSpPr>
+          <p:cNvPr id="4" name="Text 1"/>
           <p:cNvSpPr/>
           <p:nvPr/>
         </p:nvSpPr>
         <p:spPr>
           <a:xfrm>
-            <a:off x="457200" y="1005840"/>
-            <a:ext cx="11277295" cy="731520"/>
+            <a:off x="1691640" y="1005840"/>
+            <a:ext cx="10180015" cy="731520"/>
           </a:xfrm>
           <a:prstGeom prst="rect">
             <a:avLst/>
@@ -19645,7 +20601,9 @@
           <a:ln/>
         </p:spPr>
         <p:txBody>
-          <a:bodyPr wrap="square" lIns="0" tIns="0" rIns="0" bIns="0" rtlCol="0" anchor="ctr"/>
+          <a:bodyPr wrap="square" lIns="0" tIns="0" rIns="0" bIns="0" rtlCol="0" anchor="ctr">
+            <a:normAutofit/>
+          </a:bodyPr>
           <a:lstStyle/>
           <a:p>
             <a:pPr algn="ctr" indent="0" marL="0">
@@ -19660,6 +20618,723 @@
                 <a:ea typeface="Times New Roman" pitchFamily="34" charset="-122"/>
                 <a:cs typeface="Times New Roman" pitchFamily="34" charset="-120"/>
               </a:rPr>
+              <a:t>Remediation</a:t>
+            </a:r>
+            <a:endParaRPr lang="en-US" sz="3600" dirty="0"/>
+          </a:p>
+        </p:txBody>
+      </p:sp>
+      <p:sp>
+        <p:nvSpPr>
+          <p:cNvPr id="5" name="Text 2"/>
+          <p:cNvSpPr/>
+          <p:nvPr/>
+        </p:nvSpPr>
+        <p:spPr>
+          <a:xfrm>
+            <a:off x="1691640" y="1783080"/>
+            <a:ext cx="10180015" cy="4663440"/>
+          </a:xfrm>
+          <a:prstGeom prst="rect">
+            <a:avLst/>
+          </a:prstGeom>
+          <a:noFill/>
+          <a:ln/>
+        </p:spPr>
+        <p:txBody>
+          <a:bodyPr wrap="square" lIns="0" tIns="0" rIns="0" bIns="0" rtlCol="0" anchor="t"/>
+          <a:lstStyle/>
+          <a:p>
+            <a:pPr algn="l" indent="0" marL="0">
+              <a:spcAft>
+                <a:spcPts val="800"/>
+              </a:spcAft>
+              <a:buNone/>
+            </a:pPr>
+            <a:r>
+              <a:rPr lang="en-US" sz="4000" b="1" dirty="0">
+                <a:solidFill>
+                  <a:srgbClr val="111111"/>
+                </a:solidFill>
+                <a:latin typeface="Times New Roman" pitchFamily="34" charset="0"/>
+                <a:ea typeface="Times New Roman" pitchFamily="34" charset="-122"/>
+                <a:cs typeface="Times New Roman" pitchFamily="34" charset="-120"/>
+              </a:rPr>
+              <a:t>Fill in the blanks:</a:t>
+            </a:r>
+            <a:endParaRPr lang="en-US" sz="4000" dirty="0"/>
+          </a:p>
+          <a:p>
+            <a:pPr algn="l" marL="342900" indent="-342900">
+              <a:spcAft>
+                <a:spcPts val="800"/>
+              </a:spcAft>
+              <a:buSzPct val="100000"/>
+              <a:buFont typeface="+mj-lt"/>
+              <a:buAutoNum type="arabicPeriod" startAt="1"/>
+            </a:pPr>
+            <a:r>
+              <a:rPr lang="en-US" sz="4000" dirty="0">
+                <a:solidFill>
+                  <a:srgbClr val="111111"/>
+                </a:solidFill>
+                <a:latin typeface="Times New Roman" pitchFamily="34" charset="0"/>
+                <a:ea typeface="Times New Roman" pitchFamily="34" charset="-122"/>
+                <a:cs typeface="Times New Roman" pitchFamily="34" charset="-120"/>
+              </a:rPr>
+              <a:t>The thickest layer of the Earth is the ______.</a:t>
+            </a:r>
+            <a:endParaRPr lang="en-US" sz="4000" dirty="0"/>
+          </a:p>
+          <a:p>
+            <a:pPr algn="l" marL="342900" indent="-342900">
+              <a:spcAft>
+                <a:spcPts val="800"/>
+              </a:spcAft>
+              <a:buSzPct val="100000"/>
+              <a:buFont typeface="+mj-lt"/>
+              <a:buAutoNum type="arabicPeriod" startAt="1"/>
+            </a:pPr>
+            <a:r>
+              <a:rPr lang="en-US" sz="4000" dirty="0">
+                <a:solidFill>
+                  <a:srgbClr val="111111"/>
+                </a:solidFill>
+                <a:latin typeface="Times New Roman" pitchFamily="34" charset="0"/>
+                <a:ea typeface="Times New Roman" pitchFamily="34" charset="-122"/>
+                <a:cs typeface="Times New Roman" pitchFamily="34" charset="-120"/>
+              </a:rPr>
+              <a:t>Rock formed from cooled magma is ______.</a:t>
+            </a:r>
+            <a:endParaRPr lang="en-US" sz="4000" dirty="0"/>
+          </a:p>
+          <a:p>
+            <a:pPr algn="l" marL="342900" indent="-342900">
+              <a:spcAft>
+                <a:spcPts val="800"/>
+              </a:spcAft>
+              <a:buSzPct val="100000"/>
+              <a:buFont typeface="+mj-lt"/>
+              <a:buAutoNum type="arabicPeriod" startAt="1"/>
+            </a:pPr>
+            <a:r>
+              <a:rPr lang="en-US" sz="4000" dirty="0">
+                <a:solidFill>
+                  <a:srgbClr val="111111"/>
+                </a:solidFill>
+                <a:latin typeface="Times New Roman" pitchFamily="34" charset="0"/>
+                <a:ea typeface="Times New Roman" pitchFamily="34" charset="-122"/>
+                <a:cs typeface="Times New Roman" pitchFamily="34" charset="-120"/>
+              </a:rPr>
+              <a:t>Continents and ocean basins are landforms of the ______ order.</a:t>
+            </a:r>
+            <a:endParaRPr lang="en-US" sz="4000" dirty="0"/>
+          </a:p>
+        </p:txBody>
+      </p:sp>
+      <p:sp>
+        <p:nvSpPr>
+          <p:cNvPr id="25" name="Slide Number Placeholder 0"/>
+          <p:cNvSpPr>
+            <a:spLocks noGrp="1"/>
+          </p:cNvSpPr>
+          <p:nvPr>
+            <p:ph type="sldNum" sz="quarter" idx="4294967295"/>
+          </p:nvPr>
+        </p:nvSpPr>
+        <p:spPr>
+          <a:xfrm>
+            <a:off x="27432" y="91440"/>
+            <a:ext cx="585216" cy="475488"/>
+          </a:xfrm>
+          <a:prstGeom prst="rect">
+            <a:avLst/>
+          </a:prstGeom>
+          <a:extLst>
+            <a:ext uri="{C572A759-6A51-4108-AA02-DFA0A04FC94B}">
+              <ma14:wrappingTextBoxFlag xmlns:ma14="http://schemas.microsoft.com/office/mac/drawingml/2011/main" val="0"/>
+            </a:ext>
+          </a:extLst>
+        </p:spPr>
+        <p:txBody>
+          <a:bodyPr/>
+          <a:lstStyle>
+            <a:lvl1pPr>
+              <a:defRPr sz="2000">
+                <a:solidFill>
+                  <a:srgbClr val="FFFFFF"/>
+                </a:solidFill>
+                <a:latin typeface="Calibri"/>
+                <a:ea typeface="Calibri"/>
+                <a:cs typeface="Calibri"/>
+              </a:defRPr>
+            </a:lvl1pPr>
+          </a:lstStyle>
+          <a:p>
+            <a:pPr algn="ctr"/>
+            <a:fld id="{F7021451-1387-4CA6-816F-3879F97B5CBC}" type="slidenum">
+              <a:rPr b="1" lang="en-US"/>
+              <a:t>56</a:t>
+            </a:fld>
+            <a:endParaRPr lang="en-US"/>
+          </a:p>
+        </p:txBody>
+      </p:sp>
+    </p:spTree>
+  </p:cSld>
+  <p:clrMapOvr>
+    <a:masterClrMapping/>
+  </p:clrMapOvr>
+</p:sld>
+</file>
+
+<file path=ppt/slides/slide57.xml><?xml version="1.0" encoding="utf-8"?>
+<p:sld xmlns:a="http://schemas.openxmlformats.org/drawingml/2006/main" xmlns:r="http://schemas.openxmlformats.org/officeDocument/2006/relationships" xmlns:p="http://schemas.openxmlformats.org/presentationml/2006/main">
+  <p:cSld name="Slide 57">
+    <p:spTree>
+      <p:nvGrpSpPr>
+        <p:cNvPr id="1" name=""/>
+        <p:cNvGrpSpPr/>
+        <p:nvPr/>
+      </p:nvGrpSpPr>
+      <p:grpSpPr>
+        <a:xfrm>
+          <a:off x="0" y="0"/>
+          <a:ext cx="0" cy="0"/>
+          <a:chOff x="0" y="0"/>
+          <a:chExt cx="0" cy="0"/>
+        </a:xfrm>
+      </p:grpSpPr>
+      <p:sp>
+        <p:nvSpPr>
+          <p:cNvPr id="2" name="Text 0"/>
+          <p:cNvSpPr/>
+          <p:nvPr/>
+        </p:nvSpPr>
+        <p:spPr>
+          <a:xfrm>
+            <a:off x="457200" y="713232"/>
+            <a:ext cx="11368735" cy="274320"/>
+          </a:xfrm>
+          <a:prstGeom prst="rect">
+            <a:avLst/>
+          </a:prstGeom>
+          <a:noFill/>
+          <a:ln/>
+        </p:spPr>
+        <p:txBody>
+          <a:bodyPr wrap="square" lIns="0" tIns="0" rIns="0" bIns="0" rtlCol="0" anchor="ctr"/>
+          <a:lstStyle/>
+          <a:p>
+            <a:pPr algn="r" indent="0" marL="0">
+              <a:buNone/>
+            </a:pPr>
+            <a:r>
+              <a:rPr lang="en-US" sz="1400" b="1" dirty="0">
+                <a:solidFill>
+                  <a:srgbClr val="1C3F6E"/>
+                </a:solidFill>
+                <a:latin typeface="Calibri" pitchFamily="34" charset="0"/>
+                <a:ea typeface="Calibri" pitchFamily="34" charset="-122"/>
+                <a:cs typeface="Calibri" pitchFamily="34" charset="-120"/>
+              </a:rPr>
+              <a:t>HOMEWORK</a:t>
+            </a:r>
+            <a:endParaRPr lang="en-US" sz="1400" dirty="0"/>
+          </a:p>
+        </p:txBody>
+      </p:sp>
+      <p:pic>
+        <p:nvPicPr>
+          <p:cNvPr id="3" name="Image 0" descr="/home/claude/f4/img/minesec_sheet.png">    </p:cNvPr>
+          <p:cNvPicPr>
+            <a:picLocks noChangeAspect="1"/>
+          </p:cNvPicPr>
+          <p:nvPr/>
+        </p:nvPicPr>
+        <p:blipFill>
+          <a:blip r:embed="rId1"/>
+          <a:stretch>
+            <a:fillRect/>
+          </a:stretch>
+        </p:blipFill>
+        <p:spPr>
+          <a:xfrm>
+            <a:off x="0" y="658368"/>
+            <a:ext cx="5120640" cy="5833872"/>
+          </a:xfrm>
+          <a:prstGeom prst="rect">
+            <a:avLst/>
+          </a:prstGeom>
+        </p:spPr>
+      </p:pic>
+      <p:sp>
+        <p:nvSpPr>
+          <p:cNvPr id="4" name="Text 1"/>
+          <p:cNvSpPr/>
+          <p:nvPr/>
+        </p:nvSpPr>
+        <p:spPr>
+          <a:xfrm>
+            <a:off x="5349240" y="1005840"/>
+            <a:ext cx="6522415" cy="731520"/>
+          </a:xfrm>
+          <a:prstGeom prst="rect">
+            <a:avLst/>
+          </a:prstGeom>
+          <a:noFill/>
+          <a:ln/>
+        </p:spPr>
+        <p:txBody>
+          <a:bodyPr wrap="square" lIns="0" tIns="0" rIns="0" bIns="0" rtlCol="0" anchor="ctr">
+            <a:normAutofit/>
+          </a:bodyPr>
+          <a:lstStyle/>
+          <a:p>
+            <a:pPr algn="ctr" indent="0" marL="0">
+              <a:buNone/>
+            </a:pPr>
+            <a:r>
+              <a:rPr lang="en-US" sz="3600" b="1" dirty="0">
+                <a:solidFill>
+                  <a:srgbClr val="990011"/>
+                </a:solidFill>
+                <a:latin typeface="Times New Roman" pitchFamily="34" charset="0"/>
+                <a:ea typeface="Times New Roman" pitchFamily="34" charset="-122"/>
+                <a:cs typeface="Times New Roman" pitchFamily="34" charset="-120"/>
+              </a:rPr>
+              <a:t>Homework</a:t>
+            </a:r>
+            <a:endParaRPr lang="en-US" sz="3600" dirty="0"/>
+          </a:p>
+        </p:txBody>
+      </p:sp>
+      <p:sp>
+        <p:nvSpPr>
+          <p:cNvPr id="5" name="Text 2"/>
+          <p:cNvSpPr/>
+          <p:nvPr/>
+        </p:nvSpPr>
+        <p:spPr>
+          <a:xfrm>
+            <a:off x="5349240" y="1783080"/>
+            <a:ext cx="6522415" cy="4663440"/>
+          </a:xfrm>
+          <a:prstGeom prst="rect">
+            <a:avLst/>
+          </a:prstGeom>
+          <a:noFill/>
+          <a:ln/>
+        </p:spPr>
+        <p:txBody>
+          <a:bodyPr wrap="square" lIns="0" tIns="0" rIns="0" bIns="0" rtlCol="0" anchor="t"/>
+          <a:lstStyle/>
+          <a:p>
+            <a:pPr algn="l" indent="0" marL="0">
+              <a:spcAft>
+                <a:spcPts val="800"/>
+              </a:spcAft>
+              <a:buNone/>
+            </a:pPr>
+            <a:r>
+              <a:rPr lang="en-US" sz="4000" dirty="0">
+                <a:solidFill>
+                  <a:srgbClr val="111111"/>
+                </a:solidFill>
+                <a:latin typeface="Times New Roman" pitchFamily="34" charset="0"/>
+                <a:ea typeface="Times New Roman" pitchFamily="34" charset="-122"/>
+                <a:cs typeface="Times New Roman" pitchFamily="34" charset="-120"/>
+              </a:rPr>
+              <a:t>Name the supercontinent proposed by Wegener.</a:t>
+            </a:r>
+            <a:endParaRPr lang="en-US" sz="4000" dirty="0"/>
+          </a:p>
+        </p:txBody>
+      </p:sp>
+      <p:sp>
+        <p:nvSpPr>
+          <p:cNvPr id="25" name="Slide Number Placeholder 0"/>
+          <p:cNvSpPr>
+            <a:spLocks noGrp="1"/>
+          </p:cNvSpPr>
+          <p:nvPr>
+            <p:ph type="sldNum" sz="quarter" idx="4294967295"/>
+          </p:nvPr>
+        </p:nvSpPr>
+        <p:spPr>
+          <a:xfrm>
+            <a:off x="27432" y="91440"/>
+            <a:ext cx="585216" cy="475488"/>
+          </a:xfrm>
+          <a:prstGeom prst="rect">
+            <a:avLst/>
+          </a:prstGeom>
+          <a:extLst>
+            <a:ext uri="{C572A759-6A51-4108-AA02-DFA0A04FC94B}">
+              <ma14:wrappingTextBoxFlag xmlns:ma14="http://schemas.microsoft.com/office/mac/drawingml/2011/main" val="0"/>
+            </a:ext>
+          </a:extLst>
+        </p:spPr>
+        <p:txBody>
+          <a:bodyPr/>
+          <a:lstStyle>
+            <a:lvl1pPr>
+              <a:defRPr sz="2000">
+                <a:solidFill>
+                  <a:srgbClr val="FFFFFF"/>
+                </a:solidFill>
+                <a:latin typeface="Calibri"/>
+                <a:ea typeface="Calibri"/>
+                <a:cs typeface="Calibri"/>
+              </a:defRPr>
+            </a:lvl1pPr>
+          </a:lstStyle>
+          <a:p>
+            <a:pPr algn="ctr"/>
+            <a:fld id="{F7021451-1387-4CA6-816F-3879F97B5CBC}" type="slidenum">
+              <a:rPr b="1" lang="en-US"/>
+              <a:t>57</a:t>
+            </a:fld>
+            <a:endParaRPr lang="en-US"/>
+          </a:p>
+        </p:txBody>
+      </p:sp>
+    </p:spTree>
+  </p:cSld>
+  <p:clrMapOvr>
+    <a:masterClrMapping/>
+  </p:clrMapOvr>
+</p:sld>
+</file>
+
+<file path=ppt/slides/slide58.xml><?xml version="1.0" encoding="utf-8"?>
+<p:sld xmlns:a="http://schemas.openxmlformats.org/drawingml/2006/main" xmlns:r="http://schemas.openxmlformats.org/officeDocument/2006/relationships" xmlns:p="http://schemas.openxmlformats.org/presentationml/2006/main">
+  <p:cSld name="Slide 58">
+    <p:spTree>
+      <p:nvGrpSpPr>
+        <p:cNvPr id="1" name=""/>
+        <p:cNvGrpSpPr/>
+        <p:nvPr/>
+      </p:nvGrpSpPr>
+      <p:grpSpPr>
+        <a:xfrm>
+          <a:off x="0" y="0"/>
+          <a:ext cx="0" cy="0"/>
+          <a:chOff x="0" y="0"/>
+          <a:chExt cx="0" cy="0"/>
+        </a:xfrm>
+      </p:grpSpPr>
+      <p:sp>
+        <p:nvSpPr>
+          <p:cNvPr id="2" name="Text 0"/>
+          <p:cNvSpPr/>
+          <p:nvPr/>
+        </p:nvSpPr>
+        <p:spPr>
+          <a:xfrm>
+            <a:off x="457200" y="713232"/>
+            <a:ext cx="11368735" cy="274320"/>
+          </a:xfrm>
+          <a:prstGeom prst="rect">
+            <a:avLst/>
+          </a:prstGeom>
+          <a:noFill/>
+          <a:ln/>
+        </p:spPr>
+        <p:txBody>
+          <a:bodyPr wrap="square" lIns="0" tIns="0" rIns="0" bIns="0" rtlCol="0" anchor="ctr"/>
+          <a:lstStyle/>
+          <a:p>
+            <a:pPr algn="r" indent="0" marL="0">
+              <a:buNone/>
+            </a:pPr>
+            <a:r>
+              <a:rPr lang="en-US" sz="1400" b="1" dirty="0">
+                <a:solidFill>
+                  <a:srgbClr val="1C3F6E"/>
+                </a:solidFill>
+                <a:latin typeface="Calibri" pitchFamily="34" charset="0"/>
+                <a:ea typeface="Calibri" pitchFamily="34" charset="-122"/>
+                <a:cs typeface="Calibri" pitchFamily="34" charset="-120"/>
+              </a:rPr>
+              <a:t>NEXT LESSON</a:t>
+            </a:r>
+            <a:endParaRPr lang="en-US" sz="1400" dirty="0"/>
+          </a:p>
+        </p:txBody>
+      </p:sp>
+      <p:pic>
+        <p:nvPicPr>
+          <p:cNvPr id="3" name="Image 0" descr="/home/claude/f4/img/minesec_sheet.png">    </p:cNvPr>
+          <p:cNvPicPr>
+            <a:picLocks noChangeAspect="1"/>
+          </p:cNvPicPr>
+          <p:nvPr/>
+        </p:nvPicPr>
+        <p:blipFill>
+          <a:blip r:embed="rId1"/>
+          <a:stretch>
+            <a:fillRect/>
+          </a:stretch>
+        </p:blipFill>
+        <p:spPr>
+          <a:xfrm>
+            <a:off x="0" y="658368"/>
+            <a:ext cx="5120640" cy="5833872"/>
+          </a:xfrm>
+          <a:prstGeom prst="rect">
+            <a:avLst/>
+          </a:prstGeom>
+        </p:spPr>
+      </p:pic>
+      <p:sp>
+        <p:nvSpPr>
+          <p:cNvPr id="4" name="Text 1"/>
+          <p:cNvSpPr/>
+          <p:nvPr/>
+        </p:nvSpPr>
+        <p:spPr>
+          <a:xfrm>
+            <a:off x="5349240" y="1005840"/>
+            <a:ext cx="6522415" cy="731520"/>
+          </a:xfrm>
+          <a:prstGeom prst="rect">
+            <a:avLst/>
+          </a:prstGeom>
+          <a:noFill/>
+          <a:ln/>
+        </p:spPr>
+        <p:txBody>
+          <a:bodyPr wrap="square" lIns="0" tIns="0" rIns="0" bIns="0" rtlCol="0" anchor="ctr">
+            <a:normAutofit/>
+          </a:bodyPr>
+          <a:lstStyle/>
+          <a:p>
+            <a:pPr algn="ctr" indent="0" marL="0">
+              <a:buNone/>
+            </a:pPr>
+            <a:r>
+              <a:rPr lang="en-US" sz="3600" b="1" dirty="0">
+                <a:solidFill>
+                  <a:srgbClr val="990011"/>
+                </a:solidFill>
+                <a:latin typeface="Times New Roman" pitchFamily="34" charset="0"/>
+                <a:ea typeface="Times New Roman" pitchFamily="34" charset="-122"/>
+                <a:cs typeface="Times New Roman" pitchFamily="34" charset="-120"/>
+              </a:rPr>
+              <a:t>Next Lesson</a:t>
+            </a:r>
+            <a:endParaRPr lang="en-US" sz="3600" dirty="0"/>
+          </a:p>
+        </p:txBody>
+      </p:sp>
+      <p:sp>
+        <p:nvSpPr>
+          <p:cNvPr id="5" name="Text 2"/>
+          <p:cNvSpPr/>
+          <p:nvPr/>
+        </p:nvSpPr>
+        <p:spPr>
+          <a:xfrm>
+            <a:off x="5349240" y="1783080"/>
+            <a:ext cx="6522415" cy="4663440"/>
+          </a:xfrm>
+          <a:prstGeom prst="rect">
+            <a:avLst/>
+          </a:prstGeom>
+          <a:noFill/>
+          <a:ln/>
+        </p:spPr>
+        <p:txBody>
+          <a:bodyPr wrap="square" lIns="0" tIns="0" rIns="0" bIns="0" rtlCol="0" anchor="ctr"/>
+          <a:lstStyle/>
+          <a:p>
+            <a:pPr algn="ctr" indent="0" marL="0">
+              <a:spcAft>
+                <a:spcPts val="800"/>
+              </a:spcAft>
+              <a:buNone/>
+            </a:pPr>
+            <a:r>
+              <a:rPr lang="en-US" sz="4000" b="1" dirty="0">
+                <a:solidFill>
+                  <a:srgbClr val="111111"/>
+                </a:solidFill>
+                <a:latin typeface="Times New Roman" pitchFamily="34" charset="0"/>
+                <a:ea typeface="Times New Roman" pitchFamily="34" charset="-122"/>
+                <a:cs typeface="Times New Roman" pitchFamily="34" charset="-120"/>
+              </a:rPr>
+              <a:t>Our next lesson will be on:</a:t>
+            </a:r>
+            <a:endParaRPr lang="en-US" sz="4000" dirty="0"/>
+          </a:p>
+          <a:p>
+            <a:pPr algn="ctr" indent="0" marL="0">
+              <a:spcAft>
+                <a:spcPts val="800"/>
+              </a:spcAft>
+              <a:buNone/>
+            </a:pPr>
+            <a:r>
+              <a:rPr lang="en-US" sz="4000" b="1" dirty="0">
+                <a:solidFill>
+                  <a:srgbClr val="990011"/>
+                </a:solidFill>
+                <a:latin typeface="Times New Roman" pitchFamily="34" charset="0"/>
+                <a:ea typeface="Times New Roman" pitchFamily="34" charset="-122"/>
+                <a:cs typeface="Times New Roman" pitchFamily="34" charset="-120"/>
+              </a:rPr>
+              <a:t>Further Study 1: Early Theories of Crustal Movements</a:t>
+            </a:r>
+            <a:endParaRPr lang="en-US" sz="4000" dirty="0"/>
+          </a:p>
+        </p:txBody>
+      </p:sp>
+      <p:sp>
+        <p:nvSpPr>
+          <p:cNvPr id="25" name="Slide Number Placeholder 0"/>
+          <p:cNvSpPr>
+            <a:spLocks noGrp="1"/>
+          </p:cNvSpPr>
+          <p:nvPr>
+            <p:ph type="sldNum" sz="quarter" idx="4294967295"/>
+          </p:nvPr>
+        </p:nvSpPr>
+        <p:spPr>
+          <a:xfrm>
+            <a:off x="27432" y="91440"/>
+            <a:ext cx="585216" cy="475488"/>
+          </a:xfrm>
+          <a:prstGeom prst="rect">
+            <a:avLst/>
+          </a:prstGeom>
+          <a:extLst>
+            <a:ext uri="{C572A759-6A51-4108-AA02-DFA0A04FC94B}">
+              <ma14:wrappingTextBoxFlag xmlns:ma14="http://schemas.microsoft.com/office/mac/drawingml/2011/main" val="0"/>
+            </a:ext>
+          </a:extLst>
+        </p:spPr>
+        <p:txBody>
+          <a:bodyPr/>
+          <a:lstStyle>
+            <a:lvl1pPr>
+              <a:defRPr sz="2000">
+                <a:solidFill>
+                  <a:srgbClr val="FFFFFF"/>
+                </a:solidFill>
+                <a:latin typeface="Calibri"/>
+                <a:ea typeface="Calibri"/>
+                <a:cs typeface="Calibri"/>
+              </a:defRPr>
+            </a:lvl1pPr>
+          </a:lstStyle>
+          <a:p>
+            <a:pPr algn="ctr"/>
+            <a:fld id="{F7021451-1387-4CA6-816F-3879F97B5CBC}" type="slidenum">
+              <a:rPr b="1" lang="en-US"/>
+              <a:t>58</a:t>
+            </a:fld>
+            <a:endParaRPr lang="en-US"/>
+          </a:p>
+        </p:txBody>
+      </p:sp>
+    </p:spTree>
+  </p:cSld>
+  <p:clrMapOvr>
+    <a:masterClrMapping/>
+  </p:clrMapOvr>
+</p:sld>
+</file>
+
+<file path=ppt/slides/slide59.xml><?xml version="1.0" encoding="utf-8"?>
+<p:sld xmlns:a="http://schemas.openxmlformats.org/drawingml/2006/main" xmlns:r="http://schemas.openxmlformats.org/officeDocument/2006/relationships" xmlns:p="http://schemas.openxmlformats.org/presentationml/2006/main">
+  <p:cSld name="Slide 59">
+    <p:spTree>
+      <p:nvGrpSpPr>
+        <p:cNvPr id="1" name=""/>
+        <p:cNvGrpSpPr/>
+        <p:nvPr/>
+      </p:nvGrpSpPr>
+      <p:grpSpPr>
+        <a:xfrm>
+          <a:off x="0" y="0"/>
+          <a:ext cx="0" cy="0"/>
+          <a:chOff x="0" y="0"/>
+          <a:chExt cx="0" cy="0"/>
+        </a:xfrm>
+      </p:grpSpPr>
+      <p:sp>
+        <p:nvSpPr>
+          <p:cNvPr id="2" name="Text 0"/>
+          <p:cNvSpPr/>
+          <p:nvPr/>
+        </p:nvSpPr>
+        <p:spPr>
+          <a:xfrm>
+            <a:off x="457200" y="713232"/>
+            <a:ext cx="11368735" cy="274320"/>
+          </a:xfrm>
+          <a:prstGeom prst="rect">
+            <a:avLst/>
+          </a:prstGeom>
+          <a:noFill/>
+          <a:ln/>
+        </p:spPr>
+        <p:txBody>
+          <a:bodyPr wrap="square" lIns="0" tIns="0" rIns="0" bIns="0" rtlCol="0" anchor="ctr"/>
+          <a:lstStyle/>
+          <a:p>
+            <a:pPr algn="r" indent="0" marL="0">
+              <a:buNone/>
+            </a:pPr>
+            <a:r>
+              <a:rPr lang="en-US" sz="1400" b="1" dirty="0">
+                <a:solidFill>
+                  <a:srgbClr val="1C3F6E"/>
+                </a:solidFill>
+                <a:latin typeface="Calibri" pitchFamily="34" charset="0"/>
+                <a:ea typeface="Calibri" pitchFamily="34" charset="-122"/>
+                <a:cs typeface="Calibri" pitchFamily="34" charset="-120"/>
+              </a:rPr>
+              <a:t>BILINGUAL GAME</a:t>
+            </a:r>
+            <a:endParaRPr lang="en-US" sz="1400" dirty="0"/>
+          </a:p>
+        </p:txBody>
+      </p:sp>
+      <p:sp>
+        <p:nvSpPr>
+          <p:cNvPr id="3" name="Text 1"/>
+          <p:cNvSpPr/>
+          <p:nvPr/>
+        </p:nvSpPr>
+        <p:spPr>
+          <a:xfrm>
+            <a:off x="457200" y="1005840"/>
+            <a:ext cx="11277295" cy="731520"/>
+          </a:xfrm>
+          <a:prstGeom prst="rect">
+            <a:avLst/>
+          </a:prstGeom>
+          <a:noFill/>
+          <a:ln/>
+        </p:spPr>
+        <p:txBody>
+          <a:bodyPr wrap="square" lIns="0" tIns="0" rIns="0" bIns="0" rtlCol="0" anchor="ctr"/>
+          <a:lstStyle/>
+          <a:p>
+            <a:pPr algn="ctr" indent="0" marL="0">
+              <a:buNone/>
+            </a:pPr>
+            <a:r>
+              <a:rPr lang="en-US" sz="3600" b="1" dirty="0">
+                <a:solidFill>
+                  <a:srgbClr val="990011"/>
+                </a:solidFill>
+                <a:latin typeface="Times New Roman" pitchFamily="34" charset="0"/>
+                <a:ea typeface="Times New Roman" pitchFamily="34" charset="-122"/>
+                <a:cs typeface="Times New Roman" pitchFamily="34" charset="-120"/>
+              </a:rPr>
               <a:t>Bilingual Game (Jeu Bilingue)</a:t>
             </a:r>
             <a:endParaRPr lang="en-US" sz="3600" dirty="0"/>
@@ -19668,7 +21343,7 @@
       </p:sp>
       <p:graphicFrame>
         <p:nvGraphicFramePr>
-          <p:cNvPr id="57" name="Table 0"/>
+          <p:cNvPr id="60" name="Table 0"/>
           <p:cNvGraphicFramePr>
             <a:graphicFrameLocks noGrp="1"/>
           </p:cNvGraphicFramePr>
@@ -19916,7 +21591,7 @@
                           <a:ea typeface="Calibri" pitchFamily="34" charset="-122"/>
                           <a:cs typeface="Calibri" pitchFamily="34" charset="-120"/>
                         </a:rPr>
-                        <a:t>L'écorce terrestre</a:t>
+                        <a:t>La croûte terrestre</a:t>
                       </a:r>
                       <a:endParaRPr lang="en-US" sz="2200" dirty="0">
                         <a:latin typeface="Calibri" charset="0"/>
@@ -20262,7 +21937,7 @@
                           <a:ea typeface="Calibri" pitchFamily="34" charset="-122"/>
                           <a:cs typeface="Calibri" pitchFamily="34" charset="-120"/>
                         </a:rPr>
-                        <a:t>Discontinuity</a:t>
+                        <a:t>Rock cycle</a:t>
                       </a:r>
                       <a:endParaRPr lang="en-US" sz="2200" dirty="0">
                         <a:latin typeface="Calibri" charset="0"/>
@@ -20330,7 +22005,7 @@
                           <a:ea typeface="Calibri" pitchFamily="34" charset="-122"/>
                           <a:cs typeface="Calibri" pitchFamily="34" charset="-120"/>
                         </a:rPr>
-                        <a:t>La discontinuité</a:t>
+                        <a:t>Le cycle des roches</a:t>
                       </a:r>
                       <a:endParaRPr lang="en-US" sz="2200" dirty="0">
                         <a:latin typeface="Calibri" charset="0"/>
@@ -20400,7 +22075,7 @@
                           <a:ea typeface="Calibri" pitchFamily="34" charset="-122"/>
                           <a:cs typeface="Calibri" pitchFamily="34" charset="-120"/>
                         </a:rPr>
-                        <a:t>Rock cycle</a:t>
+                        <a:t>Igneous rock</a:t>
                       </a:r>
                       <a:endParaRPr lang="en-US" sz="2200" dirty="0">
                         <a:latin typeface="Calibri" charset="0"/>
@@ -20468,7 +22143,7 @@
                           <a:ea typeface="Calibri" pitchFamily="34" charset="-122"/>
                           <a:cs typeface="Calibri" pitchFamily="34" charset="-120"/>
                         </a:rPr>
-                        <a:t>Le cycle des roches</a:t>
+                        <a:t>La roche magmatique</a:t>
                       </a:r>
                       <a:endParaRPr lang="en-US" sz="2200" dirty="0">
                         <a:latin typeface="Calibri" charset="0"/>
@@ -20538,7 +22213,7 @@
                           <a:ea typeface="Calibri" pitchFamily="34" charset="-122"/>
                           <a:cs typeface="Calibri" pitchFamily="34" charset="-120"/>
                         </a:rPr>
-                        <a:t>Landform</a:t>
+                        <a:t>Sedimentary rock</a:t>
                       </a:r>
                       <a:endParaRPr lang="en-US" sz="2200" dirty="0">
                         <a:latin typeface="Calibri" charset="0"/>
@@ -20606,7 +22281,7 @@
                           <a:ea typeface="Calibri" pitchFamily="34" charset="-122"/>
                           <a:cs typeface="Calibri" pitchFamily="34" charset="-120"/>
                         </a:rPr>
-                        <a:t>Le modelé</a:t>
+                        <a:t>La roche sédimentaire</a:t>
                       </a:r>
                       <a:endParaRPr lang="en-US" sz="2200" dirty="0">
                         <a:latin typeface="Calibri" charset="0"/>
@@ -20704,7 +22379,7 @@
             <a:pPr algn="ctr"/>
             <a:fld id="{F7021451-1387-4CA6-816F-3879F97B5CBC}" type="slidenum">
               <a:rPr b="1" lang="en-US"/>
-              <a:t>56</a:t>
+              <a:t>59</a:t>
             </a:fld>
             <a:endParaRPr lang="en-US"/>
           </a:p>
@@ -20718,9 +22393,9 @@
 </p:sld>
 </file>
 
-<file path=ppt/slides/slide57.xml><?xml version="1.0" encoding="utf-8"?>
+<file path=ppt/slides/slide6.xml><?xml version="1.0" encoding="utf-8"?>
 <p:sld xmlns:a="http://schemas.openxmlformats.org/drawingml/2006/main" xmlns:r="http://schemas.openxmlformats.org/officeDocument/2006/relationships" xmlns:p="http://schemas.openxmlformats.org/presentationml/2006/main">
-  <p:cSld name="Slide 57">
+  <p:cSld name="Slide 6">
     <p:spTree>
       <p:nvGrpSpPr>
         <p:cNvPr id="1" name=""/>
@@ -20768,22 +22443,46 @@
                 <a:ea typeface="Calibri" pitchFamily="34" charset="-122"/>
                 <a:cs typeface="Calibri" pitchFamily="34" charset="-120"/>
               </a:rPr>
-              <a:t>LOGBOOK</a:t>
+              <a:t>LESSON PLAN</a:t>
             </a:r>
             <a:endParaRPr lang="en-US" sz="1400" dirty="0"/>
           </a:p>
         </p:txBody>
       </p:sp>
-      <p:sp>
-        <p:nvSpPr>
-          <p:cNvPr id="3" name="Text 1"/>
+      <p:pic>
+        <p:nvPicPr>
+          <p:cNvPr id="3" name="Image 0" descr="/home/claude/f4/img/minesec_sheet.png">    </p:cNvPr>
+          <p:cNvPicPr>
+            <a:picLocks noChangeAspect="1"/>
+          </p:cNvPicPr>
+          <p:nvPr/>
+        </p:nvPicPr>
+        <p:blipFill>
+          <a:blip r:embed="rId1"/>
+          <a:stretch>
+            <a:fillRect/>
+          </a:stretch>
+        </p:blipFill>
+        <p:spPr>
+          <a:xfrm>
+            <a:off x="0" y="658368"/>
+            <a:ext cx="2468880" cy="5833872"/>
+          </a:xfrm>
+          <a:prstGeom prst="rect">
+            <a:avLst/>
+          </a:prstGeom>
+        </p:spPr>
+      </p:pic>
+      <p:sp>
+        <p:nvSpPr>
+          <p:cNvPr id="4" name="Text 1"/>
           <p:cNvSpPr/>
           <p:nvPr/>
         </p:nvSpPr>
         <p:spPr>
           <a:xfrm>
-            <a:off x="457200" y="1005840"/>
-            <a:ext cx="11277295" cy="731520"/>
+            <a:off x="2697480" y="1005840"/>
+            <a:ext cx="9174175" cy="731520"/>
           </a:xfrm>
           <a:prstGeom prst="rect">
             <a:avLst/>
@@ -20792,7 +22491,9 @@
           <a:ln/>
         </p:spPr>
         <p:txBody>
-          <a:bodyPr wrap="square" lIns="0" tIns="0" rIns="0" bIns="0" rtlCol="0" anchor="ctr"/>
+          <a:bodyPr wrap="square" lIns="0" tIns="0" rIns="0" bIns="0" rtlCol="0" anchor="ctr">
+            <a:normAutofit/>
+          </a:bodyPr>
           <a:lstStyle/>
           <a:p>
             <a:pPr algn="ctr" indent="0" marL="0">
@@ -20807,6 +22508,311 @@
                 <a:ea typeface="Times New Roman" pitchFamily="34" charset="-122"/>
                 <a:cs typeface="Times New Roman" pitchFamily="34" charset="-120"/>
               </a:rPr>
+              <a:t>Lesson Plan</a:t>
+            </a:r>
+            <a:endParaRPr lang="en-US" sz="3600" dirty="0"/>
+          </a:p>
+        </p:txBody>
+      </p:sp>
+      <p:sp>
+        <p:nvSpPr>
+          <p:cNvPr id="5" name="Text 2"/>
+          <p:cNvSpPr/>
+          <p:nvPr/>
+        </p:nvSpPr>
+        <p:spPr>
+          <a:xfrm>
+            <a:off x="2697480" y="1783080"/>
+            <a:ext cx="9174175" cy="4663440"/>
+          </a:xfrm>
+          <a:prstGeom prst="rect">
+            <a:avLst/>
+          </a:prstGeom>
+          <a:noFill/>
+          <a:ln/>
+        </p:spPr>
+        <p:txBody>
+          <a:bodyPr wrap="square" lIns="0" tIns="0" rIns="0" bIns="0" rtlCol="0" anchor="t"/>
+          <a:lstStyle/>
+          <a:p>
+            <a:pPr algn="l" marL="342900" indent="-342900">
+              <a:spcAft>
+                <a:spcPts val="800"/>
+              </a:spcAft>
+              <a:buSzPct val="100000"/>
+              <a:buFont typeface="+mj-lt"/>
+              <a:buAutoNum type="arabicPeriod" startAt="1"/>
+            </a:pPr>
+            <a:r>
+              <a:rPr lang="en-US" sz="4000" dirty="0">
+                <a:solidFill>
+                  <a:srgbClr val="111111"/>
+                </a:solidFill>
+                <a:latin typeface="Times New Roman" pitchFamily="34" charset="0"/>
+                <a:ea typeface="Times New Roman" pitchFamily="34" charset="-122"/>
+                <a:cs typeface="Times New Roman" pitchFamily="34" charset="-120"/>
+              </a:rPr>
+              <a:t>Correction of the homework</a:t>
+            </a:r>
+            <a:endParaRPr lang="en-US" sz="4000" dirty="0"/>
+          </a:p>
+          <a:p>
+            <a:pPr algn="l" marL="342900" indent="-342900">
+              <a:spcAft>
+                <a:spcPts val="800"/>
+              </a:spcAft>
+              <a:buSzPct val="100000"/>
+              <a:buFont typeface="+mj-lt"/>
+              <a:buAutoNum type="arabicPeriod" startAt="1"/>
+            </a:pPr>
+            <a:r>
+              <a:rPr lang="en-US" sz="4000" dirty="0">
+                <a:solidFill>
+                  <a:srgbClr val="111111"/>
+                </a:solidFill>
+                <a:latin typeface="Times New Roman" pitchFamily="34" charset="0"/>
+                <a:ea typeface="Times New Roman" pitchFamily="34" charset="-122"/>
+                <a:cs typeface="Times New Roman" pitchFamily="34" charset="-120"/>
+              </a:rPr>
+              <a:t>Objectives and recall</a:t>
+            </a:r>
+            <a:endParaRPr lang="en-US" sz="4000" dirty="0"/>
+          </a:p>
+          <a:p>
+            <a:pPr algn="l" marL="342900" indent="-342900">
+              <a:spcAft>
+                <a:spcPts val="800"/>
+              </a:spcAft>
+              <a:buSzPct val="100000"/>
+              <a:buFont typeface="+mj-lt"/>
+              <a:buAutoNum type="arabicPeriod" startAt="1"/>
+            </a:pPr>
+            <a:r>
+              <a:rPr lang="en-US" sz="4000" dirty="0">
+                <a:solidFill>
+                  <a:srgbClr val="111111"/>
+                </a:solidFill>
+                <a:latin typeface="Times New Roman" pitchFamily="34" charset="0"/>
+                <a:ea typeface="Times New Roman" pitchFamily="34" charset="-122"/>
+                <a:cs typeface="Times New Roman" pitchFamily="34" charset="-120"/>
+              </a:rPr>
+              <a:t>Real-life situation and action to take</a:t>
+            </a:r>
+            <a:endParaRPr lang="en-US" sz="4000" dirty="0"/>
+          </a:p>
+          <a:p>
+            <a:pPr algn="l" marL="342900" indent="-342900">
+              <a:spcAft>
+                <a:spcPts val="800"/>
+              </a:spcAft>
+              <a:buSzPct val="100000"/>
+              <a:buFont typeface="+mj-lt"/>
+              <a:buAutoNum type="arabicPeriod" startAt="1"/>
+            </a:pPr>
+            <a:r>
+              <a:rPr lang="en-US" sz="4000" dirty="0">
+                <a:solidFill>
+                  <a:srgbClr val="111111"/>
+                </a:solidFill>
+                <a:latin typeface="Times New Roman" pitchFamily="34" charset="0"/>
+                <a:ea typeface="Times New Roman" pitchFamily="34" charset="-122"/>
+                <a:cs typeface="Times New Roman" pitchFamily="34" charset="-120"/>
+              </a:rPr>
+              <a:t>Learning activities</a:t>
+            </a:r>
+            <a:endParaRPr lang="en-US" sz="4000" dirty="0"/>
+          </a:p>
+          <a:p>
+            <a:pPr algn="l" marL="342900" indent="-342900">
+              <a:spcAft>
+                <a:spcPts val="800"/>
+              </a:spcAft>
+              <a:buSzPct val="100000"/>
+              <a:buFont typeface="+mj-lt"/>
+              <a:buAutoNum type="arabicPeriod" startAt="1"/>
+            </a:pPr>
+            <a:r>
+              <a:rPr lang="en-US" sz="4000" dirty="0">
+                <a:solidFill>
+                  <a:srgbClr val="111111"/>
+                </a:solidFill>
+                <a:latin typeface="Times New Roman" pitchFamily="34" charset="0"/>
+                <a:ea typeface="Times New Roman" pitchFamily="34" charset="-122"/>
+                <a:cs typeface="Times New Roman" pitchFamily="34" charset="-120"/>
+              </a:rPr>
+              <a:t>Board summary</a:t>
+            </a:r>
+            <a:endParaRPr lang="en-US" sz="4000" dirty="0"/>
+          </a:p>
+          <a:p>
+            <a:pPr algn="l" marL="342900" indent="-342900">
+              <a:spcAft>
+                <a:spcPts val="800"/>
+              </a:spcAft>
+              <a:buSzPct val="100000"/>
+              <a:buFont typeface="+mj-lt"/>
+              <a:buAutoNum type="arabicPeriod" startAt="1"/>
+            </a:pPr>
+            <a:r>
+              <a:rPr lang="en-US" sz="4000" dirty="0">
+                <a:solidFill>
+                  <a:srgbClr val="111111"/>
+                </a:solidFill>
+                <a:latin typeface="Times New Roman" pitchFamily="34" charset="0"/>
+                <a:ea typeface="Times New Roman" pitchFamily="34" charset="-122"/>
+                <a:cs typeface="Times New Roman" pitchFamily="34" charset="-120"/>
+              </a:rPr>
+              <a:t>Evaluation, remediation and homework</a:t>
+            </a:r>
+            <a:endParaRPr lang="en-US" sz="4000" dirty="0"/>
+          </a:p>
+        </p:txBody>
+      </p:sp>
+      <p:sp>
+        <p:nvSpPr>
+          <p:cNvPr id="25" name="Slide Number Placeholder 0"/>
+          <p:cNvSpPr>
+            <a:spLocks noGrp="1"/>
+          </p:cNvSpPr>
+          <p:nvPr>
+            <p:ph type="sldNum" sz="quarter" idx="4294967295"/>
+          </p:nvPr>
+        </p:nvSpPr>
+        <p:spPr>
+          <a:xfrm>
+            <a:off x="27432" y="91440"/>
+            <a:ext cx="585216" cy="475488"/>
+          </a:xfrm>
+          <a:prstGeom prst="rect">
+            <a:avLst/>
+          </a:prstGeom>
+          <a:extLst>
+            <a:ext uri="{C572A759-6A51-4108-AA02-DFA0A04FC94B}">
+              <ma14:wrappingTextBoxFlag xmlns:ma14="http://schemas.microsoft.com/office/mac/drawingml/2011/main" val="0"/>
+            </a:ext>
+          </a:extLst>
+        </p:spPr>
+        <p:txBody>
+          <a:bodyPr/>
+          <a:lstStyle>
+            <a:lvl1pPr>
+              <a:defRPr sz="2000">
+                <a:solidFill>
+                  <a:srgbClr val="FFFFFF"/>
+                </a:solidFill>
+                <a:latin typeface="Calibri"/>
+                <a:ea typeface="Calibri"/>
+                <a:cs typeface="Calibri"/>
+              </a:defRPr>
+            </a:lvl1pPr>
+          </a:lstStyle>
+          <a:p>
+            <a:pPr algn="ctr"/>
+            <a:fld id="{F7021451-1387-4CA6-816F-3879F97B5CBC}" type="slidenum">
+              <a:rPr b="1" lang="en-US"/>
+              <a:t>6</a:t>
+            </a:fld>
+            <a:endParaRPr lang="en-US"/>
+          </a:p>
+        </p:txBody>
+      </p:sp>
+    </p:spTree>
+  </p:cSld>
+  <p:clrMapOvr>
+    <a:masterClrMapping/>
+  </p:clrMapOvr>
+</p:sld>
+</file>
+
+<file path=ppt/slides/slide60.xml><?xml version="1.0" encoding="utf-8"?>
+<p:sld xmlns:a="http://schemas.openxmlformats.org/drawingml/2006/main" xmlns:r="http://schemas.openxmlformats.org/officeDocument/2006/relationships" xmlns:p="http://schemas.openxmlformats.org/presentationml/2006/main">
+  <p:cSld name="Slide 60">
+    <p:spTree>
+      <p:nvGrpSpPr>
+        <p:cNvPr id="1" name=""/>
+        <p:cNvGrpSpPr/>
+        <p:nvPr/>
+      </p:nvGrpSpPr>
+      <p:grpSpPr>
+        <a:xfrm>
+          <a:off x="0" y="0"/>
+          <a:ext cx="0" cy="0"/>
+          <a:chOff x="0" y="0"/>
+          <a:chExt cx="0" cy="0"/>
+        </a:xfrm>
+      </p:grpSpPr>
+      <p:sp>
+        <p:nvSpPr>
+          <p:cNvPr id="2" name="Text 0"/>
+          <p:cNvSpPr/>
+          <p:nvPr/>
+        </p:nvSpPr>
+        <p:spPr>
+          <a:xfrm>
+            <a:off x="457200" y="713232"/>
+            <a:ext cx="11368735" cy="274320"/>
+          </a:xfrm>
+          <a:prstGeom prst="rect">
+            <a:avLst/>
+          </a:prstGeom>
+          <a:noFill/>
+          <a:ln/>
+        </p:spPr>
+        <p:txBody>
+          <a:bodyPr wrap="square" lIns="0" tIns="0" rIns="0" bIns="0" rtlCol="0" anchor="ctr"/>
+          <a:lstStyle/>
+          <a:p>
+            <a:pPr algn="r" indent="0" marL="0">
+              <a:buNone/>
+            </a:pPr>
+            <a:r>
+              <a:rPr lang="en-US" sz="1400" b="1" dirty="0">
+                <a:solidFill>
+                  <a:srgbClr val="1C3F6E"/>
+                </a:solidFill>
+                <a:latin typeface="Calibri" pitchFamily="34" charset="0"/>
+                <a:ea typeface="Calibri" pitchFamily="34" charset="-122"/>
+                <a:cs typeface="Calibri" pitchFamily="34" charset="-120"/>
+              </a:rPr>
+              <a:t>LOGBOOK</a:t>
+            </a:r>
+            <a:endParaRPr lang="en-US" sz="1400" dirty="0"/>
+          </a:p>
+        </p:txBody>
+      </p:sp>
+      <p:sp>
+        <p:nvSpPr>
+          <p:cNvPr id="3" name="Text 1"/>
+          <p:cNvSpPr/>
+          <p:nvPr/>
+        </p:nvSpPr>
+        <p:spPr>
+          <a:xfrm>
+            <a:off x="457200" y="1005840"/>
+            <a:ext cx="11277295" cy="731520"/>
+          </a:xfrm>
+          <a:prstGeom prst="rect">
+            <a:avLst/>
+          </a:prstGeom>
+          <a:noFill/>
+          <a:ln/>
+        </p:spPr>
+        <p:txBody>
+          <a:bodyPr wrap="square" lIns="0" tIns="0" rIns="0" bIns="0" rtlCol="0" anchor="ctr"/>
+          <a:lstStyle/>
+          <a:p>
+            <a:pPr algn="ctr" indent="0" marL="0">
+              <a:buNone/>
+            </a:pPr>
+            <a:r>
+              <a:rPr lang="en-US" sz="3600" b="1" dirty="0">
+                <a:solidFill>
+                  <a:srgbClr val="990011"/>
+                </a:solidFill>
+                <a:latin typeface="Times New Roman" pitchFamily="34" charset="0"/>
+                <a:ea typeface="Times New Roman" pitchFamily="34" charset="-122"/>
+                <a:cs typeface="Times New Roman" pitchFamily="34" charset="-120"/>
+              </a:rPr>
               <a:t>Official Logbook (1/2)</a:t>
             </a:r>
             <a:endParaRPr lang="en-US" sz="3600" dirty="0"/>
@@ -20815,7 +22821,7 @@
       </p:sp>
       <p:graphicFrame>
         <p:nvGraphicFramePr>
-          <p:cNvPr id="58" name="Table 0"/>
+          <p:cNvPr id="61" name="Table 0"/>
           <p:cNvGraphicFramePr>
             <a:graphicFrameLocks noGrp="1"/>
           </p:cNvGraphicFramePr>
@@ -21201,7 +23207,7 @@
                           <a:ea typeface="Calibri" pitchFamily="34" charset="-122"/>
                           <a:cs typeface="Calibri" pitchFamily="34" charset="-120"/>
                         </a:rPr>
-                        <a:t>Describe the layers of the Earth and the main discontinuities. Explain the rock cycle. Distinguish internal (endogenic) and external (exogenic) forces.</a:t>
+                        <a:t>Describe the crust, the mantle and the core. Explain the rock cycle and the three types of rocks. Distinguish internal and external forces. Classify landforms into orders with examples.</a:t>
                       </a:r>
                       <a:endParaRPr lang="en-US" sz="1600" dirty="0">
                         <a:latin typeface="Calibri" charset="0"/>
@@ -21339,7 +23345,7 @@
                           <a:ea typeface="Calibri" pitchFamily="34" charset="-122"/>
                           <a:cs typeface="Calibri" pitchFamily="34" charset="-120"/>
                         </a:rPr>
-                        <a:t>Learners are able to describe the layers of the Earth and explain how internal and external forces shape the landscape.</a:t>
+                        <a:t>Learners are able to describe the internal structure of the Earth, the rock cycle and the forces that shape landforms around Garoua.</a:t>
                       </a:r>
                       <a:endParaRPr lang="en-US" sz="1600" dirty="0">
                         <a:latin typeface="Calibri" charset="0"/>
@@ -21437,7 +23443,7 @@
             <a:pPr algn="ctr"/>
             <a:fld id="{F7021451-1387-4CA6-816F-3879F97B5CBC}" type="slidenum">
               <a:rPr b="1" lang="en-US"/>
-              <a:t>57</a:t>
+              <a:t>60</a:t>
             </a:fld>
             <a:endParaRPr lang="en-US"/>
           </a:p>
@@ -21451,9 +23457,9 @@
 </p:sld>
 </file>
 
-<file path=ppt/slides/slide58.xml><?xml version="1.0" encoding="utf-8"?>
+<file path=ppt/slides/slide61.xml><?xml version="1.0" encoding="utf-8"?>
 <p:sld xmlns:a="http://schemas.openxmlformats.org/drawingml/2006/main" xmlns:r="http://schemas.openxmlformats.org/officeDocument/2006/relationships" xmlns:p="http://schemas.openxmlformats.org/presentationml/2006/main">
-  <p:cSld name="Slide 58">
+  <p:cSld name="Slide 61">
     <p:spTree>
       <p:nvGrpSpPr>
         <p:cNvPr id="1" name=""/>
@@ -21548,7 +23554,7 @@
       </p:sp>
       <p:graphicFrame>
         <p:nvGraphicFramePr>
-          <p:cNvPr id="59" name="Table 0"/>
+          <p:cNvPr id="62" name="Table 0"/>
           <p:cNvGraphicFramePr>
             <a:graphicFrameLocks noGrp="1"/>
           </p:cNvGraphicFramePr>
@@ -21658,7 +23664,7 @@
                           <a:ea typeface="Calibri" pitchFamily="34" charset="-122"/>
                           <a:cs typeface="Calibri" pitchFamily="34" charset="-120"/>
                         </a:rPr>
-                        <a:t>DEFINITIONS; Layers of the Earth and their Properties; The Rock Material Cycle; Forces and Categories of Landforms.</a:t>
+                        <a:t>DEFINITIONS; The Layers of the Earth; The Rock Cycle; Forces that Shape the Landscape; Categories of Landforms.</a:t>
                       </a:r>
                       <a:endParaRPr lang="en-US" sz="1600" dirty="0">
                         <a:latin typeface="Calibri" charset="0"/>
@@ -21934,7 +23940,7 @@
                           <a:ea typeface="Calibri" pitchFamily="34" charset="-122"/>
                           <a:cs typeface="Calibri" pitchFamily="34" charset="-120"/>
                         </a:rPr>
-                        <a:t>Look at a map of the world. Why do the coasts of Africa and South America look like pieces of a puzzle? Write two sentences.</a:t>
+                        <a:t>Name the supercontinent proposed by Wegener.</a:t>
                       </a:r>
                       <a:endParaRPr lang="en-US" sz="1600" dirty="0">
                         <a:latin typeface="Calibri" charset="0"/>
@@ -22308,7 +24314,7 @@
             <a:pPr algn="ctr"/>
             <a:fld id="{F7021451-1387-4CA6-816F-3879F97B5CBC}" type="slidenum">
               <a:rPr b="1" lang="en-US"/>
-              <a:t>58</a:t>
+              <a:t>61</a:t>
             </a:fld>
             <a:endParaRPr lang="en-US"/>
           </a:p>
@@ -22322,9 +24328,9 @@
 </p:sld>
 </file>
 
-<file path=ppt/slides/slide59.xml><?xml version="1.0" encoding="utf-8"?>
+<file path=ppt/slides/slide62.xml><?xml version="1.0" encoding="utf-8"?>
 <p:sld xmlns:a="http://schemas.openxmlformats.org/drawingml/2006/main" xmlns:r="http://schemas.openxmlformats.org/officeDocument/2006/relationships" xmlns:p="http://schemas.openxmlformats.org/presentationml/2006/main">
-  <p:cSld name="Slide 59">
+  <p:cSld name="Slide 62">
     <p:spTree>
       <p:nvGrpSpPr>
         <p:cNvPr id="1" name=""/>
@@ -22501,7 +24507,7 @@
                 <a:ea typeface="Calibri" pitchFamily="34" charset="-122"/>
                 <a:cs typeface="Calibri" pitchFamily="34" charset="-120"/>
               </a:rPr>
-              <a:t>Without the projector (Activity 1): draw four circles on the board.</a:t>
+              <a:t>Without the projector (Activity 1): use a boiled egg: shell, white and yolk.</a:t>
             </a:r>
             <a:endParaRPr lang="en-US" sz="2000" dirty="0"/>
           </a:p>
@@ -22522,7 +24528,7 @@
                 <a:ea typeface="Calibri" pitchFamily="34" charset="-122"/>
                 <a:cs typeface="Calibri" pitchFamily="34" charset="-120"/>
               </a:rPr>
-              <a:t>Without the projector (Activity 2): write the three discontinuities on the board.</a:t>
+              <a:t>Without the projector (Activity 2): draw the layers as circles.</a:t>
             </a:r>
             <a:endParaRPr lang="en-US" sz="2000" dirty="0"/>
           </a:p>
@@ -22543,7 +24549,7 @@
                 <a:ea typeface="Calibri" pitchFamily="34" charset="-122"/>
                 <a:cs typeface="Calibri" pitchFamily="34" charset="-120"/>
               </a:rPr>
-              <a:t>Without the projector (Activity 3): draw the four boxes of the rock cycle.</a:t>
+              <a:t>Without the projector (Activity 3): draw the cycle with arrows.</a:t>
             </a:r>
             <a:endParaRPr lang="en-US" sz="2000" dirty="0"/>
           </a:p>
@@ -22564,7 +24570,7 @@
                 <a:ea typeface="Calibri" pitchFamily="34" charset="-122"/>
                 <a:cs typeface="Calibri" pitchFamily="34" charset="-120"/>
               </a:rPr>
-              <a:t>Without the projector (Activity 4): mention Mount Cameroon.</a:t>
+              <a:t>Without the projector (Activity 4): describe a gully in your quarter.</a:t>
             </a:r>
             <a:endParaRPr lang="en-US" sz="2000" dirty="0"/>
           </a:p>
@@ -22585,7 +24591,7 @@
                 <a:ea typeface="Calibri" pitchFamily="34" charset="-122"/>
                 <a:cs typeface="Calibri" pitchFamily="34" charset="-120"/>
               </a:rPr>
-              <a:t>Without the projector (Activity 5): describe the gullies beside the roads after a storm.</a:t>
+              <a:t>Without the projector (Activity 5): list landforms around Garoua.</a:t>
             </a:r>
             <a:endParaRPr lang="en-US" sz="2000" dirty="0"/>
           </a:p>
@@ -22633,7 +24639,7 @@
             <a:pPr algn="ctr"/>
             <a:fld id="{F7021451-1387-4CA6-816F-3879F97B5CBC}" type="slidenum">
               <a:rPr b="1" lang="en-US"/>
-              <a:t>59</a:t>
+              <a:t>62</a:t>
             </a:fld>
             <a:endParaRPr lang="en-US"/>
           </a:p>
@@ -22647,9 +24653,9 @@
 </p:sld>
 </file>
 
-<file path=ppt/slides/slide6.xml><?xml version="1.0" encoding="utf-8"?>
+<file path=ppt/slides/slide63.xml><?xml version="1.0" encoding="utf-8"?>
 <p:sld xmlns:a="http://schemas.openxmlformats.org/drawingml/2006/main" xmlns:r="http://schemas.openxmlformats.org/officeDocument/2006/relationships" xmlns:p="http://schemas.openxmlformats.org/presentationml/2006/main">
-  <p:cSld name="Slide 6">
+  <p:cSld name="Slide 63">
     <p:spTree>
       <p:nvGrpSpPr>
         <p:cNvPr id="1" name=""/>
@@ -22697,7 +24703,7 @@
                 <a:ea typeface="Calibri" pitchFamily="34" charset="-122"/>
                 <a:cs typeface="Calibri" pitchFamily="34" charset="-120"/>
               </a:rPr>
-              <a:t>LESSON PLAN</a:t>
+              <a:t>REFERENCES</a:t>
             </a:r>
             <a:endParaRPr lang="en-US" sz="1400" dirty="0"/>
           </a:p>
@@ -22720,7 +24726,7 @@
         <p:spPr>
           <a:xfrm>
             <a:off x="0" y="658368"/>
-            <a:ext cx="2468880" cy="5833872"/>
+            <a:ext cx="1463040" cy="5833872"/>
           </a:xfrm>
           <a:prstGeom prst="rect">
             <a:avLst/>
@@ -22735,8 +24741,8 @@
         </p:nvSpPr>
         <p:spPr>
           <a:xfrm>
-            <a:off x="2697480" y="1005840"/>
-            <a:ext cx="9174175" cy="731520"/>
+            <a:off x="1691640" y="1005840"/>
+            <a:ext cx="10180015" cy="731520"/>
           </a:xfrm>
           <a:prstGeom prst="rect">
             <a:avLst/>
@@ -22762,7 +24768,7 @@
                 <a:ea typeface="Times New Roman" pitchFamily="34" charset="-122"/>
                 <a:cs typeface="Times New Roman" pitchFamily="34" charset="-120"/>
               </a:rPr>
-              <a:t>Lesson Plan</a:t>
+              <a:t>References</a:t>
             </a:r>
             <a:endParaRPr lang="en-US" sz="3600" dirty="0"/>
           </a:p>
@@ -22776,8 +24782,8 @@
         </p:nvSpPr>
         <p:spPr>
           <a:xfrm>
-            <a:off x="2697480" y="1783080"/>
-            <a:ext cx="9174175" cy="4663440"/>
+            <a:off x="1691640" y="1783080"/>
+            <a:ext cx="10180015" cy="4663440"/>
           </a:xfrm>
           <a:prstGeom prst="rect">
             <a:avLst/>
@@ -22794,21 +24800,20 @@
                 <a:spcPts val="800"/>
               </a:spcAft>
               <a:buSzPct val="100000"/>
-              <a:buFont typeface="+mj-lt"/>
-              <a:buAutoNum type="arabicPeriod" startAt="1"/>
-            </a:pPr>
-            <a:r>
-              <a:rPr lang="en-US" sz="4000" dirty="0">
+              <a:buChar char="•"/>
+            </a:pPr>
+            <a:r>
+              <a:rPr lang="en-US" sz="1800" dirty="0">
                 <a:solidFill>
                   <a:srgbClr val="111111"/>
                 </a:solidFill>
-                <a:latin typeface="Times New Roman" pitchFamily="34" charset="0"/>
-                <a:ea typeface="Times New Roman" pitchFamily="34" charset="-122"/>
-                <a:cs typeface="Times New Roman" pitchFamily="34" charset="-120"/>
-              </a:rPr>
-              <a:t>Correction of the homework</a:t>
-            </a:r>
-            <a:endParaRPr lang="en-US" sz="4000" dirty="0"/>
+                <a:latin typeface="Calibri" pitchFamily="34" charset="0"/>
+                <a:ea typeface="Calibri" pitchFamily="34" charset="-122"/>
+                <a:cs typeface="Calibri" pitchFamily="34" charset="-120"/>
+              </a:rPr>
+              <a:t>Geography Syllabus for Sixth Forms (Lower and Upper Sixth), MINESEC, 2019 — Module 2 (Geomorphology).</a:t>
+            </a:r>
+            <a:endParaRPr lang="en-US" sz="1800" dirty="0"/>
           </a:p>
           <a:p>
             <a:pPr algn="l" marL="342900" indent="-342900">
@@ -22816,21 +24821,20 @@
                 <a:spcPts val="800"/>
               </a:spcAft>
               <a:buSzPct val="100000"/>
-              <a:buFont typeface="+mj-lt"/>
-              <a:buAutoNum type="arabicPeriod" startAt="1"/>
-            </a:pPr>
-            <a:r>
-              <a:rPr lang="en-US" sz="4000" dirty="0">
+              <a:buChar char="•"/>
+            </a:pPr>
+            <a:r>
+              <a:rPr lang="en-US" sz="1800" dirty="0">
                 <a:solidFill>
                   <a:srgbClr val="111111"/>
                 </a:solidFill>
-                <a:latin typeface="Times New Roman" pitchFamily="34" charset="0"/>
-                <a:ea typeface="Times New Roman" pitchFamily="34" charset="-122"/>
-                <a:cs typeface="Times New Roman" pitchFamily="34" charset="-120"/>
-              </a:rPr>
-              <a:t>Objectives and recall</a:t>
-            </a:r>
-            <a:endParaRPr lang="en-US" sz="4000" dirty="0"/>
+                <a:latin typeface="Calibri" pitchFamily="34" charset="0"/>
+                <a:ea typeface="Calibri" pitchFamily="34" charset="-122"/>
+                <a:cs typeface="Calibri" pitchFamily="34" charset="-120"/>
+              </a:rPr>
+              <a:t>Teacher's course notes: Mr KAMDEM E., Geomorphology (LSA), GBHS Garoua, 2026.</a:t>
+            </a:r>
+            <a:endParaRPr lang="en-US" sz="1800" dirty="0"/>
           </a:p>
           <a:p>
             <a:pPr algn="l" marL="342900" indent="-342900">
@@ -22838,21 +24842,20 @@
                 <a:spcPts val="800"/>
               </a:spcAft>
               <a:buSzPct val="100000"/>
-              <a:buFont typeface="+mj-lt"/>
-              <a:buAutoNum type="arabicPeriod" startAt="1"/>
-            </a:pPr>
-            <a:r>
-              <a:rPr lang="en-US" sz="4000" dirty="0">
+              <a:buChar char="•"/>
+            </a:pPr>
+            <a:r>
+              <a:rPr lang="en-US" sz="1800" dirty="0">
                 <a:solidFill>
                   <a:srgbClr val="111111"/>
                 </a:solidFill>
-                <a:latin typeface="Times New Roman" pitchFamily="34" charset="0"/>
-                <a:ea typeface="Times New Roman" pitchFamily="34" charset="-122"/>
-                <a:cs typeface="Times New Roman" pitchFamily="34" charset="-120"/>
-              </a:rPr>
-              <a:t>Real-life situation and action to take</a:t>
-            </a:r>
-            <a:endParaRPr lang="en-US" sz="4000" dirty="0"/>
+                <a:latin typeface="Calibri" pitchFamily="34" charset="0"/>
+                <a:ea typeface="Calibri" pitchFamily="34" charset="-122"/>
+                <a:cs typeface="Calibri" pitchFamily="34" charset="-120"/>
+              </a:rPr>
+              <a:t>Photo, Activity 4: “Soil erosion in the central Mexican Highlands” by CIMMYT, CC BY-NC-SA 2.0, via Flickr (https://www.flickr.com/photos/44760652@N05/6244930288)</a:t>
+            </a:r>
+            <a:endParaRPr lang="en-US" sz="1800" dirty="0"/>
           </a:p>
           <a:p>
             <a:pPr algn="l" marL="342900" indent="-342900">
@@ -22860,21 +24863,20 @@
                 <a:spcPts val="800"/>
               </a:spcAft>
               <a:buSzPct val="100000"/>
-              <a:buFont typeface="+mj-lt"/>
-              <a:buAutoNum type="arabicPeriod" startAt="1"/>
-            </a:pPr>
-            <a:r>
-              <a:rPr lang="en-US" sz="4000" dirty="0">
+              <a:buChar char="•"/>
+            </a:pPr>
+            <a:r>
+              <a:rPr lang="en-US" sz="1800" dirty="0">
                 <a:solidFill>
                   <a:srgbClr val="111111"/>
                 </a:solidFill>
-                <a:latin typeface="Times New Roman" pitchFamily="34" charset="0"/>
-                <a:ea typeface="Times New Roman" pitchFamily="34" charset="-122"/>
-                <a:cs typeface="Times New Roman" pitchFamily="34" charset="-120"/>
-              </a:rPr>
-              <a:t>Learning activities</a:t>
-            </a:r>
-            <a:endParaRPr lang="en-US" sz="4000" dirty="0"/>
+                <a:latin typeface="Calibri" pitchFamily="34" charset="0"/>
+                <a:ea typeface="Calibri" pitchFamily="34" charset="-122"/>
+                <a:cs typeface="Calibri" pitchFamily="34" charset="-120"/>
+              </a:rPr>
+              <a:t>Photo, board summary (Igneous rocks): “Sunset over Pyramid Rock” by Mark Wassell, CC BY-NC-ND 2.0, via Flickr (https://www.flickr.com/photos/61520356@N07/6515411027)</a:t>
+            </a:r>
+            <a:endParaRPr lang="en-US" sz="1800" dirty="0"/>
           </a:p>
           <a:p>
             <a:pPr algn="l" marL="342900" indent="-342900">
@@ -22882,21 +24884,20 @@
                 <a:spcPts val="800"/>
               </a:spcAft>
               <a:buSzPct val="100000"/>
-              <a:buFont typeface="+mj-lt"/>
-              <a:buAutoNum type="arabicPeriod" startAt="1"/>
-            </a:pPr>
-            <a:r>
-              <a:rPr lang="en-US" sz="4000" dirty="0">
+              <a:buChar char="•"/>
+            </a:pPr>
+            <a:r>
+              <a:rPr lang="en-US" sz="1800" dirty="0">
                 <a:solidFill>
                   <a:srgbClr val="111111"/>
                 </a:solidFill>
-                <a:latin typeface="Times New Roman" pitchFamily="34" charset="0"/>
-                <a:ea typeface="Times New Roman" pitchFamily="34" charset="-122"/>
-                <a:cs typeface="Times New Roman" pitchFamily="34" charset="-120"/>
-              </a:rPr>
-              <a:t>Board summary</a:t>
-            </a:r>
-            <a:endParaRPr lang="en-US" sz="4000" dirty="0"/>
+                <a:latin typeface="Calibri" pitchFamily="34" charset="0"/>
+                <a:ea typeface="Calibri" pitchFamily="34" charset="-122"/>
+                <a:cs typeface="Calibri" pitchFamily="34" charset="-120"/>
+              </a:rPr>
+              <a:t>Photo, board summary (Sedimentary rocks): “Grand Canyon: Tapeats Sandstone 0283” by Grand Canyon NPS, CC BY 2.0, via Flickr (https://www.flickr.com/photos/50693818@N08/8238057843)</a:t>
+            </a:r>
+            <a:endParaRPr lang="en-US" sz="1800" dirty="0"/>
           </a:p>
           <a:p>
             <a:pPr algn="l" marL="342900" indent="-342900">
@@ -22904,21 +24905,41 @@
                 <a:spcPts val="800"/>
               </a:spcAft>
               <a:buSzPct val="100000"/>
-              <a:buFont typeface="+mj-lt"/>
-              <a:buAutoNum type="arabicPeriod" startAt="1"/>
-            </a:pPr>
-            <a:r>
-              <a:rPr lang="en-US" sz="4000" dirty="0">
+              <a:buChar char="•"/>
+            </a:pPr>
+            <a:r>
+              <a:rPr lang="en-US" sz="1800" dirty="0">
                 <a:solidFill>
                   <a:srgbClr val="111111"/>
                 </a:solidFill>
-                <a:latin typeface="Times New Roman" pitchFamily="34" charset="0"/>
-                <a:ea typeface="Times New Roman" pitchFamily="34" charset="-122"/>
-                <a:cs typeface="Times New Roman" pitchFamily="34" charset="-120"/>
-              </a:rPr>
-              <a:t>Evaluation, remediation and homework</a:t>
-            </a:r>
-            <a:endParaRPr lang="en-US" sz="4000" dirty="0"/>
+                <a:latin typeface="Calibri" pitchFamily="34" charset="0"/>
+                <a:ea typeface="Calibri" pitchFamily="34" charset="-122"/>
+                <a:cs typeface="Calibri" pitchFamily="34" charset="-120"/>
+              </a:rPr>
+              <a:t>Photo, board summary (Metamorphic rocks): “Marble quarry, Carrara” by Russell Carman, CC BY-NC-SA 2.0, via Flickr (https://www.flickr.com/photos/11328254@N02/2095886412)</a:t>
+            </a:r>
+            <a:endParaRPr lang="en-US" sz="1800" dirty="0"/>
+          </a:p>
+          <a:p>
+            <a:pPr algn="l" marL="342900" indent="-342900">
+              <a:spcAft>
+                <a:spcPts val="800"/>
+              </a:spcAft>
+              <a:buSzPct val="100000"/>
+              <a:buChar char="•"/>
+            </a:pPr>
+            <a:r>
+              <a:rPr lang="en-US" sz="1800" dirty="0">
+                <a:solidFill>
+                  <a:srgbClr val="111111"/>
+                </a:solidFill>
+                <a:latin typeface="Calibri" pitchFamily="34" charset="0"/>
+                <a:ea typeface="Calibri" pitchFamily="34" charset="-122"/>
+                <a:cs typeface="Calibri" pitchFamily="34" charset="-120"/>
+              </a:rPr>
+              <a:t>Photo, board summary (Internal (endogenic) forces): “Happy Anniversary Hawaii” by U.S. Geological Survey, CC0 1.0, via Flickr (https://www.flickr.com/photos/27784370@N05/14802198589)</a:t>
+            </a:r>
+            <a:endParaRPr lang="en-US" sz="1800" dirty="0"/>
           </a:p>
         </p:txBody>
       </p:sp>
@@ -22964,7 +24985,7 @@
             <a:pPr algn="ctr"/>
             <a:fld id="{F7021451-1387-4CA6-816F-3879F97B5CBC}" type="slidenum">
               <a:rPr b="1" lang="en-US"/>
-              <a:t>6</a:t>
+              <a:t>63</a:t>
             </a:fld>
             <a:endParaRPr lang="en-US"/>
           </a:p>
@@ -22978,9 +24999,9 @@
 </p:sld>
 </file>
 
-<file path=ppt/slides/slide60.xml><?xml version="1.0" encoding="utf-8"?>
+<file path=ppt/slides/slide64.xml><?xml version="1.0" encoding="utf-8"?>
 <p:sld xmlns:a="http://schemas.openxmlformats.org/drawingml/2006/main" xmlns:r="http://schemas.openxmlformats.org/officeDocument/2006/relationships" xmlns:p="http://schemas.openxmlformats.org/presentationml/2006/main">
-  <p:cSld name="Slide 60">
+  <p:cSld name="Slide 64">
     <p:spTree>
       <p:nvGrpSpPr>
         <p:cNvPr id="1" name=""/>
@@ -23093,7 +25114,7 @@
                 <a:ea typeface="Times New Roman" pitchFamily="34" charset="-122"/>
                 <a:cs typeface="Times New Roman" pitchFamily="34" charset="-120"/>
               </a:rPr>
-              <a:t>References</a:t>
+              <a:t>References (continued)</a:t>
             </a:r>
             <a:endParaRPr lang="en-US" sz="3600" dirty="0"/>
           </a:p>
@@ -23136,69 +25157,6 @@
                 <a:ea typeface="Calibri" pitchFamily="34" charset="-122"/>
                 <a:cs typeface="Calibri" pitchFamily="34" charset="-120"/>
               </a:rPr>
-              <a:t>National Geography Syllabus, MINESEC/IGE/IP-SS, 2019 — Module 2 (Geomorphology).</a:t>
-            </a:r>
-            <a:endParaRPr lang="en-US" sz="1800" dirty="0"/>
-          </a:p>
-          <a:p>
-            <a:pPr algn="l" marL="342900" indent="-342900">
-              <a:spcAft>
-                <a:spcPts val="800"/>
-              </a:spcAft>
-              <a:buSzPct val="100000"/>
-              <a:buChar char="•"/>
-            </a:pPr>
-            <a:r>
-              <a:rPr lang="en-US" sz="1800" dirty="0">
-                <a:solidFill>
-                  <a:srgbClr val="111111"/>
-                </a:solidFill>
-                <a:latin typeface="Calibri" pitchFamily="34" charset="0"/>
-                <a:ea typeface="Calibri" pitchFamily="34" charset="-122"/>
-                <a:cs typeface="Calibri" pitchFamily="34" charset="-120"/>
-              </a:rPr>
-              <a:t>Photo, Activity 4: “Happy Anniversary Hawaii” by U.S. Geological Survey, CC0 1.0, via Flickr (https://www.flickr.com/photos/27784370@N05/14802198589)</a:t>
-            </a:r>
-            <a:endParaRPr lang="en-US" sz="1800" dirty="0"/>
-          </a:p>
-          <a:p>
-            <a:pPr algn="l" marL="342900" indent="-342900">
-              <a:spcAft>
-                <a:spcPts val="800"/>
-              </a:spcAft>
-              <a:buSzPct val="100000"/>
-              <a:buChar char="•"/>
-            </a:pPr>
-            <a:r>
-              <a:rPr lang="en-US" sz="1800" dirty="0">
-                <a:solidFill>
-                  <a:srgbClr val="111111"/>
-                </a:solidFill>
-                <a:latin typeface="Calibri" pitchFamily="34" charset="0"/>
-                <a:ea typeface="Calibri" pitchFamily="34" charset="-122"/>
-                <a:cs typeface="Calibri" pitchFamily="34" charset="-120"/>
-              </a:rPr>
-              <a:t>Photo, Activity 5: “Soil erosion in the central Mexican Highlands” by CIMMYT, CC BY-NC-SA 2.0, via Flickr (https://www.flickr.com/photos/44760652@N05/6244930288)</a:t>
-            </a:r>
-            <a:endParaRPr lang="en-US" sz="1800" dirty="0"/>
-          </a:p>
-          <a:p>
-            <a:pPr algn="l" marL="342900" indent="-342900">
-              <a:spcAft>
-                <a:spcPts val="800"/>
-              </a:spcAft>
-              <a:buSzPct val="100000"/>
-              <a:buChar char="•"/>
-            </a:pPr>
-            <a:r>
-              <a:rPr lang="en-US" sz="1800" dirty="0">
-                <a:solidFill>
-                  <a:srgbClr val="111111"/>
-                </a:solidFill>
-                <a:latin typeface="Calibri" pitchFamily="34" charset="0"/>
-                <a:ea typeface="Calibri" pitchFamily="34" charset="-122"/>
-                <a:cs typeface="Calibri" pitchFamily="34" charset="-120"/>
-              </a:rPr>
               <a:t>Diagrams and animations: drawn for this lesson (Geography Department).</a:t>
             </a:r>
             <a:endParaRPr lang="en-US" sz="1800" dirty="0"/>
@@ -23247,7 +25205,7 @@
             <a:pPr algn="ctr"/>
             <a:fld id="{F7021451-1387-4CA6-816F-3879F97B5CBC}" type="slidenum">
               <a:rPr b="1" lang="en-US"/>
-              <a:t>60</a:t>
+              <a:t>64</a:t>
             </a:fld>
             <a:endParaRPr lang="en-US"/>
           </a:p>
@@ -23440,7 +25398,7 @@
                 <a:ea typeface="Times New Roman" pitchFamily="34" charset="-122"/>
                 <a:cs typeface="Times New Roman" pitchFamily="34" charset="-120"/>
               </a:rPr>
-              <a:t>Describe the layers of the Earth and the main discontinuities.</a:t>
+              <a:t>Describe the crust, the mantle and the core.</a:t>
             </a:r>
             <a:endParaRPr lang="en-US" sz="4000" dirty="0"/>
           </a:p>
@@ -23462,7 +25420,7 @@
                 <a:ea typeface="Times New Roman" pitchFamily="34" charset="-122"/>
                 <a:cs typeface="Times New Roman" pitchFamily="34" charset="-120"/>
               </a:rPr>
-              <a:t>Explain the rock cycle.</a:t>
+              <a:t>Explain the rock cycle and the three types of rocks.</a:t>
             </a:r>
             <a:endParaRPr lang="en-US" sz="4000" dirty="0"/>
           </a:p>
@@ -23683,7 +25641,29 @@
                 <a:ea typeface="Times New Roman" pitchFamily="34" charset="-122"/>
                 <a:cs typeface="Times New Roman" pitchFamily="34" charset="-120"/>
               </a:rPr>
-              <a:t>Distinguish internal (endogenic) and external (exogenic) forces.</a:t>
+              <a:t>Distinguish internal and external forces.</a:t>
+            </a:r>
+            <a:endParaRPr lang="en-US" sz="4000" dirty="0"/>
+          </a:p>
+          <a:p>
+            <a:pPr algn="l" marL="342900" indent="-342900">
+              <a:spcAft>
+                <a:spcPts val="800"/>
+              </a:spcAft>
+              <a:buSzPct val="100000"/>
+              <a:buFont typeface="+mj-lt"/>
+              <a:buAutoNum type="arabicPeriod" startAt="1"/>
+            </a:pPr>
+            <a:r>
+              <a:rPr lang="en-US" sz="4000" dirty="0">
+                <a:solidFill>
+                  <a:srgbClr val="111111"/>
+                </a:solidFill>
+                <a:latin typeface="Times New Roman" pitchFamily="34" charset="0"/>
+                <a:ea typeface="Times New Roman" pitchFamily="34" charset="-122"/>
+                <a:cs typeface="Times New Roman" pitchFamily="34" charset="-120"/>
+              </a:rPr>
+              <a:t>Classify landforms into orders with examples.</a:t>
             </a:r>
             <a:endParaRPr lang="en-US" sz="4000" dirty="0"/>
           </a:p>
@@ -23924,7 +25904,28 @@
                 <a:ea typeface="Times New Roman" pitchFamily="34" charset="-122"/>
                 <a:cs typeface="Times New Roman" pitchFamily="34" charset="-120"/>
               </a:rPr>
-              <a:t>Rocks are igneous, sedimentary or metamorphic.</a:t>
+              <a:t>Endogenic processes build up the land.</a:t>
+            </a:r>
+            <a:endParaRPr lang="en-US" sz="4000" dirty="0"/>
+          </a:p>
+          <a:p>
+            <a:pPr algn="l" marL="342900" indent="-342900">
+              <a:spcAft>
+                <a:spcPts val="800"/>
+              </a:spcAft>
+              <a:buSzPct val="100000"/>
+              <a:buChar char="•"/>
+            </a:pPr>
+            <a:r>
+              <a:rPr lang="en-US" sz="4000" dirty="0">
+                <a:solidFill>
+                  <a:srgbClr val="111111"/>
+                </a:solidFill>
+                <a:latin typeface="Times New Roman" pitchFamily="34" charset="0"/>
+                <a:ea typeface="Times New Roman" pitchFamily="34" charset="-122"/>
+                <a:cs typeface="Times New Roman" pitchFamily="34" charset="-120"/>
+              </a:rPr>
+              <a:t>Exogenic processes wear down the land.</a:t>
             </a:r>
             <a:endParaRPr lang="en-US" sz="4000" dirty="0"/>
           </a:p>

--- a/lecons/LSA/Geomorphology/02_LSA_GEOMO_L02_Internal_Structure_of_the_Earth.pptx
+++ b/lecons/LSA/Geomorphology/02_LSA_GEOMO_L02_Internal_Structure_of_the_Earth.pptx
@@ -69,9 +69,11 @@
     <p:sldId id="317" r:id="rId63"/>
     <p:sldId id="318" r:id="rId64"/>
     <p:sldId id="319" r:id="rId65"/>
+    <p:sldId id="320" r:id="rId66"/>
+    <p:sldId id="321" r:id="rId67"/>
   </p:sldIdLst>
   <p:notesMasterIdLst>
-    <p:notesMasterId r:id="rId66"/>
+    <p:notesMasterId r:id="rId68"/>
   </p:notesMasterIdLst>
   <p:sldSz cx="12192000" cy="6858000"/>
   <p:notesSz cx="6858000" cy="12192000"/>
@@ -3117,7 +3119,7 @@
           <a:p>
             <a:r>
               <a:rPr lang="en-US" dirty="0"/>
-              <a:t>Let us copy the definitions. The key terms of this lesson are defined as follows. On this slide we have Crust and Lithosphere. Write each point on a new line, with the key term first, and explain it in your own words when we revise. When you finish, we go to the next slide.</a:t>
+              <a:t>Let us copy the definitions. The key terms of this lesson are defined as follows. On this slide we have Lithosphere and Discontinuity. Write each point on a new line, with the key term first, and explain it in your own words when we revise. When you finish, we go to the next slide.</a:t>
             </a:r>
             <a:endParaRPr lang="en-US" dirty="0"/>
           </a:p>
@@ -3205,7 +3207,7 @@
           <a:p>
             <a:r>
               <a:rPr lang="en-US" dirty="0"/>
-              <a:t>We continue with the definitions. On this slide we have Mantle and Rock cycle. Write each point on a new line, with the key term first, and explain it in your own words when we revise. When you finish, we go to the next slide.</a:t>
+              <a:t>We continue with the definitions. On this slide we have Endogenesis and Exogenesis. Write each point on a new line, with the key term first, and explain it in your own words when we revise. When you finish, we go to the next slide.</a:t>
             </a:r>
             <a:endParaRPr lang="en-US" dirty="0"/>
           </a:p>
@@ -3293,7 +3295,7 @@
           <a:p>
             <a:r>
               <a:rPr lang="en-US" dirty="0"/>
-              <a:t>We continue with the definitions. On this slide we have Landform. Write each point on a new line, with the key term first, and explain it in your own words when we revise.</a:t>
+              <a:t>We continue with the definitions. On this slide we have Rock cycle. Write each point on a new line, with the key term first, and explain it in your own words when we revise.</a:t>
             </a:r>
             <a:endParaRPr lang="en-US" dirty="0"/>
           </a:p>
@@ -3381,7 +3383,7 @@
           <a:p>
             <a:r>
               <a:rPr lang="en-US" dirty="0"/>
-              <a:t>Let us copy The Layers of the Earth. The Earth is made of the following layers. Copy the point on The crust on the left, then draw the diagram on the right: the layers of the Earth. Give it a title and label it clearly.</a:t>
+              <a:t>Let us copy The Crust and the Mantle. The outer layers of the Earth have the following properties. Copy the point on Continental crust on the left, then draw the diagram on the right: the layers of the Earth. Give it a title and label it clearly.</a:t>
             </a:r>
             <a:endParaRPr lang="en-US" dirty="0"/>
           </a:p>
@@ -3557,7 +3559,7 @@
           <a:p>
             <a:r>
               <a:rPr lang="en-US" dirty="0"/>
-              <a:t>We continue with The Layers of the Earth. On this slide we have Types of crust. Write each point on a new line, with the key term first, and explain it in your own words when we revise. When you finish, we go to the next slide.</a:t>
+              <a:t>We continue with The Crust and the Mantle. Copy the point on Oceanic crust: write the key term first, then its explanation.</a:t>
             </a:r>
             <a:endParaRPr lang="en-US" dirty="0"/>
           </a:p>
@@ -3645,7 +3647,7 @@
           <a:p>
             <a:r>
               <a:rPr lang="en-US" dirty="0"/>
-              <a:t>We continue with The Layers of the Earth. On this slide we have The mantle and Role of the mantle. Write each point on a new line, with the key term first, and explain it in your own words when we revise.</a:t>
+              <a:t>We continue with The Crust and the Mantle. Copy the point on The mantle: write the key term first, then its explanation.</a:t>
             </a:r>
             <a:endParaRPr lang="en-US" dirty="0"/>
           </a:p>
@@ -3733,7 +3735,7 @@
           <a:p>
             <a:r>
               <a:rPr lang="en-US" dirty="0"/>
-              <a:t>Copy the point on The core on the left, then draw the diagram on the right: boundaries inside the Earth. Give it a title and label it clearly.</a:t>
+              <a:t>We continue with The Crust and the Mantle. Copy the point on Lithosphere and asthenosphere: write the key term first, then its explanation.</a:t>
             </a:r>
             <a:endParaRPr lang="en-US" dirty="0"/>
           </a:p>
@@ -3821,7 +3823,7 @@
           <a:p>
             <a:r>
               <a:rPr lang="en-US" dirty="0"/>
-              <a:t>Let us copy The Rock Cycle. The rock cycle and the three types of rocks are presented as follows. Copy the point on The rock cycle on the left, then draw the diagram on the right: the rock cycle. Give it a title and label it clearly.</a:t>
+              <a:t>Let us copy The Core and the Discontinuities. The deep layers of the Earth and their boundaries have the following properties. Copy the point on Outer core on the left, then draw the diagram on the right: the interior of the Earth. Give it a title and label it clearly.</a:t>
             </a:r>
             <a:endParaRPr lang="en-US" dirty="0"/>
           </a:p>
@@ -3909,7 +3911,7 @@
           <a:p>
             <a:r>
               <a:rPr lang="en-US" dirty="0"/>
-              <a:t>Copy the point on Igneous rocks on the left, then draw the diagram on the right: granite. Give it a title and label it clearly.</a:t>
+              <a:t>We continue with The Core and the Discontinuities. Copy the point on Inner core: write the key term first, then its explanation.</a:t>
             </a:r>
             <a:endParaRPr lang="en-US" dirty="0"/>
           </a:p>
@@ -3997,7 +3999,7 @@
           <a:p>
             <a:r>
               <a:rPr lang="en-US" dirty="0"/>
-              <a:t>Copy the point on Sedimentary rocks on the left, then draw the diagram on the right: sandstone. Give it a title and label it clearly.</a:t>
+              <a:t>We continue with The Core and the Discontinuities. Copy the point on Discontinuities: write the key term first, then its explanation.</a:t>
             </a:r>
             <a:endParaRPr lang="en-US" dirty="0"/>
           </a:p>
@@ -4085,7 +4087,7 @@
           <a:p>
             <a:r>
               <a:rPr lang="en-US" dirty="0"/>
-              <a:t>Copy the point on Metamorphic rocks on the left, then draw the diagram on the right: marble. Give it a title and label it clearly.</a:t>
+              <a:t>Let us copy The Rock Material Cycle. Rocks change from one type to another in the following cycle. Copy the point on Igneous rocks on the left, then draw the diagram on the right: the rock cycle. Give it a title and label it clearly.</a:t>
             </a:r>
             <a:endParaRPr lang="en-US" dirty="0"/>
           </a:p>
@@ -4173,7 +4175,7 @@
           <a:p>
             <a:r>
               <a:rPr lang="en-US" dirty="0"/>
-              <a:t>Let us copy Forces that Shape the Landscape. The forces that shape the landscape are the following. Copy the point on Internal (endogenic) forces on the left, then draw the diagram on the right: a volcanic eruption. Give it a title and label it clearly.</a:t>
+              <a:t>Copy the point on Sedimentary rocks on the left, then draw the diagram on the right: sandstone. Give it a title and label it clearly.</a:t>
             </a:r>
             <a:endParaRPr lang="en-US" dirty="0"/>
           </a:p>
@@ -4261,7 +4263,7 @@
           <a:p>
             <a:r>
               <a:rPr lang="en-US" dirty="0"/>
-              <a:t>Copy the point on External (exogenic) forces on the left, then draw the diagram on the right: a gully. Give it a title and label it clearly.</a:t>
+              <a:t>Copy the point on Metamorphic rocks on the left, then draw the diagram on the right: marble. Give it a title and label it clearly.</a:t>
             </a:r>
             <a:endParaRPr lang="en-US" dirty="0"/>
           </a:p>
@@ -4349,7 +4351,7 @@
           <a:p>
             <a:r>
               <a:rPr lang="en-US" dirty="0"/>
-              <a:t>We continue with Forces that Shape the Landscape. On this slide we have Local example. Write each point on a new line, with the key term first, and explain it in your own words when we revise.</a:t>
+              <a:t>We continue with The Rock Material Cycle. Copy the point on Closing the cycle: write the key term first, then its explanation.</a:t>
             </a:r>
             <a:endParaRPr lang="en-US" dirty="0"/>
           </a:p>
@@ -4525,7 +4527,7 @@
           <a:p>
             <a:r>
               <a:rPr lang="en-US" dirty="0"/>
-              <a:t>Let us copy Categories of Landforms. Landforms are classified as follows. Copy the point on First-order (major) landforms on the left, then draw the diagram on the right: categories of landforms. Give it a title and label it clearly.</a:t>
+              <a:t>Let us copy Forces that Shape the Landscape. The landscape is shaped by the following two groups of forces. Copy the point on Internal (endogenic) forces on the left, then draw the diagram on the right: a volcanic eruption. Give it a title and label it clearly.</a:t>
             </a:r>
             <a:endParaRPr lang="en-US" dirty="0"/>
           </a:p>
@@ -4613,7 +4615,7 @@
           <a:p>
             <a:r>
               <a:rPr lang="en-US" dirty="0"/>
-              <a:t>We continue with Categories of Landforms. On this slide we have Second-order landforms and Third-order (minor) landforms. Write each point on a new line, with the key term first, and explain it in your own words when we revise.</a:t>
+              <a:t>Copy the point on External (exogenic) forces on the left, then draw the diagram on the right: gully erosion. Give it a title and label it clearly.</a:t>
             </a:r>
             <a:endParaRPr lang="en-US" dirty="0"/>
           </a:p>
@@ -4701,7 +4703,7 @@
           <a:p>
             <a:r>
               <a:rPr lang="en-US" dirty="0"/>
-              <a:t>Now let us check what you have understood. Question 1: Distinguish continental crust from oceanic crust. Answer in your exercise book.</a:t>
+              <a:t>Let us copy Categories of Landforms. Landforms are classified into the following categories. Copy the point on First-order (major) landforms on the left, then draw the diagram on the right: the orders of relief. Give it a title and label it clearly.</a:t>
             </a:r>
             <a:endParaRPr lang="en-US" dirty="0"/>
           </a:p>
@@ -4789,7 +4791,7 @@
           <a:p>
             <a:r>
               <a:rPr lang="en-US" dirty="0"/>
-              <a:t>The expected answer is: continental crust is thick, light and granitic; oceanic crust is thin, dense and basaltic. If you got it right, well done.</a:t>
+              <a:t>We continue with Categories of Landforms. Copy the point on Second-order landforms: write the key term first, then its explanation.</a:t>
             </a:r>
             <a:endParaRPr lang="en-US" dirty="0"/>
           </a:p>
@@ -4877,7 +4879,7 @@
           <a:p>
             <a:r>
               <a:rPr lang="en-US" dirty="0"/>
-              <a:t>Now let us check what you have understood. Question 2: How is a sedimentary rock formed? Answer in your exercise book.</a:t>
+              <a:t>We continue with Categories of Landforms. Copy the point on Third-order (minor) landforms: write the key term first, then its explanation.</a:t>
             </a:r>
             <a:endParaRPr lang="en-US" dirty="0"/>
           </a:p>
@@ -4965,7 +4967,7 @@
           <a:p>
             <a:r>
               <a:rPr lang="en-US" dirty="0"/>
-              <a:t>The expected answer is: by the compression of layers of sediments such as sand and mud. If you got it right, well done.</a:t>
+              <a:t>Now let us check what you have understood. Question 1: Distinguish continental crust from oceanic crust. Answer in your exercise book.</a:t>
             </a:r>
             <a:endParaRPr lang="en-US" dirty="0"/>
           </a:p>
@@ -5053,7 +5055,7 @@
           <a:p>
             <a:r>
               <a:rPr lang="en-US" dirty="0"/>
-              <a:t>For those who need more practice, fill in the blanks in your exercise book. The answers are: number 1, mantle; number 2, igneous; number 3, first.</a:t>
+              <a:t>The expected answer is: continental crust is thick, light and granitic; oceanic crust is thin, dense and basaltic. If you got it right, well done.</a:t>
             </a:r>
             <a:endParaRPr lang="en-US" dirty="0"/>
           </a:p>
@@ -5141,7 +5143,7 @@
           <a:p>
             <a:r>
               <a:rPr lang="en-US" dirty="0"/>
-              <a:t>For your homework: Name the supercontinent proposed by Wegener. We shall correct it at the beginning of our next lesson.</a:t>
+              <a:t>Now let us check what you have understood. Question 2: How is a sedimentary rock formed? Answer in your exercise book.</a:t>
             </a:r>
             <a:endParaRPr lang="en-US" dirty="0"/>
           </a:p>
@@ -5229,7 +5231,7 @@
           <a:p>
             <a:r>
               <a:rPr lang="en-US" dirty="0"/>
-              <a:t>Our next lesson will be on Further Study 1: Early Theories of Crustal Movements. Thank you for your attention, and see you next time.</a:t>
+              <a:t>The expected answer is: by the compression of layers of sediments such as sand and mud. If you got it right, well done.</a:t>
             </a:r>
             <a:endParaRPr lang="en-US" dirty="0"/>
           </a:p>
@@ -5317,7 +5319,7 @@
           <a:p>
             <a:r>
               <a:rPr lang="en-US" dirty="0"/>
-              <a:t>Let us play the bilingual game. I say a word in English, and you give me the French word. Then we do the reverse.</a:t>
+              <a:t>For those who need more practice, fill in the blanks in your exercise book. The answers are: number 1, mantle; number 2, igneous; number 3, first.</a:t>
             </a:r>
             <a:endParaRPr lang="en-US" dirty="0"/>
           </a:p>
@@ -5493,7 +5495,7 @@
           <a:p>
             <a:r>
               <a:rPr lang="en-US" dirty="0"/>
-              <a:t>I record this information in the official logbook of the class after the lesson.</a:t>
+              <a:t>For your homework: Name the supercontinent proposed by Wegener. We shall correct it at the beginning of our next lesson.</a:t>
             </a:r>
             <a:endParaRPr lang="en-US" dirty="0"/>
           </a:p>
@@ -5581,7 +5583,7 @@
           <a:p>
             <a:r>
               <a:rPr lang="en-US" dirty="0"/>
-              <a:t>I complete the second page of the logbook: the matter taught, the evaluation, the homework and the attendance.</a:t>
+              <a:t>Our next lesson will be on Further Study 1: Early Theories of Crustal Movements. Thank you for your attention, and see you next time.</a:t>
             </a:r>
             <a:endParaRPr lang="en-US" dirty="0"/>
           </a:p>
@@ -5669,7 +5671,7 @@
           <a:p>
             <a:r>
               <a:rPr lang="en-US" dirty="0"/>
-              <a:t>This slide is for me, the teacher: it gives the timing of the lesson and what to do if the projector is not available.</a:t>
+              <a:t>Let us play the bilingual game. I say a word in English, and you give me the French word. Then we do the reverse.</a:t>
             </a:r>
             <a:endParaRPr lang="en-US" dirty="0"/>
           </a:p>
@@ -5757,7 +5759,7 @@
           <a:p>
             <a:r>
               <a:rPr lang="en-US" dirty="0"/>
-              <a:t>Take your time to copy this part; we will continue together.</a:t>
+              <a:t>I record this information in the official logbook of the class after the lesson.</a:t>
             </a:r>
             <a:endParaRPr lang="en-US" dirty="0"/>
           </a:p>
@@ -5845,7 +5847,7 @@
           <a:p>
             <a:r>
               <a:rPr lang="en-US" dirty="0"/>
-              <a:t>These are the references and picture credits used to prepare this lesson.</a:t>
+              <a:t>I complete the second page of the logbook: the matter taught, the evaluation, the homework and the attendance.</a:t>
             </a:r>
             <a:endParaRPr lang="en-US" dirty="0"/>
           </a:p>
@@ -5869,6 +5871,182 @@
             <a:fld id="{F7021451-1387-4CA6-816F-3879F97B5CBC}" type="slidenum">
               <a:rPr lang="en-US"/>
               <a:t>64</a:t>
+            </a:fld>
+            <a:endParaRPr lang="en-US"/>
+          </a:p>
+        </p:txBody>
+      </p:sp>
+    </p:spTree>
+    <p:extLst>
+      <p:ext uri="{BB962C8B-B14F-4D97-AF65-F5344CB8AC3E}">
+        <p14:creationId xmlns:p14="http://schemas.microsoft.com/office/powerpoint/2010/main" val="1024086991"/>
+      </p:ext>
+    </p:extLst>
+  </p:cSld>
+  <p:clrMapOvr>
+    <a:masterClrMapping/>
+  </p:clrMapOvr>
+</p:notes>
+</file>
+
+<file path=ppt/notesSlides/notesSlide65.xml><?xml version="1.0" encoding="utf-8"?>
+<p:notes xmlns:a="http://schemas.openxmlformats.org/drawingml/2006/main" xmlns:r="http://schemas.openxmlformats.org/officeDocument/2006/relationships" xmlns:p="http://schemas.openxmlformats.org/presentationml/2006/main">
+  <p:cSld>
+    <p:spTree>
+      <p:nvGrpSpPr>
+        <p:cNvPr id="1" name=""/>
+        <p:cNvGrpSpPr/>
+        <p:nvPr/>
+      </p:nvGrpSpPr>
+      <p:grpSpPr>
+        <a:xfrm>
+          <a:off x="0" y="0"/>
+          <a:ext cx="0" cy="0"/>
+          <a:chOff x="0" y="0"/>
+          <a:chExt cx="0" cy="0"/>
+        </a:xfrm>
+      </p:grpSpPr>
+      <p:sp>
+        <p:nvSpPr>
+          <p:cNvPr id="2" name="Slide Image Placeholder 1"/>
+          <p:cNvSpPr>
+            <a:spLocks noGrp="1" noRot="1" noChangeAspect="1"/>
+          </p:cNvSpPr>
+          <p:nvPr>
+            <p:ph type="sldImg"/>
+          </p:nvPr>
+        </p:nvSpPr>
+        <p:spPr/>
+      </p:sp>
+      <p:sp>
+        <p:nvSpPr>
+          <p:cNvPr id="3" name="Notes Placeholder 2"/>
+          <p:cNvSpPr>
+            <a:spLocks noGrp="1"/>
+          </p:cNvSpPr>
+          <p:nvPr>
+            <p:ph type="body" idx="1"/>
+          </p:nvPr>
+        </p:nvSpPr>
+        <p:spPr/>
+        <p:txBody>
+          <a:bodyPr/>
+          <a:lstStyle/>
+          <a:p>
+            <a:r>
+              <a:rPr lang="en-US" dirty="0"/>
+              <a:t>This slide is for me, the teacher: it gives the timing of the lesson and what to do if the projector is not available.</a:t>
+            </a:r>
+            <a:endParaRPr lang="en-US" dirty="0"/>
+          </a:p>
+        </p:txBody>
+      </p:sp>
+      <p:sp>
+        <p:nvSpPr>
+          <p:cNvPr id="4" name="Slide Number Placeholder 3"/>
+          <p:cNvSpPr>
+            <a:spLocks noGrp="1"/>
+          </p:cNvSpPr>
+          <p:nvPr>
+            <p:ph type="sldNum" sz="quarter" idx="10"/>
+          </p:nvPr>
+        </p:nvSpPr>
+        <p:spPr/>
+        <p:txBody>
+          <a:bodyPr/>
+          <a:lstStyle/>
+          <a:p>
+            <a:fld id="{F7021451-1387-4CA6-816F-3879F97B5CBC}" type="slidenum">
+              <a:rPr lang="en-US"/>
+              <a:t>65</a:t>
+            </a:fld>
+            <a:endParaRPr lang="en-US"/>
+          </a:p>
+        </p:txBody>
+      </p:sp>
+    </p:spTree>
+    <p:extLst>
+      <p:ext uri="{BB962C8B-B14F-4D97-AF65-F5344CB8AC3E}">
+        <p14:creationId xmlns:p14="http://schemas.microsoft.com/office/powerpoint/2010/main" val="1024086991"/>
+      </p:ext>
+    </p:extLst>
+  </p:cSld>
+  <p:clrMapOvr>
+    <a:masterClrMapping/>
+  </p:clrMapOvr>
+</p:notes>
+</file>
+
+<file path=ppt/notesSlides/notesSlide66.xml><?xml version="1.0" encoding="utf-8"?>
+<p:notes xmlns:a="http://schemas.openxmlformats.org/drawingml/2006/main" xmlns:r="http://schemas.openxmlformats.org/officeDocument/2006/relationships" xmlns:p="http://schemas.openxmlformats.org/presentationml/2006/main">
+  <p:cSld>
+    <p:spTree>
+      <p:nvGrpSpPr>
+        <p:cNvPr id="1" name=""/>
+        <p:cNvGrpSpPr/>
+        <p:nvPr/>
+      </p:nvGrpSpPr>
+      <p:grpSpPr>
+        <a:xfrm>
+          <a:off x="0" y="0"/>
+          <a:ext cx="0" cy="0"/>
+          <a:chOff x="0" y="0"/>
+          <a:chExt cx="0" cy="0"/>
+        </a:xfrm>
+      </p:grpSpPr>
+      <p:sp>
+        <p:nvSpPr>
+          <p:cNvPr id="2" name="Slide Image Placeholder 1"/>
+          <p:cNvSpPr>
+            <a:spLocks noGrp="1" noRot="1" noChangeAspect="1"/>
+          </p:cNvSpPr>
+          <p:nvPr>
+            <p:ph type="sldImg"/>
+          </p:nvPr>
+        </p:nvSpPr>
+        <p:spPr/>
+      </p:sp>
+      <p:sp>
+        <p:nvSpPr>
+          <p:cNvPr id="3" name="Notes Placeholder 2"/>
+          <p:cNvSpPr>
+            <a:spLocks noGrp="1"/>
+          </p:cNvSpPr>
+          <p:nvPr>
+            <p:ph type="body" idx="1"/>
+          </p:nvPr>
+        </p:nvSpPr>
+        <p:spPr/>
+        <p:txBody>
+          <a:bodyPr/>
+          <a:lstStyle/>
+          <a:p>
+            <a:r>
+              <a:rPr lang="en-US" dirty="0"/>
+              <a:t>These are the references and picture credits used to prepare this lesson.</a:t>
+            </a:r>
+            <a:endParaRPr lang="en-US" dirty="0"/>
+          </a:p>
+        </p:txBody>
+      </p:sp>
+      <p:sp>
+        <p:nvSpPr>
+          <p:cNvPr id="4" name="Slide Number Placeholder 3"/>
+          <p:cNvSpPr>
+            <a:spLocks noGrp="1"/>
+          </p:cNvSpPr>
+          <p:nvPr>
+            <p:ph type="sldNum" sz="quarter" idx="10"/>
+          </p:nvPr>
+        </p:nvSpPr>
+        <p:spPr/>
+        <p:txBody>
+          <a:bodyPr/>
+          <a:lstStyle/>
+          <a:p>
+            <a:fld id="{F7021451-1387-4CA6-816F-3879F97B5CBC}" type="slidenum">
+              <a:rPr lang="en-US"/>
+              <a:t>66</a:t>
             </a:fld>
             <a:endParaRPr lang="en-US"/>
           </a:p>
@@ -14842,7 +15020,7 @@
         <p:spPr>
           <a:xfrm>
             <a:off x="0" y="658368"/>
-            <a:ext cx="3840480" cy="5833872"/>
+            <a:ext cx="1463040" cy="5833872"/>
           </a:xfrm>
           <a:prstGeom prst="rect">
             <a:avLst/>
@@ -14857,8 +15035,8 @@
         </p:nvSpPr>
         <p:spPr>
           <a:xfrm>
-            <a:off x="4069080" y="1005840"/>
-            <a:ext cx="7802575" cy="731520"/>
+            <a:off x="1691640" y="1005840"/>
+            <a:ext cx="10180015" cy="731520"/>
           </a:xfrm>
           <a:prstGeom prst="rect">
             <a:avLst/>
@@ -14898,8 +15076,8 @@
         </p:nvSpPr>
         <p:spPr>
           <a:xfrm>
-            <a:off x="4069080" y="1783080"/>
-            <a:ext cx="7802575" cy="4663440"/>
+            <a:off x="1691640" y="1783080"/>
+            <a:ext cx="10180015" cy="4663440"/>
           </a:xfrm>
           <a:prstGeom prst="rect">
             <a:avLst/>
@@ -14946,7 +15124,7 @@
                 <a:ea typeface="Times New Roman" pitchFamily="34" charset="-122"/>
                 <a:cs typeface="Times New Roman" pitchFamily="34" charset="-120"/>
               </a:rPr>
-              <a:t>Crust: </a:t>
+              <a:t>Lithosphere: </a:t>
             </a:r>
             <a:pPr algn="l" indent="0" marL="0">
               <a:spcAft>
@@ -14963,7 +15141,7 @@
                 <a:ea typeface="Times New Roman" pitchFamily="34" charset="-122"/>
                 <a:cs typeface="Times New Roman" pitchFamily="34" charset="-120"/>
               </a:rPr>
-              <a:t>It is the thin, solid outer layer of the Earth.</a:t>
+              <a:t>It is the rigid layer made of the crust and the upper part of the mantle.</a:t>
             </a:r>
             <a:endParaRPr lang="en-US" sz="4000" dirty="0"/>
           </a:p>
@@ -14983,7 +15161,7 @@
                 <a:ea typeface="Times New Roman" pitchFamily="34" charset="-122"/>
                 <a:cs typeface="Times New Roman" pitchFamily="34" charset="-120"/>
               </a:rPr>
-              <a:t>Lithosphere: </a:t>
+              <a:t>Discontinuity: </a:t>
             </a:r>
             <a:pPr algn="l" indent="0" marL="0">
               <a:spcAft>
@@ -15000,7 +15178,7 @@
                 <a:ea typeface="Times New Roman" pitchFamily="34" charset="-122"/>
                 <a:cs typeface="Times New Roman" pitchFamily="34" charset="-120"/>
               </a:rPr>
-              <a:t>It is the rigid layer made of the crust and the upper part of the mantle.</a:t>
+              <a:t>It is a boundary inside the Earth where the speed of earthquake waves changes suddenly.</a:t>
             </a:r>
             <a:endParaRPr lang="en-US" sz="4000" dirty="0"/>
           </a:p>
@@ -15135,7 +15313,7 @@
         <p:spPr>
           <a:xfrm>
             <a:off x="0" y="658368"/>
-            <a:ext cx="3840480" cy="5833872"/>
+            <a:ext cx="2468880" cy="5833872"/>
           </a:xfrm>
           <a:prstGeom prst="rect">
             <a:avLst/>
@@ -15150,8 +15328,8 @@
         </p:nvSpPr>
         <p:spPr>
           <a:xfrm>
-            <a:off x="4069080" y="1005840"/>
-            <a:ext cx="7802575" cy="731520"/>
+            <a:off x="2697480" y="1005840"/>
+            <a:ext cx="9174175" cy="731520"/>
           </a:xfrm>
           <a:prstGeom prst="rect">
             <a:avLst/>
@@ -15191,8 +15369,8 @@
         </p:nvSpPr>
         <p:spPr>
           <a:xfrm>
-            <a:off x="4069080" y="1783080"/>
-            <a:ext cx="7802575" cy="4663440"/>
+            <a:off x="2697480" y="1783080"/>
+            <a:ext cx="9174175" cy="4663440"/>
           </a:xfrm>
           <a:prstGeom prst="rect">
             <a:avLst/>
@@ -15219,7 +15397,7 @@
                 <a:ea typeface="Times New Roman" pitchFamily="34" charset="-122"/>
                 <a:cs typeface="Times New Roman" pitchFamily="34" charset="-120"/>
               </a:rPr>
-              <a:t>Mantle: </a:t>
+              <a:t>Endogenesis: </a:t>
             </a:r>
             <a:pPr algn="l" indent="0" marL="0">
               <a:spcAft>
@@ -15236,7 +15414,7 @@
                 <a:ea typeface="Times New Roman" pitchFamily="34" charset="-122"/>
                 <a:cs typeface="Times New Roman" pitchFamily="34" charset="-120"/>
               </a:rPr>
-              <a:t>It is the thick layer of hot, dense rock between the crust and the core.</a:t>
+              <a:t>It is the set of internal processes, driven by the heat of the Earth, that build up the relief.</a:t>
             </a:r>
             <a:endParaRPr lang="en-US" sz="4000" dirty="0"/>
           </a:p>
@@ -15256,7 +15434,7 @@
                 <a:ea typeface="Times New Roman" pitchFamily="34" charset="-122"/>
                 <a:cs typeface="Times New Roman" pitchFamily="34" charset="-120"/>
               </a:rPr>
-              <a:t>Rock cycle: </a:t>
+              <a:t>Exogenesis: </a:t>
             </a:r>
             <a:pPr algn="l" indent="0" marL="0">
               <a:spcAft>
@@ -15273,7 +15451,7 @@
                 <a:ea typeface="Times New Roman" pitchFamily="34" charset="-122"/>
                 <a:cs typeface="Times New Roman" pitchFamily="34" charset="-120"/>
               </a:rPr>
-              <a:t>It is the continuous process by which rocks are formed, broken down and formed again.</a:t>
+              <a:t>It is the set of external processes, driven by the Sun and gravity, that wear down the relief.</a:t>
             </a:r>
             <a:endParaRPr lang="en-US" sz="4000" dirty="0"/>
           </a:p>
@@ -15492,7 +15670,7 @@
                 <a:ea typeface="Times New Roman" pitchFamily="34" charset="-122"/>
                 <a:cs typeface="Times New Roman" pitchFamily="34" charset="-120"/>
               </a:rPr>
-              <a:t>Landform: </a:t>
+              <a:t>Rock cycle: </a:t>
             </a:r>
             <a:pPr algn="l" indent="0" marL="0">
               <a:spcAft>
@@ -15509,7 +15687,7 @@
                 <a:ea typeface="Times New Roman" pitchFamily="34" charset="-122"/>
                 <a:cs typeface="Times New Roman" pitchFamily="34" charset="-120"/>
               </a:rPr>
-              <a:t>It is a natural feature of the surface of the Earth, such as a mountain, a plain or a valley.</a:t>
+              <a:t>It is the continuous process by which rocks are formed, broken down and formed again.</a:t>
             </a:r>
             <a:endParaRPr lang="en-US" sz="4000" dirty="0"/>
           </a:p>
@@ -15662,7 +15840,7 @@
                 <a:ea typeface="Times New Roman" pitchFamily="34" charset="-122"/>
                 <a:cs typeface="Times New Roman" pitchFamily="34" charset="-120"/>
               </a:rPr>
-              <a:t>1. The Layers of the Earth</a:t>
+              <a:t>1. Layers of the Earth and their Properties</a:t>
             </a:r>
             <a:endParaRPr lang="en-US" sz="3600" dirty="0"/>
           </a:p>
@@ -15676,8 +15854,49 @@
         </p:nvSpPr>
         <p:spPr>
           <a:xfrm>
-            <a:off x="365760" y="1783080"/>
-            <a:ext cx="4846320" cy="4617720"/>
+            <a:off x="365760" y="1737360"/>
+            <a:ext cx="6035040" cy="457200"/>
+          </a:xfrm>
+          <a:prstGeom prst="rect">
+            <a:avLst/>
+          </a:prstGeom>
+          <a:noFill/>
+          <a:ln/>
+        </p:spPr>
+        <p:txBody>
+          <a:bodyPr wrap="square" lIns="0" tIns="0" rIns="0" bIns="0" rtlCol="0" anchor="ctr">
+            <a:normAutofit/>
+          </a:bodyPr>
+          <a:lstStyle/>
+          <a:p>
+            <a:pPr algn="l" indent="0" marL="0">
+              <a:buNone/>
+            </a:pPr>
+            <a:r>
+              <a:rPr lang="en-US" sz="3000" b="1" dirty="0">
+                <a:solidFill>
+                  <a:srgbClr val="990011"/>
+                </a:solidFill>
+                <a:latin typeface="Times New Roman" pitchFamily="34" charset="0"/>
+                <a:ea typeface="Times New Roman" pitchFamily="34" charset="-122"/>
+                <a:cs typeface="Times New Roman" pitchFamily="34" charset="-120"/>
+              </a:rPr>
+              <a:t>A) The Crust and the Mantle</a:t>
+            </a:r>
+            <a:endParaRPr lang="en-US" sz="3000" dirty="0"/>
+          </a:p>
+        </p:txBody>
+      </p:sp>
+      <p:sp>
+        <p:nvSpPr>
+          <p:cNvPr id="5" name="Text 3"/>
+          <p:cNvSpPr/>
+          <p:nvPr/>
+        </p:nvSpPr>
+        <p:spPr>
+          <a:xfrm>
+            <a:off x="365760" y="2240280"/>
+            <a:ext cx="6035040" cy="4160520"/>
           </a:xfrm>
           <a:prstGeom prst="rect">
             <a:avLst/>
@@ -15696,7 +15915,7 @@
               <a:buNone/>
             </a:pPr>
             <a:r>
-              <a:rPr lang="en-US" sz="3600" i="1" dirty="0">
+              <a:rPr lang="en-US" sz="2800" i="1" dirty="0">
                 <a:solidFill>
                   <a:srgbClr val="111111"/>
                 </a:solidFill>
@@ -15704,9 +15923,9 @@
                 <a:ea typeface="Times New Roman" pitchFamily="34" charset="-122"/>
                 <a:cs typeface="Times New Roman" pitchFamily="34" charset="-120"/>
               </a:rPr>
-              <a:t>The Earth is made of the following layers:</a:t>
-            </a:r>
-            <a:endParaRPr lang="en-US" sz="3600" dirty="0"/>
+              <a:t>The outer layers of the Earth have the following properties:</a:t>
+            </a:r>
+            <a:endParaRPr lang="en-US" sz="2800" dirty="0"/>
           </a:p>
           <a:p>
             <a:pPr algn="l" indent="0" marL="0">
@@ -15716,7 +15935,7 @@
               <a:buNone/>
             </a:pPr>
             <a:r>
-              <a:rPr lang="en-US" sz="3600" b="1" dirty="0">
+              <a:rPr lang="en-US" sz="2800" b="1" dirty="0">
                 <a:solidFill>
                   <a:srgbClr val="111111"/>
                 </a:solidFill>
@@ -15724,7 +15943,7 @@
                 <a:ea typeface="Times New Roman" pitchFamily="34" charset="-122"/>
                 <a:cs typeface="Times New Roman" pitchFamily="34" charset="-120"/>
               </a:rPr>
-              <a:t>The crust: </a:t>
+              <a:t>Continental crust: </a:t>
             </a:r>
             <a:pPr algn="l" indent="0" marL="0">
               <a:spcAft>
@@ -15733,7 +15952,7 @@
               <a:buNone/>
             </a:pPr>
             <a:r>
-              <a:rPr lang="en-US" sz="3600" dirty="0">
+              <a:rPr lang="en-US" sz="2800" dirty="0">
                 <a:solidFill>
                   <a:srgbClr val="111111"/>
                 </a:solidFill>
@@ -15741,15 +15960,15 @@
                 <a:ea typeface="Times New Roman" pitchFamily="34" charset="-122"/>
                 <a:cs typeface="Times New Roman" pitchFamily="34" charset="-120"/>
               </a:rPr>
-              <a:t>It is thin and solid, like the skin of a fruit.</a:t>
-            </a:r>
-            <a:endParaRPr lang="en-US" sz="3600" dirty="0"/>
+              <a:t>It forms the continents and is thick, from about 35 km to 70 km under mountains. It is light, with a density of about 2.7, and made mainly of granite, rich in silica and aluminium (SIAL).</a:t>
+            </a:r>
+            <a:endParaRPr lang="en-US" sz="2800" dirty="0"/>
           </a:p>
         </p:txBody>
       </p:sp>
       <p:pic>
         <p:nvPicPr>
-          <p:cNvPr id="5" name="Image 0" descr="/home/claude/f4/img/v2/earth_layers_big.png">    </p:cNvPr>
+          <p:cNvPr id="6" name="Image 0" descr="/home/claude/f4/img/v2/earth_layers_big.png">    </p:cNvPr>
           <p:cNvPicPr>
             <a:picLocks noChangeAspect="1"/>
           </p:cNvPicPr>
@@ -15763,8 +15982,8 @@
         </p:blipFill>
         <p:spPr>
           <a:xfrm>
-            <a:off x="5349240" y="2617506"/>
-            <a:ext cx="6659575" cy="2601397"/>
+            <a:off x="6537960" y="2849678"/>
+            <a:ext cx="5470855" cy="2137053"/>
           </a:xfrm>
           <a:prstGeom prst="rect">
             <a:avLst/>
@@ -15773,14 +15992,14 @@
       </p:pic>
       <p:sp>
         <p:nvSpPr>
-          <p:cNvPr id="6" name="Text 3"/>
+          <p:cNvPr id="7" name="Text 4"/>
           <p:cNvSpPr/>
           <p:nvPr/>
         </p:nvSpPr>
         <p:spPr>
           <a:xfrm>
-            <a:off x="5349240" y="6089904"/>
-            <a:ext cx="6659575" cy="347472"/>
+            <a:off x="6537960" y="6089904"/>
+            <a:ext cx="5470855" cy="347472"/>
           </a:xfrm>
           <a:prstGeom prst="rect">
             <a:avLst/>
@@ -16178,7 +16397,7 @@
         <p:spPr>
           <a:xfrm>
             <a:off x="0" y="658368"/>
-            <a:ext cx="5120640" cy="5833872"/>
+            <a:ext cx="2468880" cy="5833872"/>
           </a:xfrm>
           <a:prstGeom prst="rect">
             <a:avLst/>
@@ -16193,8 +16412,8 @@
         </p:nvSpPr>
         <p:spPr>
           <a:xfrm>
-            <a:off x="5349240" y="1005840"/>
-            <a:ext cx="6522415" cy="731520"/>
+            <a:off x="2697480" y="1005840"/>
+            <a:ext cx="9174175" cy="731520"/>
           </a:xfrm>
           <a:prstGeom prst="rect">
             <a:avLst/>
@@ -16220,7 +16439,7 @@
                 <a:ea typeface="Times New Roman" pitchFamily="34" charset="-122"/>
                 <a:cs typeface="Times New Roman" pitchFamily="34" charset="-120"/>
               </a:rPr>
-              <a:t>1. The Layers of the Earth</a:t>
+              <a:t>1. Layers of the Earth and their Properties</a:t>
             </a:r>
             <a:endParaRPr lang="en-US" sz="3600" dirty="0"/>
           </a:p>
@@ -16234,8 +16453,47 @@
         </p:nvSpPr>
         <p:spPr>
           <a:xfrm>
-            <a:off x="5349240" y="1783080"/>
-            <a:ext cx="6522415" cy="4663440"/>
+            <a:off x="2697480" y="1737360"/>
+            <a:ext cx="9174175" cy="457200"/>
+          </a:xfrm>
+          <a:prstGeom prst="rect">
+            <a:avLst/>
+          </a:prstGeom>
+          <a:noFill/>
+          <a:ln/>
+        </p:spPr>
+        <p:txBody>
+          <a:bodyPr wrap="square" lIns="0" tIns="0" rIns="0" bIns="0" rtlCol="0" anchor="ctr"/>
+          <a:lstStyle/>
+          <a:p>
+            <a:pPr algn="l" indent="0" marL="0">
+              <a:buNone/>
+            </a:pPr>
+            <a:r>
+              <a:rPr lang="en-US" sz="3200" b="1" dirty="0">
+                <a:solidFill>
+                  <a:srgbClr val="990011"/>
+                </a:solidFill>
+                <a:latin typeface="Times New Roman" pitchFamily="34" charset="0"/>
+                <a:ea typeface="Times New Roman" pitchFamily="34" charset="-122"/>
+                <a:cs typeface="Times New Roman" pitchFamily="34" charset="-120"/>
+              </a:rPr>
+              <a:t>A) The Crust and the Mantle</a:t>
+            </a:r>
+            <a:endParaRPr lang="en-US" sz="3200" dirty="0"/>
+          </a:p>
+        </p:txBody>
+      </p:sp>
+      <p:sp>
+        <p:nvSpPr>
+          <p:cNvPr id="6" name="Text 3"/>
+          <p:cNvSpPr/>
+          <p:nvPr/>
+        </p:nvSpPr>
+        <p:spPr>
+          <a:xfrm>
+            <a:off x="2697480" y="2240280"/>
+            <a:ext cx="9174175" cy="4206240"/>
           </a:xfrm>
           <a:prstGeom prst="rect">
             <a:avLst/>
@@ -16262,17 +16520,13 @@
                 <a:ea typeface="Times New Roman" pitchFamily="34" charset="-122"/>
                 <a:cs typeface="Times New Roman" pitchFamily="34" charset="-120"/>
               </a:rPr>
-              <a:t>Types of crust:</a:t>
-            </a:r>
-            <a:endParaRPr lang="en-US" sz="4000" dirty="0"/>
-          </a:p>
-          <a:p>
-            <a:pPr algn="l" marL="342900" indent="-342900">
+              <a:t>Oceanic crust: </a:t>
+            </a:r>
+            <a:pPr algn="l" indent="0" marL="0">
               <a:spcAft>
                 <a:spcPts val="800"/>
               </a:spcAft>
-              <a:buSzPct val="100000"/>
-              <a:buChar char="•"/>
+              <a:buNone/>
             </a:pPr>
             <a:r>
               <a:rPr lang="en-US" sz="4000" dirty="0">
@@ -16283,28 +16537,7 @@
                 <a:ea typeface="Times New Roman" pitchFamily="34" charset="-122"/>
                 <a:cs typeface="Times New Roman" pitchFamily="34" charset="-120"/>
               </a:rPr>
-              <a:t>Continental crust: thick (up to 70 km under mountains), light, granitic.</a:t>
-            </a:r>
-            <a:endParaRPr lang="en-US" sz="4000" dirty="0"/>
-          </a:p>
-          <a:p>
-            <a:pPr algn="l" marL="342900" indent="-342900">
-              <a:spcAft>
-                <a:spcPts val="800"/>
-              </a:spcAft>
-              <a:buSzPct val="100000"/>
-              <a:buChar char="•"/>
-            </a:pPr>
-            <a:r>
-              <a:rPr lang="en-US" sz="4000" dirty="0">
-                <a:solidFill>
-                  <a:srgbClr val="111111"/>
-                </a:solidFill>
-                <a:latin typeface="Times New Roman" pitchFamily="34" charset="0"/>
-                <a:ea typeface="Times New Roman" pitchFamily="34" charset="-122"/>
-                <a:cs typeface="Times New Roman" pitchFamily="34" charset="-120"/>
-              </a:rPr>
-              <a:t>Oceanic crust: thin (about 7 km), dense, basaltic.</a:t>
+              <a:t>It forms the ocean floor and is thin, about 7 km. It is denser, about 3.0, and made of basalt, rich in silica and magnesium (SIMA), and it is younger than the continental crust.</a:t>
             </a:r>
             <a:endParaRPr lang="en-US" sz="4000" dirty="0"/>
           </a:p>
@@ -16481,7 +16714,7 @@
                 <a:ea typeface="Times New Roman" pitchFamily="34" charset="-122"/>
                 <a:cs typeface="Times New Roman" pitchFamily="34" charset="-120"/>
               </a:rPr>
-              <a:t>1. The Layers of the Earth (continued)</a:t>
+              <a:t>1. Layers of the Earth and their Properties</a:t>
             </a:r>
             <a:endParaRPr lang="en-US" sz="3600" dirty="0"/>
           </a:p>
@@ -16495,8 +16728,47 @@
         </p:nvSpPr>
         <p:spPr>
           <a:xfrm>
-            <a:off x="2697480" y="1783080"/>
-            <a:ext cx="9174175" cy="4663440"/>
+            <a:off x="2697480" y="1737360"/>
+            <a:ext cx="9174175" cy="457200"/>
+          </a:xfrm>
+          <a:prstGeom prst="rect">
+            <a:avLst/>
+          </a:prstGeom>
+          <a:noFill/>
+          <a:ln/>
+        </p:spPr>
+        <p:txBody>
+          <a:bodyPr wrap="square" lIns="0" tIns="0" rIns="0" bIns="0" rtlCol="0" anchor="ctr"/>
+          <a:lstStyle/>
+          <a:p>
+            <a:pPr algn="l" indent="0" marL="0">
+              <a:buNone/>
+            </a:pPr>
+            <a:r>
+              <a:rPr lang="en-US" sz="3200" b="1" dirty="0">
+                <a:solidFill>
+                  <a:srgbClr val="990011"/>
+                </a:solidFill>
+                <a:latin typeface="Times New Roman" pitchFamily="34" charset="0"/>
+                <a:ea typeface="Times New Roman" pitchFamily="34" charset="-122"/>
+                <a:cs typeface="Times New Roman" pitchFamily="34" charset="-120"/>
+              </a:rPr>
+              <a:t>A) The Crust and the Mantle</a:t>
+            </a:r>
+            <a:endParaRPr lang="en-US" sz="3200" dirty="0"/>
+          </a:p>
+        </p:txBody>
+      </p:sp>
+      <p:sp>
+        <p:nvSpPr>
+          <p:cNvPr id="6" name="Text 3"/>
+          <p:cNvSpPr/>
+          <p:nvPr/>
+        </p:nvSpPr>
+        <p:spPr>
+          <a:xfrm>
+            <a:off x="2697480" y="2240280"/>
+            <a:ext cx="9174175" cy="4206240"/>
           </a:xfrm>
           <a:prstGeom prst="rect">
             <a:avLst/>
@@ -16540,44 +16812,7 @@
                 <a:ea typeface="Times New Roman" pitchFamily="34" charset="-122"/>
                 <a:cs typeface="Times New Roman" pitchFamily="34" charset="-120"/>
               </a:rPr>
-              <a:t>It is the thickest layer (about 84 % of the volume of the Earth), made of hot rock that flows very slowly like thick honey.</a:t>
-            </a:r>
-            <a:endParaRPr lang="en-US" sz="4000" dirty="0"/>
-          </a:p>
-          <a:p>
-            <a:pPr algn="l" indent="0" marL="0">
-              <a:spcAft>
-                <a:spcPts val="800"/>
-              </a:spcAft>
-              <a:buNone/>
-            </a:pPr>
-            <a:r>
-              <a:rPr lang="en-US" sz="4000" b="1" dirty="0">
-                <a:solidFill>
-                  <a:srgbClr val="111111"/>
-                </a:solidFill>
-                <a:latin typeface="Times New Roman" pitchFamily="34" charset="0"/>
-                <a:ea typeface="Times New Roman" pitchFamily="34" charset="-122"/>
-                <a:cs typeface="Times New Roman" pitchFamily="34" charset="-120"/>
-              </a:rPr>
-              <a:t>Role of the mantle: </a:t>
-            </a:r>
-            <a:pPr algn="l" indent="0" marL="0">
-              <a:spcAft>
-                <a:spcPts val="800"/>
-              </a:spcAft>
-              <a:buNone/>
-            </a:pPr>
-            <a:r>
-              <a:rPr lang="en-US" sz="4000" dirty="0">
-                <a:solidFill>
-                  <a:srgbClr val="111111"/>
-                </a:solidFill>
-                <a:latin typeface="Times New Roman" pitchFamily="34" charset="0"/>
-                <a:ea typeface="Times New Roman" pitchFamily="34" charset="-122"/>
-                <a:cs typeface="Times New Roman" pitchFamily="34" charset="-120"/>
-              </a:rPr>
-              <a:t>Movements of heat in the mantle drive the movement of the continents.</a:t>
+              <a:t>The mantle reaches a depth of about 2,900 km and contains about 84 % of the volume of the Earth. Its rocks are solid but so hot that, in the asthenosphere, they flow very slowly like thick honey.</a:t>
             </a:r>
             <a:endParaRPr lang="en-US" sz="4000" dirty="0"/>
           </a:p>
@@ -16695,109 +16930,9 @@
           </a:p>
         </p:txBody>
       </p:sp>
-      <p:sp>
-        <p:nvSpPr>
-          <p:cNvPr id="3" name="Text 1"/>
-          <p:cNvSpPr/>
-          <p:nvPr/>
-        </p:nvSpPr>
-        <p:spPr>
-          <a:xfrm>
-            <a:off x="365760" y="1005840"/>
-            <a:ext cx="11460175" cy="731520"/>
-          </a:xfrm>
-          <a:prstGeom prst="rect">
-            <a:avLst/>
-          </a:prstGeom>
-          <a:noFill/>
-          <a:ln/>
-        </p:spPr>
-        <p:txBody>
-          <a:bodyPr wrap="square" lIns="0" tIns="0" rIns="0" bIns="0" rtlCol="0" anchor="ctr">
-            <a:normAutofit/>
-          </a:bodyPr>
-          <a:lstStyle/>
-          <a:p>
-            <a:pPr algn="ctr" indent="0" marL="0">
-              <a:buNone/>
-            </a:pPr>
-            <a:r>
-              <a:rPr lang="en-US" sz="3600" b="1" dirty="0">
-                <a:solidFill>
-                  <a:srgbClr val="990011"/>
-                </a:solidFill>
-                <a:latin typeface="Times New Roman" pitchFamily="34" charset="0"/>
-                <a:ea typeface="Times New Roman" pitchFamily="34" charset="-122"/>
-                <a:cs typeface="Times New Roman" pitchFamily="34" charset="-120"/>
-              </a:rPr>
-              <a:t>1. The Layers of the Earth</a:t>
-            </a:r>
-            <a:endParaRPr lang="en-US" sz="3600" dirty="0"/>
-          </a:p>
-        </p:txBody>
-      </p:sp>
-      <p:sp>
-        <p:nvSpPr>
-          <p:cNvPr id="4" name="Text 2"/>
-          <p:cNvSpPr/>
-          <p:nvPr/>
-        </p:nvSpPr>
-        <p:spPr>
-          <a:xfrm>
-            <a:off x="365760" y="1783080"/>
-            <a:ext cx="4846320" cy="4617720"/>
-          </a:xfrm>
-          <a:prstGeom prst="rect">
-            <a:avLst/>
-          </a:prstGeom>
-          <a:noFill/>
-          <a:ln/>
-        </p:spPr>
-        <p:txBody>
-          <a:bodyPr wrap="square" lIns="0" tIns="0" rIns="0" bIns="0" rtlCol="0" anchor="t"/>
-          <a:lstStyle/>
-          <a:p>
-            <a:pPr algn="l" indent="0" marL="0">
-              <a:spcAft>
-                <a:spcPts val="800"/>
-              </a:spcAft>
-              <a:buNone/>
-            </a:pPr>
-            <a:r>
-              <a:rPr lang="en-US" sz="3600" b="1" dirty="0">
-                <a:solidFill>
-                  <a:srgbClr val="111111"/>
-                </a:solidFill>
-                <a:latin typeface="Times New Roman" pitchFamily="34" charset="0"/>
-                <a:ea typeface="Times New Roman" pitchFamily="34" charset="-122"/>
-                <a:cs typeface="Times New Roman" pitchFamily="34" charset="-120"/>
-              </a:rPr>
-              <a:t>The core: </a:t>
-            </a:r>
-            <a:pPr algn="l" indent="0" marL="0">
-              <a:spcAft>
-                <a:spcPts val="800"/>
-              </a:spcAft>
-              <a:buNone/>
-            </a:pPr>
-            <a:r>
-              <a:rPr lang="en-US" sz="3600" dirty="0">
-                <a:solidFill>
-                  <a:srgbClr val="111111"/>
-                </a:solidFill>
-                <a:latin typeface="Times New Roman" pitchFamily="34" charset="0"/>
-                <a:ea typeface="Times New Roman" pitchFamily="34" charset="-122"/>
-                <a:cs typeface="Times New Roman" pitchFamily="34" charset="-120"/>
-              </a:rPr>
-              <a:t>It has a liquid outer core and a solid inner core, both made of iron and nickel.</a:t>
-            </a:r>
-            <a:endParaRPr lang="en-US" sz="3600" dirty="0"/>
-          </a:p>
-        </p:txBody>
-      </p:sp>
       <p:pic>
         <p:nvPicPr>
-          <p:cNvPr id="5" name="Image 0" descr="/home/claude/f4/img/v2/earth_disc_big.png">    </p:cNvPr>
+          <p:cNvPr id="3" name="Image 0" descr="/home/claude/f4/img/minesec_sheet.png">    </p:cNvPr>
           <p:cNvPicPr>
             <a:picLocks noChangeAspect="1"/>
           </p:cNvPicPr>
@@ -16811,8 +16946,8 @@
         </p:blipFill>
         <p:spPr>
           <a:xfrm>
-            <a:off x="5349240" y="2617506"/>
-            <a:ext cx="6659575" cy="2601397"/>
+            <a:off x="0" y="658368"/>
+            <a:ext cx="2468880" cy="5833872"/>
           </a:xfrm>
           <a:prstGeom prst="rect">
             <a:avLst/>
@@ -16821,14 +16956,14 @@
       </p:pic>
       <p:sp>
         <p:nvSpPr>
-          <p:cNvPr id="6" name="Text 3"/>
+          <p:cNvPr id="4" name="Text 1"/>
           <p:cNvSpPr/>
           <p:nvPr/>
         </p:nvSpPr>
         <p:spPr>
           <a:xfrm>
-            <a:off x="5349240" y="6089904"/>
-            <a:ext cx="6659575" cy="347472"/>
+            <a:off x="2697480" y="1005840"/>
+            <a:ext cx="9174175" cy="731520"/>
           </a:xfrm>
           <a:prstGeom prst="rect">
             <a:avLst/>
@@ -16837,24 +16972,124 @@
           <a:ln/>
         </p:spPr>
         <p:txBody>
-          <a:bodyPr wrap="square" lIns="0" tIns="0" rIns="0" bIns="0" rtlCol="0" anchor="ctr"/>
+          <a:bodyPr wrap="square" lIns="0" tIns="0" rIns="0" bIns="0" rtlCol="0" anchor="ctr">
+            <a:normAutofit/>
+          </a:bodyPr>
           <a:lstStyle/>
           <a:p>
             <a:pPr algn="ctr" indent="0" marL="0">
               <a:buNone/>
             </a:pPr>
             <a:r>
-              <a:rPr lang="en-US" sz="1600" i="1" dirty="0">
-                <a:solidFill>
-                  <a:srgbClr val="555555"/>
+              <a:rPr lang="en-US" sz="3600" b="1" dirty="0">
+                <a:solidFill>
+                  <a:srgbClr val="990011"/>
                 </a:solidFill>
                 <a:latin typeface="Times New Roman" pitchFamily="34" charset="0"/>
                 <a:ea typeface="Times New Roman" pitchFamily="34" charset="-122"/>
                 <a:cs typeface="Times New Roman" pitchFamily="34" charset="-120"/>
               </a:rPr>
-              <a:t>Illustration: boundaries inside the Earth</a:t>
-            </a:r>
-            <a:endParaRPr lang="en-US" sz="1600" dirty="0"/>
+              <a:t>1. Layers of the Earth and their Properties</a:t>
+            </a:r>
+            <a:endParaRPr lang="en-US" sz="3600" dirty="0"/>
+          </a:p>
+        </p:txBody>
+      </p:sp>
+      <p:sp>
+        <p:nvSpPr>
+          <p:cNvPr id="5" name="Text 2"/>
+          <p:cNvSpPr/>
+          <p:nvPr/>
+        </p:nvSpPr>
+        <p:spPr>
+          <a:xfrm>
+            <a:off x="2697480" y="1737360"/>
+            <a:ext cx="9174175" cy="457200"/>
+          </a:xfrm>
+          <a:prstGeom prst="rect">
+            <a:avLst/>
+          </a:prstGeom>
+          <a:noFill/>
+          <a:ln/>
+        </p:spPr>
+        <p:txBody>
+          <a:bodyPr wrap="square" lIns="0" tIns="0" rIns="0" bIns="0" rtlCol="0" anchor="ctr"/>
+          <a:lstStyle/>
+          <a:p>
+            <a:pPr algn="l" indent="0" marL="0">
+              <a:buNone/>
+            </a:pPr>
+            <a:r>
+              <a:rPr lang="en-US" sz="3200" b="1" dirty="0">
+                <a:solidFill>
+                  <a:srgbClr val="990011"/>
+                </a:solidFill>
+                <a:latin typeface="Times New Roman" pitchFamily="34" charset="0"/>
+                <a:ea typeface="Times New Roman" pitchFamily="34" charset="-122"/>
+                <a:cs typeface="Times New Roman" pitchFamily="34" charset="-120"/>
+              </a:rPr>
+              <a:t>A) The Crust and the Mantle</a:t>
+            </a:r>
+            <a:endParaRPr lang="en-US" sz="3200" dirty="0"/>
+          </a:p>
+        </p:txBody>
+      </p:sp>
+      <p:sp>
+        <p:nvSpPr>
+          <p:cNvPr id="6" name="Text 3"/>
+          <p:cNvSpPr/>
+          <p:nvPr/>
+        </p:nvSpPr>
+        <p:spPr>
+          <a:xfrm>
+            <a:off x="2697480" y="2240280"/>
+            <a:ext cx="9174175" cy="4206240"/>
+          </a:xfrm>
+          <a:prstGeom prst="rect">
+            <a:avLst/>
+          </a:prstGeom>
+          <a:noFill/>
+          <a:ln/>
+        </p:spPr>
+        <p:txBody>
+          <a:bodyPr wrap="square" lIns="0" tIns="0" rIns="0" bIns="0" rtlCol="0" anchor="t"/>
+          <a:lstStyle/>
+          <a:p>
+            <a:pPr algn="l" indent="0" marL="0">
+              <a:spcAft>
+                <a:spcPts val="800"/>
+              </a:spcAft>
+              <a:buNone/>
+            </a:pPr>
+            <a:r>
+              <a:rPr lang="en-US" sz="3800" b="1" dirty="0">
+                <a:solidFill>
+                  <a:srgbClr val="111111"/>
+                </a:solidFill>
+                <a:latin typeface="Times New Roman" pitchFamily="34" charset="0"/>
+                <a:ea typeface="Times New Roman" pitchFamily="34" charset="-122"/>
+                <a:cs typeface="Times New Roman" pitchFamily="34" charset="-120"/>
+              </a:rPr>
+              <a:t>Lithosphere and asthenosphere: </a:t>
+            </a:r>
+            <a:pPr algn="l" indent="0" marL="0">
+              <a:spcAft>
+                <a:spcPts val="800"/>
+              </a:spcAft>
+              <a:buNone/>
+            </a:pPr>
+            <a:r>
+              <a:rPr lang="en-US" sz="3800" dirty="0">
+                <a:solidFill>
+                  <a:srgbClr val="111111"/>
+                </a:solidFill>
+                <a:latin typeface="Times New Roman" pitchFamily="34" charset="0"/>
+                <a:ea typeface="Times New Roman" pitchFamily="34" charset="-122"/>
+                <a:cs typeface="Times New Roman" pitchFamily="34" charset="-120"/>
+              </a:rPr>
+              <a:t>The crust and the rigid top of the mantle form the lithosphere, about 100 km thick, which is broken into plates. These plates move over the soft asthenosphere, which is why this part of the mantle is so important for landforms.</a:t>
+            </a:r>
+            <a:endParaRPr lang="en-US" sz="3800" dirty="0"/>
           </a:p>
         </p:txBody>
       </p:sp>
@@ -17005,7 +17240,7 @@
                 <a:ea typeface="Times New Roman" pitchFamily="34" charset="-122"/>
                 <a:cs typeface="Times New Roman" pitchFamily="34" charset="-120"/>
               </a:rPr>
-              <a:t>2. The Rock Cycle</a:t>
+              <a:t>1. Layers of the Earth and their Properties</a:t>
             </a:r>
             <a:endParaRPr lang="en-US" sz="3600" dirty="0"/>
           </a:p>
@@ -17019,8 +17254,49 @@
         </p:nvSpPr>
         <p:spPr>
           <a:xfrm>
-            <a:off x="365760" y="1783080"/>
-            <a:ext cx="4846320" cy="4617720"/>
+            <a:off x="365760" y="1737360"/>
+            <a:ext cx="6035040" cy="457200"/>
+          </a:xfrm>
+          <a:prstGeom prst="rect">
+            <a:avLst/>
+          </a:prstGeom>
+          <a:noFill/>
+          <a:ln/>
+        </p:spPr>
+        <p:txBody>
+          <a:bodyPr wrap="square" lIns="0" tIns="0" rIns="0" bIns="0" rtlCol="0" anchor="ctr">
+            <a:normAutofit/>
+          </a:bodyPr>
+          <a:lstStyle/>
+          <a:p>
+            <a:pPr algn="l" indent="0" marL="0">
+              <a:buNone/>
+            </a:pPr>
+            <a:r>
+              <a:rPr lang="en-US" sz="3000" b="1" dirty="0">
+                <a:solidFill>
+                  <a:srgbClr val="990011"/>
+                </a:solidFill>
+                <a:latin typeface="Times New Roman" pitchFamily="34" charset="0"/>
+                <a:ea typeface="Times New Roman" pitchFamily="34" charset="-122"/>
+                <a:cs typeface="Times New Roman" pitchFamily="34" charset="-120"/>
+              </a:rPr>
+              <a:t>B) The Core and the Discontinuities</a:t>
+            </a:r>
+            <a:endParaRPr lang="en-US" sz="3000" dirty="0"/>
+          </a:p>
+        </p:txBody>
+      </p:sp>
+      <p:sp>
+        <p:nvSpPr>
+          <p:cNvPr id="5" name="Text 3"/>
+          <p:cNvSpPr/>
+          <p:nvPr/>
+        </p:nvSpPr>
+        <p:spPr>
+          <a:xfrm>
+            <a:off x="365760" y="2240280"/>
+            <a:ext cx="6035040" cy="4160520"/>
           </a:xfrm>
           <a:prstGeom prst="rect">
             <a:avLst/>
@@ -17039,7 +17315,7 @@
               <a:buNone/>
             </a:pPr>
             <a:r>
-              <a:rPr lang="en-US" sz="3600" i="1" dirty="0">
+              <a:rPr lang="en-US" sz="3200" i="1" dirty="0">
                 <a:solidFill>
                   <a:srgbClr val="111111"/>
                 </a:solidFill>
@@ -17047,9 +17323,9 @@
                 <a:ea typeface="Times New Roman" pitchFamily="34" charset="-122"/>
                 <a:cs typeface="Times New Roman" pitchFamily="34" charset="-120"/>
               </a:rPr>
-              <a:t>The rock cycle and the three types of rocks are presented as follows:</a:t>
-            </a:r>
-            <a:endParaRPr lang="en-US" sz="3600" dirty="0"/>
+              <a:t>The deep layers of the Earth and their boundaries have the following properties:</a:t>
+            </a:r>
+            <a:endParaRPr lang="en-US" sz="3200" dirty="0"/>
           </a:p>
           <a:p>
             <a:pPr algn="l" indent="0" marL="0">
@@ -17059,7 +17335,7 @@
               <a:buNone/>
             </a:pPr>
             <a:r>
-              <a:rPr lang="en-US" sz="3600" b="1" dirty="0">
+              <a:rPr lang="en-US" sz="3200" b="1" dirty="0">
                 <a:solidFill>
                   <a:srgbClr val="111111"/>
                 </a:solidFill>
@@ -17067,7 +17343,7 @@
                 <a:ea typeface="Times New Roman" pitchFamily="34" charset="-122"/>
                 <a:cs typeface="Times New Roman" pitchFamily="34" charset="-120"/>
               </a:rPr>
-              <a:t>The rock cycle: </a:t>
+              <a:t>Outer core: </a:t>
             </a:r>
             <a:pPr algn="l" indent="0" marL="0">
               <a:spcAft>
@@ -17076,7 +17352,7 @@
               <a:buNone/>
             </a:pPr>
             <a:r>
-              <a:rPr lang="en-US" sz="3600" dirty="0">
+              <a:rPr lang="en-US" sz="3200" dirty="0">
                 <a:solidFill>
                   <a:srgbClr val="111111"/>
                 </a:solidFill>
@@ -17084,15 +17360,15 @@
                 <a:ea typeface="Times New Roman" pitchFamily="34" charset="-122"/>
                 <a:cs typeface="Times New Roman" pitchFamily="34" charset="-120"/>
               </a:rPr>
-              <a:t>Rocks are always changing: they form, break down and form again.</a:t>
-            </a:r>
-            <a:endParaRPr lang="en-US" sz="3600" dirty="0"/>
+              <a:t>The outer core lies between about 2,900 and 5,100 km deep and is made of liquid iron and nickel. Its movements produce the magnetic field of the Earth.</a:t>
+            </a:r>
+            <a:endParaRPr lang="en-US" sz="3200" dirty="0"/>
           </a:p>
         </p:txBody>
       </p:sp>
       <p:pic>
         <p:nvPicPr>
-          <p:cNvPr id="5" name="Image 0" descr="/home/claude/f4/img/v2/rock_cycle_big.png">    </p:cNvPr>
+          <p:cNvPr id="6" name="Image 0" descr="/home/claude/f4/img/v2/earth_disc_big.png">    </p:cNvPr>
           <p:cNvPicPr>
             <a:picLocks noChangeAspect="1"/>
           </p:cNvPicPr>
@@ -17106,8 +17382,8 @@
         </p:blipFill>
         <p:spPr>
           <a:xfrm>
-            <a:off x="5349240" y="2617506"/>
-            <a:ext cx="6659575" cy="2601397"/>
+            <a:off x="6537960" y="2849678"/>
+            <a:ext cx="5470855" cy="2137053"/>
           </a:xfrm>
           <a:prstGeom prst="rect">
             <a:avLst/>
@@ -17116,14 +17392,14 @@
       </p:pic>
       <p:sp>
         <p:nvSpPr>
-          <p:cNvPr id="6" name="Text 3"/>
+          <p:cNvPr id="7" name="Text 4"/>
           <p:cNvSpPr/>
           <p:nvPr/>
         </p:nvSpPr>
         <p:spPr>
           <a:xfrm>
-            <a:off x="5349240" y="6089904"/>
-            <a:ext cx="6659575" cy="347472"/>
+            <a:off x="6537960" y="6089904"/>
+            <a:ext cx="5470855" cy="347472"/>
           </a:xfrm>
           <a:prstGeom prst="rect">
             <a:avLst/>
@@ -17147,7 +17423,7 @@
                 <a:ea typeface="Times New Roman" pitchFamily="34" charset="-122"/>
                 <a:cs typeface="Times New Roman" pitchFamily="34" charset="-120"/>
               </a:rPr>
-              <a:t>Illustration: the rock cycle</a:t>
+              <a:t>Illustration: the interior of the Earth</a:t>
             </a:r>
             <a:endParaRPr lang="en-US" sz="1600" dirty="0"/>
           </a:p>
@@ -17265,109 +17541,9 @@
           </a:p>
         </p:txBody>
       </p:sp>
-      <p:sp>
-        <p:nvSpPr>
-          <p:cNvPr id="3" name="Text 1"/>
-          <p:cNvSpPr/>
-          <p:nvPr/>
-        </p:nvSpPr>
-        <p:spPr>
-          <a:xfrm>
-            <a:off x="365760" y="1005840"/>
-            <a:ext cx="11460175" cy="731520"/>
-          </a:xfrm>
-          <a:prstGeom prst="rect">
-            <a:avLst/>
-          </a:prstGeom>
-          <a:noFill/>
-          <a:ln/>
-        </p:spPr>
-        <p:txBody>
-          <a:bodyPr wrap="square" lIns="0" tIns="0" rIns="0" bIns="0" rtlCol="0" anchor="ctr">
-            <a:normAutofit/>
-          </a:bodyPr>
-          <a:lstStyle/>
-          <a:p>
-            <a:pPr algn="ctr" indent="0" marL="0">
-              <a:buNone/>
-            </a:pPr>
-            <a:r>
-              <a:rPr lang="en-US" sz="3600" b="1" dirty="0">
-                <a:solidFill>
-                  <a:srgbClr val="990011"/>
-                </a:solidFill>
-                <a:latin typeface="Times New Roman" pitchFamily="34" charset="0"/>
-                <a:ea typeface="Times New Roman" pitchFamily="34" charset="-122"/>
-                <a:cs typeface="Times New Roman" pitchFamily="34" charset="-120"/>
-              </a:rPr>
-              <a:t>2. The Rock Cycle</a:t>
-            </a:r>
-            <a:endParaRPr lang="en-US" sz="3600" dirty="0"/>
-          </a:p>
-        </p:txBody>
-      </p:sp>
-      <p:sp>
-        <p:nvSpPr>
-          <p:cNvPr id="4" name="Text 2"/>
-          <p:cNvSpPr/>
-          <p:nvPr/>
-        </p:nvSpPr>
-        <p:spPr>
-          <a:xfrm>
-            <a:off x="365760" y="1783080"/>
-            <a:ext cx="4846320" cy="4617720"/>
-          </a:xfrm>
-          <a:prstGeom prst="rect">
-            <a:avLst/>
-          </a:prstGeom>
-          <a:noFill/>
-          <a:ln/>
-        </p:spPr>
-        <p:txBody>
-          <a:bodyPr wrap="square" lIns="0" tIns="0" rIns="0" bIns="0" rtlCol="0" anchor="t"/>
-          <a:lstStyle/>
-          <a:p>
-            <a:pPr algn="l" indent="0" marL="0">
-              <a:spcAft>
-                <a:spcPts val="800"/>
-              </a:spcAft>
-              <a:buNone/>
-            </a:pPr>
-            <a:r>
-              <a:rPr lang="en-US" sz="3600" b="1" dirty="0">
-                <a:solidFill>
-                  <a:srgbClr val="111111"/>
-                </a:solidFill>
-                <a:latin typeface="Times New Roman" pitchFamily="34" charset="0"/>
-                <a:ea typeface="Times New Roman" pitchFamily="34" charset="-122"/>
-                <a:cs typeface="Times New Roman" pitchFamily="34" charset="-120"/>
-              </a:rPr>
-              <a:t>Igneous rocks: </a:t>
-            </a:r>
-            <a:pPr algn="l" indent="0" marL="0">
-              <a:spcAft>
-                <a:spcPts val="800"/>
-              </a:spcAft>
-              <a:buNone/>
-            </a:pPr>
-            <a:r>
-              <a:rPr lang="en-US" sz="3600" dirty="0">
-                <a:solidFill>
-                  <a:srgbClr val="111111"/>
-                </a:solidFill>
-                <a:latin typeface="Times New Roman" pitchFamily="34" charset="0"/>
-                <a:ea typeface="Times New Roman" pitchFamily="34" charset="-122"/>
-                <a:cs typeface="Times New Roman" pitchFamily="34" charset="-120"/>
-              </a:rPr>
-              <a:t>They form when magma or lava cools, such as granite and basalt.</a:t>
-            </a:r>
-            <a:endParaRPr lang="en-US" sz="3600" dirty="0"/>
-          </a:p>
-        </p:txBody>
-      </p:sp>
       <p:pic>
         <p:nvPicPr>
-          <p:cNvPr id="5" name="Image 0" descr="/home/claude/f4/img/v2/f4_granite.jpg">    </p:cNvPr>
+          <p:cNvPr id="3" name="Image 0" descr="/home/claude/f4/img/minesec_sheet.png">    </p:cNvPr>
           <p:cNvPicPr>
             <a:picLocks noChangeAspect="1"/>
           </p:cNvPicPr>
@@ -17381,8 +17557,8 @@
         </p:blipFill>
         <p:spPr>
           <a:xfrm>
-            <a:off x="5349240" y="2071212"/>
-            <a:ext cx="6659575" cy="3693983"/>
+            <a:off x="0" y="658368"/>
+            <a:ext cx="5120640" cy="5833872"/>
           </a:xfrm>
           <a:prstGeom prst="rect">
             <a:avLst/>
@@ -17391,14 +17567,14 @@
       </p:pic>
       <p:sp>
         <p:nvSpPr>
-          <p:cNvPr id="6" name="Text 3"/>
+          <p:cNvPr id="4" name="Text 1"/>
           <p:cNvSpPr/>
           <p:nvPr/>
         </p:nvSpPr>
         <p:spPr>
           <a:xfrm>
-            <a:off x="5349240" y="6089904"/>
-            <a:ext cx="6659575" cy="347472"/>
+            <a:off x="5349240" y="1005840"/>
+            <a:ext cx="6522415" cy="731520"/>
           </a:xfrm>
           <a:prstGeom prst="rect">
             <a:avLst/>
@@ -17407,24 +17583,124 @@
           <a:ln/>
         </p:spPr>
         <p:txBody>
-          <a:bodyPr wrap="square" lIns="0" tIns="0" rIns="0" bIns="0" rtlCol="0" anchor="ctr"/>
+          <a:bodyPr wrap="square" lIns="0" tIns="0" rIns="0" bIns="0" rtlCol="0" anchor="ctr">
+            <a:normAutofit/>
+          </a:bodyPr>
           <a:lstStyle/>
           <a:p>
             <a:pPr algn="ctr" indent="0" marL="0">
               <a:buNone/>
             </a:pPr>
             <a:r>
-              <a:rPr lang="en-US" sz="1600" i="1" dirty="0">
-                <a:solidFill>
-                  <a:srgbClr val="555555"/>
+              <a:rPr lang="en-US" sz="3600" b="1" dirty="0">
+                <a:solidFill>
+                  <a:srgbClr val="990011"/>
                 </a:solidFill>
                 <a:latin typeface="Times New Roman" pitchFamily="34" charset="0"/>
                 <a:ea typeface="Times New Roman" pitchFamily="34" charset="-122"/>
                 <a:cs typeface="Times New Roman" pitchFamily="34" charset="-120"/>
               </a:rPr>
-              <a:t>Illustration: granite</a:t>
-            </a:r>
-            <a:endParaRPr lang="en-US" sz="1600" dirty="0"/>
+              <a:t>1. Layers of the Earth and their Properties</a:t>
+            </a:r>
+            <a:endParaRPr lang="en-US" sz="3600" dirty="0"/>
+          </a:p>
+        </p:txBody>
+      </p:sp>
+      <p:sp>
+        <p:nvSpPr>
+          <p:cNvPr id="5" name="Text 2"/>
+          <p:cNvSpPr/>
+          <p:nvPr/>
+        </p:nvSpPr>
+        <p:spPr>
+          <a:xfrm>
+            <a:off x="5349240" y="1737360"/>
+            <a:ext cx="6522415" cy="457200"/>
+          </a:xfrm>
+          <a:prstGeom prst="rect">
+            <a:avLst/>
+          </a:prstGeom>
+          <a:noFill/>
+          <a:ln/>
+        </p:spPr>
+        <p:txBody>
+          <a:bodyPr wrap="square" lIns="0" tIns="0" rIns="0" bIns="0" rtlCol="0" anchor="ctr"/>
+          <a:lstStyle/>
+          <a:p>
+            <a:pPr algn="l" indent="0" marL="0">
+              <a:buNone/>
+            </a:pPr>
+            <a:r>
+              <a:rPr lang="en-US" sz="2900" b="1" dirty="0">
+                <a:solidFill>
+                  <a:srgbClr val="990011"/>
+                </a:solidFill>
+                <a:latin typeface="Times New Roman" pitchFamily="34" charset="0"/>
+                <a:ea typeface="Times New Roman" pitchFamily="34" charset="-122"/>
+                <a:cs typeface="Times New Roman" pitchFamily="34" charset="-120"/>
+              </a:rPr>
+              <a:t>B) The Core and the Discontinuities</a:t>
+            </a:r>
+            <a:endParaRPr lang="en-US" sz="2900" dirty="0"/>
+          </a:p>
+        </p:txBody>
+      </p:sp>
+      <p:sp>
+        <p:nvSpPr>
+          <p:cNvPr id="6" name="Text 3"/>
+          <p:cNvSpPr/>
+          <p:nvPr/>
+        </p:nvSpPr>
+        <p:spPr>
+          <a:xfrm>
+            <a:off x="5349240" y="2240280"/>
+            <a:ext cx="6522415" cy="4206240"/>
+          </a:xfrm>
+          <a:prstGeom prst="rect">
+            <a:avLst/>
+          </a:prstGeom>
+          <a:noFill/>
+          <a:ln/>
+        </p:spPr>
+        <p:txBody>
+          <a:bodyPr wrap="square" lIns="0" tIns="0" rIns="0" bIns="0" rtlCol="0" anchor="t"/>
+          <a:lstStyle/>
+          <a:p>
+            <a:pPr algn="l" indent="0" marL="0">
+              <a:spcAft>
+                <a:spcPts val="800"/>
+              </a:spcAft>
+              <a:buNone/>
+            </a:pPr>
+            <a:r>
+              <a:rPr lang="en-US" sz="4000" b="1" dirty="0">
+                <a:solidFill>
+                  <a:srgbClr val="111111"/>
+                </a:solidFill>
+                <a:latin typeface="Times New Roman" pitchFamily="34" charset="0"/>
+                <a:ea typeface="Times New Roman" pitchFamily="34" charset="-122"/>
+                <a:cs typeface="Times New Roman" pitchFamily="34" charset="-120"/>
+              </a:rPr>
+              <a:t>Inner core: </a:t>
+            </a:r>
+            <a:pPr algn="l" indent="0" marL="0">
+              <a:spcAft>
+                <a:spcPts val="800"/>
+              </a:spcAft>
+              <a:buNone/>
+            </a:pPr>
+            <a:r>
+              <a:rPr lang="en-US" sz="4000" dirty="0">
+                <a:solidFill>
+                  <a:srgbClr val="111111"/>
+                </a:solidFill>
+                <a:latin typeface="Times New Roman" pitchFamily="34" charset="0"/>
+                <a:ea typeface="Times New Roman" pitchFamily="34" charset="-122"/>
+                <a:cs typeface="Times New Roman" pitchFamily="34" charset="-120"/>
+              </a:rPr>
+              <a:t>The inner core is a solid ball of iron and nickel at the centre, with a temperature of about 5,500 °C. It stays solid because of the enormous pressure.</a:t>
+            </a:r>
+            <a:endParaRPr lang="en-US" sz="4000" dirty="0"/>
           </a:p>
         </p:txBody>
       </p:sp>
@@ -17540,109 +17816,9 @@
           </a:p>
         </p:txBody>
       </p:sp>
-      <p:sp>
-        <p:nvSpPr>
-          <p:cNvPr id="3" name="Text 1"/>
-          <p:cNvSpPr/>
-          <p:nvPr/>
-        </p:nvSpPr>
-        <p:spPr>
-          <a:xfrm>
-            <a:off x="365760" y="1005840"/>
-            <a:ext cx="11460175" cy="731520"/>
-          </a:xfrm>
-          <a:prstGeom prst="rect">
-            <a:avLst/>
-          </a:prstGeom>
-          <a:noFill/>
-          <a:ln/>
-        </p:spPr>
-        <p:txBody>
-          <a:bodyPr wrap="square" lIns="0" tIns="0" rIns="0" bIns="0" rtlCol="0" anchor="ctr">
-            <a:normAutofit/>
-          </a:bodyPr>
-          <a:lstStyle/>
-          <a:p>
-            <a:pPr algn="ctr" indent="0" marL="0">
-              <a:buNone/>
-            </a:pPr>
-            <a:r>
-              <a:rPr lang="en-US" sz="3600" b="1" dirty="0">
-                <a:solidFill>
-                  <a:srgbClr val="990011"/>
-                </a:solidFill>
-                <a:latin typeface="Times New Roman" pitchFamily="34" charset="0"/>
-                <a:ea typeface="Times New Roman" pitchFamily="34" charset="-122"/>
-                <a:cs typeface="Times New Roman" pitchFamily="34" charset="-120"/>
-              </a:rPr>
-              <a:t>2. The Rock Cycle</a:t>
-            </a:r>
-            <a:endParaRPr lang="en-US" sz="3600" dirty="0"/>
-          </a:p>
-        </p:txBody>
-      </p:sp>
-      <p:sp>
-        <p:nvSpPr>
-          <p:cNvPr id="4" name="Text 2"/>
-          <p:cNvSpPr/>
-          <p:nvPr/>
-        </p:nvSpPr>
-        <p:spPr>
-          <a:xfrm>
-            <a:off x="365760" y="1783080"/>
-            <a:ext cx="4846320" cy="4617720"/>
-          </a:xfrm>
-          <a:prstGeom prst="rect">
-            <a:avLst/>
-          </a:prstGeom>
-          <a:noFill/>
-          <a:ln/>
-        </p:spPr>
-        <p:txBody>
-          <a:bodyPr wrap="square" lIns="0" tIns="0" rIns="0" bIns="0" rtlCol="0" anchor="t"/>
-          <a:lstStyle/>
-          <a:p>
-            <a:pPr algn="l" indent="0" marL="0">
-              <a:spcAft>
-                <a:spcPts val="800"/>
-              </a:spcAft>
-              <a:buNone/>
-            </a:pPr>
-            <a:r>
-              <a:rPr lang="en-US" sz="3600" b="1" dirty="0">
-                <a:solidFill>
-                  <a:srgbClr val="111111"/>
-                </a:solidFill>
-                <a:latin typeface="Times New Roman" pitchFamily="34" charset="0"/>
-                <a:ea typeface="Times New Roman" pitchFamily="34" charset="-122"/>
-                <a:cs typeface="Times New Roman" pitchFamily="34" charset="-120"/>
-              </a:rPr>
-              <a:t>Sedimentary rocks: </a:t>
-            </a:r>
-            <a:pPr algn="l" indent="0" marL="0">
-              <a:spcAft>
-                <a:spcPts val="800"/>
-              </a:spcAft>
-              <a:buNone/>
-            </a:pPr>
-            <a:r>
-              <a:rPr lang="en-US" sz="3600" dirty="0">
-                <a:solidFill>
-                  <a:srgbClr val="111111"/>
-                </a:solidFill>
-                <a:latin typeface="Times New Roman" pitchFamily="34" charset="0"/>
-                <a:ea typeface="Times New Roman" pitchFamily="34" charset="-122"/>
-                <a:cs typeface="Times New Roman" pitchFamily="34" charset="-120"/>
-              </a:rPr>
-              <a:t>They form from compressed layers of sand, mud and pebbles, such as the sandstones of the Benue valley.</a:t>
-            </a:r>
-            <a:endParaRPr lang="en-US" sz="3600" dirty="0"/>
-          </a:p>
-        </p:txBody>
-      </p:sp>
       <p:pic>
         <p:nvPicPr>
-          <p:cNvPr id="5" name="Image 0" descr="/home/claude/f4/img/v2/f4_sandstone.jpg">    </p:cNvPr>
+          <p:cNvPr id="3" name="Image 0" descr="/home/claude/f4/img/minesec_sheet.png">    </p:cNvPr>
           <p:cNvPicPr>
             <a:picLocks noChangeAspect="1"/>
           </p:cNvPicPr>
@@ -17656,8 +17832,8 @@
         </p:blipFill>
         <p:spPr>
           <a:xfrm>
-            <a:off x="5349240" y="2071212"/>
-            <a:ext cx="6659575" cy="3693983"/>
+            <a:off x="0" y="658368"/>
+            <a:ext cx="2468880" cy="5833872"/>
           </a:xfrm>
           <a:prstGeom prst="rect">
             <a:avLst/>
@@ -17666,14 +17842,14 @@
       </p:pic>
       <p:sp>
         <p:nvSpPr>
-          <p:cNvPr id="6" name="Text 3"/>
+          <p:cNvPr id="4" name="Text 1"/>
           <p:cNvSpPr/>
           <p:nvPr/>
         </p:nvSpPr>
         <p:spPr>
           <a:xfrm>
-            <a:off x="5349240" y="6089904"/>
-            <a:ext cx="6659575" cy="347472"/>
+            <a:off x="2697480" y="1005840"/>
+            <a:ext cx="9174175" cy="731520"/>
           </a:xfrm>
           <a:prstGeom prst="rect">
             <a:avLst/>
@@ -17682,24 +17858,124 @@
           <a:ln/>
         </p:spPr>
         <p:txBody>
-          <a:bodyPr wrap="square" lIns="0" tIns="0" rIns="0" bIns="0" rtlCol="0" anchor="ctr"/>
+          <a:bodyPr wrap="square" lIns="0" tIns="0" rIns="0" bIns="0" rtlCol="0" anchor="ctr">
+            <a:normAutofit/>
+          </a:bodyPr>
           <a:lstStyle/>
           <a:p>
             <a:pPr algn="ctr" indent="0" marL="0">
               <a:buNone/>
             </a:pPr>
             <a:r>
-              <a:rPr lang="en-US" sz="1600" i="1" dirty="0">
-                <a:solidFill>
-                  <a:srgbClr val="555555"/>
+              <a:rPr lang="en-US" sz="3600" b="1" dirty="0">
+                <a:solidFill>
+                  <a:srgbClr val="990011"/>
                 </a:solidFill>
                 <a:latin typeface="Times New Roman" pitchFamily="34" charset="0"/>
                 <a:ea typeface="Times New Roman" pitchFamily="34" charset="-122"/>
                 <a:cs typeface="Times New Roman" pitchFamily="34" charset="-120"/>
               </a:rPr>
-              <a:t>Illustration: sandstone</a:t>
-            </a:r>
-            <a:endParaRPr lang="en-US" sz="1600" dirty="0"/>
+              <a:t>1. Layers of the Earth and their Properties</a:t>
+            </a:r>
+            <a:endParaRPr lang="en-US" sz="3600" dirty="0"/>
+          </a:p>
+        </p:txBody>
+      </p:sp>
+      <p:sp>
+        <p:nvSpPr>
+          <p:cNvPr id="5" name="Text 2"/>
+          <p:cNvSpPr/>
+          <p:nvPr/>
+        </p:nvSpPr>
+        <p:spPr>
+          <a:xfrm>
+            <a:off x="2697480" y="1737360"/>
+            <a:ext cx="9174175" cy="457200"/>
+          </a:xfrm>
+          <a:prstGeom prst="rect">
+            <a:avLst/>
+          </a:prstGeom>
+          <a:noFill/>
+          <a:ln/>
+        </p:spPr>
+        <p:txBody>
+          <a:bodyPr wrap="square" lIns="0" tIns="0" rIns="0" bIns="0" rtlCol="0" anchor="ctr"/>
+          <a:lstStyle/>
+          <a:p>
+            <a:pPr algn="l" indent="0" marL="0">
+              <a:buNone/>
+            </a:pPr>
+            <a:r>
+              <a:rPr lang="en-US" sz="3200" b="1" dirty="0">
+                <a:solidFill>
+                  <a:srgbClr val="990011"/>
+                </a:solidFill>
+                <a:latin typeface="Times New Roman" pitchFamily="34" charset="0"/>
+                <a:ea typeface="Times New Roman" pitchFamily="34" charset="-122"/>
+                <a:cs typeface="Times New Roman" pitchFamily="34" charset="-120"/>
+              </a:rPr>
+              <a:t>B) The Core and the Discontinuities</a:t>
+            </a:r>
+            <a:endParaRPr lang="en-US" sz="3200" dirty="0"/>
+          </a:p>
+        </p:txBody>
+      </p:sp>
+      <p:sp>
+        <p:nvSpPr>
+          <p:cNvPr id="6" name="Text 3"/>
+          <p:cNvSpPr/>
+          <p:nvPr/>
+        </p:nvSpPr>
+        <p:spPr>
+          <a:xfrm>
+            <a:off x="2697480" y="2240280"/>
+            <a:ext cx="9174175" cy="4206240"/>
+          </a:xfrm>
+          <a:prstGeom prst="rect">
+            <a:avLst/>
+          </a:prstGeom>
+          <a:noFill/>
+          <a:ln/>
+        </p:spPr>
+        <p:txBody>
+          <a:bodyPr wrap="square" lIns="0" tIns="0" rIns="0" bIns="0" rtlCol="0" anchor="t"/>
+          <a:lstStyle/>
+          <a:p>
+            <a:pPr algn="l" indent="0" marL="0">
+              <a:spcAft>
+                <a:spcPts val="800"/>
+              </a:spcAft>
+              <a:buNone/>
+            </a:pPr>
+            <a:r>
+              <a:rPr lang="en-US" sz="3800" b="1" dirty="0">
+                <a:solidFill>
+                  <a:srgbClr val="111111"/>
+                </a:solidFill>
+                <a:latin typeface="Times New Roman" pitchFamily="34" charset="0"/>
+                <a:ea typeface="Times New Roman" pitchFamily="34" charset="-122"/>
+                <a:cs typeface="Times New Roman" pitchFamily="34" charset="-120"/>
+              </a:rPr>
+              <a:t>Discontinuities: </a:t>
+            </a:r>
+            <a:pPr algn="l" indent="0" marL="0">
+              <a:spcAft>
+                <a:spcPts val="800"/>
+              </a:spcAft>
+              <a:buNone/>
+            </a:pPr>
+            <a:r>
+              <a:rPr lang="en-US" sz="3800" dirty="0">
+                <a:solidFill>
+                  <a:srgbClr val="111111"/>
+                </a:solidFill>
+                <a:latin typeface="Times New Roman" pitchFamily="34" charset="0"/>
+                <a:ea typeface="Times New Roman" pitchFamily="34" charset="-122"/>
+                <a:cs typeface="Times New Roman" pitchFamily="34" charset="-120"/>
+              </a:rPr>
+              <a:t>The Mohorovičić (Moho) discontinuity separates the crust from the mantle, and the Gutenberg discontinuity separates the mantle from the core. They were discovered because earthquake waves change speed and direction when they cross them.</a:t>
+            </a:r>
+            <a:endParaRPr lang="en-US" sz="3800" dirty="0"/>
           </a:p>
         </p:txBody>
       </p:sp>
@@ -17850,7 +18126,7 @@
                 <a:ea typeface="Times New Roman" pitchFamily="34" charset="-122"/>
                 <a:cs typeface="Times New Roman" pitchFamily="34" charset="-120"/>
               </a:rPr>
-              <a:t>2. The Rock Cycle</a:t>
+              <a:t>2. The Rock Material Cycle</a:t>
             </a:r>
             <a:endParaRPr lang="en-US" sz="3600" dirty="0"/>
           </a:p>
@@ -17865,7 +18141,7 @@
         <p:spPr>
           <a:xfrm>
             <a:off x="365760" y="1783080"/>
-            <a:ext cx="4846320" cy="4617720"/>
+            <a:ext cx="6035040" cy="4617720"/>
           </a:xfrm>
           <a:prstGeom prst="rect">
             <a:avLst/>
@@ -17884,7 +18160,7 @@
               <a:buNone/>
             </a:pPr>
             <a:r>
-              <a:rPr lang="en-US" sz="3600" b="1" dirty="0">
+              <a:rPr lang="en-US" sz="3000" i="1" dirty="0">
                 <a:solidFill>
                   <a:srgbClr val="111111"/>
                 </a:solidFill>
@@ -17892,8 +18168,11 @@
                 <a:ea typeface="Times New Roman" pitchFamily="34" charset="-122"/>
                 <a:cs typeface="Times New Roman" pitchFamily="34" charset="-120"/>
               </a:rPr>
-              <a:t>Metamorphic rocks: </a:t>
-            </a:r>
+              <a:t>Rocks change from one type to another in the following cycle:</a:t>
+            </a:r>
+            <a:endParaRPr lang="en-US" sz="3000" dirty="0"/>
+          </a:p>
+          <a:p>
             <a:pPr algn="l" indent="0" marL="0">
               <a:spcAft>
                 <a:spcPts val="800"/>
@@ -17901,7 +18180,7 @@
               <a:buNone/>
             </a:pPr>
             <a:r>
-              <a:rPr lang="en-US" sz="3600" dirty="0">
+              <a:rPr lang="en-US" sz="3000" b="1" dirty="0">
                 <a:solidFill>
                   <a:srgbClr val="111111"/>
                 </a:solidFill>
@@ -17909,15 +18188,32 @@
                 <a:ea typeface="Times New Roman" pitchFamily="34" charset="-122"/>
                 <a:cs typeface="Times New Roman" pitchFamily="34" charset="-120"/>
               </a:rPr>
-              <a:t>They form when rocks are changed by heat and pressure, such as marble and gneiss.</a:t>
-            </a:r>
-            <a:endParaRPr lang="en-US" sz="3600" dirty="0"/>
+              <a:t>Igneous rocks: </a:t>
+            </a:r>
+            <a:pPr algn="l" indent="0" marL="0">
+              <a:spcAft>
+                <a:spcPts val="800"/>
+              </a:spcAft>
+              <a:buNone/>
+            </a:pPr>
+            <a:r>
+              <a:rPr lang="en-US" sz="3000" dirty="0">
+                <a:solidFill>
+                  <a:srgbClr val="111111"/>
+                </a:solidFill>
+                <a:latin typeface="Times New Roman" pitchFamily="34" charset="0"/>
+                <a:ea typeface="Times New Roman" pitchFamily="34" charset="-122"/>
+                <a:cs typeface="Times New Roman" pitchFamily="34" charset="-120"/>
+              </a:rPr>
+              <a:t>They form when magma cools inside the crust, like granite, or when lava cools at the surface, like basalt. They are the first rocks of the cycle and are common in the Western Highlands and around Mount Cameroon.</a:t>
+            </a:r>
+            <a:endParaRPr lang="en-US" sz="3000" dirty="0"/>
           </a:p>
         </p:txBody>
       </p:sp>
       <p:pic>
         <p:nvPicPr>
-          <p:cNvPr id="5" name="Image 0" descr="/home/claude/f4/img/v2/f4_marble.jpg">    </p:cNvPr>
+          <p:cNvPr id="5" name="Image 0" descr="/home/claude/f4/img/v2/rock_cycle_big.png">    </p:cNvPr>
           <p:cNvPicPr>
             <a:picLocks noChangeAspect="1"/>
           </p:cNvPicPr>
@@ -17931,8 +18227,8 @@
         </p:blipFill>
         <p:spPr>
           <a:xfrm>
-            <a:off x="5349240" y="2071212"/>
-            <a:ext cx="6659575" cy="3693983"/>
+            <a:off x="6537960" y="2849678"/>
+            <a:ext cx="5470855" cy="2137053"/>
           </a:xfrm>
           <a:prstGeom prst="rect">
             <a:avLst/>
@@ -17947,8 +18243,8 @@
         </p:nvSpPr>
         <p:spPr>
           <a:xfrm>
-            <a:off x="5349240" y="6089904"/>
-            <a:ext cx="6659575" cy="347472"/>
+            <a:off x="6537960" y="6089904"/>
+            <a:ext cx="5470855" cy="347472"/>
           </a:xfrm>
           <a:prstGeom prst="rect">
             <a:avLst/>
@@ -17972,7 +18268,7 @@
                 <a:ea typeface="Times New Roman" pitchFamily="34" charset="-122"/>
                 <a:cs typeface="Times New Roman" pitchFamily="34" charset="-120"/>
               </a:rPr>
-              <a:t>Illustration: marble</a:t>
+              <a:t>Illustration: the rock cycle</a:t>
             </a:r>
             <a:endParaRPr lang="en-US" sz="1600" dirty="0"/>
           </a:p>
@@ -18125,7 +18421,7 @@
                 <a:ea typeface="Times New Roman" pitchFamily="34" charset="-122"/>
                 <a:cs typeface="Times New Roman" pitchFamily="34" charset="-120"/>
               </a:rPr>
-              <a:t>3. Forces that Shape the Landscape</a:t>
+              <a:t>2. The Rock Material Cycle</a:t>
             </a:r>
             <a:endParaRPr lang="en-US" sz="3600" dirty="0"/>
           </a:p>
@@ -18140,7 +18436,7 @@
         <p:spPr>
           <a:xfrm>
             <a:off x="365760" y="1783080"/>
-            <a:ext cx="4846320" cy="4617720"/>
+            <a:ext cx="6035040" cy="4617720"/>
           </a:xfrm>
           <a:prstGeom prst="rect">
             <a:avLst/>
@@ -18159,7 +18455,7 @@
               <a:buNone/>
             </a:pPr>
             <a:r>
-              <a:rPr lang="en-US" sz="3000" i="1" dirty="0">
+              <a:rPr lang="en-US" sz="3600" b="1" dirty="0">
                 <a:solidFill>
                   <a:srgbClr val="111111"/>
                 </a:solidFill>
@@ -18167,11 +18463,8 @@
                 <a:ea typeface="Times New Roman" pitchFamily="34" charset="-122"/>
                 <a:cs typeface="Times New Roman" pitchFamily="34" charset="-120"/>
               </a:rPr>
-              <a:t>The forces that shape the landscape are the following:</a:t>
-            </a:r>
-            <a:endParaRPr lang="en-US" sz="3000" dirty="0"/>
-          </a:p>
-          <a:p>
+              <a:t>Sedimentary rocks: </a:t>
+            </a:r>
             <a:pPr algn="l" indent="0" marL="0">
               <a:spcAft>
                 <a:spcPts val="800"/>
@@ -18179,7 +18472,7 @@
               <a:buNone/>
             </a:pPr>
             <a:r>
-              <a:rPr lang="en-US" sz="3000" b="1" dirty="0">
+              <a:rPr lang="en-US" sz="3600" dirty="0">
                 <a:solidFill>
                   <a:srgbClr val="111111"/>
                 </a:solidFill>
@@ -18187,32 +18480,15 @@
                 <a:ea typeface="Times New Roman" pitchFamily="34" charset="-122"/>
                 <a:cs typeface="Times New Roman" pitchFamily="34" charset="-120"/>
               </a:rPr>
-              <a:t>Internal (endogenic) forces: </a:t>
-            </a:r>
-            <a:pPr algn="l" indent="0" marL="0">
-              <a:spcAft>
-                <a:spcPts val="800"/>
-              </a:spcAft>
-              <a:buNone/>
-            </a:pPr>
-            <a:r>
-              <a:rPr lang="en-US" sz="3000" dirty="0">
-                <a:solidFill>
-                  <a:srgbClr val="111111"/>
-                </a:solidFill>
-                <a:latin typeface="Times New Roman" pitchFamily="34" charset="0"/>
-                <a:ea typeface="Times New Roman" pitchFamily="34" charset="-122"/>
-                <a:cs typeface="Times New Roman" pitchFamily="34" charset="-120"/>
-              </a:rPr>
-              <a:t>Driven by the heat of the mantle, they build up the land through volcanic eruptions, earthquakes, folding and faulting.</a:t>
-            </a:r>
-            <a:endParaRPr lang="en-US" sz="3000" dirty="0"/>
+              <a:t>Rocks at the surface are weathered and eroded, and the fragments are deposited in layers that are compressed and cemented. The sandstones of the Benue valley near Garoua formed in this way.</a:t>
+            </a:r>
+            <a:endParaRPr lang="en-US" sz="3600" dirty="0"/>
           </a:p>
         </p:txBody>
       </p:sp>
       <p:pic>
         <p:nvPicPr>
-          <p:cNvPr id="5" name="Image 0" descr="/home/claude/f4/img/v2/f4_eruption.jpg">    </p:cNvPr>
+          <p:cNvPr id="5" name="Image 0" descr="/home/claude/f4/img/v2/f4_sandstone.jpg">    </p:cNvPr>
           <p:cNvPicPr>
             <a:picLocks noChangeAspect="1"/>
           </p:cNvPicPr>
@@ -18226,8 +18502,8 @@
         </p:blipFill>
         <p:spPr>
           <a:xfrm>
-            <a:off x="5349240" y="2071212"/>
-            <a:ext cx="6659575" cy="3693983"/>
+            <a:off x="6537960" y="2400897"/>
+            <a:ext cx="5470855" cy="3034615"/>
           </a:xfrm>
           <a:prstGeom prst="rect">
             <a:avLst/>
@@ -18242,8 +18518,8 @@
         </p:nvSpPr>
         <p:spPr>
           <a:xfrm>
-            <a:off x="5349240" y="6089904"/>
-            <a:ext cx="6659575" cy="347472"/>
+            <a:off x="6537960" y="6089904"/>
+            <a:ext cx="5470855" cy="347472"/>
           </a:xfrm>
           <a:prstGeom prst="rect">
             <a:avLst/>
@@ -18267,7 +18543,7 @@
                 <a:ea typeface="Times New Roman" pitchFamily="34" charset="-122"/>
                 <a:cs typeface="Times New Roman" pitchFamily="34" charset="-120"/>
               </a:rPr>
-              <a:t>Illustration: a volcanic eruption</a:t>
+              <a:t>Illustration: sandstone</a:t>
             </a:r>
             <a:endParaRPr lang="en-US" sz="1600" dirty="0"/>
           </a:p>
@@ -18420,7 +18696,7 @@
                 <a:ea typeface="Times New Roman" pitchFamily="34" charset="-122"/>
                 <a:cs typeface="Times New Roman" pitchFamily="34" charset="-120"/>
               </a:rPr>
-              <a:t>3. Forces that Shape the Landscape</a:t>
+              <a:t>2. The Rock Material Cycle</a:t>
             </a:r>
             <a:endParaRPr lang="en-US" sz="3600" dirty="0"/>
           </a:p>
@@ -18435,7 +18711,7 @@
         <p:spPr>
           <a:xfrm>
             <a:off x="365760" y="1783080"/>
-            <a:ext cx="4846320" cy="4617720"/>
+            <a:ext cx="6035040" cy="4617720"/>
           </a:xfrm>
           <a:prstGeom prst="rect">
             <a:avLst/>
@@ -18454,7 +18730,7 @@
               <a:buNone/>
             </a:pPr>
             <a:r>
-              <a:rPr lang="en-US" sz="3600" b="1" dirty="0">
+              <a:rPr lang="en-US" sz="3400" b="1" dirty="0">
                 <a:solidFill>
                   <a:srgbClr val="111111"/>
                 </a:solidFill>
@@ -18462,7 +18738,7 @@
                 <a:ea typeface="Times New Roman" pitchFamily="34" charset="-122"/>
                 <a:cs typeface="Times New Roman" pitchFamily="34" charset="-120"/>
               </a:rPr>
-              <a:t>External (exogenic) forces: </a:t>
+              <a:t>Metamorphic rocks: </a:t>
             </a:r>
             <a:pPr algn="l" indent="0" marL="0">
               <a:spcAft>
@@ -18471,7 +18747,7 @@
               <a:buNone/>
             </a:pPr>
             <a:r>
-              <a:rPr lang="en-US" sz="3600" dirty="0">
+              <a:rPr lang="en-US" sz="3400" dirty="0">
                 <a:solidFill>
                   <a:srgbClr val="111111"/>
                 </a:solidFill>
@@ -18479,15 +18755,15 @@
                 <a:ea typeface="Times New Roman" pitchFamily="34" charset="-122"/>
                 <a:cs typeface="Times New Roman" pitchFamily="34" charset="-120"/>
               </a:rPr>
-              <a:t>Powered by the Sun, they wear down the land through weathering and erosion by rivers, wind and ice.</a:t>
-            </a:r>
-            <a:endParaRPr lang="en-US" sz="3600" dirty="0"/>
+              <a:t>When igneous or sedimentary rocks are buried deep and heated and squeezed, their minerals change without melting. Limestone becomes marble and granite becomes gneiss, which is common in the basement rocks of Cameroon.</a:t>
+            </a:r>
+            <a:endParaRPr lang="en-US" sz="3400" dirty="0"/>
           </a:p>
         </p:txBody>
       </p:sp>
       <p:pic>
         <p:nvPicPr>
-          <p:cNvPr id="5" name="Image 0" descr="/home/claude/f4/img/v2/f4_gully.jpg">    </p:cNvPr>
+          <p:cNvPr id="5" name="Image 0" descr="/home/claude/f4/img/v2/f4_marble.jpg">    </p:cNvPr>
           <p:cNvPicPr>
             <a:picLocks noChangeAspect="1"/>
           </p:cNvPicPr>
@@ -18501,8 +18777,8 @@
         </p:blipFill>
         <p:spPr>
           <a:xfrm>
-            <a:off x="5349240" y="2071212"/>
-            <a:ext cx="6659575" cy="3693983"/>
+            <a:off x="6537960" y="2400897"/>
+            <a:ext cx="5470855" cy="3034615"/>
           </a:xfrm>
           <a:prstGeom prst="rect">
             <a:avLst/>
@@ -18517,8 +18793,8 @@
         </p:nvSpPr>
         <p:spPr>
           <a:xfrm>
-            <a:off x="5349240" y="6089904"/>
-            <a:ext cx="6659575" cy="347472"/>
+            <a:off x="6537960" y="6089904"/>
+            <a:ext cx="5470855" cy="347472"/>
           </a:xfrm>
           <a:prstGeom prst="rect">
             <a:avLst/>
@@ -18542,7 +18818,7 @@
                 <a:ea typeface="Times New Roman" pitchFamily="34" charset="-122"/>
                 <a:cs typeface="Times New Roman" pitchFamily="34" charset="-120"/>
               </a:rPr>
-              <a:t>Illustration: a gully</a:t>
+              <a:t>Illustration: marble</a:t>
             </a:r>
             <a:endParaRPr lang="en-US" sz="1600" dirty="0"/>
           </a:p>
@@ -18677,7 +18953,7 @@
         <p:spPr>
           <a:xfrm>
             <a:off x="0" y="658368"/>
-            <a:ext cx="5120640" cy="5833872"/>
+            <a:ext cx="3840480" cy="5833872"/>
           </a:xfrm>
           <a:prstGeom prst="rect">
             <a:avLst/>
@@ -18692,8 +18968,8 @@
         </p:nvSpPr>
         <p:spPr>
           <a:xfrm>
-            <a:off x="5349240" y="1005840"/>
-            <a:ext cx="6522415" cy="731520"/>
+            <a:off x="4069080" y="1005840"/>
+            <a:ext cx="7802575" cy="731520"/>
           </a:xfrm>
           <a:prstGeom prst="rect">
             <a:avLst/>
@@ -18719,7 +18995,7 @@
                 <a:ea typeface="Times New Roman" pitchFamily="34" charset="-122"/>
                 <a:cs typeface="Times New Roman" pitchFamily="34" charset="-120"/>
               </a:rPr>
-              <a:t>3. Forces that Shape the Landscape</a:t>
+              <a:t>2. The Rock Material Cycle</a:t>
             </a:r>
             <a:endParaRPr lang="en-US" sz="3600" dirty="0"/>
           </a:p>
@@ -18733,8 +19009,8 @@
         </p:nvSpPr>
         <p:spPr>
           <a:xfrm>
-            <a:off x="5349240" y="1783080"/>
-            <a:ext cx="6522415" cy="4663440"/>
+            <a:off x="4069080" y="1783080"/>
+            <a:ext cx="7802575" cy="4663440"/>
           </a:xfrm>
           <a:prstGeom prst="rect">
             <a:avLst/>
@@ -18761,7 +19037,7 @@
                 <a:ea typeface="Times New Roman" pitchFamily="34" charset="-122"/>
                 <a:cs typeface="Times New Roman" pitchFamily="34" charset="-120"/>
               </a:rPr>
-              <a:t>Local example: </a:t>
+              <a:t>Closing the cycle: </a:t>
             </a:r>
             <a:pPr algn="l" indent="0" marL="0">
               <a:spcAft>
@@ -18778,7 +19054,7 @@
                 <a:ea typeface="Times New Roman" pitchFamily="34" charset="-122"/>
                 <a:cs typeface="Times New Roman" pitchFamily="34" charset="-120"/>
               </a:rPr>
-              <a:t>The erosion of the banks of the Benue at Garoua is the work of external forces.</a:t>
+              <a:t>If rocks are pushed deeper still, they melt into magma, which may rise and form new igneous rocks. The cycle therefore never stops, driven by the heat of the Earth and by the energy of the Sun.</a:t>
             </a:r>
             <a:endParaRPr lang="en-US" sz="4000" dirty="0"/>
           </a:p>
@@ -19150,7 +19426,7 @@
                 <a:ea typeface="Times New Roman" pitchFamily="34" charset="-122"/>
                 <a:cs typeface="Times New Roman" pitchFamily="34" charset="-120"/>
               </a:rPr>
-              <a:t>4. Categories of Landforms</a:t>
+              <a:t>3. Forces that Shape the Landscape</a:t>
             </a:r>
             <a:endParaRPr lang="en-US" sz="3600" dirty="0"/>
           </a:p>
@@ -19165,7 +19441,7 @@
         <p:spPr>
           <a:xfrm>
             <a:off x="365760" y="1783080"/>
-            <a:ext cx="4846320" cy="4617720"/>
+            <a:ext cx="6035040" cy="4617720"/>
           </a:xfrm>
           <a:prstGeom prst="rect">
             <a:avLst/>
@@ -19184,7 +19460,7 @@
               <a:buNone/>
             </a:pPr>
             <a:r>
-              <a:rPr lang="en-US" sz="3600" i="1" dirty="0">
+              <a:rPr lang="en-US" sz="2800" i="1" dirty="0">
                 <a:solidFill>
                   <a:srgbClr val="111111"/>
                 </a:solidFill>
@@ -19192,9 +19468,9 @@
                 <a:ea typeface="Times New Roman" pitchFamily="34" charset="-122"/>
                 <a:cs typeface="Times New Roman" pitchFamily="34" charset="-120"/>
               </a:rPr>
-              <a:t>Landforms are classified as follows:</a:t>
-            </a:r>
-            <a:endParaRPr lang="en-US" sz="3600" dirty="0"/>
+              <a:t>The landscape is shaped by the following two groups of forces:</a:t>
+            </a:r>
+            <a:endParaRPr lang="en-US" sz="2800" dirty="0"/>
           </a:p>
           <a:p>
             <a:pPr algn="l" indent="0" marL="0">
@@ -19204,7 +19480,7 @@
               <a:buNone/>
             </a:pPr>
             <a:r>
-              <a:rPr lang="en-US" sz="3600" b="1" dirty="0">
+              <a:rPr lang="en-US" sz="2800" b="1" dirty="0">
                 <a:solidFill>
                   <a:srgbClr val="111111"/>
                 </a:solidFill>
@@ -19212,7 +19488,7 @@
                 <a:ea typeface="Times New Roman" pitchFamily="34" charset="-122"/>
                 <a:cs typeface="Times New Roman" pitchFamily="34" charset="-120"/>
               </a:rPr>
-              <a:t>First-order (major) landforms: </a:t>
+              <a:t>Internal (endogenic) forces: </a:t>
             </a:r>
             <a:pPr algn="l" indent="0" marL="0">
               <a:spcAft>
@@ -19221,7 +19497,7 @@
               <a:buNone/>
             </a:pPr>
             <a:r>
-              <a:rPr lang="en-US" sz="3600" dirty="0">
+              <a:rPr lang="en-US" sz="2800" dirty="0">
                 <a:solidFill>
                   <a:srgbClr val="111111"/>
                 </a:solidFill>
@@ -19229,15 +19505,15 @@
                 <a:ea typeface="Times New Roman" pitchFamily="34" charset="-122"/>
                 <a:cs typeface="Times New Roman" pitchFamily="34" charset="-120"/>
               </a:rPr>
-              <a:t>They are the largest features: continents and ocean basins.</a:t>
-            </a:r>
-            <a:endParaRPr lang="en-US" sz="3600" dirty="0"/>
+              <a:t>They are driven by the heat of the interior of the Earth and act through plate movements, volcanism, earthquakes, folding and faulting. They build up the relief and create mountains, plateaux and rift valleys.</a:t>
+            </a:r>
+            <a:endParaRPr lang="en-US" sz="2800" dirty="0"/>
           </a:p>
         </p:txBody>
       </p:sp>
       <p:pic>
         <p:nvPicPr>
-          <p:cNvPr id="5" name="Image 0" descr="/home/claude/f4/img/v2/geo2_orders.png">    </p:cNvPr>
+          <p:cNvPr id="5" name="Image 0" descr="/home/claude/f4/img/v2/f4_eruption.jpg">    </p:cNvPr>
           <p:cNvPicPr>
             <a:picLocks noChangeAspect="1"/>
           </p:cNvPicPr>
@@ -19251,8 +19527,8 @@
         </p:blipFill>
         <p:spPr>
           <a:xfrm>
-            <a:off x="5349240" y="2617506"/>
-            <a:ext cx="6659575" cy="2601397"/>
+            <a:off x="6537960" y="2400897"/>
+            <a:ext cx="5470855" cy="3034615"/>
           </a:xfrm>
           <a:prstGeom prst="rect">
             <a:avLst/>
@@ -19267,8 +19543,8 @@
         </p:nvSpPr>
         <p:spPr>
           <a:xfrm>
-            <a:off x="5349240" y="6089904"/>
-            <a:ext cx="6659575" cy="347472"/>
+            <a:off x="6537960" y="6089904"/>
+            <a:ext cx="5470855" cy="347472"/>
           </a:xfrm>
           <a:prstGeom prst="rect">
             <a:avLst/>
@@ -19292,7 +19568,7 @@
                 <a:ea typeface="Times New Roman" pitchFamily="34" charset="-122"/>
                 <a:cs typeface="Times New Roman" pitchFamily="34" charset="-120"/>
               </a:rPr>
-              <a:t>Illustration: categories of landforms</a:t>
+              <a:t>Illustration: a volcanic eruption</a:t>
             </a:r>
             <a:endParaRPr lang="en-US" sz="1600" dirty="0"/>
           </a:p>
@@ -19410,9 +19686,109 @@
           </a:p>
         </p:txBody>
       </p:sp>
+      <p:sp>
+        <p:nvSpPr>
+          <p:cNvPr id="3" name="Text 1"/>
+          <p:cNvSpPr/>
+          <p:nvPr/>
+        </p:nvSpPr>
+        <p:spPr>
+          <a:xfrm>
+            <a:off x="365760" y="1005840"/>
+            <a:ext cx="11460175" cy="731520"/>
+          </a:xfrm>
+          <a:prstGeom prst="rect">
+            <a:avLst/>
+          </a:prstGeom>
+          <a:noFill/>
+          <a:ln/>
+        </p:spPr>
+        <p:txBody>
+          <a:bodyPr wrap="square" lIns="0" tIns="0" rIns="0" bIns="0" rtlCol="0" anchor="ctr">
+            <a:normAutofit/>
+          </a:bodyPr>
+          <a:lstStyle/>
+          <a:p>
+            <a:pPr algn="ctr" indent="0" marL="0">
+              <a:buNone/>
+            </a:pPr>
+            <a:r>
+              <a:rPr lang="en-US" sz="3600" b="1" dirty="0">
+                <a:solidFill>
+                  <a:srgbClr val="990011"/>
+                </a:solidFill>
+                <a:latin typeface="Times New Roman" pitchFamily="34" charset="0"/>
+                <a:ea typeface="Times New Roman" pitchFamily="34" charset="-122"/>
+                <a:cs typeface="Times New Roman" pitchFamily="34" charset="-120"/>
+              </a:rPr>
+              <a:t>3. Forces that Shape the Landscape</a:t>
+            </a:r>
+            <a:endParaRPr lang="en-US" sz="3600" dirty="0"/>
+          </a:p>
+        </p:txBody>
+      </p:sp>
+      <p:sp>
+        <p:nvSpPr>
+          <p:cNvPr id="4" name="Text 2"/>
+          <p:cNvSpPr/>
+          <p:nvPr/>
+        </p:nvSpPr>
+        <p:spPr>
+          <a:xfrm>
+            <a:off x="365760" y="1783080"/>
+            <a:ext cx="6035040" cy="4617720"/>
+          </a:xfrm>
+          <a:prstGeom prst="rect">
+            <a:avLst/>
+          </a:prstGeom>
+          <a:noFill/>
+          <a:ln/>
+        </p:spPr>
+        <p:txBody>
+          <a:bodyPr wrap="square" lIns="0" tIns="0" rIns="0" bIns="0" rtlCol="0" anchor="t"/>
+          <a:lstStyle/>
+          <a:p>
+            <a:pPr algn="l" indent="0" marL="0">
+              <a:spcAft>
+                <a:spcPts val="800"/>
+              </a:spcAft>
+              <a:buNone/>
+            </a:pPr>
+            <a:r>
+              <a:rPr lang="en-US" sz="3200" b="1" dirty="0">
+                <a:solidFill>
+                  <a:srgbClr val="111111"/>
+                </a:solidFill>
+                <a:latin typeface="Times New Roman" pitchFamily="34" charset="0"/>
+                <a:ea typeface="Times New Roman" pitchFamily="34" charset="-122"/>
+                <a:cs typeface="Times New Roman" pitchFamily="34" charset="-120"/>
+              </a:rPr>
+              <a:t>External (exogenic) forces: </a:t>
+            </a:r>
+            <a:pPr algn="l" indent="0" marL="0">
+              <a:spcAft>
+                <a:spcPts val="800"/>
+              </a:spcAft>
+              <a:buNone/>
+            </a:pPr>
+            <a:r>
+              <a:rPr lang="en-US" sz="3200" dirty="0">
+                <a:solidFill>
+                  <a:srgbClr val="111111"/>
+                </a:solidFill>
+                <a:latin typeface="Times New Roman" pitchFamily="34" charset="0"/>
+                <a:ea typeface="Times New Roman" pitchFamily="34" charset="-122"/>
+                <a:cs typeface="Times New Roman" pitchFamily="34" charset="-120"/>
+              </a:rPr>
+              <a:t>They are driven by the energy of the Sun and by gravity and act through weathering, mass movement and erosion by rivers, wind, waves and ice. They wear down the relief and deposit the material in lowlands, as the Benue does around Garoua.</a:t>
+            </a:r>
+            <a:endParaRPr lang="en-US" sz="3200" dirty="0"/>
+          </a:p>
+        </p:txBody>
+      </p:sp>
       <p:pic>
         <p:nvPicPr>
-          <p:cNvPr id="3" name="Image 0" descr="/home/claude/f4/img/minesec_sheet.png">    </p:cNvPr>
+          <p:cNvPr id="5" name="Image 0" descr="/home/claude/f4/img/v2/f4_gully.jpg">    </p:cNvPr>
           <p:cNvPicPr>
             <a:picLocks noChangeAspect="1"/>
           </p:cNvPicPr>
@@ -19426,8 +19802,8 @@
         </p:blipFill>
         <p:spPr>
           <a:xfrm>
-            <a:off x="0" y="658368"/>
-            <a:ext cx="2468880" cy="5833872"/>
+            <a:off x="6537960" y="2400897"/>
+            <a:ext cx="5470855" cy="3034615"/>
           </a:xfrm>
           <a:prstGeom prst="rect">
             <a:avLst/>
@@ -19436,14 +19812,14 @@
       </p:pic>
       <p:sp>
         <p:nvSpPr>
-          <p:cNvPr id="4" name="Text 1"/>
+          <p:cNvPr id="6" name="Text 3"/>
           <p:cNvSpPr/>
           <p:nvPr/>
         </p:nvSpPr>
         <p:spPr>
           <a:xfrm>
-            <a:off x="2697480" y="1005840"/>
-            <a:ext cx="9174175" cy="731520"/>
+            <a:off x="6537960" y="6089904"/>
+            <a:ext cx="5470855" cy="347472"/>
           </a:xfrm>
           <a:prstGeom prst="rect">
             <a:avLst/>
@@ -19452,122 +19828,24 @@
           <a:ln/>
         </p:spPr>
         <p:txBody>
-          <a:bodyPr wrap="square" lIns="0" tIns="0" rIns="0" bIns="0" rtlCol="0" anchor="ctr">
-            <a:normAutofit/>
-          </a:bodyPr>
+          <a:bodyPr wrap="square" lIns="0" tIns="0" rIns="0" bIns="0" rtlCol="0" anchor="ctr"/>
           <a:lstStyle/>
           <a:p>
             <a:pPr algn="ctr" indent="0" marL="0">
               <a:buNone/>
             </a:pPr>
             <a:r>
-              <a:rPr lang="en-US" sz="3600" b="1" dirty="0">
-                <a:solidFill>
-                  <a:srgbClr val="990011"/>
+              <a:rPr lang="en-US" sz="1600" i="1" dirty="0">
+                <a:solidFill>
+                  <a:srgbClr val="555555"/>
                 </a:solidFill>
                 <a:latin typeface="Times New Roman" pitchFamily="34" charset="0"/>
                 <a:ea typeface="Times New Roman" pitchFamily="34" charset="-122"/>
                 <a:cs typeface="Times New Roman" pitchFamily="34" charset="-120"/>
               </a:rPr>
-              <a:t>4. Categories of Landforms</a:t>
-            </a:r>
-            <a:endParaRPr lang="en-US" sz="3600" dirty="0"/>
-          </a:p>
-        </p:txBody>
-      </p:sp>
-      <p:sp>
-        <p:nvSpPr>
-          <p:cNvPr id="5" name="Text 2"/>
-          <p:cNvSpPr/>
-          <p:nvPr/>
-        </p:nvSpPr>
-        <p:spPr>
-          <a:xfrm>
-            <a:off x="2697480" y="1783080"/>
-            <a:ext cx="9174175" cy="4663440"/>
-          </a:xfrm>
-          <a:prstGeom prst="rect">
-            <a:avLst/>
-          </a:prstGeom>
-          <a:noFill/>
-          <a:ln/>
-        </p:spPr>
-        <p:txBody>
-          <a:bodyPr wrap="square" lIns="0" tIns="0" rIns="0" bIns="0" rtlCol="0" anchor="t"/>
-          <a:lstStyle/>
-          <a:p>
-            <a:pPr algn="l" indent="0" marL="0">
-              <a:spcAft>
-                <a:spcPts val="800"/>
-              </a:spcAft>
-              <a:buNone/>
-            </a:pPr>
-            <a:r>
-              <a:rPr lang="en-US" sz="4000" b="1" dirty="0">
-                <a:solidFill>
-                  <a:srgbClr val="111111"/>
-                </a:solidFill>
-                <a:latin typeface="Times New Roman" pitchFamily="34" charset="0"/>
-                <a:ea typeface="Times New Roman" pitchFamily="34" charset="-122"/>
-                <a:cs typeface="Times New Roman" pitchFamily="34" charset="-120"/>
-              </a:rPr>
-              <a:t>Second-order landforms: </a:t>
-            </a:r>
-            <a:pPr algn="l" indent="0" marL="0">
-              <a:spcAft>
-                <a:spcPts val="800"/>
-              </a:spcAft>
-              <a:buNone/>
-            </a:pPr>
-            <a:r>
-              <a:rPr lang="en-US" sz="4000" dirty="0">
-                <a:solidFill>
-                  <a:srgbClr val="111111"/>
-                </a:solidFill>
-                <a:latin typeface="Times New Roman" pitchFamily="34" charset="0"/>
-                <a:ea typeface="Times New Roman" pitchFamily="34" charset="-122"/>
-                <a:cs typeface="Times New Roman" pitchFamily="34" charset="-120"/>
-              </a:rPr>
-              <a:t>They are found on the major ones: mountains, plateaux and plains, such as the Mandara Mountains and the Adamawa Plateau.</a:t>
-            </a:r>
-            <a:endParaRPr lang="en-US" sz="4000" dirty="0"/>
-          </a:p>
-          <a:p>
-            <a:pPr algn="l" indent="0" marL="0">
-              <a:spcAft>
-                <a:spcPts val="800"/>
-              </a:spcAft>
-              <a:buNone/>
-            </a:pPr>
-            <a:r>
-              <a:rPr lang="en-US" sz="4000" b="1" dirty="0">
-                <a:solidFill>
-                  <a:srgbClr val="111111"/>
-                </a:solidFill>
-                <a:latin typeface="Times New Roman" pitchFamily="34" charset="0"/>
-                <a:ea typeface="Times New Roman" pitchFamily="34" charset="-122"/>
-                <a:cs typeface="Times New Roman" pitchFamily="34" charset="-120"/>
-              </a:rPr>
-              <a:t>Third-order (minor) landforms: </a:t>
-            </a:r>
-            <a:pPr algn="l" indent="0" marL="0">
-              <a:spcAft>
-                <a:spcPts val="800"/>
-              </a:spcAft>
-              <a:buNone/>
-            </a:pPr>
-            <a:r>
-              <a:rPr lang="en-US" sz="4000" dirty="0">
-                <a:solidFill>
-                  <a:srgbClr val="111111"/>
-                </a:solidFill>
-                <a:latin typeface="Times New Roman" pitchFamily="34" charset="0"/>
-                <a:ea typeface="Times New Roman" pitchFamily="34" charset="-122"/>
-                <a:cs typeface="Times New Roman" pitchFamily="34" charset="-120"/>
-              </a:rPr>
-              <a:t>They are smaller features such as valleys, hills and gullies, like the Benue valley.</a:t>
-            </a:r>
-            <a:endParaRPr lang="en-US" sz="4000" dirty="0"/>
+              <a:t>Illustration: gully erosion</a:t>
+            </a:r>
+            <a:endParaRPr lang="en-US" sz="1600" dirty="0"/>
           </a:p>
         </p:txBody>
       </p:sp>
@@ -19677,15 +19955,135 @@
                 <a:ea typeface="Calibri" pitchFamily="34" charset="-122"/>
                 <a:cs typeface="Calibri" pitchFamily="34" charset="-120"/>
               </a:rPr>
-              <a:t>FORMATIVE EVALUATION</a:t>
+              <a:t>BOARD SUMMARY</a:t>
             </a:r>
             <a:endParaRPr lang="en-US" sz="1400" dirty="0"/>
+          </a:p>
+        </p:txBody>
+      </p:sp>
+      <p:sp>
+        <p:nvSpPr>
+          <p:cNvPr id="3" name="Text 1"/>
+          <p:cNvSpPr/>
+          <p:nvPr/>
+        </p:nvSpPr>
+        <p:spPr>
+          <a:xfrm>
+            <a:off x="365760" y="1005840"/>
+            <a:ext cx="11460175" cy="731520"/>
+          </a:xfrm>
+          <a:prstGeom prst="rect">
+            <a:avLst/>
+          </a:prstGeom>
+          <a:noFill/>
+          <a:ln/>
+        </p:spPr>
+        <p:txBody>
+          <a:bodyPr wrap="square" lIns="0" tIns="0" rIns="0" bIns="0" rtlCol="0" anchor="ctr">
+            <a:normAutofit/>
+          </a:bodyPr>
+          <a:lstStyle/>
+          <a:p>
+            <a:pPr algn="ctr" indent="0" marL="0">
+              <a:buNone/>
+            </a:pPr>
+            <a:r>
+              <a:rPr lang="en-US" sz="3600" b="1" dirty="0">
+                <a:solidFill>
+                  <a:srgbClr val="990011"/>
+                </a:solidFill>
+                <a:latin typeface="Times New Roman" pitchFamily="34" charset="0"/>
+                <a:ea typeface="Times New Roman" pitchFamily="34" charset="-122"/>
+                <a:cs typeface="Times New Roman" pitchFamily="34" charset="-120"/>
+              </a:rPr>
+              <a:t>4. Categories of Landforms</a:t>
+            </a:r>
+            <a:endParaRPr lang="en-US" sz="3600" dirty="0"/>
+          </a:p>
+        </p:txBody>
+      </p:sp>
+      <p:sp>
+        <p:nvSpPr>
+          <p:cNvPr id="4" name="Text 2"/>
+          <p:cNvSpPr/>
+          <p:nvPr/>
+        </p:nvSpPr>
+        <p:spPr>
+          <a:xfrm>
+            <a:off x="365760" y="1783080"/>
+            <a:ext cx="6035040" cy="4617720"/>
+          </a:xfrm>
+          <a:prstGeom prst="rect">
+            <a:avLst/>
+          </a:prstGeom>
+          <a:noFill/>
+          <a:ln/>
+        </p:spPr>
+        <p:txBody>
+          <a:bodyPr wrap="square" lIns="0" tIns="0" rIns="0" bIns="0" rtlCol="0" anchor="t"/>
+          <a:lstStyle/>
+          <a:p>
+            <a:pPr algn="l" indent="0" marL="0">
+              <a:spcAft>
+                <a:spcPts val="800"/>
+              </a:spcAft>
+              <a:buNone/>
+            </a:pPr>
+            <a:r>
+              <a:rPr lang="en-US" sz="3200" i="1" dirty="0">
+                <a:solidFill>
+                  <a:srgbClr val="111111"/>
+                </a:solidFill>
+                <a:latin typeface="Times New Roman" pitchFamily="34" charset="0"/>
+                <a:ea typeface="Times New Roman" pitchFamily="34" charset="-122"/>
+                <a:cs typeface="Times New Roman" pitchFamily="34" charset="-120"/>
+              </a:rPr>
+              <a:t>Landforms are classified into the following categories:</a:t>
+            </a:r>
+            <a:endParaRPr lang="en-US" sz="3200" dirty="0"/>
+          </a:p>
+          <a:p>
+            <a:pPr algn="l" indent="0" marL="0">
+              <a:spcAft>
+                <a:spcPts val="800"/>
+              </a:spcAft>
+              <a:buNone/>
+            </a:pPr>
+            <a:r>
+              <a:rPr lang="en-US" sz="3200" b="1" dirty="0">
+                <a:solidFill>
+                  <a:srgbClr val="111111"/>
+                </a:solidFill>
+                <a:latin typeface="Times New Roman" pitchFamily="34" charset="0"/>
+                <a:ea typeface="Times New Roman" pitchFamily="34" charset="-122"/>
+                <a:cs typeface="Times New Roman" pitchFamily="34" charset="-120"/>
+              </a:rPr>
+              <a:t>First-order (major) landforms: </a:t>
+            </a:r>
+            <a:pPr algn="l" indent="0" marL="0">
+              <a:spcAft>
+                <a:spcPts val="800"/>
+              </a:spcAft>
+              <a:buNone/>
+            </a:pPr>
+            <a:r>
+              <a:rPr lang="en-US" sz="3200" dirty="0">
+                <a:solidFill>
+                  <a:srgbClr val="111111"/>
+                </a:solidFill>
+                <a:latin typeface="Times New Roman" pitchFamily="34" charset="0"/>
+                <a:ea typeface="Times New Roman" pitchFamily="34" charset="-122"/>
+                <a:cs typeface="Times New Roman" pitchFamily="34" charset="-120"/>
+              </a:rPr>
+              <a:t>They are the largest features of the Earth: the continents and the ocean basins. They are due to the difference between the light continental crust and the dense oceanic crust.</a:t>
+            </a:r>
+            <a:endParaRPr lang="en-US" sz="3200" dirty="0"/>
           </a:p>
         </p:txBody>
       </p:sp>
       <p:pic>
         <p:nvPicPr>
-          <p:cNvPr id="3" name="Image 0" descr="/home/claude/f4/img/minesec_sheet.png">    </p:cNvPr>
+          <p:cNvPr id="5" name="Image 0" descr="/home/claude/f4/img/v2/geo2_orders.png">    </p:cNvPr>
           <p:cNvPicPr>
             <a:picLocks noChangeAspect="1"/>
           </p:cNvPicPr>
@@ -19699,8 +20097,8 @@
         </p:blipFill>
         <p:spPr>
           <a:xfrm>
-            <a:off x="0" y="658368"/>
-            <a:ext cx="5120640" cy="5833872"/>
+            <a:off x="6537960" y="2849678"/>
+            <a:ext cx="5470855" cy="2137053"/>
           </a:xfrm>
           <a:prstGeom prst="rect">
             <a:avLst/>
@@ -19709,14 +20107,14 @@
       </p:pic>
       <p:sp>
         <p:nvSpPr>
-          <p:cNvPr id="4" name="Text 1"/>
+          <p:cNvPr id="6" name="Text 3"/>
           <p:cNvSpPr/>
           <p:nvPr/>
         </p:nvSpPr>
         <p:spPr>
           <a:xfrm>
-            <a:off x="5349240" y="1005840"/>
-            <a:ext cx="6522415" cy="731520"/>
+            <a:off x="6537960" y="6089904"/>
+            <a:ext cx="5470855" cy="347472"/>
           </a:xfrm>
           <a:prstGeom prst="rect">
             <a:avLst/>
@@ -19725,68 +20123,24 @@
           <a:ln/>
         </p:spPr>
         <p:txBody>
-          <a:bodyPr wrap="square" lIns="0" tIns="0" rIns="0" bIns="0" rtlCol="0" anchor="ctr">
-            <a:normAutofit/>
-          </a:bodyPr>
+          <a:bodyPr wrap="square" lIns="0" tIns="0" rIns="0" bIns="0" rtlCol="0" anchor="ctr"/>
           <a:lstStyle/>
           <a:p>
             <a:pPr algn="ctr" indent="0" marL="0">
               <a:buNone/>
             </a:pPr>
             <a:r>
-              <a:rPr lang="en-US" sz="3600" b="1" dirty="0">
-                <a:solidFill>
-                  <a:srgbClr val="990011"/>
+              <a:rPr lang="en-US" sz="1600" i="1" dirty="0">
+                <a:solidFill>
+                  <a:srgbClr val="555555"/>
                 </a:solidFill>
                 <a:latin typeface="Times New Roman" pitchFamily="34" charset="0"/>
                 <a:ea typeface="Times New Roman" pitchFamily="34" charset="-122"/>
                 <a:cs typeface="Times New Roman" pitchFamily="34" charset="-120"/>
               </a:rPr>
-              <a:t>Evaluation 1</a:t>
-            </a:r>
-            <a:endParaRPr lang="en-US" sz="3600" dirty="0"/>
-          </a:p>
-        </p:txBody>
-      </p:sp>
-      <p:sp>
-        <p:nvSpPr>
-          <p:cNvPr id="5" name="Text 2"/>
-          <p:cNvSpPr/>
-          <p:nvPr/>
-        </p:nvSpPr>
-        <p:spPr>
-          <a:xfrm>
-            <a:off x="5349240" y="1783080"/>
-            <a:ext cx="6522415" cy="4663440"/>
-          </a:xfrm>
-          <a:prstGeom prst="rect">
-            <a:avLst/>
-          </a:prstGeom>
-          <a:noFill/>
-          <a:ln/>
-        </p:spPr>
-        <p:txBody>
-          <a:bodyPr wrap="square" lIns="0" tIns="0" rIns="0" bIns="0" rtlCol="0" anchor="t"/>
-          <a:lstStyle/>
-          <a:p>
-            <a:pPr algn="l" indent="0" marL="0">
-              <a:spcAft>
-                <a:spcPts val="800"/>
-              </a:spcAft>
-              <a:buNone/>
-            </a:pPr>
-            <a:r>
-              <a:rPr lang="en-US" sz="4000" dirty="0">
-                <a:solidFill>
-                  <a:srgbClr val="111111"/>
-                </a:solidFill>
-                <a:latin typeface="Times New Roman" pitchFamily="34" charset="0"/>
-                <a:ea typeface="Times New Roman" pitchFamily="34" charset="-122"/>
-                <a:cs typeface="Times New Roman" pitchFamily="34" charset="-120"/>
-              </a:rPr>
-              <a:t>Distinguish continental crust from oceanic crust.</a:t>
-            </a:r>
-            <a:endParaRPr lang="en-US" sz="4000" dirty="0"/>
+              <a:t>Illustration: the orders of relief</a:t>
+            </a:r>
+            <a:endParaRPr lang="en-US" sz="1600" dirty="0"/>
           </a:p>
         </p:txBody>
       </p:sp>
@@ -19896,7 +20250,7 @@
                 <a:ea typeface="Calibri" pitchFamily="34" charset="-122"/>
                 <a:cs typeface="Calibri" pitchFamily="34" charset="-120"/>
               </a:rPr>
-              <a:t>FORMATIVE EVALUATION</a:t>
+              <a:t>BOARD SUMMARY</a:t>
             </a:r>
             <a:endParaRPr lang="en-US" sz="1400" dirty="0"/>
           </a:p>
@@ -19919,7 +20273,7 @@
         <p:spPr>
           <a:xfrm>
             <a:off x="0" y="658368"/>
-            <a:ext cx="5120640" cy="5833872"/>
+            <a:ext cx="3840480" cy="5833872"/>
           </a:xfrm>
           <a:prstGeom prst="rect">
             <a:avLst/>
@@ -19934,8 +20288,8 @@
         </p:nvSpPr>
         <p:spPr>
           <a:xfrm>
-            <a:off x="5349240" y="1005840"/>
-            <a:ext cx="6522415" cy="731520"/>
+            <a:off x="4069080" y="1005840"/>
+            <a:ext cx="7802575" cy="731520"/>
           </a:xfrm>
           <a:prstGeom prst="rect">
             <a:avLst/>
@@ -19961,7 +20315,7 @@
                 <a:ea typeface="Times New Roman" pitchFamily="34" charset="-122"/>
                 <a:cs typeface="Times New Roman" pitchFamily="34" charset="-120"/>
               </a:rPr>
-              <a:t>Expected Answer</a:t>
+              <a:t>4. Categories of Landforms</a:t>
             </a:r>
             <a:endParaRPr lang="en-US" sz="3600" dirty="0"/>
           </a:p>
@@ -19975,8 +20329,8 @@
         </p:nvSpPr>
         <p:spPr>
           <a:xfrm>
-            <a:off x="5349240" y="1783080"/>
-            <a:ext cx="6522415" cy="4663440"/>
+            <a:off x="4069080" y="1783080"/>
+            <a:ext cx="7802575" cy="4663440"/>
           </a:xfrm>
           <a:prstGeom prst="rect">
             <a:avLst/>
@@ -19995,7 +20349,7 @@
               <a:buNone/>
             </a:pPr>
             <a:r>
-              <a:rPr lang="en-US" sz="4000" dirty="0">
+              <a:rPr lang="en-US" sz="4000" b="1" dirty="0">
                 <a:solidFill>
                   <a:srgbClr val="111111"/>
                 </a:solidFill>
@@ -20003,7 +20357,24 @@
                 <a:ea typeface="Times New Roman" pitchFamily="34" charset="-122"/>
                 <a:cs typeface="Times New Roman" pitchFamily="34" charset="-120"/>
               </a:rPr>
-              <a:t>Continental crust is thick, light and granitic; oceanic crust is thin, dense and basaltic.</a:t>
+              <a:t>Second-order landforms: </a:t>
+            </a:r>
+            <a:pPr algn="l" indent="0" marL="0">
+              <a:spcAft>
+                <a:spcPts val="800"/>
+              </a:spcAft>
+              <a:buNone/>
+            </a:pPr>
+            <a:r>
+              <a:rPr lang="en-US" sz="4000" dirty="0">
+                <a:solidFill>
+                  <a:srgbClr val="111111"/>
+                </a:solidFill>
+                <a:latin typeface="Times New Roman" pitchFamily="34" charset="0"/>
+                <a:ea typeface="Times New Roman" pitchFamily="34" charset="-122"/>
+                <a:cs typeface="Times New Roman" pitchFamily="34" charset="-120"/>
+              </a:rPr>
+              <a:t>They are the large features found on the continents and ocean floors, such as mountain ranges, plateaux and plains. Examples in Cameroon are the Mandara Mountains, the Adamawa Plateau and the Benue plain.</a:t>
             </a:r>
             <a:endParaRPr lang="en-US" sz="4000" dirty="0"/>
           </a:p>
@@ -20115,7 +20486,7 @@
                 <a:ea typeface="Calibri" pitchFamily="34" charset="-122"/>
                 <a:cs typeface="Calibri" pitchFamily="34" charset="-120"/>
               </a:rPr>
-              <a:t>FORMATIVE EVALUATION</a:t>
+              <a:t>BOARD SUMMARY</a:t>
             </a:r>
             <a:endParaRPr lang="en-US" sz="1400" dirty="0"/>
           </a:p>
@@ -20138,7 +20509,7 @@
         <p:spPr>
           <a:xfrm>
             <a:off x="0" y="658368"/>
-            <a:ext cx="5120640" cy="5833872"/>
+            <a:ext cx="3840480" cy="5833872"/>
           </a:xfrm>
           <a:prstGeom prst="rect">
             <a:avLst/>
@@ -20153,8 +20524,8 @@
         </p:nvSpPr>
         <p:spPr>
           <a:xfrm>
-            <a:off x="5349240" y="1005840"/>
-            <a:ext cx="6522415" cy="731520"/>
+            <a:off x="4069080" y="1005840"/>
+            <a:ext cx="7802575" cy="731520"/>
           </a:xfrm>
           <a:prstGeom prst="rect">
             <a:avLst/>
@@ -20180,7 +20551,7 @@
                 <a:ea typeface="Times New Roman" pitchFamily="34" charset="-122"/>
                 <a:cs typeface="Times New Roman" pitchFamily="34" charset="-120"/>
               </a:rPr>
-              <a:t>Evaluation 2</a:t>
+              <a:t>4. Categories of Landforms</a:t>
             </a:r>
             <a:endParaRPr lang="en-US" sz="3600" dirty="0"/>
           </a:p>
@@ -20194,8 +20565,8 @@
         </p:nvSpPr>
         <p:spPr>
           <a:xfrm>
-            <a:off x="5349240" y="1783080"/>
-            <a:ext cx="6522415" cy="4663440"/>
+            <a:off x="4069080" y="1783080"/>
+            <a:ext cx="7802575" cy="4663440"/>
           </a:xfrm>
           <a:prstGeom prst="rect">
             <a:avLst/>
@@ -20214,7 +20585,7 @@
               <a:buNone/>
             </a:pPr>
             <a:r>
-              <a:rPr lang="en-US" sz="4000" dirty="0">
+              <a:rPr lang="en-US" sz="4000" b="1" dirty="0">
                 <a:solidFill>
                   <a:srgbClr val="111111"/>
                 </a:solidFill>
@@ -20222,7 +20593,24 @@
                 <a:ea typeface="Times New Roman" pitchFamily="34" charset="-122"/>
                 <a:cs typeface="Times New Roman" pitchFamily="34" charset="-120"/>
               </a:rPr>
-              <a:t>How is a sedimentary rock formed?</a:t>
+              <a:t>Third-order (minor) landforms: </a:t>
+            </a:r>
+            <a:pPr algn="l" indent="0" marL="0">
+              <a:spcAft>
+                <a:spcPts val="800"/>
+              </a:spcAft>
+              <a:buNone/>
+            </a:pPr>
+            <a:r>
+              <a:rPr lang="en-US" sz="4000" dirty="0">
+                <a:solidFill>
+                  <a:srgbClr val="111111"/>
+                </a:solidFill>
+                <a:latin typeface="Times New Roman" pitchFamily="34" charset="0"/>
+                <a:ea typeface="Times New Roman" pitchFamily="34" charset="-122"/>
+                <a:cs typeface="Times New Roman" pitchFamily="34" charset="-120"/>
+              </a:rPr>
+              <a:t>They are smaller features carved on the second-order ones, such as valleys, hills, gullies, waterfalls and sand dunes. They are shaped mainly by external forces over short periods.</a:t>
             </a:r>
             <a:endParaRPr lang="en-US" sz="4000" dirty="0"/>
           </a:p>
@@ -20399,7 +20787,7 @@
                 <a:ea typeface="Times New Roman" pitchFamily="34" charset="-122"/>
                 <a:cs typeface="Times New Roman" pitchFamily="34" charset="-120"/>
               </a:rPr>
-              <a:t>Expected Answer</a:t>
+              <a:t>Evaluation 1</a:t>
             </a:r>
             <a:endParaRPr lang="en-US" sz="3600" dirty="0"/>
           </a:p>
@@ -20441,7 +20829,7 @@
                 <a:ea typeface="Times New Roman" pitchFamily="34" charset="-122"/>
                 <a:cs typeface="Times New Roman" pitchFamily="34" charset="-120"/>
               </a:rPr>
-              <a:t>By the compression of layers of sediments such as sand and mud.</a:t>
+              <a:t>Distinguish continental crust from oceanic crust.</a:t>
             </a:r>
             <a:endParaRPr lang="en-US" sz="4000" dirty="0"/>
           </a:p>
@@ -20553,7 +20941,7 @@
                 <a:ea typeface="Calibri" pitchFamily="34" charset="-122"/>
                 <a:cs typeface="Calibri" pitchFamily="34" charset="-120"/>
               </a:rPr>
-              <a:t>REMEDIATION</a:t>
+              <a:t>FORMATIVE EVALUATION</a:t>
             </a:r>
             <a:endParaRPr lang="en-US" sz="1400" dirty="0"/>
           </a:p>
@@ -20576,7 +20964,7 @@
         <p:spPr>
           <a:xfrm>
             <a:off x="0" y="658368"/>
-            <a:ext cx="1463040" cy="5833872"/>
+            <a:ext cx="5120640" cy="5833872"/>
           </a:xfrm>
           <a:prstGeom prst="rect">
             <a:avLst/>
@@ -20591,8 +20979,8 @@
         </p:nvSpPr>
         <p:spPr>
           <a:xfrm>
-            <a:off x="1691640" y="1005840"/>
-            <a:ext cx="10180015" cy="731520"/>
+            <a:off x="5349240" y="1005840"/>
+            <a:ext cx="6522415" cy="731520"/>
           </a:xfrm>
           <a:prstGeom prst="rect">
             <a:avLst/>
@@ -20618,7 +21006,7 @@
                 <a:ea typeface="Times New Roman" pitchFamily="34" charset="-122"/>
                 <a:cs typeface="Times New Roman" pitchFamily="34" charset="-120"/>
               </a:rPr>
-              <a:t>Remediation</a:t>
+              <a:t>Expected Answer</a:t>
             </a:r>
             <a:endParaRPr lang="en-US" sz="3600" dirty="0"/>
           </a:p>
@@ -20632,8 +21020,8 @@
         </p:nvSpPr>
         <p:spPr>
           <a:xfrm>
-            <a:off x="1691640" y="1783080"/>
-            <a:ext cx="10180015" cy="4663440"/>
+            <a:off x="5349240" y="1783080"/>
+            <a:ext cx="6522415" cy="4663440"/>
           </a:xfrm>
           <a:prstGeom prst="rect">
             <a:avLst/>
@@ -20652,7 +21040,7 @@
               <a:buNone/>
             </a:pPr>
             <a:r>
-              <a:rPr lang="en-US" sz="4000" b="1" dirty="0">
+              <a:rPr lang="en-US" sz="4000" dirty="0">
                 <a:solidFill>
                   <a:srgbClr val="111111"/>
                 </a:solidFill>
@@ -20660,73 +21048,7 @@
                 <a:ea typeface="Times New Roman" pitchFamily="34" charset="-122"/>
                 <a:cs typeface="Times New Roman" pitchFamily="34" charset="-120"/>
               </a:rPr>
-              <a:t>Fill in the blanks:</a:t>
-            </a:r>
-            <a:endParaRPr lang="en-US" sz="4000" dirty="0"/>
-          </a:p>
-          <a:p>
-            <a:pPr algn="l" marL="342900" indent="-342900">
-              <a:spcAft>
-                <a:spcPts val="800"/>
-              </a:spcAft>
-              <a:buSzPct val="100000"/>
-              <a:buFont typeface="+mj-lt"/>
-              <a:buAutoNum type="arabicPeriod" startAt="1"/>
-            </a:pPr>
-            <a:r>
-              <a:rPr lang="en-US" sz="4000" dirty="0">
-                <a:solidFill>
-                  <a:srgbClr val="111111"/>
-                </a:solidFill>
-                <a:latin typeface="Times New Roman" pitchFamily="34" charset="0"/>
-                <a:ea typeface="Times New Roman" pitchFamily="34" charset="-122"/>
-                <a:cs typeface="Times New Roman" pitchFamily="34" charset="-120"/>
-              </a:rPr>
-              <a:t>The thickest layer of the Earth is the ______.</a:t>
-            </a:r>
-            <a:endParaRPr lang="en-US" sz="4000" dirty="0"/>
-          </a:p>
-          <a:p>
-            <a:pPr algn="l" marL="342900" indent="-342900">
-              <a:spcAft>
-                <a:spcPts val="800"/>
-              </a:spcAft>
-              <a:buSzPct val="100000"/>
-              <a:buFont typeface="+mj-lt"/>
-              <a:buAutoNum type="arabicPeriod" startAt="1"/>
-            </a:pPr>
-            <a:r>
-              <a:rPr lang="en-US" sz="4000" dirty="0">
-                <a:solidFill>
-                  <a:srgbClr val="111111"/>
-                </a:solidFill>
-                <a:latin typeface="Times New Roman" pitchFamily="34" charset="0"/>
-                <a:ea typeface="Times New Roman" pitchFamily="34" charset="-122"/>
-                <a:cs typeface="Times New Roman" pitchFamily="34" charset="-120"/>
-              </a:rPr>
-              <a:t>Rock formed from cooled magma is ______.</a:t>
-            </a:r>
-            <a:endParaRPr lang="en-US" sz="4000" dirty="0"/>
-          </a:p>
-          <a:p>
-            <a:pPr algn="l" marL="342900" indent="-342900">
-              <a:spcAft>
-                <a:spcPts val="800"/>
-              </a:spcAft>
-              <a:buSzPct val="100000"/>
-              <a:buFont typeface="+mj-lt"/>
-              <a:buAutoNum type="arabicPeriod" startAt="1"/>
-            </a:pPr>
-            <a:r>
-              <a:rPr lang="en-US" sz="4000" dirty="0">
-                <a:solidFill>
-                  <a:srgbClr val="111111"/>
-                </a:solidFill>
-                <a:latin typeface="Times New Roman" pitchFamily="34" charset="0"/>
-                <a:ea typeface="Times New Roman" pitchFamily="34" charset="-122"/>
-                <a:cs typeface="Times New Roman" pitchFamily="34" charset="-120"/>
-              </a:rPr>
-              <a:t>Continents and ocean basins are landforms of the ______ order.</a:t>
+              <a:t>Continental crust is thick, light and granitic; oceanic crust is thin, dense and basaltic.</a:t>
             </a:r>
             <a:endParaRPr lang="en-US" sz="4000" dirty="0"/>
           </a:p>
@@ -20838,7 +21160,7 @@
                 <a:ea typeface="Calibri" pitchFamily="34" charset="-122"/>
                 <a:cs typeface="Calibri" pitchFamily="34" charset="-120"/>
               </a:rPr>
-              <a:t>HOMEWORK</a:t>
+              <a:t>FORMATIVE EVALUATION</a:t>
             </a:r>
             <a:endParaRPr lang="en-US" sz="1400" dirty="0"/>
           </a:p>
@@ -20903,7 +21225,7 @@
                 <a:ea typeface="Times New Roman" pitchFamily="34" charset="-122"/>
                 <a:cs typeface="Times New Roman" pitchFamily="34" charset="-120"/>
               </a:rPr>
-              <a:t>Homework</a:t>
+              <a:t>Evaluation 2</a:t>
             </a:r>
             <a:endParaRPr lang="en-US" sz="3600" dirty="0"/>
           </a:p>
@@ -20945,7 +21267,7 @@
                 <a:ea typeface="Times New Roman" pitchFamily="34" charset="-122"/>
                 <a:cs typeface="Times New Roman" pitchFamily="34" charset="-120"/>
               </a:rPr>
-              <a:t>Name the supercontinent proposed by Wegener.</a:t>
+              <a:t>How is a sedimentary rock formed?</a:t>
             </a:r>
             <a:endParaRPr lang="en-US" sz="4000" dirty="0"/>
           </a:p>
@@ -21057,7 +21379,7 @@
                 <a:ea typeface="Calibri" pitchFamily="34" charset="-122"/>
                 <a:cs typeface="Calibri" pitchFamily="34" charset="-120"/>
               </a:rPr>
-              <a:t>NEXT LESSON</a:t>
+              <a:t>FORMATIVE EVALUATION</a:t>
             </a:r>
             <a:endParaRPr lang="en-US" sz="1400" dirty="0"/>
           </a:p>
@@ -21122,7 +21444,7 @@
                 <a:ea typeface="Times New Roman" pitchFamily="34" charset="-122"/>
                 <a:cs typeface="Times New Roman" pitchFamily="34" charset="-120"/>
               </a:rPr>
-              <a:t>Next Lesson</a:t>
+              <a:t>Expected Answer</a:t>
             </a:r>
             <a:endParaRPr lang="en-US" sz="3600" dirty="0"/>
           </a:p>
@@ -21146,17 +21468,17 @@
           <a:ln/>
         </p:spPr>
         <p:txBody>
-          <a:bodyPr wrap="square" lIns="0" tIns="0" rIns="0" bIns="0" rtlCol="0" anchor="ctr"/>
-          <a:lstStyle/>
-          <a:p>
-            <a:pPr algn="ctr" indent="0" marL="0">
+          <a:bodyPr wrap="square" lIns="0" tIns="0" rIns="0" bIns="0" rtlCol="0" anchor="t"/>
+          <a:lstStyle/>
+          <a:p>
+            <a:pPr algn="l" indent="0" marL="0">
               <a:spcAft>
                 <a:spcPts val="800"/>
               </a:spcAft>
               <a:buNone/>
             </a:pPr>
             <a:r>
-              <a:rPr lang="en-US" sz="4000" b="1" dirty="0">
+              <a:rPr lang="en-US" sz="4000" dirty="0">
                 <a:solidFill>
                   <a:srgbClr val="111111"/>
                 </a:solidFill>
@@ -21164,27 +21486,7 @@
                 <a:ea typeface="Times New Roman" pitchFamily="34" charset="-122"/>
                 <a:cs typeface="Times New Roman" pitchFamily="34" charset="-120"/>
               </a:rPr>
-              <a:t>Our next lesson will be on:</a:t>
-            </a:r>
-            <a:endParaRPr lang="en-US" sz="4000" dirty="0"/>
-          </a:p>
-          <a:p>
-            <a:pPr algn="ctr" indent="0" marL="0">
-              <a:spcAft>
-                <a:spcPts val="800"/>
-              </a:spcAft>
-              <a:buNone/>
-            </a:pPr>
-            <a:r>
-              <a:rPr lang="en-US" sz="4000" b="1" dirty="0">
-                <a:solidFill>
-                  <a:srgbClr val="990011"/>
-                </a:solidFill>
-                <a:latin typeface="Times New Roman" pitchFamily="34" charset="0"/>
-                <a:ea typeface="Times New Roman" pitchFamily="34" charset="-122"/>
-                <a:cs typeface="Times New Roman" pitchFamily="34" charset="-120"/>
-              </a:rPr>
-              <a:t>Further Study 1: Early Theories of Crustal Movements</a:t>
+              <a:t>By the compression of layers of sediments such as sand and mud.</a:t>
             </a:r>
             <a:endParaRPr lang="en-US" sz="4000" dirty="0"/>
           </a:p>
@@ -21296,22 +21598,46 @@
                 <a:ea typeface="Calibri" pitchFamily="34" charset="-122"/>
                 <a:cs typeface="Calibri" pitchFamily="34" charset="-120"/>
               </a:rPr>
-              <a:t>BILINGUAL GAME</a:t>
+              <a:t>REMEDIATION</a:t>
             </a:r>
             <a:endParaRPr lang="en-US" sz="1400" dirty="0"/>
           </a:p>
         </p:txBody>
       </p:sp>
-      <p:sp>
-        <p:nvSpPr>
-          <p:cNvPr id="3" name="Text 1"/>
+      <p:pic>
+        <p:nvPicPr>
+          <p:cNvPr id="3" name="Image 0" descr="/home/claude/f4/img/minesec_sheet.png">    </p:cNvPr>
+          <p:cNvPicPr>
+            <a:picLocks noChangeAspect="1"/>
+          </p:cNvPicPr>
+          <p:nvPr/>
+        </p:nvPicPr>
+        <p:blipFill>
+          <a:blip r:embed="rId1"/>
+          <a:stretch>
+            <a:fillRect/>
+          </a:stretch>
+        </p:blipFill>
+        <p:spPr>
+          <a:xfrm>
+            <a:off x="0" y="658368"/>
+            <a:ext cx="1463040" cy="5833872"/>
+          </a:xfrm>
+          <a:prstGeom prst="rect">
+            <a:avLst/>
+          </a:prstGeom>
+        </p:spPr>
+      </p:pic>
+      <p:sp>
+        <p:nvSpPr>
+          <p:cNvPr id="4" name="Text 1"/>
           <p:cNvSpPr/>
           <p:nvPr/>
         </p:nvSpPr>
         <p:spPr>
           <a:xfrm>
-            <a:off x="457200" y="1005840"/>
-            <a:ext cx="11277295" cy="731520"/>
+            <a:off x="1691640" y="1005840"/>
+            <a:ext cx="10180015" cy="731520"/>
           </a:xfrm>
           <a:prstGeom prst="rect">
             <a:avLst/>
@@ -21320,7 +21646,9 @@
           <a:ln/>
         </p:spPr>
         <p:txBody>
-          <a:bodyPr wrap="square" lIns="0" tIns="0" rIns="0" bIns="0" rtlCol="0" anchor="ctr"/>
+          <a:bodyPr wrap="square" lIns="0" tIns="0" rIns="0" bIns="0" rtlCol="0" anchor="ctr">
+            <a:normAutofit/>
+          </a:bodyPr>
           <a:lstStyle/>
           <a:p>
             <a:pPr algn="ctr" indent="0" marL="0">
@@ -21335,6 +21663,1054 @@
                 <a:ea typeface="Times New Roman" pitchFamily="34" charset="-122"/>
                 <a:cs typeface="Times New Roman" pitchFamily="34" charset="-120"/>
               </a:rPr>
+              <a:t>Remediation</a:t>
+            </a:r>
+            <a:endParaRPr lang="en-US" sz="3600" dirty="0"/>
+          </a:p>
+        </p:txBody>
+      </p:sp>
+      <p:sp>
+        <p:nvSpPr>
+          <p:cNvPr id="5" name="Text 2"/>
+          <p:cNvSpPr/>
+          <p:nvPr/>
+        </p:nvSpPr>
+        <p:spPr>
+          <a:xfrm>
+            <a:off x="1691640" y="1783080"/>
+            <a:ext cx="10180015" cy="4663440"/>
+          </a:xfrm>
+          <a:prstGeom prst="rect">
+            <a:avLst/>
+          </a:prstGeom>
+          <a:noFill/>
+          <a:ln/>
+        </p:spPr>
+        <p:txBody>
+          <a:bodyPr wrap="square" lIns="0" tIns="0" rIns="0" bIns="0" rtlCol="0" anchor="t"/>
+          <a:lstStyle/>
+          <a:p>
+            <a:pPr algn="l" indent="0" marL="0">
+              <a:spcAft>
+                <a:spcPts val="800"/>
+              </a:spcAft>
+              <a:buNone/>
+            </a:pPr>
+            <a:r>
+              <a:rPr lang="en-US" sz="4000" b="1" dirty="0">
+                <a:solidFill>
+                  <a:srgbClr val="111111"/>
+                </a:solidFill>
+                <a:latin typeface="Times New Roman" pitchFamily="34" charset="0"/>
+                <a:ea typeface="Times New Roman" pitchFamily="34" charset="-122"/>
+                <a:cs typeface="Times New Roman" pitchFamily="34" charset="-120"/>
+              </a:rPr>
+              <a:t>Fill in the blanks:</a:t>
+            </a:r>
+            <a:endParaRPr lang="en-US" sz="4000" dirty="0"/>
+          </a:p>
+          <a:p>
+            <a:pPr algn="l" marL="342900" indent="-342900">
+              <a:spcAft>
+                <a:spcPts val="800"/>
+              </a:spcAft>
+              <a:buSzPct val="100000"/>
+              <a:buFont typeface="+mj-lt"/>
+              <a:buAutoNum type="arabicPeriod" startAt="1"/>
+            </a:pPr>
+            <a:r>
+              <a:rPr lang="en-US" sz="4000" dirty="0">
+                <a:solidFill>
+                  <a:srgbClr val="111111"/>
+                </a:solidFill>
+                <a:latin typeface="Times New Roman" pitchFamily="34" charset="0"/>
+                <a:ea typeface="Times New Roman" pitchFamily="34" charset="-122"/>
+                <a:cs typeface="Times New Roman" pitchFamily="34" charset="-120"/>
+              </a:rPr>
+              <a:t>The thickest layer of the Earth is the ______.</a:t>
+            </a:r>
+            <a:endParaRPr lang="en-US" sz="4000" dirty="0"/>
+          </a:p>
+          <a:p>
+            <a:pPr algn="l" marL="342900" indent="-342900">
+              <a:spcAft>
+                <a:spcPts val="800"/>
+              </a:spcAft>
+              <a:buSzPct val="100000"/>
+              <a:buFont typeface="+mj-lt"/>
+              <a:buAutoNum type="arabicPeriod" startAt="1"/>
+            </a:pPr>
+            <a:r>
+              <a:rPr lang="en-US" sz="4000" dirty="0">
+                <a:solidFill>
+                  <a:srgbClr val="111111"/>
+                </a:solidFill>
+                <a:latin typeface="Times New Roman" pitchFamily="34" charset="0"/>
+                <a:ea typeface="Times New Roman" pitchFamily="34" charset="-122"/>
+                <a:cs typeface="Times New Roman" pitchFamily="34" charset="-120"/>
+              </a:rPr>
+              <a:t>Rock formed from cooled magma is ______.</a:t>
+            </a:r>
+            <a:endParaRPr lang="en-US" sz="4000" dirty="0"/>
+          </a:p>
+          <a:p>
+            <a:pPr algn="l" marL="342900" indent="-342900">
+              <a:spcAft>
+                <a:spcPts val="800"/>
+              </a:spcAft>
+              <a:buSzPct val="100000"/>
+              <a:buFont typeface="+mj-lt"/>
+              <a:buAutoNum type="arabicPeriod" startAt="1"/>
+            </a:pPr>
+            <a:r>
+              <a:rPr lang="en-US" sz="4000" dirty="0">
+                <a:solidFill>
+                  <a:srgbClr val="111111"/>
+                </a:solidFill>
+                <a:latin typeface="Times New Roman" pitchFamily="34" charset="0"/>
+                <a:ea typeface="Times New Roman" pitchFamily="34" charset="-122"/>
+                <a:cs typeface="Times New Roman" pitchFamily="34" charset="-120"/>
+              </a:rPr>
+              <a:t>Continents and ocean basins are landforms of the ______ order.</a:t>
+            </a:r>
+            <a:endParaRPr lang="en-US" sz="4000" dirty="0"/>
+          </a:p>
+        </p:txBody>
+      </p:sp>
+      <p:sp>
+        <p:nvSpPr>
+          <p:cNvPr id="25" name="Slide Number Placeholder 0"/>
+          <p:cNvSpPr>
+            <a:spLocks noGrp="1"/>
+          </p:cNvSpPr>
+          <p:nvPr>
+            <p:ph type="sldNum" sz="quarter" idx="4294967295"/>
+          </p:nvPr>
+        </p:nvSpPr>
+        <p:spPr>
+          <a:xfrm>
+            <a:off x="27432" y="91440"/>
+            <a:ext cx="585216" cy="475488"/>
+          </a:xfrm>
+          <a:prstGeom prst="rect">
+            <a:avLst/>
+          </a:prstGeom>
+          <a:extLst>
+            <a:ext uri="{C572A759-6A51-4108-AA02-DFA0A04FC94B}">
+              <ma14:wrappingTextBoxFlag xmlns:ma14="http://schemas.microsoft.com/office/mac/drawingml/2011/main" val="0"/>
+            </a:ext>
+          </a:extLst>
+        </p:spPr>
+        <p:txBody>
+          <a:bodyPr/>
+          <a:lstStyle>
+            <a:lvl1pPr>
+              <a:defRPr sz="2000">
+                <a:solidFill>
+                  <a:srgbClr val="FFFFFF"/>
+                </a:solidFill>
+                <a:latin typeface="Calibri"/>
+                <a:ea typeface="Calibri"/>
+                <a:cs typeface="Calibri"/>
+              </a:defRPr>
+            </a:lvl1pPr>
+          </a:lstStyle>
+          <a:p>
+            <a:pPr algn="ctr"/>
+            <a:fld id="{F7021451-1387-4CA6-816F-3879F97B5CBC}" type="slidenum">
+              <a:rPr b="1" lang="en-US"/>
+              <a:t>59</a:t>
+            </a:fld>
+            <a:endParaRPr lang="en-US"/>
+          </a:p>
+        </p:txBody>
+      </p:sp>
+    </p:spTree>
+  </p:cSld>
+  <p:clrMapOvr>
+    <a:masterClrMapping/>
+  </p:clrMapOvr>
+</p:sld>
+</file>
+
+<file path=ppt/slides/slide6.xml><?xml version="1.0" encoding="utf-8"?>
+<p:sld xmlns:a="http://schemas.openxmlformats.org/drawingml/2006/main" xmlns:r="http://schemas.openxmlformats.org/officeDocument/2006/relationships" xmlns:p="http://schemas.openxmlformats.org/presentationml/2006/main">
+  <p:cSld name="Slide 6">
+    <p:spTree>
+      <p:nvGrpSpPr>
+        <p:cNvPr id="1" name=""/>
+        <p:cNvGrpSpPr/>
+        <p:nvPr/>
+      </p:nvGrpSpPr>
+      <p:grpSpPr>
+        <a:xfrm>
+          <a:off x="0" y="0"/>
+          <a:ext cx="0" cy="0"/>
+          <a:chOff x="0" y="0"/>
+          <a:chExt cx="0" cy="0"/>
+        </a:xfrm>
+      </p:grpSpPr>
+      <p:sp>
+        <p:nvSpPr>
+          <p:cNvPr id="2" name="Text 0"/>
+          <p:cNvSpPr/>
+          <p:nvPr/>
+        </p:nvSpPr>
+        <p:spPr>
+          <a:xfrm>
+            <a:off x="457200" y="713232"/>
+            <a:ext cx="11368735" cy="274320"/>
+          </a:xfrm>
+          <a:prstGeom prst="rect">
+            <a:avLst/>
+          </a:prstGeom>
+          <a:noFill/>
+          <a:ln/>
+        </p:spPr>
+        <p:txBody>
+          <a:bodyPr wrap="square" lIns="0" tIns="0" rIns="0" bIns="0" rtlCol="0" anchor="ctr"/>
+          <a:lstStyle/>
+          <a:p>
+            <a:pPr algn="r" indent="0" marL="0">
+              <a:buNone/>
+            </a:pPr>
+            <a:r>
+              <a:rPr lang="en-US" sz="1400" b="1" dirty="0">
+                <a:solidFill>
+                  <a:srgbClr val="1C3F6E"/>
+                </a:solidFill>
+                <a:latin typeface="Calibri" pitchFamily="34" charset="0"/>
+                <a:ea typeface="Calibri" pitchFamily="34" charset="-122"/>
+                <a:cs typeface="Calibri" pitchFamily="34" charset="-120"/>
+              </a:rPr>
+              <a:t>LESSON PLAN</a:t>
+            </a:r>
+            <a:endParaRPr lang="en-US" sz="1400" dirty="0"/>
+          </a:p>
+        </p:txBody>
+      </p:sp>
+      <p:pic>
+        <p:nvPicPr>
+          <p:cNvPr id="3" name="Image 0" descr="/home/claude/f4/img/minesec_sheet.png">    </p:cNvPr>
+          <p:cNvPicPr>
+            <a:picLocks noChangeAspect="1"/>
+          </p:cNvPicPr>
+          <p:nvPr/>
+        </p:nvPicPr>
+        <p:blipFill>
+          <a:blip r:embed="rId1"/>
+          <a:stretch>
+            <a:fillRect/>
+          </a:stretch>
+        </p:blipFill>
+        <p:spPr>
+          <a:xfrm>
+            <a:off x="0" y="658368"/>
+            <a:ext cx="2468880" cy="5833872"/>
+          </a:xfrm>
+          <a:prstGeom prst="rect">
+            <a:avLst/>
+          </a:prstGeom>
+        </p:spPr>
+      </p:pic>
+      <p:sp>
+        <p:nvSpPr>
+          <p:cNvPr id="4" name="Text 1"/>
+          <p:cNvSpPr/>
+          <p:nvPr/>
+        </p:nvSpPr>
+        <p:spPr>
+          <a:xfrm>
+            <a:off x="2697480" y="1005840"/>
+            <a:ext cx="9174175" cy="731520"/>
+          </a:xfrm>
+          <a:prstGeom prst="rect">
+            <a:avLst/>
+          </a:prstGeom>
+          <a:noFill/>
+          <a:ln/>
+        </p:spPr>
+        <p:txBody>
+          <a:bodyPr wrap="square" lIns="0" tIns="0" rIns="0" bIns="0" rtlCol="0" anchor="ctr">
+            <a:normAutofit/>
+          </a:bodyPr>
+          <a:lstStyle/>
+          <a:p>
+            <a:pPr algn="ctr" indent="0" marL="0">
+              <a:buNone/>
+            </a:pPr>
+            <a:r>
+              <a:rPr lang="en-US" sz="3600" b="1" dirty="0">
+                <a:solidFill>
+                  <a:srgbClr val="990011"/>
+                </a:solidFill>
+                <a:latin typeface="Times New Roman" pitchFamily="34" charset="0"/>
+                <a:ea typeface="Times New Roman" pitchFamily="34" charset="-122"/>
+                <a:cs typeface="Times New Roman" pitchFamily="34" charset="-120"/>
+              </a:rPr>
+              <a:t>Lesson Plan</a:t>
+            </a:r>
+            <a:endParaRPr lang="en-US" sz="3600" dirty="0"/>
+          </a:p>
+        </p:txBody>
+      </p:sp>
+      <p:sp>
+        <p:nvSpPr>
+          <p:cNvPr id="5" name="Text 2"/>
+          <p:cNvSpPr/>
+          <p:nvPr/>
+        </p:nvSpPr>
+        <p:spPr>
+          <a:xfrm>
+            <a:off x="2697480" y="1783080"/>
+            <a:ext cx="9174175" cy="4663440"/>
+          </a:xfrm>
+          <a:prstGeom prst="rect">
+            <a:avLst/>
+          </a:prstGeom>
+          <a:noFill/>
+          <a:ln/>
+        </p:spPr>
+        <p:txBody>
+          <a:bodyPr wrap="square" lIns="0" tIns="0" rIns="0" bIns="0" rtlCol="0" anchor="t"/>
+          <a:lstStyle/>
+          <a:p>
+            <a:pPr algn="l" marL="342900" indent="-342900">
+              <a:spcAft>
+                <a:spcPts val="800"/>
+              </a:spcAft>
+              <a:buSzPct val="100000"/>
+              <a:buFont typeface="+mj-lt"/>
+              <a:buAutoNum type="arabicPeriod" startAt="1"/>
+            </a:pPr>
+            <a:r>
+              <a:rPr lang="en-US" sz="4000" dirty="0">
+                <a:solidFill>
+                  <a:srgbClr val="111111"/>
+                </a:solidFill>
+                <a:latin typeface="Times New Roman" pitchFamily="34" charset="0"/>
+                <a:ea typeface="Times New Roman" pitchFamily="34" charset="-122"/>
+                <a:cs typeface="Times New Roman" pitchFamily="34" charset="-120"/>
+              </a:rPr>
+              <a:t>Correction of the homework</a:t>
+            </a:r>
+            <a:endParaRPr lang="en-US" sz="4000" dirty="0"/>
+          </a:p>
+          <a:p>
+            <a:pPr algn="l" marL="342900" indent="-342900">
+              <a:spcAft>
+                <a:spcPts val="800"/>
+              </a:spcAft>
+              <a:buSzPct val="100000"/>
+              <a:buFont typeface="+mj-lt"/>
+              <a:buAutoNum type="arabicPeriod" startAt="1"/>
+            </a:pPr>
+            <a:r>
+              <a:rPr lang="en-US" sz="4000" dirty="0">
+                <a:solidFill>
+                  <a:srgbClr val="111111"/>
+                </a:solidFill>
+                <a:latin typeface="Times New Roman" pitchFamily="34" charset="0"/>
+                <a:ea typeface="Times New Roman" pitchFamily="34" charset="-122"/>
+                <a:cs typeface="Times New Roman" pitchFamily="34" charset="-120"/>
+              </a:rPr>
+              <a:t>Objectives and recall</a:t>
+            </a:r>
+            <a:endParaRPr lang="en-US" sz="4000" dirty="0"/>
+          </a:p>
+          <a:p>
+            <a:pPr algn="l" marL="342900" indent="-342900">
+              <a:spcAft>
+                <a:spcPts val="800"/>
+              </a:spcAft>
+              <a:buSzPct val="100000"/>
+              <a:buFont typeface="+mj-lt"/>
+              <a:buAutoNum type="arabicPeriod" startAt="1"/>
+            </a:pPr>
+            <a:r>
+              <a:rPr lang="en-US" sz="4000" dirty="0">
+                <a:solidFill>
+                  <a:srgbClr val="111111"/>
+                </a:solidFill>
+                <a:latin typeface="Times New Roman" pitchFamily="34" charset="0"/>
+                <a:ea typeface="Times New Roman" pitchFamily="34" charset="-122"/>
+                <a:cs typeface="Times New Roman" pitchFamily="34" charset="-120"/>
+              </a:rPr>
+              <a:t>Real-life situation and action to take</a:t>
+            </a:r>
+            <a:endParaRPr lang="en-US" sz="4000" dirty="0"/>
+          </a:p>
+          <a:p>
+            <a:pPr algn="l" marL="342900" indent="-342900">
+              <a:spcAft>
+                <a:spcPts val="800"/>
+              </a:spcAft>
+              <a:buSzPct val="100000"/>
+              <a:buFont typeface="+mj-lt"/>
+              <a:buAutoNum type="arabicPeriod" startAt="1"/>
+            </a:pPr>
+            <a:r>
+              <a:rPr lang="en-US" sz="4000" dirty="0">
+                <a:solidFill>
+                  <a:srgbClr val="111111"/>
+                </a:solidFill>
+                <a:latin typeface="Times New Roman" pitchFamily="34" charset="0"/>
+                <a:ea typeface="Times New Roman" pitchFamily="34" charset="-122"/>
+                <a:cs typeface="Times New Roman" pitchFamily="34" charset="-120"/>
+              </a:rPr>
+              <a:t>Learning activities</a:t>
+            </a:r>
+            <a:endParaRPr lang="en-US" sz="4000" dirty="0"/>
+          </a:p>
+          <a:p>
+            <a:pPr algn="l" marL="342900" indent="-342900">
+              <a:spcAft>
+                <a:spcPts val="800"/>
+              </a:spcAft>
+              <a:buSzPct val="100000"/>
+              <a:buFont typeface="+mj-lt"/>
+              <a:buAutoNum type="arabicPeriod" startAt="1"/>
+            </a:pPr>
+            <a:r>
+              <a:rPr lang="en-US" sz="4000" dirty="0">
+                <a:solidFill>
+                  <a:srgbClr val="111111"/>
+                </a:solidFill>
+                <a:latin typeface="Times New Roman" pitchFamily="34" charset="0"/>
+                <a:ea typeface="Times New Roman" pitchFamily="34" charset="-122"/>
+                <a:cs typeface="Times New Roman" pitchFamily="34" charset="-120"/>
+              </a:rPr>
+              <a:t>Board summary</a:t>
+            </a:r>
+            <a:endParaRPr lang="en-US" sz="4000" dirty="0"/>
+          </a:p>
+          <a:p>
+            <a:pPr algn="l" marL="342900" indent="-342900">
+              <a:spcAft>
+                <a:spcPts val="800"/>
+              </a:spcAft>
+              <a:buSzPct val="100000"/>
+              <a:buFont typeface="+mj-lt"/>
+              <a:buAutoNum type="arabicPeriod" startAt="1"/>
+            </a:pPr>
+            <a:r>
+              <a:rPr lang="en-US" sz="4000" dirty="0">
+                <a:solidFill>
+                  <a:srgbClr val="111111"/>
+                </a:solidFill>
+                <a:latin typeface="Times New Roman" pitchFamily="34" charset="0"/>
+                <a:ea typeface="Times New Roman" pitchFamily="34" charset="-122"/>
+                <a:cs typeface="Times New Roman" pitchFamily="34" charset="-120"/>
+              </a:rPr>
+              <a:t>Evaluation, remediation and homework</a:t>
+            </a:r>
+            <a:endParaRPr lang="en-US" sz="4000" dirty="0"/>
+          </a:p>
+        </p:txBody>
+      </p:sp>
+      <p:sp>
+        <p:nvSpPr>
+          <p:cNvPr id="25" name="Slide Number Placeholder 0"/>
+          <p:cNvSpPr>
+            <a:spLocks noGrp="1"/>
+          </p:cNvSpPr>
+          <p:nvPr>
+            <p:ph type="sldNum" sz="quarter" idx="4294967295"/>
+          </p:nvPr>
+        </p:nvSpPr>
+        <p:spPr>
+          <a:xfrm>
+            <a:off x="27432" y="91440"/>
+            <a:ext cx="585216" cy="475488"/>
+          </a:xfrm>
+          <a:prstGeom prst="rect">
+            <a:avLst/>
+          </a:prstGeom>
+          <a:extLst>
+            <a:ext uri="{C572A759-6A51-4108-AA02-DFA0A04FC94B}">
+              <ma14:wrappingTextBoxFlag xmlns:ma14="http://schemas.microsoft.com/office/mac/drawingml/2011/main" val="0"/>
+            </a:ext>
+          </a:extLst>
+        </p:spPr>
+        <p:txBody>
+          <a:bodyPr/>
+          <a:lstStyle>
+            <a:lvl1pPr>
+              <a:defRPr sz="2000">
+                <a:solidFill>
+                  <a:srgbClr val="FFFFFF"/>
+                </a:solidFill>
+                <a:latin typeface="Calibri"/>
+                <a:ea typeface="Calibri"/>
+                <a:cs typeface="Calibri"/>
+              </a:defRPr>
+            </a:lvl1pPr>
+          </a:lstStyle>
+          <a:p>
+            <a:pPr algn="ctr"/>
+            <a:fld id="{F7021451-1387-4CA6-816F-3879F97B5CBC}" type="slidenum">
+              <a:rPr b="1" lang="en-US"/>
+              <a:t>6</a:t>
+            </a:fld>
+            <a:endParaRPr lang="en-US"/>
+          </a:p>
+        </p:txBody>
+      </p:sp>
+    </p:spTree>
+  </p:cSld>
+  <p:clrMapOvr>
+    <a:masterClrMapping/>
+  </p:clrMapOvr>
+</p:sld>
+</file>
+
+<file path=ppt/slides/slide60.xml><?xml version="1.0" encoding="utf-8"?>
+<p:sld xmlns:a="http://schemas.openxmlformats.org/drawingml/2006/main" xmlns:r="http://schemas.openxmlformats.org/officeDocument/2006/relationships" xmlns:p="http://schemas.openxmlformats.org/presentationml/2006/main">
+  <p:cSld name="Slide 60">
+    <p:spTree>
+      <p:nvGrpSpPr>
+        <p:cNvPr id="1" name=""/>
+        <p:cNvGrpSpPr/>
+        <p:nvPr/>
+      </p:nvGrpSpPr>
+      <p:grpSpPr>
+        <a:xfrm>
+          <a:off x="0" y="0"/>
+          <a:ext cx="0" cy="0"/>
+          <a:chOff x="0" y="0"/>
+          <a:chExt cx="0" cy="0"/>
+        </a:xfrm>
+      </p:grpSpPr>
+      <p:sp>
+        <p:nvSpPr>
+          <p:cNvPr id="2" name="Text 0"/>
+          <p:cNvSpPr/>
+          <p:nvPr/>
+        </p:nvSpPr>
+        <p:spPr>
+          <a:xfrm>
+            <a:off x="457200" y="713232"/>
+            <a:ext cx="11368735" cy="274320"/>
+          </a:xfrm>
+          <a:prstGeom prst="rect">
+            <a:avLst/>
+          </a:prstGeom>
+          <a:noFill/>
+          <a:ln/>
+        </p:spPr>
+        <p:txBody>
+          <a:bodyPr wrap="square" lIns="0" tIns="0" rIns="0" bIns="0" rtlCol="0" anchor="ctr"/>
+          <a:lstStyle/>
+          <a:p>
+            <a:pPr algn="r" indent="0" marL="0">
+              <a:buNone/>
+            </a:pPr>
+            <a:r>
+              <a:rPr lang="en-US" sz="1400" b="1" dirty="0">
+                <a:solidFill>
+                  <a:srgbClr val="1C3F6E"/>
+                </a:solidFill>
+                <a:latin typeface="Calibri" pitchFamily="34" charset="0"/>
+                <a:ea typeface="Calibri" pitchFamily="34" charset="-122"/>
+                <a:cs typeface="Calibri" pitchFamily="34" charset="-120"/>
+              </a:rPr>
+              <a:t>HOMEWORK</a:t>
+            </a:r>
+            <a:endParaRPr lang="en-US" sz="1400" dirty="0"/>
+          </a:p>
+        </p:txBody>
+      </p:sp>
+      <p:pic>
+        <p:nvPicPr>
+          <p:cNvPr id="3" name="Image 0" descr="/home/claude/f4/img/minesec_sheet.png">    </p:cNvPr>
+          <p:cNvPicPr>
+            <a:picLocks noChangeAspect="1"/>
+          </p:cNvPicPr>
+          <p:nvPr/>
+        </p:nvPicPr>
+        <p:blipFill>
+          <a:blip r:embed="rId1"/>
+          <a:stretch>
+            <a:fillRect/>
+          </a:stretch>
+        </p:blipFill>
+        <p:spPr>
+          <a:xfrm>
+            <a:off x="0" y="658368"/>
+            <a:ext cx="5120640" cy="5833872"/>
+          </a:xfrm>
+          <a:prstGeom prst="rect">
+            <a:avLst/>
+          </a:prstGeom>
+        </p:spPr>
+      </p:pic>
+      <p:sp>
+        <p:nvSpPr>
+          <p:cNvPr id="4" name="Text 1"/>
+          <p:cNvSpPr/>
+          <p:nvPr/>
+        </p:nvSpPr>
+        <p:spPr>
+          <a:xfrm>
+            <a:off x="5349240" y="1005840"/>
+            <a:ext cx="6522415" cy="731520"/>
+          </a:xfrm>
+          <a:prstGeom prst="rect">
+            <a:avLst/>
+          </a:prstGeom>
+          <a:noFill/>
+          <a:ln/>
+        </p:spPr>
+        <p:txBody>
+          <a:bodyPr wrap="square" lIns="0" tIns="0" rIns="0" bIns="0" rtlCol="0" anchor="ctr">
+            <a:normAutofit/>
+          </a:bodyPr>
+          <a:lstStyle/>
+          <a:p>
+            <a:pPr algn="ctr" indent="0" marL="0">
+              <a:buNone/>
+            </a:pPr>
+            <a:r>
+              <a:rPr lang="en-US" sz="3600" b="1" dirty="0">
+                <a:solidFill>
+                  <a:srgbClr val="990011"/>
+                </a:solidFill>
+                <a:latin typeface="Times New Roman" pitchFamily="34" charset="0"/>
+                <a:ea typeface="Times New Roman" pitchFamily="34" charset="-122"/>
+                <a:cs typeface="Times New Roman" pitchFamily="34" charset="-120"/>
+              </a:rPr>
+              <a:t>Homework</a:t>
+            </a:r>
+            <a:endParaRPr lang="en-US" sz="3600" dirty="0"/>
+          </a:p>
+        </p:txBody>
+      </p:sp>
+      <p:sp>
+        <p:nvSpPr>
+          <p:cNvPr id="5" name="Text 2"/>
+          <p:cNvSpPr/>
+          <p:nvPr/>
+        </p:nvSpPr>
+        <p:spPr>
+          <a:xfrm>
+            <a:off x="5349240" y="1783080"/>
+            <a:ext cx="6522415" cy="4663440"/>
+          </a:xfrm>
+          <a:prstGeom prst="rect">
+            <a:avLst/>
+          </a:prstGeom>
+          <a:noFill/>
+          <a:ln/>
+        </p:spPr>
+        <p:txBody>
+          <a:bodyPr wrap="square" lIns="0" tIns="0" rIns="0" bIns="0" rtlCol="0" anchor="t"/>
+          <a:lstStyle/>
+          <a:p>
+            <a:pPr algn="l" indent="0" marL="0">
+              <a:spcAft>
+                <a:spcPts val="800"/>
+              </a:spcAft>
+              <a:buNone/>
+            </a:pPr>
+            <a:r>
+              <a:rPr lang="en-US" sz="4000" dirty="0">
+                <a:solidFill>
+                  <a:srgbClr val="111111"/>
+                </a:solidFill>
+                <a:latin typeface="Times New Roman" pitchFamily="34" charset="0"/>
+                <a:ea typeface="Times New Roman" pitchFamily="34" charset="-122"/>
+                <a:cs typeface="Times New Roman" pitchFamily="34" charset="-120"/>
+              </a:rPr>
+              <a:t>Name the supercontinent proposed by Wegener.</a:t>
+            </a:r>
+            <a:endParaRPr lang="en-US" sz="4000" dirty="0"/>
+          </a:p>
+        </p:txBody>
+      </p:sp>
+      <p:sp>
+        <p:nvSpPr>
+          <p:cNvPr id="25" name="Slide Number Placeholder 0"/>
+          <p:cNvSpPr>
+            <a:spLocks noGrp="1"/>
+          </p:cNvSpPr>
+          <p:nvPr>
+            <p:ph type="sldNum" sz="quarter" idx="4294967295"/>
+          </p:nvPr>
+        </p:nvSpPr>
+        <p:spPr>
+          <a:xfrm>
+            <a:off x="27432" y="91440"/>
+            <a:ext cx="585216" cy="475488"/>
+          </a:xfrm>
+          <a:prstGeom prst="rect">
+            <a:avLst/>
+          </a:prstGeom>
+          <a:extLst>
+            <a:ext uri="{C572A759-6A51-4108-AA02-DFA0A04FC94B}">
+              <ma14:wrappingTextBoxFlag xmlns:ma14="http://schemas.microsoft.com/office/mac/drawingml/2011/main" val="0"/>
+            </a:ext>
+          </a:extLst>
+        </p:spPr>
+        <p:txBody>
+          <a:bodyPr/>
+          <a:lstStyle>
+            <a:lvl1pPr>
+              <a:defRPr sz="2000">
+                <a:solidFill>
+                  <a:srgbClr val="FFFFFF"/>
+                </a:solidFill>
+                <a:latin typeface="Calibri"/>
+                <a:ea typeface="Calibri"/>
+                <a:cs typeface="Calibri"/>
+              </a:defRPr>
+            </a:lvl1pPr>
+          </a:lstStyle>
+          <a:p>
+            <a:pPr algn="ctr"/>
+            <a:fld id="{F7021451-1387-4CA6-816F-3879F97B5CBC}" type="slidenum">
+              <a:rPr b="1" lang="en-US"/>
+              <a:t>60</a:t>
+            </a:fld>
+            <a:endParaRPr lang="en-US"/>
+          </a:p>
+        </p:txBody>
+      </p:sp>
+    </p:spTree>
+  </p:cSld>
+  <p:clrMapOvr>
+    <a:masterClrMapping/>
+  </p:clrMapOvr>
+</p:sld>
+</file>
+
+<file path=ppt/slides/slide61.xml><?xml version="1.0" encoding="utf-8"?>
+<p:sld xmlns:a="http://schemas.openxmlformats.org/drawingml/2006/main" xmlns:r="http://schemas.openxmlformats.org/officeDocument/2006/relationships" xmlns:p="http://schemas.openxmlformats.org/presentationml/2006/main">
+  <p:cSld name="Slide 61">
+    <p:spTree>
+      <p:nvGrpSpPr>
+        <p:cNvPr id="1" name=""/>
+        <p:cNvGrpSpPr/>
+        <p:nvPr/>
+      </p:nvGrpSpPr>
+      <p:grpSpPr>
+        <a:xfrm>
+          <a:off x="0" y="0"/>
+          <a:ext cx="0" cy="0"/>
+          <a:chOff x="0" y="0"/>
+          <a:chExt cx="0" cy="0"/>
+        </a:xfrm>
+      </p:grpSpPr>
+      <p:sp>
+        <p:nvSpPr>
+          <p:cNvPr id="2" name="Text 0"/>
+          <p:cNvSpPr/>
+          <p:nvPr/>
+        </p:nvSpPr>
+        <p:spPr>
+          <a:xfrm>
+            <a:off x="457200" y="713232"/>
+            <a:ext cx="11368735" cy="274320"/>
+          </a:xfrm>
+          <a:prstGeom prst="rect">
+            <a:avLst/>
+          </a:prstGeom>
+          <a:noFill/>
+          <a:ln/>
+        </p:spPr>
+        <p:txBody>
+          <a:bodyPr wrap="square" lIns="0" tIns="0" rIns="0" bIns="0" rtlCol="0" anchor="ctr"/>
+          <a:lstStyle/>
+          <a:p>
+            <a:pPr algn="r" indent="0" marL="0">
+              <a:buNone/>
+            </a:pPr>
+            <a:r>
+              <a:rPr lang="en-US" sz="1400" b="1" dirty="0">
+                <a:solidFill>
+                  <a:srgbClr val="1C3F6E"/>
+                </a:solidFill>
+                <a:latin typeface="Calibri" pitchFamily="34" charset="0"/>
+                <a:ea typeface="Calibri" pitchFamily="34" charset="-122"/>
+                <a:cs typeface="Calibri" pitchFamily="34" charset="-120"/>
+              </a:rPr>
+              <a:t>NEXT LESSON</a:t>
+            </a:r>
+            <a:endParaRPr lang="en-US" sz="1400" dirty="0"/>
+          </a:p>
+        </p:txBody>
+      </p:sp>
+      <p:pic>
+        <p:nvPicPr>
+          <p:cNvPr id="3" name="Image 0" descr="/home/claude/f4/img/minesec_sheet.png">    </p:cNvPr>
+          <p:cNvPicPr>
+            <a:picLocks noChangeAspect="1"/>
+          </p:cNvPicPr>
+          <p:nvPr/>
+        </p:nvPicPr>
+        <p:blipFill>
+          <a:blip r:embed="rId1"/>
+          <a:stretch>
+            <a:fillRect/>
+          </a:stretch>
+        </p:blipFill>
+        <p:spPr>
+          <a:xfrm>
+            <a:off x="0" y="658368"/>
+            <a:ext cx="5120640" cy="5833872"/>
+          </a:xfrm>
+          <a:prstGeom prst="rect">
+            <a:avLst/>
+          </a:prstGeom>
+        </p:spPr>
+      </p:pic>
+      <p:sp>
+        <p:nvSpPr>
+          <p:cNvPr id="4" name="Text 1"/>
+          <p:cNvSpPr/>
+          <p:nvPr/>
+        </p:nvSpPr>
+        <p:spPr>
+          <a:xfrm>
+            <a:off x="5349240" y="1005840"/>
+            <a:ext cx="6522415" cy="731520"/>
+          </a:xfrm>
+          <a:prstGeom prst="rect">
+            <a:avLst/>
+          </a:prstGeom>
+          <a:noFill/>
+          <a:ln/>
+        </p:spPr>
+        <p:txBody>
+          <a:bodyPr wrap="square" lIns="0" tIns="0" rIns="0" bIns="0" rtlCol="0" anchor="ctr">
+            <a:normAutofit/>
+          </a:bodyPr>
+          <a:lstStyle/>
+          <a:p>
+            <a:pPr algn="ctr" indent="0" marL="0">
+              <a:buNone/>
+            </a:pPr>
+            <a:r>
+              <a:rPr lang="en-US" sz="3600" b="1" dirty="0">
+                <a:solidFill>
+                  <a:srgbClr val="990011"/>
+                </a:solidFill>
+                <a:latin typeface="Times New Roman" pitchFamily="34" charset="0"/>
+                <a:ea typeface="Times New Roman" pitchFamily="34" charset="-122"/>
+                <a:cs typeface="Times New Roman" pitchFamily="34" charset="-120"/>
+              </a:rPr>
+              <a:t>Next Lesson</a:t>
+            </a:r>
+            <a:endParaRPr lang="en-US" sz="3600" dirty="0"/>
+          </a:p>
+        </p:txBody>
+      </p:sp>
+      <p:sp>
+        <p:nvSpPr>
+          <p:cNvPr id="5" name="Text 2"/>
+          <p:cNvSpPr/>
+          <p:nvPr/>
+        </p:nvSpPr>
+        <p:spPr>
+          <a:xfrm>
+            <a:off x="5349240" y="1783080"/>
+            <a:ext cx="6522415" cy="4663440"/>
+          </a:xfrm>
+          <a:prstGeom prst="rect">
+            <a:avLst/>
+          </a:prstGeom>
+          <a:noFill/>
+          <a:ln/>
+        </p:spPr>
+        <p:txBody>
+          <a:bodyPr wrap="square" lIns="0" tIns="0" rIns="0" bIns="0" rtlCol="0" anchor="ctr"/>
+          <a:lstStyle/>
+          <a:p>
+            <a:pPr algn="ctr" indent="0" marL="0">
+              <a:spcAft>
+                <a:spcPts val="800"/>
+              </a:spcAft>
+              <a:buNone/>
+            </a:pPr>
+            <a:r>
+              <a:rPr lang="en-US" sz="4000" b="1" dirty="0">
+                <a:solidFill>
+                  <a:srgbClr val="111111"/>
+                </a:solidFill>
+                <a:latin typeface="Times New Roman" pitchFamily="34" charset="0"/>
+                <a:ea typeface="Times New Roman" pitchFamily="34" charset="-122"/>
+                <a:cs typeface="Times New Roman" pitchFamily="34" charset="-120"/>
+              </a:rPr>
+              <a:t>Our next lesson will be on:</a:t>
+            </a:r>
+            <a:endParaRPr lang="en-US" sz="4000" dirty="0"/>
+          </a:p>
+          <a:p>
+            <a:pPr algn="ctr" indent="0" marL="0">
+              <a:spcAft>
+                <a:spcPts val="800"/>
+              </a:spcAft>
+              <a:buNone/>
+            </a:pPr>
+            <a:r>
+              <a:rPr lang="en-US" sz="4000" b="1" dirty="0">
+                <a:solidFill>
+                  <a:srgbClr val="990011"/>
+                </a:solidFill>
+                <a:latin typeface="Times New Roman" pitchFamily="34" charset="0"/>
+                <a:ea typeface="Times New Roman" pitchFamily="34" charset="-122"/>
+                <a:cs typeface="Times New Roman" pitchFamily="34" charset="-120"/>
+              </a:rPr>
+              <a:t>Further Study 1: Early Theories of Crustal Movements</a:t>
+            </a:r>
+            <a:endParaRPr lang="en-US" sz="4000" dirty="0"/>
+          </a:p>
+        </p:txBody>
+      </p:sp>
+      <p:sp>
+        <p:nvSpPr>
+          <p:cNvPr id="25" name="Slide Number Placeholder 0"/>
+          <p:cNvSpPr>
+            <a:spLocks noGrp="1"/>
+          </p:cNvSpPr>
+          <p:nvPr>
+            <p:ph type="sldNum" sz="quarter" idx="4294967295"/>
+          </p:nvPr>
+        </p:nvSpPr>
+        <p:spPr>
+          <a:xfrm>
+            <a:off x="27432" y="91440"/>
+            <a:ext cx="585216" cy="475488"/>
+          </a:xfrm>
+          <a:prstGeom prst="rect">
+            <a:avLst/>
+          </a:prstGeom>
+          <a:extLst>
+            <a:ext uri="{C572A759-6A51-4108-AA02-DFA0A04FC94B}">
+              <ma14:wrappingTextBoxFlag xmlns:ma14="http://schemas.microsoft.com/office/mac/drawingml/2011/main" val="0"/>
+            </a:ext>
+          </a:extLst>
+        </p:spPr>
+        <p:txBody>
+          <a:bodyPr/>
+          <a:lstStyle>
+            <a:lvl1pPr>
+              <a:defRPr sz="2000">
+                <a:solidFill>
+                  <a:srgbClr val="FFFFFF"/>
+                </a:solidFill>
+                <a:latin typeface="Calibri"/>
+                <a:ea typeface="Calibri"/>
+                <a:cs typeface="Calibri"/>
+              </a:defRPr>
+            </a:lvl1pPr>
+          </a:lstStyle>
+          <a:p>
+            <a:pPr algn="ctr"/>
+            <a:fld id="{F7021451-1387-4CA6-816F-3879F97B5CBC}" type="slidenum">
+              <a:rPr b="1" lang="en-US"/>
+              <a:t>61</a:t>
+            </a:fld>
+            <a:endParaRPr lang="en-US"/>
+          </a:p>
+        </p:txBody>
+      </p:sp>
+    </p:spTree>
+  </p:cSld>
+  <p:clrMapOvr>
+    <a:masterClrMapping/>
+  </p:clrMapOvr>
+</p:sld>
+</file>
+
+<file path=ppt/slides/slide62.xml><?xml version="1.0" encoding="utf-8"?>
+<p:sld xmlns:a="http://schemas.openxmlformats.org/drawingml/2006/main" xmlns:r="http://schemas.openxmlformats.org/officeDocument/2006/relationships" xmlns:p="http://schemas.openxmlformats.org/presentationml/2006/main">
+  <p:cSld name="Slide 62">
+    <p:spTree>
+      <p:nvGrpSpPr>
+        <p:cNvPr id="1" name=""/>
+        <p:cNvGrpSpPr/>
+        <p:nvPr/>
+      </p:nvGrpSpPr>
+      <p:grpSpPr>
+        <a:xfrm>
+          <a:off x="0" y="0"/>
+          <a:ext cx="0" cy="0"/>
+          <a:chOff x="0" y="0"/>
+          <a:chExt cx="0" cy="0"/>
+        </a:xfrm>
+      </p:grpSpPr>
+      <p:sp>
+        <p:nvSpPr>
+          <p:cNvPr id="2" name="Text 0"/>
+          <p:cNvSpPr/>
+          <p:nvPr/>
+        </p:nvSpPr>
+        <p:spPr>
+          <a:xfrm>
+            <a:off x="457200" y="713232"/>
+            <a:ext cx="11368735" cy="274320"/>
+          </a:xfrm>
+          <a:prstGeom prst="rect">
+            <a:avLst/>
+          </a:prstGeom>
+          <a:noFill/>
+          <a:ln/>
+        </p:spPr>
+        <p:txBody>
+          <a:bodyPr wrap="square" lIns="0" tIns="0" rIns="0" bIns="0" rtlCol="0" anchor="ctr"/>
+          <a:lstStyle/>
+          <a:p>
+            <a:pPr algn="r" indent="0" marL="0">
+              <a:buNone/>
+            </a:pPr>
+            <a:r>
+              <a:rPr lang="en-US" sz="1400" b="1" dirty="0">
+                <a:solidFill>
+                  <a:srgbClr val="1C3F6E"/>
+                </a:solidFill>
+                <a:latin typeface="Calibri" pitchFamily="34" charset="0"/>
+                <a:ea typeface="Calibri" pitchFamily="34" charset="-122"/>
+                <a:cs typeface="Calibri" pitchFamily="34" charset="-120"/>
+              </a:rPr>
+              <a:t>BILINGUAL GAME</a:t>
+            </a:r>
+            <a:endParaRPr lang="en-US" sz="1400" dirty="0"/>
+          </a:p>
+        </p:txBody>
+      </p:sp>
+      <p:sp>
+        <p:nvSpPr>
+          <p:cNvPr id="3" name="Text 1"/>
+          <p:cNvSpPr/>
+          <p:nvPr/>
+        </p:nvSpPr>
+        <p:spPr>
+          <a:xfrm>
+            <a:off x="457200" y="1005840"/>
+            <a:ext cx="11277295" cy="731520"/>
+          </a:xfrm>
+          <a:prstGeom prst="rect">
+            <a:avLst/>
+          </a:prstGeom>
+          <a:noFill/>
+          <a:ln/>
+        </p:spPr>
+        <p:txBody>
+          <a:bodyPr wrap="square" lIns="0" tIns="0" rIns="0" bIns="0" rtlCol="0" anchor="ctr"/>
+          <a:lstStyle/>
+          <a:p>
+            <a:pPr algn="ctr" indent="0" marL="0">
+              <a:buNone/>
+            </a:pPr>
+            <a:r>
+              <a:rPr lang="en-US" sz="3600" b="1" dirty="0">
+                <a:solidFill>
+                  <a:srgbClr val="990011"/>
+                </a:solidFill>
+                <a:latin typeface="Times New Roman" pitchFamily="34" charset="0"/>
+                <a:ea typeface="Times New Roman" pitchFamily="34" charset="-122"/>
+                <a:cs typeface="Times New Roman" pitchFamily="34" charset="-120"/>
+              </a:rPr>
               <a:t>Bilingual Game (Jeu Bilingue)</a:t>
             </a:r>
             <a:endParaRPr lang="en-US" sz="3600" dirty="0"/>
@@ -21343,7 +22719,7 @@
       </p:sp>
       <p:graphicFrame>
         <p:nvGraphicFramePr>
-          <p:cNvPr id="60" name="Table 0"/>
+          <p:cNvPr id="63" name="Table 0"/>
           <p:cNvGraphicFramePr>
             <a:graphicFrameLocks noGrp="1"/>
           </p:cNvGraphicFramePr>
@@ -22379,7 +23755,7 @@
             <a:pPr algn="ctr"/>
             <a:fld id="{F7021451-1387-4CA6-816F-3879F97B5CBC}" type="slidenum">
               <a:rPr b="1" lang="en-US"/>
-              <a:t>59</a:t>
+              <a:t>62</a:t>
             </a:fld>
             <a:endParaRPr lang="en-US"/>
           </a:p>
@@ -22393,9 +23769,9 @@
 </p:sld>
 </file>
 
-<file path=ppt/slides/slide6.xml><?xml version="1.0" encoding="utf-8"?>
+<file path=ppt/slides/slide63.xml><?xml version="1.0" encoding="utf-8"?>
 <p:sld xmlns:a="http://schemas.openxmlformats.org/drawingml/2006/main" xmlns:r="http://schemas.openxmlformats.org/officeDocument/2006/relationships" xmlns:p="http://schemas.openxmlformats.org/presentationml/2006/main">
-  <p:cSld name="Slide 6">
+  <p:cSld name="Slide 63">
     <p:spTree>
       <p:nvGrpSpPr>
         <p:cNvPr id="1" name=""/>
@@ -22443,46 +23819,22 @@
                 <a:ea typeface="Calibri" pitchFamily="34" charset="-122"/>
                 <a:cs typeface="Calibri" pitchFamily="34" charset="-120"/>
               </a:rPr>
-              <a:t>LESSON PLAN</a:t>
+              <a:t>LOGBOOK</a:t>
             </a:r>
             <a:endParaRPr lang="en-US" sz="1400" dirty="0"/>
           </a:p>
         </p:txBody>
       </p:sp>
-      <p:pic>
-        <p:nvPicPr>
-          <p:cNvPr id="3" name="Image 0" descr="/home/claude/f4/img/minesec_sheet.png">    </p:cNvPr>
-          <p:cNvPicPr>
-            <a:picLocks noChangeAspect="1"/>
-          </p:cNvPicPr>
-          <p:nvPr/>
-        </p:nvPicPr>
-        <p:blipFill>
-          <a:blip r:embed="rId1"/>
-          <a:stretch>
-            <a:fillRect/>
-          </a:stretch>
-        </p:blipFill>
-        <p:spPr>
-          <a:xfrm>
-            <a:off x="0" y="658368"/>
-            <a:ext cx="2468880" cy="5833872"/>
-          </a:xfrm>
-          <a:prstGeom prst="rect">
-            <a:avLst/>
-          </a:prstGeom>
-        </p:spPr>
-      </p:pic>
-      <p:sp>
-        <p:nvSpPr>
-          <p:cNvPr id="4" name="Text 1"/>
+      <p:sp>
+        <p:nvSpPr>
+          <p:cNvPr id="3" name="Text 1"/>
           <p:cNvSpPr/>
           <p:nvPr/>
         </p:nvSpPr>
         <p:spPr>
           <a:xfrm>
-            <a:off x="2697480" y="1005840"/>
-            <a:ext cx="9174175" cy="731520"/>
+            <a:off x="457200" y="1005840"/>
+            <a:ext cx="11277295" cy="731520"/>
           </a:xfrm>
           <a:prstGeom prst="rect">
             <a:avLst/>
@@ -22491,9 +23843,7 @@
           <a:ln/>
         </p:spPr>
         <p:txBody>
-          <a:bodyPr wrap="square" lIns="0" tIns="0" rIns="0" bIns="0" rtlCol="0" anchor="ctr">
-            <a:normAutofit/>
-          </a:bodyPr>
+          <a:bodyPr wrap="square" lIns="0" tIns="0" rIns="0" bIns="0" rtlCol="0" anchor="ctr"/>
           <a:lstStyle/>
           <a:p>
             <a:pPr algn="ctr" indent="0" marL="0">
@@ -22508,311 +23858,6 @@
                 <a:ea typeface="Times New Roman" pitchFamily="34" charset="-122"/>
                 <a:cs typeface="Times New Roman" pitchFamily="34" charset="-120"/>
               </a:rPr>
-              <a:t>Lesson Plan</a:t>
-            </a:r>
-            <a:endParaRPr lang="en-US" sz="3600" dirty="0"/>
-          </a:p>
-        </p:txBody>
-      </p:sp>
-      <p:sp>
-        <p:nvSpPr>
-          <p:cNvPr id="5" name="Text 2"/>
-          <p:cNvSpPr/>
-          <p:nvPr/>
-        </p:nvSpPr>
-        <p:spPr>
-          <a:xfrm>
-            <a:off x="2697480" y="1783080"/>
-            <a:ext cx="9174175" cy="4663440"/>
-          </a:xfrm>
-          <a:prstGeom prst="rect">
-            <a:avLst/>
-          </a:prstGeom>
-          <a:noFill/>
-          <a:ln/>
-        </p:spPr>
-        <p:txBody>
-          <a:bodyPr wrap="square" lIns="0" tIns="0" rIns="0" bIns="0" rtlCol="0" anchor="t"/>
-          <a:lstStyle/>
-          <a:p>
-            <a:pPr algn="l" marL="342900" indent="-342900">
-              <a:spcAft>
-                <a:spcPts val="800"/>
-              </a:spcAft>
-              <a:buSzPct val="100000"/>
-              <a:buFont typeface="+mj-lt"/>
-              <a:buAutoNum type="arabicPeriod" startAt="1"/>
-            </a:pPr>
-            <a:r>
-              <a:rPr lang="en-US" sz="4000" dirty="0">
-                <a:solidFill>
-                  <a:srgbClr val="111111"/>
-                </a:solidFill>
-                <a:latin typeface="Times New Roman" pitchFamily="34" charset="0"/>
-                <a:ea typeface="Times New Roman" pitchFamily="34" charset="-122"/>
-                <a:cs typeface="Times New Roman" pitchFamily="34" charset="-120"/>
-              </a:rPr>
-              <a:t>Correction of the homework</a:t>
-            </a:r>
-            <a:endParaRPr lang="en-US" sz="4000" dirty="0"/>
-          </a:p>
-          <a:p>
-            <a:pPr algn="l" marL="342900" indent="-342900">
-              <a:spcAft>
-                <a:spcPts val="800"/>
-              </a:spcAft>
-              <a:buSzPct val="100000"/>
-              <a:buFont typeface="+mj-lt"/>
-              <a:buAutoNum type="arabicPeriod" startAt="1"/>
-            </a:pPr>
-            <a:r>
-              <a:rPr lang="en-US" sz="4000" dirty="0">
-                <a:solidFill>
-                  <a:srgbClr val="111111"/>
-                </a:solidFill>
-                <a:latin typeface="Times New Roman" pitchFamily="34" charset="0"/>
-                <a:ea typeface="Times New Roman" pitchFamily="34" charset="-122"/>
-                <a:cs typeface="Times New Roman" pitchFamily="34" charset="-120"/>
-              </a:rPr>
-              <a:t>Objectives and recall</a:t>
-            </a:r>
-            <a:endParaRPr lang="en-US" sz="4000" dirty="0"/>
-          </a:p>
-          <a:p>
-            <a:pPr algn="l" marL="342900" indent="-342900">
-              <a:spcAft>
-                <a:spcPts val="800"/>
-              </a:spcAft>
-              <a:buSzPct val="100000"/>
-              <a:buFont typeface="+mj-lt"/>
-              <a:buAutoNum type="arabicPeriod" startAt="1"/>
-            </a:pPr>
-            <a:r>
-              <a:rPr lang="en-US" sz="4000" dirty="0">
-                <a:solidFill>
-                  <a:srgbClr val="111111"/>
-                </a:solidFill>
-                <a:latin typeface="Times New Roman" pitchFamily="34" charset="0"/>
-                <a:ea typeface="Times New Roman" pitchFamily="34" charset="-122"/>
-                <a:cs typeface="Times New Roman" pitchFamily="34" charset="-120"/>
-              </a:rPr>
-              <a:t>Real-life situation and action to take</a:t>
-            </a:r>
-            <a:endParaRPr lang="en-US" sz="4000" dirty="0"/>
-          </a:p>
-          <a:p>
-            <a:pPr algn="l" marL="342900" indent="-342900">
-              <a:spcAft>
-                <a:spcPts val="800"/>
-              </a:spcAft>
-              <a:buSzPct val="100000"/>
-              <a:buFont typeface="+mj-lt"/>
-              <a:buAutoNum type="arabicPeriod" startAt="1"/>
-            </a:pPr>
-            <a:r>
-              <a:rPr lang="en-US" sz="4000" dirty="0">
-                <a:solidFill>
-                  <a:srgbClr val="111111"/>
-                </a:solidFill>
-                <a:latin typeface="Times New Roman" pitchFamily="34" charset="0"/>
-                <a:ea typeface="Times New Roman" pitchFamily="34" charset="-122"/>
-                <a:cs typeface="Times New Roman" pitchFamily="34" charset="-120"/>
-              </a:rPr>
-              <a:t>Learning activities</a:t>
-            </a:r>
-            <a:endParaRPr lang="en-US" sz="4000" dirty="0"/>
-          </a:p>
-          <a:p>
-            <a:pPr algn="l" marL="342900" indent="-342900">
-              <a:spcAft>
-                <a:spcPts val="800"/>
-              </a:spcAft>
-              <a:buSzPct val="100000"/>
-              <a:buFont typeface="+mj-lt"/>
-              <a:buAutoNum type="arabicPeriod" startAt="1"/>
-            </a:pPr>
-            <a:r>
-              <a:rPr lang="en-US" sz="4000" dirty="0">
-                <a:solidFill>
-                  <a:srgbClr val="111111"/>
-                </a:solidFill>
-                <a:latin typeface="Times New Roman" pitchFamily="34" charset="0"/>
-                <a:ea typeface="Times New Roman" pitchFamily="34" charset="-122"/>
-                <a:cs typeface="Times New Roman" pitchFamily="34" charset="-120"/>
-              </a:rPr>
-              <a:t>Board summary</a:t>
-            </a:r>
-            <a:endParaRPr lang="en-US" sz="4000" dirty="0"/>
-          </a:p>
-          <a:p>
-            <a:pPr algn="l" marL="342900" indent="-342900">
-              <a:spcAft>
-                <a:spcPts val="800"/>
-              </a:spcAft>
-              <a:buSzPct val="100000"/>
-              <a:buFont typeface="+mj-lt"/>
-              <a:buAutoNum type="arabicPeriod" startAt="1"/>
-            </a:pPr>
-            <a:r>
-              <a:rPr lang="en-US" sz="4000" dirty="0">
-                <a:solidFill>
-                  <a:srgbClr val="111111"/>
-                </a:solidFill>
-                <a:latin typeface="Times New Roman" pitchFamily="34" charset="0"/>
-                <a:ea typeface="Times New Roman" pitchFamily="34" charset="-122"/>
-                <a:cs typeface="Times New Roman" pitchFamily="34" charset="-120"/>
-              </a:rPr>
-              <a:t>Evaluation, remediation and homework</a:t>
-            </a:r>
-            <a:endParaRPr lang="en-US" sz="4000" dirty="0"/>
-          </a:p>
-        </p:txBody>
-      </p:sp>
-      <p:sp>
-        <p:nvSpPr>
-          <p:cNvPr id="25" name="Slide Number Placeholder 0"/>
-          <p:cNvSpPr>
-            <a:spLocks noGrp="1"/>
-          </p:cNvSpPr>
-          <p:nvPr>
-            <p:ph type="sldNum" sz="quarter" idx="4294967295"/>
-          </p:nvPr>
-        </p:nvSpPr>
-        <p:spPr>
-          <a:xfrm>
-            <a:off x="27432" y="91440"/>
-            <a:ext cx="585216" cy="475488"/>
-          </a:xfrm>
-          <a:prstGeom prst="rect">
-            <a:avLst/>
-          </a:prstGeom>
-          <a:extLst>
-            <a:ext uri="{C572A759-6A51-4108-AA02-DFA0A04FC94B}">
-              <ma14:wrappingTextBoxFlag xmlns:ma14="http://schemas.microsoft.com/office/mac/drawingml/2011/main" val="0"/>
-            </a:ext>
-          </a:extLst>
-        </p:spPr>
-        <p:txBody>
-          <a:bodyPr/>
-          <a:lstStyle>
-            <a:lvl1pPr>
-              <a:defRPr sz="2000">
-                <a:solidFill>
-                  <a:srgbClr val="FFFFFF"/>
-                </a:solidFill>
-                <a:latin typeface="Calibri"/>
-                <a:ea typeface="Calibri"/>
-                <a:cs typeface="Calibri"/>
-              </a:defRPr>
-            </a:lvl1pPr>
-          </a:lstStyle>
-          <a:p>
-            <a:pPr algn="ctr"/>
-            <a:fld id="{F7021451-1387-4CA6-816F-3879F97B5CBC}" type="slidenum">
-              <a:rPr b="1" lang="en-US"/>
-              <a:t>6</a:t>
-            </a:fld>
-            <a:endParaRPr lang="en-US"/>
-          </a:p>
-        </p:txBody>
-      </p:sp>
-    </p:spTree>
-  </p:cSld>
-  <p:clrMapOvr>
-    <a:masterClrMapping/>
-  </p:clrMapOvr>
-</p:sld>
-</file>
-
-<file path=ppt/slides/slide60.xml><?xml version="1.0" encoding="utf-8"?>
-<p:sld xmlns:a="http://schemas.openxmlformats.org/drawingml/2006/main" xmlns:r="http://schemas.openxmlformats.org/officeDocument/2006/relationships" xmlns:p="http://schemas.openxmlformats.org/presentationml/2006/main">
-  <p:cSld name="Slide 60">
-    <p:spTree>
-      <p:nvGrpSpPr>
-        <p:cNvPr id="1" name=""/>
-        <p:cNvGrpSpPr/>
-        <p:nvPr/>
-      </p:nvGrpSpPr>
-      <p:grpSpPr>
-        <a:xfrm>
-          <a:off x="0" y="0"/>
-          <a:ext cx="0" cy="0"/>
-          <a:chOff x="0" y="0"/>
-          <a:chExt cx="0" cy="0"/>
-        </a:xfrm>
-      </p:grpSpPr>
-      <p:sp>
-        <p:nvSpPr>
-          <p:cNvPr id="2" name="Text 0"/>
-          <p:cNvSpPr/>
-          <p:nvPr/>
-        </p:nvSpPr>
-        <p:spPr>
-          <a:xfrm>
-            <a:off x="457200" y="713232"/>
-            <a:ext cx="11368735" cy="274320"/>
-          </a:xfrm>
-          <a:prstGeom prst="rect">
-            <a:avLst/>
-          </a:prstGeom>
-          <a:noFill/>
-          <a:ln/>
-        </p:spPr>
-        <p:txBody>
-          <a:bodyPr wrap="square" lIns="0" tIns="0" rIns="0" bIns="0" rtlCol="0" anchor="ctr"/>
-          <a:lstStyle/>
-          <a:p>
-            <a:pPr algn="r" indent="0" marL="0">
-              <a:buNone/>
-            </a:pPr>
-            <a:r>
-              <a:rPr lang="en-US" sz="1400" b="1" dirty="0">
-                <a:solidFill>
-                  <a:srgbClr val="1C3F6E"/>
-                </a:solidFill>
-                <a:latin typeface="Calibri" pitchFamily="34" charset="0"/>
-                <a:ea typeface="Calibri" pitchFamily="34" charset="-122"/>
-                <a:cs typeface="Calibri" pitchFamily="34" charset="-120"/>
-              </a:rPr>
-              <a:t>LOGBOOK</a:t>
-            </a:r>
-            <a:endParaRPr lang="en-US" sz="1400" dirty="0"/>
-          </a:p>
-        </p:txBody>
-      </p:sp>
-      <p:sp>
-        <p:nvSpPr>
-          <p:cNvPr id="3" name="Text 1"/>
-          <p:cNvSpPr/>
-          <p:nvPr/>
-        </p:nvSpPr>
-        <p:spPr>
-          <a:xfrm>
-            <a:off x="457200" y="1005840"/>
-            <a:ext cx="11277295" cy="731520"/>
-          </a:xfrm>
-          <a:prstGeom prst="rect">
-            <a:avLst/>
-          </a:prstGeom>
-          <a:noFill/>
-          <a:ln/>
-        </p:spPr>
-        <p:txBody>
-          <a:bodyPr wrap="square" lIns="0" tIns="0" rIns="0" bIns="0" rtlCol="0" anchor="ctr"/>
-          <a:lstStyle/>
-          <a:p>
-            <a:pPr algn="ctr" indent="0" marL="0">
-              <a:buNone/>
-            </a:pPr>
-            <a:r>
-              <a:rPr lang="en-US" sz="3600" b="1" dirty="0">
-                <a:solidFill>
-                  <a:srgbClr val="990011"/>
-                </a:solidFill>
-                <a:latin typeface="Times New Roman" pitchFamily="34" charset="0"/>
-                <a:ea typeface="Times New Roman" pitchFamily="34" charset="-122"/>
-                <a:cs typeface="Times New Roman" pitchFamily="34" charset="-120"/>
-              </a:rPr>
               <a:t>Official Logbook (1/2)</a:t>
             </a:r>
             <a:endParaRPr lang="en-US" sz="3600" dirty="0"/>
@@ -22821,7 +23866,7 @@
       </p:sp>
       <p:graphicFrame>
         <p:nvGraphicFramePr>
-          <p:cNvPr id="61" name="Table 0"/>
+          <p:cNvPr id="64" name="Table 0"/>
           <p:cNvGraphicFramePr>
             <a:graphicFrameLocks noGrp="1"/>
           </p:cNvGraphicFramePr>
@@ -23443,7 +24488,7 @@
             <a:pPr algn="ctr"/>
             <a:fld id="{F7021451-1387-4CA6-816F-3879F97B5CBC}" type="slidenum">
               <a:rPr b="1" lang="en-US"/>
-              <a:t>60</a:t>
+              <a:t>63</a:t>
             </a:fld>
             <a:endParaRPr lang="en-US"/>
           </a:p>
@@ -23457,9 +24502,9 @@
 </p:sld>
 </file>
 
-<file path=ppt/slides/slide61.xml><?xml version="1.0" encoding="utf-8"?>
+<file path=ppt/slides/slide64.xml><?xml version="1.0" encoding="utf-8"?>
 <p:sld xmlns:a="http://schemas.openxmlformats.org/drawingml/2006/main" xmlns:r="http://schemas.openxmlformats.org/officeDocument/2006/relationships" xmlns:p="http://schemas.openxmlformats.org/presentationml/2006/main">
-  <p:cSld name="Slide 61">
+  <p:cSld name="Slide 64">
     <p:spTree>
       <p:nvGrpSpPr>
         <p:cNvPr id="1" name=""/>
@@ -23554,7 +24599,7 @@
       </p:sp>
       <p:graphicFrame>
         <p:nvGraphicFramePr>
-          <p:cNvPr id="62" name="Table 0"/>
+          <p:cNvPr id="65" name="Table 0"/>
           <p:cNvGraphicFramePr>
             <a:graphicFrameLocks noGrp="1"/>
           </p:cNvGraphicFramePr>
@@ -23664,7 +24709,7 @@
                           <a:ea typeface="Calibri" pitchFamily="34" charset="-122"/>
                           <a:cs typeface="Calibri" pitchFamily="34" charset="-120"/>
                         </a:rPr>
-                        <a:t>DEFINITIONS; The Layers of the Earth; The Rock Cycle; Forces that Shape the Landscape; Categories of Landforms.</a:t>
+                        <a:t>DEFINITIONS; The Crust and the Mantle; The Core and the Discontinuities; The Rock Material Cycle; Forces that Shape the Landscape; Categories of Landforms.</a:t>
                       </a:r>
                       <a:endParaRPr lang="en-US" sz="1600" dirty="0">
                         <a:latin typeface="Calibri" charset="0"/>
@@ -24314,7 +25359,7 @@
             <a:pPr algn="ctr"/>
             <a:fld id="{F7021451-1387-4CA6-816F-3879F97B5CBC}" type="slidenum">
               <a:rPr b="1" lang="en-US"/>
-              <a:t>61</a:t>
+              <a:t>64</a:t>
             </a:fld>
             <a:endParaRPr lang="en-US"/>
           </a:p>
@@ -24328,9 +25373,9 @@
 </p:sld>
 </file>
 
-<file path=ppt/slides/slide62.xml><?xml version="1.0" encoding="utf-8"?>
+<file path=ppt/slides/slide65.xml><?xml version="1.0" encoding="utf-8"?>
 <p:sld xmlns:a="http://schemas.openxmlformats.org/drawingml/2006/main" xmlns:r="http://schemas.openxmlformats.org/officeDocument/2006/relationships" xmlns:p="http://schemas.openxmlformats.org/presentationml/2006/main">
-  <p:cSld name="Slide 62">
+  <p:cSld name="Slide 65">
     <p:spTree>
       <p:nvGrpSpPr>
         <p:cNvPr id="1" name=""/>
@@ -24639,7 +25684,7 @@
             <a:pPr algn="ctr"/>
             <a:fld id="{F7021451-1387-4CA6-816F-3879F97B5CBC}" type="slidenum">
               <a:rPr b="1" lang="en-US"/>
-              <a:t>62</a:t>
+              <a:t>65</a:t>
             </a:fld>
             <a:endParaRPr lang="en-US"/>
           </a:p>
@@ -24653,9 +25698,9 @@
 </p:sld>
 </file>
 
-<file path=ppt/slides/slide63.xml><?xml version="1.0" encoding="utf-8"?>
+<file path=ppt/slides/slide66.xml><?xml version="1.0" encoding="utf-8"?>
 <p:sld xmlns:a="http://schemas.openxmlformats.org/drawingml/2006/main" xmlns:r="http://schemas.openxmlformats.org/officeDocument/2006/relationships" xmlns:p="http://schemas.openxmlformats.org/presentationml/2006/main">
-  <p:cSld name="Slide 63">
+  <p:cSld name="Slide 66">
     <p:spTree>
       <p:nvGrpSpPr>
         <p:cNvPr id="1" name=""/>
@@ -24874,7 +25919,7 @@
                 <a:ea typeface="Calibri" pitchFamily="34" charset="-122"/>
                 <a:cs typeface="Calibri" pitchFamily="34" charset="-120"/>
               </a:rPr>
-              <a:t>Photo, board summary (Igneous rocks): “Sunset over Pyramid Rock” by Mark Wassell, CC BY-NC-ND 2.0, via Flickr (https://www.flickr.com/photos/61520356@N07/6515411027)</a:t>
+              <a:t>Photo, board summary (Sedimentary rocks): “Grand Canyon: Tapeats Sandstone 0283” by Grand Canyon NPS, CC BY 2.0, via Flickr (https://www.flickr.com/photos/50693818@N08/8238057843)</a:t>
             </a:r>
             <a:endParaRPr lang="en-US" sz="1800" dirty="0"/>
           </a:p>
@@ -24895,7 +25940,7 @@
                 <a:ea typeface="Calibri" pitchFamily="34" charset="-122"/>
                 <a:cs typeface="Calibri" pitchFamily="34" charset="-120"/>
               </a:rPr>
-              <a:t>Photo, board summary (Sedimentary rocks): “Grand Canyon: Tapeats Sandstone 0283” by Grand Canyon NPS, CC BY 2.0, via Flickr (https://www.flickr.com/photos/50693818@N08/8238057843)</a:t>
+              <a:t>Photo, board summary (Metamorphic rocks): “Marble quarry, Carrara” by Russell Carman, CC BY-NC-SA 2.0, via Flickr (https://www.flickr.com/photos/11328254@N02/2095886412)</a:t>
             </a:r>
             <a:endParaRPr lang="en-US" sz="1800" dirty="0"/>
           </a:p>
@@ -24916,7 +25961,7 @@
                 <a:ea typeface="Calibri" pitchFamily="34" charset="-122"/>
                 <a:cs typeface="Calibri" pitchFamily="34" charset="-120"/>
               </a:rPr>
-              <a:t>Photo, board summary (Metamorphic rocks): “Marble quarry, Carrara” by Russell Carman, CC BY-NC-SA 2.0, via Flickr (https://www.flickr.com/photos/11328254@N02/2095886412)</a:t>
+              <a:t>Photo, board summary (Internal (endogenic) forces): “Happy Anniversary Hawaii” by U.S. Geological Survey, CC0 1.0, via Flickr (https://www.flickr.com/photos/27784370@N05/14802198589)</a:t>
             </a:r>
             <a:endParaRPr lang="en-US" sz="1800" dirty="0"/>
           </a:p>
@@ -24937,7 +25982,7 @@
                 <a:ea typeface="Calibri" pitchFamily="34" charset="-122"/>
                 <a:cs typeface="Calibri" pitchFamily="34" charset="-120"/>
               </a:rPr>
-              <a:t>Photo, board summary (Internal (endogenic) forces): “Happy Anniversary Hawaii” by U.S. Geological Survey, CC0 1.0, via Flickr (https://www.flickr.com/photos/27784370@N05/14802198589)</a:t>
+              <a:t>Diagrams and animations: drawn for this lesson (Geography Department).</a:t>
             </a:r>
             <a:endParaRPr lang="en-US" sz="1800" dirty="0"/>
           </a:p>
@@ -24985,227 +26030,7 @@
             <a:pPr algn="ctr"/>
             <a:fld id="{F7021451-1387-4CA6-816F-3879F97B5CBC}" type="slidenum">
               <a:rPr b="1" lang="en-US"/>
-              <a:t>63</a:t>
-            </a:fld>
-            <a:endParaRPr lang="en-US"/>
-          </a:p>
-        </p:txBody>
-      </p:sp>
-    </p:spTree>
-  </p:cSld>
-  <p:clrMapOvr>
-    <a:masterClrMapping/>
-  </p:clrMapOvr>
-</p:sld>
-</file>
-
-<file path=ppt/slides/slide64.xml><?xml version="1.0" encoding="utf-8"?>
-<p:sld xmlns:a="http://schemas.openxmlformats.org/drawingml/2006/main" xmlns:r="http://schemas.openxmlformats.org/officeDocument/2006/relationships" xmlns:p="http://schemas.openxmlformats.org/presentationml/2006/main">
-  <p:cSld name="Slide 64">
-    <p:spTree>
-      <p:nvGrpSpPr>
-        <p:cNvPr id="1" name=""/>
-        <p:cNvGrpSpPr/>
-        <p:nvPr/>
-      </p:nvGrpSpPr>
-      <p:grpSpPr>
-        <a:xfrm>
-          <a:off x="0" y="0"/>
-          <a:ext cx="0" cy="0"/>
-          <a:chOff x="0" y="0"/>
-          <a:chExt cx="0" cy="0"/>
-        </a:xfrm>
-      </p:grpSpPr>
-      <p:sp>
-        <p:nvSpPr>
-          <p:cNvPr id="2" name="Text 0"/>
-          <p:cNvSpPr/>
-          <p:nvPr/>
-        </p:nvSpPr>
-        <p:spPr>
-          <a:xfrm>
-            <a:off x="457200" y="713232"/>
-            <a:ext cx="11368735" cy="274320"/>
-          </a:xfrm>
-          <a:prstGeom prst="rect">
-            <a:avLst/>
-          </a:prstGeom>
-          <a:noFill/>
-          <a:ln/>
-        </p:spPr>
-        <p:txBody>
-          <a:bodyPr wrap="square" lIns="0" tIns="0" rIns="0" bIns="0" rtlCol="0" anchor="ctr"/>
-          <a:lstStyle/>
-          <a:p>
-            <a:pPr algn="r" indent="0" marL="0">
-              <a:buNone/>
-            </a:pPr>
-            <a:r>
-              <a:rPr lang="en-US" sz="1400" b="1" dirty="0">
-                <a:solidFill>
-                  <a:srgbClr val="1C3F6E"/>
-                </a:solidFill>
-                <a:latin typeface="Calibri" pitchFamily="34" charset="0"/>
-                <a:ea typeface="Calibri" pitchFamily="34" charset="-122"/>
-                <a:cs typeface="Calibri" pitchFamily="34" charset="-120"/>
-              </a:rPr>
-              <a:t>REFERENCES</a:t>
-            </a:r>
-            <a:endParaRPr lang="en-US" sz="1400" dirty="0"/>
-          </a:p>
-        </p:txBody>
-      </p:sp>
-      <p:pic>
-        <p:nvPicPr>
-          <p:cNvPr id="3" name="Image 0" descr="/home/claude/f4/img/minesec_sheet.png">    </p:cNvPr>
-          <p:cNvPicPr>
-            <a:picLocks noChangeAspect="1"/>
-          </p:cNvPicPr>
-          <p:nvPr/>
-        </p:nvPicPr>
-        <p:blipFill>
-          <a:blip r:embed="rId1"/>
-          <a:stretch>
-            <a:fillRect/>
-          </a:stretch>
-        </p:blipFill>
-        <p:spPr>
-          <a:xfrm>
-            <a:off x="0" y="658368"/>
-            <a:ext cx="5120640" cy="5833872"/>
-          </a:xfrm>
-          <a:prstGeom prst="rect">
-            <a:avLst/>
-          </a:prstGeom>
-        </p:spPr>
-      </p:pic>
-      <p:sp>
-        <p:nvSpPr>
-          <p:cNvPr id="4" name="Text 1"/>
-          <p:cNvSpPr/>
-          <p:nvPr/>
-        </p:nvSpPr>
-        <p:spPr>
-          <a:xfrm>
-            <a:off x="5349240" y="1005840"/>
-            <a:ext cx="6522415" cy="731520"/>
-          </a:xfrm>
-          <a:prstGeom prst="rect">
-            <a:avLst/>
-          </a:prstGeom>
-          <a:noFill/>
-          <a:ln/>
-        </p:spPr>
-        <p:txBody>
-          <a:bodyPr wrap="square" lIns="0" tIns="0" rIns="0" bIns="0" rtlCol="0" anchor="ctr">
-            <a:normAutofit/>
-          </a:bodyPr>
-          <a:lstStyle/>
-          <a:p>
-            <a:pPr algn="ctr" indent="0" marL="0">
-              <a:buNone/>
-            </a:pPr>
-            <a:r>
-              <a:rPr lang="en-US" sz="3600" b="1" dirty="0">
-                <a:solidFill>
-                  <a:srgbClr val="990011"/>
-                </a:solidFill>
-                <a:latin typeface="Times New Roman" pitchFamily="34" charset="0"/>
-                <a:ea typeface="Times New Roman" pitchFamily="34" charset="-122"/>
-                <a:cs typeface="Times New Roman" pitchFamily="34" charset="-120"/>
-              </a:rPr>
-              <a:t>References (continued)</a:t>
-            </a:r>
-            <a:endParaRPr lang="en-US" sz="3600" dirty="0"/>
-          </a:p>
-        </p:txBody>
-      </p:sp>
-      <p:sp>
-        <p:nvSpPr>
-          <p:cNvPr id="5" name="Text 2"/>
-          <p:cNvSpPr/>
-          <p:nvPr/>
-        </p:nvSpPr>
-        <p:spPr>
-          <a:xfrm>
-            <a:off x="5349240" y="1783080"/>
-            <a:ext cx="6522415" cy="4663440"/>
-          </a:xfrm>
-          <a:prstGeom prst="rect">
-            <a:avLst/>
-          </a:prstGeom>
-          <a:noFill/>
-          <a:ln/>
-        </p:spPr>
-        <p:txBody>
-          <a:bodyPr wrap="square" lIns="0" tIns="0" rIns="0" bIns="0" rtlCol="0" anchor="t"/>
-          <a:lstStyle/>
-          <a:p>
-            <a:pPr algn="l" marL="342900" indent="-342900">
-              <a:spcAft>
-                <a:spcPts val="800"/>
-              </a:spcAft>
-              <a:buSzPct val="100000"/>
-              <a:buChar char="•"/>
-            </a:pPr>
-            <a:r>
-              <a:rPr lang="en-US" sz="1800" dirty="0">
-                <a:solidFill>
-                  <a:srgbClr val="111111"/>
-                </a:solidFill>
-                <a:latin typeface="Calibri" pitchFamily="34" charset="0"/>
-                <a:ea typeface="Calibri" pitchFamily="34" charset="-122"/>
-                <a:cs typeface="Calibri" pitchFamily="34" charset="-120"/>
-              </a:rPr>
-              <a:t>Diagrams and animations: drawn for this lesson (Geography Department).</a:t>
-            </a:r>
-            <a:endParaRPr lang="en-US" sz="1800" dirty="0"/>
-          </a:p>
-        </p:txBody>
-      </p:sp>
-      <p:sp>
-        <p:nvSpPr>
-          <p:cNvPr id="25" name="Slide Number Placeholder 0"/>
-          <p:cNvSpPr>
-            <a:spLocks noGrp="1"/>
-          </p:cNvSpPr>
-          <p:nvPr>
-            <p:ph type="sldNum" sz="quarter" idx="4294967295"/>
-          </p:nvPr>
-        </p:nvSpPr>
-        <p:spPr>
-          <a:xfrm>
-            <a:off x="27432" y="91440"/>
-            <a:ext cx="585216" cy="475488"/>
-          </a:xfrm>
-          <a:prstGeom prst="rect">
-            <a:avLst/>
-          </a:prstGeom>
-          <a:extLst>
-            <a:ext uri="{C572A759-6A51-4108-AA02-DFA0A04FC94B}">
-              <ma14:wrappingTextBoxFlag xmlns:ma14="http://schemas.microsoft.com/office/mac/drawingml/2011/main" val="0"/>
-            </a:ext>
-          </a:extLst>
-        </p:spPr>
-        <p:txBody>
-          <a:bodyPr/>
-          <a:lstStyle>
-            <a:lvl1pPr>
-              <a:defRPr sz="2000">
-                <a:solidFill>
-                  <a:srgbClr val="FFFFFF"/>
-                </a:solidFill>
-                <a:latin typeface="Calibri"/>
-                <a:ea typeface="Calibri"/>
-                <a:cs typeface="Calibri"/>
-              </a:defRPr>
-            </a:lvl1pPr>
-          </a:lstStyle>
-          <a:p>
-            <a:pPr algn="ctr"/>
-            <a:fld id="{F7021451-1387-4CA6-816F-3879F97B5CBC}" type="slidenum">
-              <a:rPr b="1" lang="en-US"/>
-              <a:t>64</a:t>
+              <a:t>66</a:t>
             </a:fld>
             <a:endParaRPr lang="en-US"/>
           </a:p>
